--- a/lecons/USA/Population Geography/18_USA_POP_L14_Spatial_Interaction.pptx
+++ b/lecons/USA/Population Geography/18_USA_POP_L14_Spatial_Interaction.pptx
@@ -58,9 +58,14 @@
     <p:sldId id="306" r:id="rId52"/>
     <p:sldId id="307" r:id="rId53"/>
     <p:sldId id="308" r:id="rId54"/>
+    <p:sldId id="309" r:id="rId55"/>
+    <p:sldId id="310" r:id="rId56"/>
+    <p:sldId id="311" r:id="rId57"/>
+    <p:sldId id="312" r:id="rId58"/>
+    <p:sldId id="313" r:id="rId59"/>
   </p:sldIdLst>
   <p:notesMasterIdLst>
-    <p:notesMasterId r:id="rId55"/>
+    <p:notesMasterId r:id="rId60"/>
   </p:notesMasterIdLst>
   <p:sldSz cx="12192000" cy="6858000"/>
   <p:notesSz cx="6858000" cy="12192000"/>
@@ -642,7 +647,7 @@
           <a:p>
             <a:r>
               <a:rPr lang="en-US" dirty="0"/>
-              <a:t>Listen carefully to this situation from real life. Cattle from the Adamawa are sold in Yaoundé and Douala, while plantains and palm oil from the south are sold in the north. A new road and mobile phones have increased this trade. Think about it, because I am going to ask you some questions.</a:t>
+              <a:t>Take your time to copy this part; we will continue together.</a:t>
             </a:r>
             <a:endParaRPr lang="en-US" dirty="0"/>
           </a:p>
@@ -730,7 +735,7 @@
           <a:p>
             <a:r>
               <a:rPr lang="en-US" dirty="0"/>
-              <a:t>Question 1: What is the problem in the situation? Think for a moment, then raise your hand to answer.</a:t>
+              <a:t>Take your time to copy this part; we will continue together.</a:t>
             </a:r>
             <a:endParaRPr lang="en-US" dirty="0"/>
           </a:p>
@@ -818,7 +823,7 @@
           <a:p>
             <a:r>
               <a:rPr lang="en-US" dirty="0"/>
-              <a:t>Good. Learners want to understand why regions exchange goods and people.</a:t>
+              <a:t>Listen carefully to this situation from real life. Aïssatou sells fresh tomatoes at the Central Market of Garoua. Every few days she travels to buy new stock. She knows that there are big tomato farms near Maroua, but she almost always goes to Pitoa, which is closer: the trip is faster and cheaper, and she can be back at her stall the same day. She asks: "What makes places exchange goods and people, and why do I prefer Pitoa to Maroua?" Think about it, because I am going to ask you some questions.</a:t>
             </a:r>
             <a:endParaRPr lang="en-US" dirty="0"/>
           </a:p>
@@ -906,7 +911,7 @@
           <a:p>
             <a:r>
               <a:rPr lang="en-US" dirty="0"/>
-              <a:t>Question 2: Why do the north and south trade? Think for a moment, then raise your hand to answer.</a:t>
+              <a:t>Question 1: What is the problem in the situation? Think for a moment, then raise your hand to answer.</a:t>
             </a:r>
             <a:endParaRPr lang="en-US" dirty="0"/>
           </a:p>
@@ -994,7 +999,7 @@
           <a:p>
             <a:r>
               <a:rPr lang="en-US" dirty="0"/>
-              <a:t>Good. Each has products the other needs (complementarity).</a:t>
+              <a:t>Good. Aïssatou does not know the factors of spatial interaction.</a:t>
             </a:r>
             <a:endParaRPr lang="en-US" dirty="0"/>
           </a:p>
@@ -1082,7 +1087,7 @@
           <a:p>
             <a:r>
               <a:rPr lang="en-US" dirty="0"/>
-              <a:t>Question 3: How did the new road help? Think for a moment, then raise your hand to answer.</a:t>
+              <a:t>Question 2: Why must she travel to buy tomatoes? Think for a moment, then raise your hand to answer.</a:t>
             </a:r>
             <a:endParaRPr lang="en-US" dirty="0"/>
           </a:p>
@@ -1170,7 +1175,7 @@
           <a:p>
             <a:r>
               <a:rPr lang="en-US" dirty="0"/>
-              <a:t>Good. It reduced the cost and time of movement (transferability).</a:t>
+              <a:t>Good. Garoua needs tomatoes and Pitoa has a surplus: this is complementarity.</a:t>
             </a:r>
             <a:endParaRPr lang="en-US" dirty="0"/>
           </a:p>
@@ -1258,7 +1263,7 @@
           <a:p>
             <a:r>
               <a:rPr lang="en-US" dirty="0"/>
-              <a:t>From this situation, the action we are working towards in this lesson is the following: improve links between regions to encourage trade and exchange.</a:t>
+              <a:t>Question 3: Why does she prefer Pitoa to Maroua? Think for a moment, then raise your hand to answer.</a:t>
             </a:r>
             <a:endParaRPr lang="en-US" dirty="0"/>
           </a:p>
@@ -1346,7 +1351,7 @@
           <a:p>
             <a:r>
               <a:rPr lang="en-US" dirty="0"/>
-              <a:t>Why is this lesson important for you? This lesson helps us to understand the links between places.</a:t>
+              <a:t>Good. It is nearer and cheaper: interaction decreases with distance (distance decay).</a:t>
             </a:r>
             <a:endParaRPr lang="en-US" dirty="0"/>
           </a:p>
@@ -1434,7 +1439,7 @@
           <a:p>
             <a:r>
               <a:rPr lang="en-US" dirty="0"/>
-              <a:t>Activity 1. Look carefully at this diagram: ullman's three bases of spatial interaction. Observe every detail before I ask the question.</a:t>
+              <a:t>From this situation, the action we are working towards in this lesson is the following: improve roads and communication links to increase useful exchanges between places.</a:t>
             </a:r>
             <a:endParaRPr lang="en-US" dirty="0"/>
           </a:p>
@@ -1610,7 +1615,7 @@
           <a:p>
             <a:r>
               <a:rPr lang="en-US" dirty="0"/>
-              <a:t>Here is the question for Activity 1: Name the three bases of spatial interaction. Take one minute to think and write your answer in your rough notebook.</a:t>
+              <a:t>Why is this lesson important for you? This lesson helps us to understand trade, transport and communication between towns and regions.</a:t>
             </a:r>
             <a:endParaRPr lang="en-US" dirty="0"/>
           </a:p>
@@ -1698,7 +1703,7 @@
           <a:p>
             <a:r>
               <a:rPr lang="en-US" dirty="0"/>
-              <a:t>Let us check the answer together. Complementarity, transferability and intervening opportunity.</a:t>
+              <a:t>Activity 1. Look carefully at this picture: mobile money. Observe every detail before I ask the question.</a:t>
             </a:r>
             <a:endParaRPr lang="en-US" dirty="0"/>
           </a:p>
@@ -1786,7 +1791,7 @@
           <a:p>
             <a:r>
               <a:rPr lang="en-US" dirty="0"/>
-              <a:t>Activity 2. Look carefully at this picture: a cattle market. Observe every detail before I ask the question.</a:t>
+              <a:t>Here is the question for Activity 1: Is a mobile money transfer a tangible or an intangible flow? Take one minute to think and write your answer in your rough notebook.</a:t>
             </a:r>
             <a:endParaRPr lang="en-US" dirty="0"/>
           </a:p>
@@ -1874,7 +1879,7 @@
           <a:p>
             <a:r>
               <a:rPr lang="en-US" dirty="0"/>
-              <a:t>Here is the question for Activity 2: Why are cattle sent from the north to the south? Take one minute to think and write your answer in your rough notebook.</a:t>
+              <a:t>Let us check the answer together. An intangible flow (information and money).</a:t>
             </a:r>
             <a:endParaRPr lang="en-US" dirty="0"/>
           </a:p>
@@ -1962,7 +1967,7 @@
           <a:p>
             <a:r>
               <a:rPr lang="en-US" dirty="0"/>
-              <a:t>Let us check the answer together. The north has surplus cattle and the south needs meat.</a:t>
+              <a:t>Activity 2. Look carefully at this picture: cotton harvest. Observe every detail before I ask the question.</a:t>
             </a:r>
             <a:endParaRPr lang="en-US" dirty="0"/>
           </a:p>
@@ -2050,7 +2055,7 @@
           <a:p>
             <a:r>
               <a:rPr lang="en-US" dirty="0"/>
-              <a:t>Activity 3. Look carefully at this picture: a train. Observe every detail before I ask the question.</a:t>
+              <a:t>Here is the question for Activity 2: Why does cotton move from the North to factories in Douala? Take one minute to think and write your answer in your rough notebook.</a:t>
             </a:r>
             <a:endParaRPr lang="en-US" dirty="0"/>
           </a:p>
@@ -2138,7 +2143,7 @@
           <a:p>
             <a:r>
               <a:rPr lang="en-US" dirty="0"/>
-              <a:t>Here is the question for Activity 3: How does the railway increase interaction? Take one minute to think and write your answer in your rough notebook.</a:t>
+              <a:t>Let us check the answer together. The North has a surplus of cotton and the factories need it.</a:t>
             </a:r>
             <a:endParaRPr lang="en-US" dirty="0"/>
           </a:p>
@@ -2226,7 +2231,7 @@
           <a:p>
             <a:r>
               <a:rPr lang="en-US" dirty="0"/>
-              <a:t>Let us check the answer together. It lowers the cost and time of moving people and goods.</a:t>
+              <a:t>Activity 3. Look carefully at this picture: a lorry on the road. Observe every detail before I ask the question.</a:t>
             </a:r>
             <a:endParaRPr lang="en-US" dirty="0"/>
           </a:p>
@@ -2314,7 +2319,7 @@
           <a:p>
             <a:r>
               <a:rPr lang="en-US" dirty="0"/>
-              <a:t>Activity 4. Look carefully at this picture: a farmer using a mobile phone. Observe every detail before I ask the question.</a:t>
+              <a:t>Here is the question for Activity 3: Why are onions sent from Garoua to Maroua by road and not by air? Take one minute to think and write your answer in your rough notebook.</a:t>
             </a:r>
             <a:endParaRPr lang="en-US" dirty="0"/>
           </a:p>
@@ -2402,7 +2407,7 @@
           <a:p>
             <a:r>
               <a:rPr lang="en-US" dirty="0"/>
-              <a:t>Here is the question for Activity 4: How do phones change spatial interaction? Take one minute to think and write your answer in your rough notebook.</a:t>
+              <a:t>Let us check the answer together. Road transport is cheaper for heavy, low-value goods.</a:t>
             </a:r>
             <a:endParaRPr lang="en-US" dirty="0"/>
           </a:p>
@@ -2490,7 +2495,7 @@
           <a:p>
             <a:r>
               <a:rPr lang="en-US" dirty="0"/>
-              <a:t>Our topic is Population Change over Space (Migration), and the sub-topic is Migration Laws. The key notions we shall use today are: spatial interaction, complementarity, transferability, intervening opportunity, friction of distance. At the end, you should be able to do this: learners are able to explain why places interact through flows of people, goods and information.</a:t>
+              <a:t>Our topic is Population Change over Space (Migration), and the sub-topic is Migration Laws. The key notions we shall use today are: spatial interaction, network, complementarity, transferability, intervening opportunity, distance decay, Ullman. At the end, you should be able to do this: learners are able to explain the flows of people, goods and information between places using the factors of spatial interaction.</a:t>
             </a:r>
             <a:endParaRPr lang="en-US" dirty="0"/>
           </a:p>
@@ -2578,7 +2583,7 @@
           <a:p>
             <a:r>
               <a:rPr lang="en-US" dirty="0"/>
-              <a:t>Let us check the answer together. They move information instantly and help trade.</a:t>
+              <a:t>Activity 4. Look carefully at this diagram: a nearer opportunity. Observe every detail before I ask the question.</a:t>
             </a:r>
             <a:endParaRPr lang="en-US" dirty="0"/>
           </a:p>
@@ -2666,7 +2671,7 @@
           <a:p>
             <a:r>
               <a:rPr lang="en-US" dirty="0"/>
-              <a:t>Activity 5. Look carefully at this picture: motorbike taxis. Observe every detail before I ask the question.</a:t>
+              <a:t>Here is the question for Activity 4: How can a new university in Ngaoundéré change the flow of students to Yaoundé? Take one minute to think and write your answer in your rough notebook.</a:t>
             </a:r>
             <a:endParaRPr lang="en-US" dirty="0"/>
           </a:p>
@@ -2754,7 +2759,7 @@
           <a:p>
             <a:r>
               <a:rPr lang="en-US" dirty="0"/>
-              <a:t>Here is the question for Activity 5: Give two factors that reduce interaction. Take one minute to think and write your answer in your rough notebook.</a:t>
+              <a:t>Let us check the answer together. It reduces it, because it is a nearer intervening opportunity.</a:t>
             </a:r>
             <a:endParaRPr lang="en-US" dirty="0"/>
           </a:p>
@@ -2842,7 +2847,7 @@
           <a:p>
             <a:r>
               <a:rPr lang="en-US" dirty="0"/>
-              <a:t>Let us check the answer together. Long distance and poor roads (also borders, insecurity, cost).</a:t>
+              <a:t>Activity 5. Look carefully at this diagram: interaction and distance. Observe every detail before I ask the question.</a:t>
             </a:r>
             <a:endParaRPr lang="en-US" dirty="0"/>
           </a:p>
@@ -2930,7 +2935,7 @@
           <a:p>
             <a:r>
               <a:rPr lang="en-US" dirty="0"/>
-              <a:t>Now we are going to copy the board summary. Write the title and the headings neatly in your notebooks. I will give you enough time for each slide, so do not rush.</a:t>
+              <a:t>Here is the question for Activity 5: Why do you visit a friend in your quarter more often than one in Kribi? Take one minute to think and write your answer in your rough notebook.</a:t>
             </a:r>
             <a:endParaRPr lang="en-US" dirty="0"/>
           </a:p>
@@ -3018,7 +3023,7 @@
           <a:p>
             <a:r>
               <a:rPr lang="en-US" dirty="0"/>
-              <a:t>Let us copy Meaning of Spatial Interaction. Spatial interaction can be understood as follows. On this slide we have Spatial interaction. Write each point on a new line, with the key term first, and explain it in your own words when we revise.</a:t>
+              <a:t>Let us check the answer together. Distance increases time, effort and cost.</a:t>
             </a:r>
             <a:endParaRPr lang="en-US" dirty="0"/>
           </a:p>
@@ -3106,7 +3111,7 @@
           <a:p>
             <a:r>
               <a:rPr lang="en-US" dirty="0"/>
-              <a:t>Now draw this illustration in your notebook: ullman's bases of interaction. Give it a title and label it clearly.</a:t>
+              <a:t>Now we are going to copy the board summary. Write the title and the headings neatly in your notebooks. I will give you enough time for each slide, so do not rush.</a:t>
             </a:r>
             <a:endParaRPr lang="en-US" dirty="0"/>
           </a:p>
@@ -3194,7 +3199,7 @@
           <a:p>
             <a:r>
               <a:rPr lang="en-US" dirty="0"/>
-              <a:t>Let us copy Factors of Spatial Interaction. Ullman identified three main factors. On this slide we have Complementarity. Write each point on a new line, with the key term first, and explain it in your own words when we revise. When you finish, we go to the next slide.</a:t>
+              <a:t>Let us copy the definitions. The key terms of this lesson are defined as follows. On this slide we have Spatial interaction. Write each point on a new line, with the key term first, and explain it in your own words when we revise. When you finish, we go to the next slide.</a:t>
             </a:r>
             <a:endParaRPr lang="en-US" dirty="0"/>
           </a:p>
@@ -3282,7 +3287,7 @@
           <a:p>
             <a:r>
               <a:rPr lang="en-US" dirty="0"/>
-              <a:t>We continue with Factors of Spatial Interaction. On this slide we have Transferability. Write each point on a new line, with the key term first, and explain it in your own words when we revise. When you finish, we go to the next slide.</a:t>
+              <a:t>We continue with the definitions. On this slide we have Network and Complementarity. Write each point on a new line, with the key term first, and explain it in your own words when we revise. When you finish, we go to the next slide.</a:t>
             </a:r>
             <a:endParaRPr lang="en-US" dirty="0"/>
           </a:p>
@@ -3370,7 +3375,7 @@
           <a:p>
             <a:r>
               <a:rPr lang="en-US" dirty="0"/>
-              <a:t>We continue with Factors of Spatial Interaction. On this slide we have Intervening opportunity. Write each point on a new line, with the key term first, and explain it in your own words when we revise.</a:t>
+              <a:t>We continue with the definitions. On this slide we have Transferability and Distance decay. Write each point on a new line, with the key term first, and explain it in your own words when we revise.</a:t>
             </a:r>
             <a:endParaRPr lang="en-US" dirty="0"/>
           </a:p>
@@ -3458,7 +3463,7 @@
           <a:p>
             <a:r>
               <a:rPr lang="en-US" dirty="0"/>
-              <a:t>Before we start the new lesson, let us correct the homework I gave you at the end of Lesson 13: Migration: Characteristics, Laws and Models. The question was: Use the gravity model to compare Douala–Yaoundé and Douala–Garoua. Take out your exercise books.</a:t>
+              <a:t>Before we start the new lesson, let us correct the homework I gave you at the end of Lesson 13: Migration: Characteristics, Laws and Models. The question was: Define spatial interaction. Take out your exercise books.</a:t>
             </a:r>
             <a:endParaRPr lang="en-US" dirty="0"/>
           </a:p>
@@ -3546,7 +3551,7 @@
           <a:p>
             <a:r>
               <a:rPr lang="en-US" dirty="0"/>
-              <a:t>Let us copy Other Factors. Other factors also affect interaction. On this slide we have Information and communication. Write each point on a new line, with the key term first, and explain it in your own words when we revise. When you finish, we go to the next slide.</a:t>
+              <a:t>Let us copy Meaning of Spatial Interaction. Spatial interaction is presented as follows. Copy the point on Tangible flows on the left, then draw the diagram on the right: goods on the road. Give it a title and label it clearly.</a:t>
             </a:r>
             <a:endParaRPr lang="en-US" dirty="0"/>
           </a:p>
@@ -3634,7 +3639,7 @@
           <a:p>
             <a:r>
               <a:rPr lang="en-US" dirty="0"/>
-              <a:t>We continue with Other Factors. On this slide we have Barriers. Write each point on a new line, with the key term first, and explain it in your own words when we revise.</a:t>
+              <a:t>Copy the point on Intangible flows on the left, then draw the diagram on the right: mobile money. Give it a title and label it clearly.</a:t>
             </a:r>
             <a:endParaRPr lang="en-US" dirty="0"/>
           </a:p>
@@ -3722,7 +3727,7 @@
           <a:p>
             <a:r>
               <a:rPr lang="en-US" dirty="0"/>
-              <a:t>Now let us check what you have understood. Question 1: Name Ullman's three bases of spatial interaction. Answer in your exercise book.</a:t>
+              <a:t>We continue with Meaning of Spatial Interaction. On this slide we have Networks and Measurement. Write each point on a new line, with the key term first, and explain it in your own words when we revise.</a:t>
             </a:r>
             <a:endParaRPr lang="en-US" dirty="0"/>
           </a:p>
@@ -3810,7 +3815,7 @@
           <a:p>
             <a:r>
               <a:rPr lang="en-US" dirty="0"/>
-              <a:t>The expected answer is: complementarity, transferability and intervening opportunity. If you got it right, well done.</a:t>
+              <a:t>Let us copy Factors of Spatial Interaction (Ullman). The factors of spatial interaction identified by Edward Ullman are the following. Copy the point on Complementarity on the left, then draw the diagram on the right: factors of spatial interaction. Give it a title and label it clearly.</a:t>
             </a:r>
             <a:endParaRPr lang="en-US" dirty="0"/>
           </a:p>
@@ -3898,7 +3903,7 @@
           <a:p>
             <a:r>
               <a:rPr lang="en-US" dirty="0"/>
-              <a:t>Now let us check what you have understood. Question 2: How does a new road affect interaction? Answer in your exercise book.</a:t>
+              <a:t>Copy the point on Transferability on the left, then draw the diagram on the right: cotton, a surplus of the North. Give it a title and label it clearly.</a:t>
             </a:r>
             <a:endParaRPr lang="en-US" dirty="0"/>
           </a:p>
@@ -3986,7 +3991,7 @@
           <a:p>
             <a:r>
               <a:rPr lang="en-US" dirty="0"/>
-              <a:t>The expected answer is: it increases transferability by lowering cost and time. If you got it right, well done.</a:t>
+              <a:t>Copy the point on Intervening opportunity on the left, then draw the diagram on the right: a nearer opportunity. Give it a title and label it clearly.</a:t>
             </a:r>
             <a:endParaRPr lang="en-US" dirty="0"/>
           </a:p>
@@ -4074,7 +4079,7 @@
           <a:p>
             <a:r>
               <a:rPr lang="en-US" dirty="0"/>
-              <a:t>For those who need more practice, fill in the blanks in your exercise book. The answers are: number 1, interaction; number 2, complementarity; number 3, transferability.</a:t>
+              <a:t>Copy the point on Distance decay on the left, then draw the diagram on the right: interaction and distance. Give it a title and label it clearly.</a:t>
             </a:r>
             <a:endParaRPr lang="en-US" dirty="0"/>
           </a:p>
@@ -4162,7 +4167,7 @@
           <a:p>
             <a:r>
               <a:rPr lang="en-US" dirty="0"/>
-              <a:t>For your homework: List goods that come to your town from other regions and say why. We shall correct it at the beginning of our next lesson.</a:t>
+              <a:t>Now let us check what you have understood. Question 1: Explain complementarity with an example. Answer in your exercise book.</a:t>
             </a:r>
             <a:endParaRPr lang="en-US" dirty="0"/>
           </a:p>
@@ -4250,7 +4255,7 @@
           <a:p>
             <a:r>
               <a:rPr lang="en-US" dirty="0"/>
-              <a:t>Our next lesson will be on Lesson 15: Types of Migration. Thank you for your attention, and see you next time.</a:t>
+              <a:t>The expected answer is: one place has a surplus that another needs, e.g. cotton from the North sent to textile factories in Douala. If you got it right, well done.</a:t>
             </a:r>
             <a:endParaRPr lang="en-US" dirty="0"/>
           </a:p>
@@ -4338,7 +4343,7 @@
           <a:p>
             <a:r>
               <a:rPr lang="en-US" dirty="0"/>
-              <a:t>Let us play the bilingual game. I say a word in English, and you give me the French word. Then we do the reverse.</a:t>
+              <a:t>Now let us check what you have understood. Question 2: What is distance decay? Answer in your exercise book.</a:t>
             </a:r>
             <a:endParaRPr lang="en-US" dirty="0"/>
           </a:p>
@@ -4426,7 +4431,7 @@
           <a:p>
             <a:r>
               <a:rPr lang="en-US" dirty="0"/>
-              <a:t>Here is a good answer. Douala (3.9 M) – Yaoundé (4.1 M), 240 km: I = (3.9 × 4.1) ÷ 240² ≈ 0.00028; Douala – Garoua (0.9 M), about 1,000 km: I = (3.9 × 0.9) ÷ 1,000² ≈ 0.0000035. Douala–Yaoundé interaction is about 80 times stronger. Compare it with your own answer and correct your work in red.</a:t>
+              <a:t>Here is a good answer. Spatial interaction is the movement of people, goods, services and information between places. Compare it with your own answer and correct your work in red.</a:t>
             </a:r>
             <a:endParaRPr lang="en-US" dirty="0"/>
           </a:p>
@@ -4514,7 +4519,7 @@
           <a:p>
             <a:r>
               <a:rPr lang="en-US" dirty="0"/>
-              <a:t>I record this information in the official logbook of the class after the lesson.</a:t>
+              <a:t>The expected answer is: the decrease of interaction between places as distance increases. If you got it right, well done.</a:t>
             </a:r>
             <a:endParaRPr lang="en-US" dirty="0"/>
           </a:p>
@@ -4602,7 +4607,7 @@
           <a:p>
             <a:r>
               <a:rPr lang="en-US" dirty="0"/>
-              <a:t>I complete the second page of the logbook: the matter taught, the evaluation, the homework and the attendance.</a:t>
+              <a:t>For those who need more practice, fill in the blanks in your exercise book. The answers are: number 1, interaction; number 2, transferability; number 3, decay.</a:t>
             </a:r>
             <a:endParaRPr lang="en-US" dirty="0"/>
           </a:p>
@@ -4690,7 +4695,7 @@
           <a:p>
             <a:r>
               <a:rPr lang="en-US" dirty="0"/>
-              <a:t>This slide is for me, the teacher: it gives the timing of the lesson and what to do if the projector is not available.</a:t>
+              <a:t>For your homework: Define an internally displaced person. We shall correct it at the beginning of our next lesson.</a:t>
             </a:r>
             <a:endParaRPr lang="en-US" dirty="0"/>
           </a:p>
@@ -4778,7 +4783,7 @@
           <a:p>
             <a:r>
               <a:rPr lang="en-US" dirty="0"/>
-              <a:t>These are the references and picture credits used to prepare this lesson.</a:t>
+              <a:t>Our next lesson will be on Lesson 15: Types of Migration. Thank you for your attention, and see you next time.</a:t>
             </a:r>
             <a:endParaRPr lang="en-US" dirty="0"/>
           </a:p>
@@ -4802,6 +4807,446 @@
             <a:fld id="{F7021451-1387-4CA6-816F-3879F97B5CBC}" type="slidenum">
               <a:rPr lang="en-US"/>
               <a:t>53</a:t>
+            </a:fld>
+            <a:endParaRPr lang="en-US"/>
+          </a:p>
+        </p:txBody>
+      </p:sp>
+    </p:spTree>
+    <p:extLst>
+      <p:ext uri="{BB962C8B-B14F-4D97-AF65-F5344CB8AC3E}">
+        <p14:creationId xmlns:p14="http://schemas.microsoft.com/office/powerpoint/2010/main" val="1024086991"/>
+      </p:ext>
+    </p:extLst>
+  </p:cSld>
+  <p:clrMapOvr>
+    <a:masterClrMapping/>
+  </p:clrMapOvr>
+</p:notes>
+</file>
+
+<file path=ppt/notesSlides/notesSlide54.xml><?xml version="1.0" encoding="utf-8"?>
+<p:notes xmlns:a="http://schemas.openxmlformats.org/drawingml/2006/main" xmlns:r="http://schemas.openxmlformats.org/officeDocument/2006/relationships" xmlns:p="http://schemas.openxmlformats.org/presentationml/2006/main">
+  <p:cSld>
+    <p:spTree>
+      <p:nvGrpSpPr>
+        <p:cNvPr id="1" name=""/>
+        <p:cNvGrpSpPr/>
+        <p:nvPr/>
+      </p:nvGrpSpPr>
+      <p:grpSpPr>
+        <a:xfrm>
+          <a:off x="0" y="0"/>
+          <a:ext cx="0" cy="0"/>
+          <a:chOff x="0" y="0"/>
+          <a:chExt cx="0" cy="0"/>
+        </a:xfrm>
+      </p:grpSpPr>
+      <p:sp>
+        <p:nvSpPr>
+          <p:cNvPr id="2" name="Slide Image Placeholder 1"/>
+          <p:cNvSpPr>
+            <a:spLocks noGrp="1" noRot="1" noChangeAspect="1"/>
+          </p:cNvSpPr>
+          <p:nvPr>
+            <p:ph type="sldImg"/>
+          </p:nvPr>
+        </p:nvSpPr>
+        <p:spPr/>
+      </p:sp>
+      <p:sp>
+        <p:nvSpPr>
+          <p:cNvPr id="3" name="Notes Placeholder 2"/>
+          <p:cNvSpPr>
+            <a:spLocks noGrp="1"/>
+          </p:cNvSpPr>
+          <p:nvPr>
+            <p:ph type="body" idx="1"/>
+          </p:nvPr>
+        </p:nvSpPr>
+        <p:spPr/>
+        <p:txBody>
+          <a:bodyPr/>
+          <a:lstStyle/>
+          <a:p>
+            <a:r>
+              <a:rPr lang="en-US" dirty="0"/>
+              <a:t>Let us play the bilingual game. I say a word in English, and you give me the French word. Then we do the reverse.</a:t>
+            </a:r>
+            <a:endParaRPr lang="en-US" dirty="0"/>
+          </a:p>
+        </p:txBody>
+      </p:sp>
+      <p:sp>
+        <p:nvSpPr>
+          <p:cNvPr id="4" name="Slide Number Placeholder 3"/>
+          <p:cNvSpPr>
+            <a:spLocks noGrp="1"/>
+          </p:cNvSpPr>
+          <p:nvPr>
+            <p:ph type="sldNum" sz="quarter" idx="10"/>
+          </p:nvPr>
+        </p:nvSpPr>
+        <p:spPr/>
+        <p:txBody>
+          <a:bodyPr/>
+          <a:lstStyle/>
+          <a:p>
+            <a:fld id="{F7021451-1387-4CA6-816F-3879F97B5CBC}" type="slidenum">
+              <a:rPr lang="en-US"/>
+              <a:t>54</a:t>
+            </a:fld>
+            <a:endParaRPr lang="en-US"/>
+          </a:p>
+        </p:txBody>
+      </p:sp>
+    </p:spTree>
+    <p:extLst>
+      <p:ext uri="{BB962C8B-B14F-4D97-AF65-F5344CB8AC3E}">
+        <p14:creationId xmlns:p14="http://schemas.microsoft.com/office/powerpoint/2010/main" val="1024086991"/>
+      </p:ext>
+    </p:extLst>
+  </p:cSld>
+  <p:clrMapOvr>
+    <a:masterClrMapping/>
+  </p:clrMapOvr>
+</p:notes>
+</file>
+
+<file path=ppt/notesSlides/notesSlide55.xml><?xml version="1.0" encoding="utf-8"?>
+<p:notes xmlns:a="http://schemas.openxmlformats.org/drawingml/2006/main" xmlns:r="http://schemas.openxmlformats.org/officeDocument/2006/relationships" xmlns:p="http://schemas.openxmlformats.org/presentationml/2006/main">
+  <p:cSld>
+    <p:spTree>
+      <p:nvGrpSpPr>
+        <p:cNvPr id="1" name=""/>
+        <p:cNvGrpSpPr/>
+        <p:nvPr/>
+      </p:nvGrpSpPr>
+      <p:grpSpPr>
+        <a:xfrm>
+          <a:off x="0" y="0"/>
+          <a:ext cx="0" cy="0"/>
+          <a:chOff x="0" y="0"/>
+          <a:chExt cx="0" cy="0"/>
+        </a:xfrm>
+      </p:grpSpPr>
+      <p:sp>
+        <p:nvSpPr>
+          <p:cNvPr id="2" name="Slide Image Placeholder 1"/>
+          <p:cNvSpPr>
+            <a:spLocks noGrp="1" noRot="1" noChangeAspect="1"/>
+          </p:cNvSpPr>
+          <p:nvPr>
+            <p:ph type="sldImg"/>
+          </p:nvPr>
+        </p:nvSpPr>
+        <p:spPr/>
+      </p:sp>
+      <p:sp>
+        <p:nvSpPr>
+          <p:cNvPr id="3" name="Notes Placeholder 2"/>
+          <p:cNvSpPr>
+            <a:spLocks noGrp="1"/>
+          </p:cNvSpPr>
+          <p:nvPr>
+            <p:ph type="body" idx="1"/>
+          </p:nvPr>
+        </p:nvSpPr>
+        <p:spPr/>
+        <p:txBody>
+          <a:bodyPr/>
+          <a:lstStyle/>
+          <a:p>
+            <a:r>
+              <a:rPr lang="en-US" dirty="0"/>
+              <a:t>I record this information in the official logbook of the class after the lesson.</a:t>
+            </a:r>
+            <a:endParaRPr lang="en-US" dirty="0"/>
+          </a:p>
+        </p:txBody>
+      </p:sp>
+      <p:sp>
+        <p:nvSpPr>
+          <p:cNvPr id="4" name="Slide Number Placeholder 3"/>
+          <p:cNvSpPr>
+            <a:spLocks noGrp="1"/>
+          </p:cNvSpPr>
+          <p:nvPr>
+            <p:ph type="sldNum" sz="quarter" idx="10"/>
+          </p:nvPr>
+        </p:nvSpPr>
+        <p:spPr/>
+        <p:txBody>
+          <a:bodyPr/>
+          <a:lstStyle/>
+          <a:p>
+            <a:fld id="{F7021451-1387-4CA6-816F-3879F97B5CBC}" type="slidenum">
+              <a:rPr lang="en-US"/>
+              <a:t>55</a:t>
+            </a:fld>
+            <a:endParaRPr lang="en-US"/>
+          </a:p>
+        </p:txBody>
+      </p:sp>
+    </p:spTree>
+    <p:extLst>
+      <p:ext uri="{BB962C8B-B14F-4D97-AF65-F5344CB8AC3E}">
+        <p14:creationId xmlns:p14="http://schemas.microsoft.com/office/powerpoint/2010/main" val="1024086991"/>
+      </p:ext>
+    </p:extLst>
+  </p:cSld>
+  <p:clrMapOvr>
+    <a:masterClrMapping/>
+  </p:clrMapOvr>
+</p:notes>
+</file>
+
+<file path=ppt/notesSlides/notesSlide56.xml><?xml version="1.0" encoding="utf-8"?>
+<p:notes xmlns:a="http://schemas.openxmlformats.org/drawingml/2006/main" xmlns:r="http://schemas.openxmlformats.org/officeDocument/2006/relationships" xmlns:p="http://schemas.openxmlformats.org/presentationml/2006/main">
+  <p:cSld>
+    <p:spTree>
+      <p:nvGrpSpPr>
+        <p:cNvPr id="1" name=""/>
+        <p:cNvGrpSpPr/>
+        <p:nvPr/>
+      </p:nvGrpSpPr>
+      <p:grpSpPr>
+        <a:xfrm>
+          <a:off x="0" y="0"/>
+          <a:ext cx="0" cy="0"/>
+          <a:chOff x="0" y="0"/>
+          <a:chExt cx="0" cy="0"/>
+        </a:xfrm>
+      </p:grpSpPr>
+      <p:sp>
+        <p:nvSpPr>
+          <p:cNvPr id="2" name="Slide Image Placeholder 1"/>
+          <p:cNvSpPr>
+            <a:spLocks noGrp="1" noRot="1" noChangeAspect="1"/>
+          </p:cNvSpPr>
+          <p:nvPr>
+            <p:ph type="sldImg"/>
+          </p:nvPr>
+        </p:nvSpPr>
+        <p:spPr/>
+      </p:sp>
+      <p:sp>
+        <p:nvSpPr>
+          <p:cNvPr id="3" name="Notes Placeholder 2"/>
+          <p:cNvSpPr>
+            <a:spLocks noGrp="1"/>
+          </p:cNvSpPr>
+          <p:nvPr>
+            <p:ph type="body" idx="1"/>
+          </p:nvPr>
+        </p:nvSpPr>
+        <p:spPr/>
+        <p:txBody>
+          <a:bodyPr/>
+          <a:lstStyle/>
+          <a:p>
+            <a:r>
+              <a:rPr lang="en-US" dirty="0"/>
+              <a:t>I complete the second page of the logbook: the matter taught, the evaluation, the homework and the attendance.</a:t>
+            </a:r>
+            <a:endParaRPr lang="en-US" dirty="0"/>
+          </a:p>
+        </p:txBody>
+      </p:sp>
+      <p:sp>
+        <p:nvSpPr>
+          <p:cNvPr id="4" name="Slide Number Placeholder 3"/>
+          <p:cNvSpPr>
+            <a:spLocks noGrp="1"/>
+          </p:cNvSpPr>
+          <p:nvPr>
+            <p:ph type="sldNum" sz="quarter" idx="10"/>
+          </p:nvPr>
+        </p:nvSpPr>
+        <p:spPr/>
+        <p:txBody>
+          <a:bodyPr/>
+          <a:lstStyle/>
+          <a:p>
+            <a:fld id="{F7021451-1387-4CA6-816F-3879F97B5CBC}" type="slidenum">
+              <a:rPr lang="en-US"/>
+              <a:t>56</a:t>
+            </a:fld>
+            <a:endParaRPr lang="en-US"/>
+          </a:p>
+        </p:txBody>
+      </p:sp>
+    </p:spTree>
+    <p:extLst>
+      <p:ext uri="{BB962C8B-B14F-4D97-AF65-F5344CB8AC3E}">
+        <p14:creationId xmlns:p14="http://schemas.microsoft.com/office/powerpoint/2010/main" val="1024086991"/>
+      </p:ext>
+    </p:extLst>
+  </p:cSld>
+  <p:clrMapOvr>
+    <a:masterClrMapping/>
+  </p:clrMapOvr>
+</p:notes>
+</file>
+
+<file path=ppt/notesSlides/notesSlide57.xml><?xml version="1.0" encoding="utf-8"?>
+<p:notes xmlns:a="http://schemas.openxmlformats.org/drawingml/2006/main" xmlns:r="http://schemas.openxmlformats.org/officeDocument/2006/relationships" xmlns:p="http://schemas.openxmlformats.org/presentationml/2006/main">
+  <p:cSld>
+    <p:spTree>
+      <p:nvGrpSpPr>
+        <p:cNvPr id="1" name=""/>
+        <p:cNvGrpSpPr/>
+        <p:nvPr/>
+      </p:nvGrpSpPr>
+      <p:grpSpPr>
+        <a:xfrm>
+          <a:off x="0" y="0"/>
+          <a:ext cx="0" cy="0"/>
+          <a:chOff x="0" y="0"/>
+          <a:chExt cx="0" cy="0"/>
+        </a:xfrm>
+      </p:grpSpPr>
+      <p:sp>
+        <p:nvSpPr>
+          <p:cNvPr id="2" name="Slide Image Placeholder 1"/>
+          <p:cNvSpPr>
+            <a:spLocks noGrp="1" noRot="1" noChangeAspect="1"/>
+          </p:cNvSpPr>
+          <p:nvPr>
+            <p:ph type="sldImg"/>
+          </p:nvPr>
+        </p:nvSpPr>
+        <p:spPr/>
+      </p:sp>
+      <p:sp>
+        <p:nvSpPr>
+          <p:cNvPr id="3" name="Notes Placeholder 2"/>
+          <p:cNvSpPr>
+            <a:spLocks noGrp="1"/>
+          </p:cNvSpPr>
+          <p:nvPr>
+            <p:ph type="body" idx="1"/>
+          </p:nvPr>
+        </p:nvSpPr>
+        <p:spPr/>
+        <p:txBody>
+          <a:bodyPr/>
+          <a:lstStyle/>
+          <a:p>
+            <a:r>
+              <a:rPr lang="en-US" dirty="0"/>
+              <a:t>This slide is for me, the teacher: it gives the timing of the lesson and what to do if the projector is not available.</a:t>
+            </a:r>
+            <a:endParaRPr lang="en-US" dirty="0"/>
+          </a:p>
+        </p:txBody>
+      </p:sp>
+      <p:sp>
+        <p:nvSpPr>
+          <p:cNvPr id="4" name="Slide Number Placeholder 3"/>
+          <p:cNvSpPr>
+            <a:spLocks noGrp="1"/>
+          </p:cNvSpPr>
+          <p:nvPr>
+            <p:ph type="sldNum" sz="quarter" idx="10"/>
+          </p:nvPr>
+        </p:nvSpPr>
+        <p:spPr/>
+        <p:txBody>
+          <a:bodyPr/>
+          <a:lstStyle/>
+          <a:p>
+            <a:fld id="{F7021451-1387-4CA6-816F-3879F97B5CBC}" type="slidenum">
+              <a:rPr lang="en-US"/>
+              <a:t>57</a:t>
+            </a:fld>
+            <a:endParaRPr lang="en-US"/>
+          </a:p>
+        </p:txBody>
+      </p:sp>
+    </p:spTree>
+    <p:extLst>
+      <p:ext uri="{BB962C8B-B14F-4D97-AF65-F5344CB8AC3E}">
+        <p14:creationId xmlns:p14="http://schemas.microsoft.com/office/powerpoint/2010/main" val="1024086991"/>
+      </p:ext>
+    </p:extLst>
+  </p:cSld>
+  <p:clrMapOvr>
+    <a:masterClrMapping/>
+  </p:clrMapOvr>
+</p:notes>
+</file>
+
+<file path=ppt/notesSlides/notesSlide58.xml><?xml version="1.0" encoding="utf-8"?>
+<p:notes xmlns:a="http://schemas.openxmlformats.org/drawingml/2006/main" xmlns:r="http://schemas.openxmlformats.org/officeDocument/2006/relationships" xmlns:p="http://schemas.openxmlformats.org/presentationml/2006/main">
+  <p:cSld>
+    <p:spTree>
+      <p:nvGrpSpPr>
+        <p:cNvPr id="1" name=""/>
+        <p:cNvGrpSpPr/>
+        <p:nvPr/>
+      </p:nvGrpSpPr>
+      <p:grpSpPr>
+        <a:xfrm>
+          <a:off x="0" y="0"/>
+          <a:ext cx="0" cy="0"/>
+          <a:chOff x="0" y="0"/>
+          <a:chExt cx="0" cy="0"/>
+        </a:xfrm>
+      </p:grpSpPr>
+      <p:sp>
+        <p:nvSpPr>
+          <p:cNvPr id="2" name="Slide Image Placeholder 1"/>
+          <p:cNvSpPr>
+            <a:spLocks noGrp="1" noRot="1" noChangeAspect="1"/>
+          </p:cNvSpPr>
+          <p:nvPr>
+            <p:ph type="sldImg"/>
+          </p:nvPr>
+        </p:nvSpPr>
+        <p:spPr/>
+      </p:sp>
+      <p:sp>
+        <p:nvSpPr>
+          <p:cNvPr id="3" name="Notes Placeholder 2"/>
+          <p:cNvSpPr>
+            <a:spLocks noGrp="1"/>
+          </p:cNvSpPr>
+          <p:nvPr>
+            <p:ph type="body" idx="1"/>
+          </p:nvPr>
+        </p:nvSpPr>
+        <p:spPr/>
+        <p:txBody>
+          <a:bodyPr/>
+          <a:lstStyle/>
+          <a:p>
+            <a:r>
+              <a:rPr lang="en-US" dirty="0"/>
+              <a:t>These are the references and picture credits used to prepare this lesson.</a:t>
+            </a:r>
+            <a:endParaRPr lang="en-US" dirty="0"/>
+          </a:p>
+        </p:txBody>
+      </p:sp>
+      <p:sp>
+        <p:nvSpPr>
+          <p:cNvPr id="4" name="Slide Number Placeholder 3"/>
+          <p:cNvSpPr>
+            <a:spLocks noGrp="1"/>
+          </p:cNvSpPr>
+          <p:nvPr>
+            <p:ph type="sldNum" sz="quarter" idx="10"/>
+          </p:nvPr>
+        </p:nvSpPr>
+        <p:spPr/>
+        <p:txBody>
+          <a:bodyPr/>
+          <a:lstStyle/>
+          <a:p>
+            <a:fld id="{F7021451-1387-4CA6-816F-3879F97B5CBC}" type="slidenum">
+              <a:rPr lang="en-US"/>
+              <a:t>58</a:t>
             </a:fld>
             <a:endParaRPr lang="en-US"/>
           </a:p>
@@ -5042,7 +5487,7 @@
           <a:p>
             <a:r>
               <a:rPr lang="en-US" dirty="0"/>
-              <a:t>By the end of this lesson, you should be able to do three things. Number 1: define spatial interaction. Number 2: explain Ullman's three bases of interaction. Number 3: explain other factors of spatial interaction.</a:t>
+              <a:t>By the end of this lesson, you should be able to do four things. Number 1: define spatial interaction. Number 2: distinguish tangible and intangible flows. Number 3: explain complementarity and transferability. Number 4: explain intervening opportunity and distance decay.</a:t>
             </a:r>
             <a:endParaRPr lang="en-US" dirty="0"/>
           </a:p>
@@ -5130,7 +5575,7 @@
           <a:p>
             <a:r>
               <a:rPr lang="en-US" dirty="0"/>
-              <a:t>Let us first remember what you already know. Migration falls with distance. Intervening opportunities reduce long flows. Keep this in mind, because we shall build on it today.</a:t>
+              <a:t>Let us first remember what you already know. Migration decreases with distance. Big towns attract more people. The gravity model uses population and distance. Keep this in mind, because we shall build on it today.</a:t>
             </a:r>
             <a:endParaRPr lang="en-US" dirty="0"/>
           </a:p>
@@ -6594,7 +7039,27 @@
                 <a:ea typeface="Times New Roman" pitchFamily="34" charset="-122"/>
                 <a:cs typeface="Times New Roman" pitchFamily="34" charset="-120"/>
               </a:rPr>
-              <a:t>Cattle from the Adamawa are sold in Yaoundé and Douala, while plantains and palm oil from the south are sold in the north. A new road and mobile phones have increased this trade.</a:t>
+              <a:t>Aïssatou sells fresh tomatoes at the Central Market of Garoua.</a:t>
+            </a:r>
+            <a:endParaRPr lang="en-US" sz="4000" dirty="0"/>
+          </a:p>
+          <a:p>
+            <a:pPr algn="l" indent="0" marL="0">
+              <a:spcAft>
+                <a:spcPts val="800"/>
+              </a:spcAft>
+              <a:buNone/>
+            </a:pPr>
+            <a:r>
+              <a:rPr lang="en-US" sz="4000" dirty="0">
+                <a:solidFill>
+                  <a:srgbClr val="111111"/>
+                </a:solidFill>
+                <a:latin typeface="Times New Roman" pitchFamily="34" charset="0"/>
+                <a:ea typeface="Times New Roman" pitchFamily="34" charset="-122"/>
+                <a:cs typeface="Times New Roman" pitchFamily="34" charset="-120"/>
+              </a:rPr>
+              <a:t>Every few days she travels to buy new stock.</a:t>
             </a:r>
             <a:endParaRPr lang="en-US" sz="4000" dirty="0"/>
           </a:p>
@@ -6771,7 +7236,7 @@
                 <a:ea typeface="Times New Roman" pitchFamily="34" charset="-122"/>
                 <a:cs typeface="Times New Roman" pitchFamily="34" charset="-120"/>
               </a:rPr>
-              <a:t>Situation: Question 1</a:t>
+              <a:t>Situation in Real Life (continued)</a:t>
             </a:r>
             <a:endParaRPr lang="en-US" sz="3600" dirty="0"/>
           </a:p>
@@ -6813,7 +7278,7 @@
                 <a:ea typeface="Times New Roman" pitchFamily="34" charset="-122"/>
                 <a:cs typeface="Times New Roman" pitchFamily="34" charset="-120"/>
               </a:rPr>
-              <a:t>What is the problem in the situation?</a:t>
+              <a:t>She knows that there are big tomato farms near Maroua, but she almost always goes to Pitoa, which is closer: the trip is faster and cheaper, and she can be back at her stall the same day.</a:t>
             </a:r>
             <a:endParaRPr lang="en-US" sz="4000" dirty="0"/>
           </a:p>
@@ -6990,7 +7455,7 @@
                 <a:ea typeface="Times New Roman" pitchFamily="34" charset="-122"/>
                 <a:cs typeface="Times New Roman" pitchFamily="34" charset="-120"/>
               </a:rPr>
-              <a:t>Answer</a:t>
+              <a:t>Situation in Real Life (continued)</a:t>
             </a:r>
             <a:endParaRPr lang="en-US" sz="3600" dirty="0"/>
           </a:p>
@@ -7032,7 +7497,7 @@
                 <a:ea typeface="Times New Roman" pitchFamily="34" charset="-122"/>
                 <a:cs typeface="Times New Roman" pitchFamily="34" charset="-120"/>
               </a:rPr>
-              <a:t>Learners want to understand why regions exchange goods and people.</a:t>
+              <a:t>She asks: "What makes places exchange goods and people, and why do I prefer Pitoa to Maroua?"</a:t>
             </a:r>
             <a:endParaRPr lang="en-US" sz="4000" dirty="0"/>
           </a:p>
@@ -7209,7 +7674,7 @@
                 <a:ea typeface="Times New Roman" pitchFamily="34" charset="-122"/>
                 <a:cs typeface="Times New Roman" pitchFamily="34" charset="-120"/>
               </a:rPr>
-              <a:t>Situation: Question 2</a:t>
+              <a:t>Situation: Question 1</a:t>
             </a:r>
             <a:endParaRPr lang="en-US" sz="3600" dirty="0"/>
           </a:p>
@@ -7251,7 +7716,7 @@
                 <a:ea typeface="Times New Roman" pitchFamily="34" charset="-122"/>
                 <a:cs typeface="Times New Roman" pitchFamily="34" charset="-120"/>
               </a:rPr>
-              <a:t>Why do the north and south trade?</a:t>
+              <a:t>What is the problem in the situation?</a:t>
             </a:r>
             <a:endParaRPr lang="en-US" sz="4000" dirty="0"/>
           </a:p>
@@ -7470,7 +7935,7 @@
                 <a:ea typeface="Times New Roman" pitchFamily="34" charset="-122"/>
                 <a:cs typeface="Times New Roman" pitchFamily="34" charset="-120"/>
               </a:rPr>
-              <a:t>Each has products the other needs (complementarity).</a:t>
+              <a:t>Aïssatou does not know the factors of spatial interaction.</a:t>
             </a:r>
             <a:endParaRPr lang="en-US" sz="4000" dirty="0"/>
           </a:p>
@@ -7647,7 +8112,7 @@
                 <a:ea typeface="Times New Roman" pitchFamily="34" charset="-122"/>
                 <a:cs typeface="Times New Roman" pitchFamily="34" charset="-120"/>
               </a:rPr>
-              <a:t>Situation: Question 3</a:t>
+              <a:t>Situation: Question 2</a:t>
             </a:r>
             <a:endParaRPr lang="en-US" sz="3600" dirty="0"/>
           </a:p>
@@ -7689,7 +8154,7 @@
                 <a:ea typeface="Times New Roman" pitchFamily="34" charset="-122"/>
                 <a:cs typeface="Times New Roman" pitchFamily="34" charset="-120"/>
               </a:rPr>
-              <a:t>How did the new road help?</a:t>
+              <a:t>Why must she travel to buy tomatoes?</a:t>
             </a:r>
             <a:endParaRPr lang="en-US" sz="4000" dirty="0"/>
           </a:p>
@@ -7866,7 +8331,7 @@
                 <a:ea typeface="Times New Roman" pitchFamily="34" charset="-122"/>
                 <a:cs typeface="Times New Roman" pitchFamily="34" charset="-120"/>
               </a:rPr>
-              <a:t>Possible Answer</a:t>
+              <a:t>Answer</a:t>
             </a:r>
             <a:endParaRPr lang="en-US" sz="3600" dirty="0"/>
           </a:p>
@@ -7908,7 +8373,7 @@
                 <a:ea typeface="Times New Roman" pitchFamily="34" charset="-122"/>
                 <a:cs typeface="Times New Roman" pitchFamily="34" charset="-120"/>
               </a:rPr>
-              <a:t>It reduced the cost and time of movement (transferability).</a:t>
+              <a:t>Garoua needs tomatoes and Pitoa has a surplus: this is complementarity.</a:t>
             </a:r>
             <a:endParaRPr lang="en-US" sz="4000" dirty="0"/>
           </a:p>
@@ -8020,7 +8485,7 @@
                 <a:ea typeface="Calibri" pitchFamily="34" charset="-122"/>
                 <a:cs typeface="Calibri" pitchFamily="34" charset="-120"/>
               </a:rPr>
-              <a:t>ACTION TO TAKE</a:t>
+              <a:t>REAL-LIFE SITUATION</a:t>
             </a:r>
             <a:endParaRPr lang="en-US" sz="1400" dirty="0"/>
           </a:p>
@@ -8085,7 +8550,7 @@
                 <a:ea typeface="Times New Roman" pitchFamily="34" charset="-122"/>
                 <a:cs typeface="Times New Roman" pitchFamily="34" charset="-120"/>
               </a:rPr>
-              <a:t>Action to Take</a:t>
+              <a:t>Situation: Question 3</a:t>
             </a:r>
             <a:endParaRPr lang="en-US" sz="3600" dirty="0"/>
           </a:p>
@@ -8127,7 +8592,7 @@
                 <a:ea typeface="Times New Roman" pitchFamily="34" charset="-122"/>
                 <a:cs typeface="Times New Roman" pitchFamily="34" charset="-120"/>
               </a:rPr>
-              <a:t>Improve links between regions to encourage trade and exchange.</a:t>
+              <a:t>Why does she prefer Pitoa to Maroua?</a:t>
             </a:r>
             <a:endParaRPr lang="en-US" sz="4000" dirty="0"/>
           </a:p>
@@ -8239,7 +8704,7 @@
                 <a:ea typeface="Calibri" pitchFamily="34" charset="-122"/>
                 <a:cs typeface="Calibri" pitchFamily="34" charset="-120"/>
               </a:rPr>
-              <a:t>JUSTIFICATION</a:t>
+              <a:t>REAL-LIFE SITUATION</a:t>
             </a:r>
             <a:endParaRPr lang="en-US" sz="1400" dirty="0"/>
           </a:p>
@@ -8304,7 +8769,7 @@
                 <a:ea typeface="Times New Roman" pitchFamily="34" charset="-122"/>
                 <a:cs typeface="Times New Roman" pitchFamily="34" charset="-120"/>
               </a:rPr>
-              <a:t>Justification of the Lesson</a:t>
+              <a:t>Possible Answer</a:t>
             </a:r>
             <a:endParaRPr lang="en-US" sz="3600" dirty="0"/>
           </a:p>
@@ -8346,7 +8811,7 @@
                 <a:ea typeface="Times New Roman" pitchFamily="34" charset="-122"/>
                 <a:cs typeface="Times New Roman" pitchFamily="34" charset="-120"/>
               </a:rPr>
-              <a:t>This lesson helps us to understand the links between places.</a:t>
+              <a:t>It is nearer and cheaper: interaction decreases with distance (distance decay).</a:t>
             </a:r>
             <a:endParaRPr lang="en-US" sz="4000" dirty="0"/>
           </a:p>
@@ -8458,54 +8923,15 @@
                 <a:ea typeface="Calibri" pitchFamily="34" charset="-122"/>
                 <a:cs typeface="Calibri" pitchFamily="34" charset="-120"/>
               </a:rPr>
-              <a:t>1. MEANING</a:t>
+              <a:t>ACTION TO TAKE</a:t>
             </a:r>
             <a:endParaRPr lang="en-US" sz="1400" dirty="0"/>
-          </a:p>
-        </p:txBody>
-      </p:sp>
-      <p:sp>
-        <p:nvSpPr>
-          <p:cNvPr id="3" name="Text 1"/>
-          <p:cNvSpPr/>
-          <p:nvPr/>
-        </p:nvSpPr>
-        <p:spPr>
-          <a:xfrm>
-            <a:off x="457200" y="1005840"/>
-            <a:ext cx="11277295" cy="731520"/>
-          </a:xfrm>
-          <a:prstGeom prst="rect">
-            <a:avLst/>
-          </a:prstGeom>
-          <a:noFill/>
-          <a:ln/>
-        </p:spPr>
-        <p:txBody>
-          <a:bodyPr wrap="square" lIns="0" tIns="0" rIns="0" bIns="0" rtlCol="0" anchor="ctr"/>
-          <a:lstStyle/>
-          <a:p>
-            <a:pPr algn="ctr" indent="0" marL="0">
-              <a:buNone/>
-            </a:pPr>
-            <a:r>
-              <a:rPr lang="en-US" sz="3600" b="1" dirty="0">
-                <a:solidFill>
-                  <a:srgbClr val="990011"/>
-                </a:solidFill>
-                <a:latin typeface="Times New Roman" pitchFamily="34" charset="0"/>
-                <a:ea typeface="Times New Roman" pitchFamily="34" charset="-122"/>
-                <a:cs typeface="Times New Roman" pitchFamily="34" charset="-120"/>
-              </a:rPr>
-              <a:t>Activity 1</a:t>
-            </a:r>
-            <a:endParaRPr lang="en-US" sz="3600" dirty="0"/>
           </a:p>
         </p:txBody>
       </p:sp>
       <p:pic>
         <p:nvPicPr>
-          <p:cNvPr id="4" name="Image 0" descr="/home/claude/f4/img/v2/ullman_big.png">    </p:cNvPr>
+          <p:cNvPr id="3" name="Image 0" descr="/home/claude/f4/img/minesec_sheet.png">    </p:cNvPr>
           <p:cNvPicPr>
             <a:picLocks noChangeAspect="1"/>
           </p:cNvPicPr>
@@ -8519,8 +8945,8 @@
         </p:blipFill>
         <p:spPr>
           <a:xfrm>
-            <a:off x="629930" y="1783080"/>
-            <a:ext cx="10931835" cy="4270248"/>
+            <a:off x="0" y="658368"/>
+            <a:ext cx="5120640" cy="5833872"/>
           </a:xfrm>
           <a:prstGeom prst="rect">
             <a:avLst/>
@@ -8529,14 +8955,14 @@
       </p:pic>
       <p:sp>
         <p:nvSpPr>
-          <p:cNvPr id="5" name="Text 2"/>
+          <p:cNvPr id="4" name="Text 1"/>
           <p:cNvSpPr/>
           <p:nvPr/>
         </p:nvSpPr>
         <p:spPr>
           <a:xfrm>
-            <a:off x="457200" y="6089904"/>
-            <a:ext cx="11277295" cy="347472"/>
+            <a:off x="5349240" y="1005840"/>
+            <a:ext cx="6522415" cy="731520"/>
           </a:xfrm>
           <a:prstGeom prst="rect">
             <a:avLst/>
@@ -8545,24 +8971,68 @@
           <a:ln/>
         </p:spPr>
         <p:txBody>
-          <a:bodyPr wrap="square" lIns="0" tIns="0" rIns="0" bIns="0" rtlCol="0" anchor="ctr"/>
+          <a:bodyPr wrap="square" lIns="0" tIns="0" rIns="0" bIns="0" rtlCol="0" anchor="ctr">
+            <a:normAutofit/>
+          </a:bodyPr>
           <a:lstStyle/>
           <a:p>
             <a:pPr algn="ctr" indent="0" marL="0">
               <a:buNone/>
             </a:pPr>
             <a:r>
-              <a:rPr lang="en-US" sz="1800" i="1" dirty="0">
-                <a:solidFill>
-                  <a:srgbClr val="555555"/>
+              <a:rPr lang="en-US" sz="3600" b="1" dirty="0">
+                <a:solidFill>
+                  <a:srgbClr val="990011"/>
                 </a:solidFill>
                 <a:latin typeface="Times New Roman" pitchFamily="34" charset="0"/>
                 <a:ea typeface="Times New Roman" pitchFamily="34" charset="-122"/>
                 <a:cs typeface="Times New Roman" pitchFamily="34" charset="-120"/>
               </a:rPr>
-              <a:t>Ullman's three bases of spatial interaction.</a:t>
-            </a:r>
-            <a:endParaRPr lang="en-US" sz="1800" dirty="0"/>
+              <a:t>Action to Take</a:t>
+            </a:r>
+            <a:endParaRPr lang="en-US" sz="3600" dirty="0"/>
+          </a:p>
+        </p:txBody>
+      </p:sp>
+      <p:sp>
+        <p:nvSpPr>
+          <p:cNvPr id="5" name="Text 2"/>
+          <p:cNvSpPr/>
+          <p:nvPr/>
+        </p:nvSpPr>
+        <p:spPr>
+          <a:xfrm>
+            <a:off x="5349240" y="1783080"/>
+            <a:ext cx="6522415" cy="4663440"/>
+          </a:xfrm>
+          <a:prstGeom prst="rect">
+            <a:avLst/>
+          </a:prstGeom>
+          <a:noFill/>
+          <a:ln/>
+        </p:spPr>
+        <p:txBody>
+          <a:bodyPr wrap="square" lIns="0" tIns="0" rIns="0" bIns="0" rtlCol="0" anchor="t"/>
+          <a:lstStyle/>
+          <a:p>
+            <a:pPr algn="l" indent="0" marL="0">
+              <a:spcAft>
+                <a:spcPts val="800"/>
+              </a:spcAft>
+              <a:buNone/>
+            </a:pPr>
+            <a:r>
+              <a:rPr lang="en-US" sz="4000" dirty="0">
+                <a:solidFill>
+                  <a:srgbClr val="111111"/>
+                </a:solidFill>
+                <a:latin typeface="Times New Roman" pitchFamily="34" charset="0"/>
+                <a:ea typeface="Times New Roman" pitchFamily="34" charset="-122"/>
+                <a:cs typeface="Times New Roman" pitchFamily="34" charset="-120"/>
+              </a:rPr>
+              <a:t>Improve roads and communication links to increase useful exchanges between places.</a:t>
+            </a:r>
+            <a:endParaRPr lang="en-US" sz="4000" dirty="0"/>
           </a:p>
         </p:txBody>
       </p:sp>
@@ -9267,7 +9737,7 @@
                 <a:ea typeface="Calibri" pitchFamily="34" charset="-122"/>
                 <a:cs typeface="Calibri" pitchFamily="34" charset="-120"/>
               </a:rPr>
-              <a:t>1. MEANING</a:t>
+              <a:t>JUSTIFICATION</a:t>
             </a:r>
             <a:endParaRPr lang="en-US" sz="1400" dirty="0"/>
           </a:p>
@@ -9332,7 +9802,7 @@
                 <a:ea typeface="Times New Roman" pitchFamily="34" charset="-122"/>
                 <a:cs typeface="Times New Roman" pitchFamily="34" charset="-120"/>
               </a:rPr>
-              <a:t>Activity 1: Question</a:t>
+              <a:t>Justification of the Lesson</a:t>
             </a:r>
             <a:endParaRPr lang="en-US" sz="3600" dirty="0"/>
           </a:p>
@@ -9374,7 +9844,7 @@
                 <a:ea typeface="Times New Roman" pitchFamily="34" charset="-122"/>
                 <a:cs typeface="Times New Roman" pitchFamily="34" charset="-120"/>
               </a:rPr>
-              <a:t>Name the three bases of spatial interaction.</a:t>
+              <a:t>This lesson helps us to understand trade, transport and communication between towns and regions.</a:t>
             </a:r>
             <a:endParaRPr lang="en-US" sz="4000" dirty="0"/>
           </a:p>
@@ -9492,9 +9962,48 @@
           </a:p>
         </p:txBody>
       </p:sp>
+      <p:sp>
+        <p:nvSpPr>
+          <p:cNvPr id="3" name="Text 1"/>
+          <p:cNvSpPr/>
+          <p:nvPr/>
+        </p:nvSpPr>
+        <p:spPr>
+          <a:xfrm>
+            <a:off x="457200" y="1005840"/>
+            <a:ext cx="11277295" cy="731520"/>
+          </a:xfrm>
+          <a:prstGeom prst="rect">
+            <a:avLst/>
+          </a:prstGeom>
+          <a:noFill/>
+          <a:ln/>
+        </p:spPr>
+        <p:txBody>
+          <a:bodyPr wrap="square" lIns="0" tIns="0" rIns="0" bIns="0" rtlCol="0" anchor="ctr"/>
+          <a:lstStyle/>
+          <a:p>
+            <a:pPr algn="ctr" indent="0" marL="0">
+              <a:buNone/>
+            </a:pPr>
+            <a:r>
+              <a:rPr lang="en-US" sz="3600" b="1" dirty="0">
+                <a:solidFill>
+                  <a:srgbClr val="990011"/>
+                </a:solidFill>
+                <a:latin typeface="Times New Roman" pitchFamily="34" charset="0"/>
+                <a:ea typeface="Times New Roman" pitchFamily="34" charset="-122"/>
+                <a:cs typeface="Times New Roman" pitchFamily="34" charset="-120"/>
+              </a:rPr>
+              <a:t>Activity 1</a:t>
+            </a:r>
+            <a:endParaRPr lang="en-US" sz="3600" dirty="0"/>
+          </a:p>
+        </p:txBody>
+      </p:sp>
       <p:pic>
         <p:nvPicPr>
-          <p:cNvPr id="3" name="Image 0" descr="/home/claude/f4/img/minesec_sheet.png">    </p:cNvPr>
+          <p:cNvPr id="4" name="Image 0" descr="/home/claude/f4/img/v2/f2t_mobile_money.jpg">    </p:cNvPr>
           <p:cNvPicPr>
             <a:picLocks noChangeAspect="1"/>
           </p:cNvPicPr>
@@ -9508,8 +10017,8 @@
         </p:blipFill>
         <p:spPr>
           <a:xfrm>
-            <a:off x="0" y="658368"/>
-            <a:ext cx="5120640" cy="5833872"/>
+            <a:off x="2246610" y="1783080"/>
+            <a:ext cx="7698475" cy="4270248"/>
           </a:xfrm>
           <a:prstGeom prst="rect">
             <a:avLst/>
@@ -9518,14 +10027,14 @@
       </p:pic>
       <p:sp>
         <p:nvSpPr>
-          <p:cNvPr id="4" name="Text 1"/>
+          <p:cNvPr id="5" name="Text 2"/>
           <p:cNvSpPr/>
           <p:nvPr/>
         </p:nvSpPr>
         <p:spPr>
           <a:xfrm>
-            <a:off x="5349240" y="1005840"/>
-            <a:ext cx="6522415" cy="731520"/>
+            <a:off x="457200" y="6089904"/>
+            <a:ext cx="11277295" cy="347472"/>
           </a:xfrm>
           <a:prstGeom prst="rect">
             <a:avLst/>
@@ -9534,68 +10043,24 @@
           <a:ln/>
         </p:spPr>
         <p:txBody>
-          <a:bodyPr wrap="square" lIns="0" tIns="0" rIns="0" bIns="0" rtlCol="0" anchor="ctr">
-            <a:normAutofit/>
-          </a:bodyPr>
+          <a:bodyPr wrap="square" lIns="0" tIns="0" rIns="0" bIns="0" rtlCol="0" anchor="ctr"/>
           <a:lstStyle/>
           <a:p>
             <a:pPr algn="ctr" indent="0" marL="0">
               <a:buNone/>
             </a:pPr>
             <a:r>
-              <a:rPr lang="en-US" sz="3600" b="1" dirty="0">
-                <a:solidFill>
-                  <a:srgbClr val="990011"/>
+              <a:rPr lang="en-US" sz="1800" i="1" dirty="0">
+                <a:solidFill>
+                  <a:srgbClr val="555555"/>
                 </a:solidFill>
                 <a:latin typeface="Times New Roman" pitchFamily="34" charset="0"/>
                 <a:ea typeface="Times New Roman" pitchFamily="34" charset="-122"/>
                 <a:cs typeface="Times New Roman" pitchFamily="34" charset="-120"/>
               </a:rPr>
-              <a:t>Activity 1: Answer</a:t>
-            </a:r>
-            <a:endParaRPr lang="en-US" sz="3600" dirty="0"/>
-          </a:p>
-        </p:txBody>
-      </p:sp>
-      <p:sp>
-        <p:nvSpPr>
-          <p:cNvPr id="5" name="Text 2"/>
-          <p:cNvSpPr/>
-          <p:nvPr/>
-        </p:nvSpPr>
-        <p:spPr>
-          <a:xfrm>
-            <a:off x="5349240" y="1783080"/>
-            <a:ext cx="6522415" cy="4663440"/>
-          </a:xfrm>
-          <a:prstGeom prst="rect">
-            <a:avLst/>
-          </a:prstGeom>
-          <a:noFill/>
-          <a:ln/>
-        </p:spPr>
-        <p:txBody>
-          <a:bodyPr wrap="square" lIns="0" tIns="0" rIns="0" bIns="0" rtlCol="0" anchor="t"/>
-          <a:lstStyle/>
-          <a:p>
-            <a:pPr algn="l" indent="0" marL="0">
-              <a:spcAft>
-                <a:spcPts val="800"/>
-              </a:spcAft>
-              <a:buNone/>
-            </a:pPr>
-            <a:r>
-              <a:rPr lang="en-US" sz="4000" dirty="0">
-                <a:solidFill>
-                  <a:srgbClr val="111111"/>
-                </a:solidFill>
-                <a:latin typeface="Times New Roman" pitchFamily="34" charset="0"/>
-                <a:ea typeface="Times New Roman" pitchFamily="34" charset="-122"/>
-                <a:cs typeface="Times New Roman" pitchFamily="34" charset="-120"/>
-              </a:rPr>
-              <a:t>Complementarity, transferability and intervening opportunity.</a:t>
-            </a:r>
-            <a:endParaRPr lang="en-US" sz="4000" dirty="0"/>
+              <a:t>Mobile money.</a:t>
+            </a:r>
+            <a:endParaRPr lang="en-US" sz="1800" dirty="0"/>
           </a:p>
         </p:txBody>
       </p:sp>
@@ -9705,54 +10170,15 @@
                 <a:ea typeface="Calibri" pitchFamily="34" charset="-122"/>
                 <a:cs typeface="Calibri" pitchFamily="34" charset="-120"/>
               </a:rPr>
-              <a:t>2. FACTORS: COMPLEMENTARITY</a:t>
+              <a:t>1. MEANING</a:t>
             </a:r>
             <a:endParaRPr lang="en-US" sz="1400" dirty="0"/>
-          </a:p>
-        </p:txBody>
-      </p:sp>
-      <p:sp>
-        <p:nvSpPr>
-          <p:cNvPr id="3" name="Text 1"/>
-          <p:cNvSpPr/>
-          <p:nvPr/>
-        </p:nvSpPr>
-        <p:spPr>
-          <a:xfrm>
-            <a:off x="457200" y="1005840"/>
-            <a:ext cx="11277295" cy="731520"/>
-          </a:xfrm>
-          <a:prstGeom prst="rect">
-            <a:avLst/>
-          </a:prstGeom>
-          <a:noFill/>
-          <a:ln/>
-        </p:spPr>
-        <p:txBody>
-          <a:bodyPr wrap="square" lIns="0" tIns="0" rIns="0" bIns="0" rtlCol="0" anchor="ctr"/>
-          <a:lstStyle/>
-          <a:p>
-            <a:pPr algn="ctr" indent="0" marL="0">
-              <a:buNone/>
-            </a:pPr>
-            <a:r>
-              <a:rPr lang="en-US" sz="3600" b="1" dirty="0">
-                <a:solidFill>
-                  <a:srgbClr val="990011"/>
-                </a:solidFill>
-                <a:latin typeface="Times New Roman" pitchFamily="34" charset="0"/>
-                <a:ea typeface="Times New Roman" pitchFamily="34" charset="-122"/>
-                <a:cs typeface="Times New Roman" pitchFamily="34" charset="-120"/>
-              </a:rPr>
-              <a:t>Activity 2</a:t>
-            </a:r>
-            <a:endParaRPr lang="en-US" sz="3600" dirty="0"/>
           </a:p>
         </p:txBody>
       </p:sp>
       <p:pic>
         <p:nvPicPr>
-          <p:cNvPr id="4" name="Image 0" descr="/home/claude/f4/img/v2/f2t_cattle_market.jpg">    </p:cNvPr>
+          <p:cNvPr id="3" name="Image 0" descr="/home/claude/f4/img/minesec_sheet.png">    </p:cNvPr>
           <p:cNvPicPr>
             <a:picLocks noChangeAspect="1"/>
           </p:cNvPicPr>
@@ -9766,8 +10192,8 @@
         </p:blipFill>
         <p:spPr>
           <a:xfrm>
-            <a:off x="2246610" y="1783080"/>
-            <a:ext cx="7698475" cy="4270248"/>
+            <a:off x="0" y="658368"/>
+            <a:ext cx="5120640" cy="5833872"/>
           </a:xfrm>
           <a:prstGeom prst="rect">
             <a:avLst/>
@@ -9776,14 +10202,14 @@
       </p:pic>
       <p:sp>
         <p:nvSpPr>
-          <p:cNvPr id="5" name="Text 2"/>
+          <p:cNvPr id="4" name="Text 1"/>
           <p:cNvSpPr/>
           <p:nvPr/>
         </p:nvSpPr>
         <p:spPr>
           <a:xfrm>
-            <a:off x="457200" y="6089904"/>
-            <a:ext cx="11277295" cy="347472"/>
+            <a:off x="5349240" y="1005840"/>
+            <a:ext cx="6522415" cy="731520"/>
           </a:xfrm>
           <a:prstGeom prst="rect">
             <a:avLst/>
@@ -9792,24 +10218,68 @@
           <a:ln/>
         </p:spPr>
         <p:txBody>
-          <a:bodyPr wrap="square" lIns="0" tIns="0" rIns="0" bIns="0" rtlCol="0" anchor="ctr"/>
+          <a:bodyPr wrap="square" lIns="0" tIns="0" rIns="0" bIns="0" rtlCol="0" anchor="ctr">
+            <a:normAutofit/>
+          </a:bodyPr>
           <a:lstStyle/>
           <a:p>
             <a:pPr algn="ctr" indent="0" marL="0">
               <a:buNone/>
             </a:pPr>
             <a:r>
-              <a:rPr lang="en-US" sz="1800" i="1" dirty="0">
-                <a:solidFill>
-                  <a:srgbClr val="555555"/>
+              <a:rPr lang="en-US" sz="3600" b="1" dirty="0">
+                <a:solidFill>
+                  <a:srgbClr val="990011"/>
                 </a:solidFill>
                 <a:latin typeface="Times New Roman" pitchFamily="34" charset="0"/>
                 <a:ea typeface="Times New Roman" pitchFamily="34" charset="-122"/>
                 <a:cs typeface="Times New Roman" pitchFamily="34" charset="-120"/>
               </a:rPr>
-              <a:t>A cattle market.</a:t>
-            </a:r>
-            <a:endParaRPr lang="en-US" sz="1800" dirty="0"/>
+              <a:t>Activity 1: Question</a:t>
+            </a:r>
+            <a:endParaRPr lang="en-US" sz="3600" dirty="0"/>
+          </a:p>
+        </p:txBody>
+      </p:sp>
+      <p:sp>
+        <p:nvSpPr>
+          <p:cNvPr id="5" name="Text 2"/>
+          <p:cNvSpPr/>
+          <p:nvPr/>
+        </p:nvSpPr>
+        <p:spPr>
+          <a:xfrm>
+            <a:off x="5349240" y="1783080"/>
+            <a:ext cx="6522415" cy="4663440"/>
+          </a:xfrm>
+          <a:prstGeom prst="rect">
+            <a:avLst/>
+          </a:prstGeom>
+          <a:noFill/>
+          <a:ln/>
+        </p:spPr>
+        <p:txBody>
+          <a:bodyPr wrap="square" lIns="0" tIns="0" rIns="0" bIns="0" rtlCol="0" anchor="t"/>
+          <a:lstStyle/>
+          <a:p>
+            <a:pPr algn="l" indent="0" marL="0">
+              <a:spcAft>
+                <a:spcPts val="800"/>
+              </a:spcAft>
+              <a:buNone/>
+            </a:pPr>
+            <a:r>
+              <a:rPr lang="en-US" sz="4000" dirty="0">
+                <a:solidFill>
+                  <a:srgbClr val="111111"/>
+                </a:solidFill>
+                <a:latin typeface="Times New Roman" pitchFamily="34" charset="0"/>
+                <a:ea typeface="Times New Roman" pitchFamily="34" charset="-122"/>
+                <a:cs typeface="Times New Roman" pitchFamily="34" charset="-120"/>
+              </a:rPr>
+              <a:t>Is a mobile money transfer a tangible or an intangible flow?</a:t>
+            </a:r>
+            <a:endParaRPr lang="en-US" sz="4000" dirty="0"/>
           </a:p>
         </p:txBody>
       </p:sp>
@@ -9919,7 +10389,7 @@
                 <a:ea typeface="Calibri" pitchFamily="34" charset="-122"/>
                 <a:cs typeface="Calibri" pitchFamily="34" charset="-120"/>
               </a:rPr>
-              <a:t>2. FACTORS: COMPLEMENTARITY</a:t>
+              <a:t>1. MEANING</a:t>
             </a:r>
             <a:endParaRPr lang="en-US" sz="1400" dirty="0"/>
           </a:p>
@@ -9984,7 +10454,7 @@
                 <a:ea typeface="Times New Roman" pitchFamily="34" charset="-122"/>
                 <a:cs typeface="Times New Roman" pitchFamily="34" charset="-120"/>
               </a:rPr>
-              <a:t>Activity 2: Question</a:t>
+              <a:t>Activity 1: Answer</a:t>
             </a:r>
             <a:endParaRPr lang="en-US" sz="3600" dirty="0"/>
           </a:p>
@@ -10026,7 +10496,7 @@
                 <a:ea typeface="Times New Roman" pitchFamily="34" charset="-122"/>
                 <a:cs typeface="Times New Roman" pitchFamily="34" charset="-120"/>
               </a:rPr>
-              <a:t>Why are cattle sent from the north to the south?</a:t>
+              <a:t>An intangible flow (information and money).</a:t>
             </a:r>
             <a:endParaRPr lang="en-US" sz="4000" dirty="0"/>
           </a:p>
@@ -10138,15 +10608,54 @@
                 <a:ea typeface="Calibri" pitchFamily="34" charset="-122"/>
                 <a:cs typeface="Calibri" pitchFamily="34" charset="-120"/>
               </a:rPr>
-              <a:t>2. FACTORS: COMPLEMENTARITY</a:t>
+              <a:t>2. COMPLEMENTARITY</a:t>
             </a:r>
             <a:endParaRPr lang="en-US" sz="1400" dirty="0"/>
+          </a:p>
+        </p:txBody>
+      </p:sp>
+      <p:sp>
+        <p:nvSpPr>
+          <p:cNvPr id="3" name="Text 1"/>
+          <p:cNvSpPr/>
+          <p:nvPr/>
+        </p:nvSpPr>
+        <p:spPr>
+          <a:xfrm>
+            <a:off x="457200" y="1005840"/>
+            <a:ext cx="11277295" cy="731520"/>
+          </a:xfrm>
+          <a:prstGeom prst="rect">
+            <a:avLst/>
+          </a:prstGeom>
+          <a:noFill/>
+          <a:ln/>
+        </p:spPr>
+        <p:txBody>
+          <a:bodyPr wrap="square" lIns="0" tIns="0" rIns="0" bIns="0" rtlCol="0" anchor="ctr"/>
+          <a:lstStyle/>
+          <a:p>
+            <a:pPr algn="ctr" indent="0" marL="0">
+              <a:buNone/>
+            </a:pPr>
+            <a:r>
+              <a:rPr lang="en-US" sz="3600" b="1" dirty="0">
+                <a:solidFill>
+                  <a:srgbClr val="990011"/>
+                </a:solidFill>
+                <a:latin typeface="Times New Roman" pitchFamily="34" charset="0"/>
+                <a:ea typeface="Times New Roman" pitchFamily="34" charset="-122"/>
+                <a:cs typeface="Times New Roman" pitchFamily="34" charset="-120"/>
+              </a:rPr>
+              <a:t>Activity 2</a:t>
+            </a:r>
+            <a:endParaRPr lang="en-US" sz="3600" dirty="0"/>
           </a:p>
         </p:txBody>
       </p:sp>
       <p:pic>
         <p:nvPicPr>
-          <p:cNvPr id="3" name="Image 0" descr="/home/claude/f4/img/minesec_sheet.png">    </p:cNvPr>
+          <p:cNvPr id="4" name="Image 0" descr="/home/claude/f4/img/v2/f2t_cotton_harvest.jpg">    </p:cNvPr>
           <p:cNvPicPr>
             <a:picLocks noChangeAspect="1"/>
           </p:cNvPicPr>
@@ -10160,8 +10669,8 @@
         </p:blipFill>
         <p:spPr>
           <a:xfrm>
-            <a:off x="0" y="658368"/>
-            <a:ext cx="5120640" cy="5833872"/>
+            <a:off x="2250369" y="1783080"/>
+            <a:ext cx="7690957" cy="4270248"/>
           </a:xfrm>
           <a:prstGeom prst="rect">
             <a:avLst/>
@@ -10170,14 +10679,14 @@
       </p:pic>
       <p:sp>
         <p:nvSpPr>
-          <p:cNvPr id="4" name="Text 1"/>
+          <p:cNvPr id="5" name="Text 2"/>
           <p:cNvSpPr/>
           <p:nvPr/>
         </p:nvSpPr>
         <p:spPr>
           <a:xfrm>
-            <a:off x="5349240" y="1005840"/>
-            <a:ext cx="6522415" cy="731520"/>
+            <a:off x="457200" y="6089904"/>
+            <a:ext cx="11277295" cy="347472"/>
           </a:xfrm>
           <a:prstGeom prst="rect">
             <a:avLst/>
@@ -10186,68 +10695,24 @@
           <a:ln/>
         </p:spPr>
         <p:txBody>
-          <a:bodyPr wrap="square" lIns="0" tIns="0" rIns="0" bIns="0" rtlCol="0" anchor="ctr">
-            <a:normAutofit/>
-          </a:bodyPr>
+          <a:bodyPr wrap="square" lIns="0" tIns="0" rIns="0" bIns="0" rtlCol="0" anchor="ctr"/>
           <a:lstStyle/>
           <a:p>
             <a:pPr algn="ctr" indent="0" marL="0">
               <a:buNone/>
             </a:pPr>
             <a:r>
-              <a:rPr lang="en-US" sz="3600" b="1" dirty="0">
-                <a:solidFill>
-                  <a:srgbClr val="990011"/>
+              <a:rPr lang="en-US" sz="1800" i="1" dirty="0">
+                <a:solidFill>
+                  <a:srgbClr val="555555"/>
                 </a:solidFill>
                 <a:latin typeface="Times New Roman" pitchFamily="34" charset="0"/>
                 <a:ea typeface="Times New Roman" pitchFamily="34" charset="-122"/>
                 <a:cs typeface="Times New Roman" pitchFamily="34" charset="-120"/>
               </a:rPr>
-              <a:t>Activity 2: Answer</a:t>
-            </a:r>
-            <a:endParaRPr lang="en-US" sz="3600" dirty="0"/>
-          </a:p>
-        </p:txBody>
-      </p:sp>
-      <p:sp>
-        <p:nvSpPr>
-          <p:cNvPr id="5" name="Text 2"/>
-          <p:cNvSpPr/>
-          <p:nvPr/>
-        </p:nvSpPr>
-        <p:spPr>
-          <a:xfrm>
-            <a:off x="5349240" y="1783080"/>
-            <a:ext cx="6522415" cy="4663440"/>
-          </a:xfrm>
-          <a:prstGeom prst="rect">
-            <a:avLst/>
-          </a:prstGeom>
-          <a:noFill/>
-          <a:ln/>
-        </p:spPr>
-        <p:txBody>
-          <a:bodyPr wrap="square" lIns="0" tIns="0" rIns="0" bIns="0" rtlCol="0" anchor="t"/>
-          <a:lstStyle/>
-          <a:p>
-            <a:pPr algn="l" indent="0" marL="0">
-              <a:spcAft>
-                <a:spcPts val="800"/>
-              </a:spcAft>
-              <a:buNone/>
-            </a:pPr>
-            <a:r>
-              <a:rPr lang="en-US" sz="4000" dirty="0">
-                <a:solidFill>
-                  <a:srgbClr val="111111"/>
-                </a:solidFill>
-                <a:latin typeface="Times New Roman" pitchFamily="34" charset="0"/>
-                <a:ea typeface="Times New Roman" pitchFamily="34" charset="-122"/>
-                <a:cs typeface="Times New Roman" pitchFamily="34" charset="-120"/>
-              </a:rPr>
-              <a:t>The north has surplus cattle and the south needs meat.</a:t>
-            </a:r>
-            <a:endParaRPr lang="en-US" sz="4000" dirty="0"/>
+              <a:t>Cotton harvest.</a:t>
+            </a:r>
+            <a:endParaRPr lang="en-US" sz="1800" dirty="0"/>
           </a:p>
         </p:txBody>
       </p:sp>
@@ -10357,54 +10822,15 @@
                 <a:ea typeface="Calibri" pitchFamily="34" charset="-122"/>
                 <a:cs typeface="Calibri" pitchFamily="34" charset="-120"/>
               </a:rPr>
-              <a:t>2. FACTORS: TRANSFERABILITY</a:t>
+              <a:t>2. COMPLEMENTARITY</a:t>
             </a:r>
             <a:endParaRPr lang="en-US" sz="1400" dirty="0"/>
-          </a:p>
-        </p:txBody>
-      </p:sp>
-      <p:sp>
-        <p:nvSpPr>
-          <p:cNvPr id="3" name="Text 1"/>
-          <p:cNvSpPr/>
-          <p:nvPr/>
-        </p:nvSpPr>
-        <p:spPr>
-          <a:xfrm>
-            <a:off x="457200" y="1005840"/>
-            <a:ext cx="11277295" cy="731520"/>
-          </a:xfrm>
-          <a:prstGeom prst="rect">
-            <a:avLst/>
-          </a:prstGeom>
-          <a:noFill/>
-          <a:ln/>
-        </p:spPr>
-        <p:txBody>
-          <a:bodyPr wrap="square" lIns="0" tIns="0" rIns="0" bIns="0" rtlCol="0" anchor="ctr"/>
-          <a:lstStyle/>
-          <a:p>
-            <a:pPr algn="ctr" indent="0" marL="0">
-              <a:buNone/>
-            </a:pPr>
-            <a:r>
-              <a:rPr lang="en-US" sz="3600" b="1" dirty="0">
-                <a:solidFill>
-                  <a:srgbClr val="990011"/>
-                </a:solidFill>
-                <a:latin typeface="Times New Roman" pitchFamily="34" charset="0"/>
-                <a:ea typeface="Times New Roman" pitchFamily="34" charset="-122"/>
-                <a:cs typeface="Times New Roman" pitchFamily="34" charset="-120"/>
-              </a:rPr>
-              <a:t>Activity 3</a:t>
-            </a:r>
-            <a:endParaRPr lang="en-US" sz="3600" dirty="0"/>
           </a:p>
         </p:txBody>
       </p:sp>
       <p:pic>
         <p:nvPicPr>
-          <p:cNvPr id="4" name="Image 0" descr="/home/claude/f4/img/v2/f2t_train.jpg">    </p:cNvPr>
+          <p:cNvPr id="3" name="Image 0" descr="/home/claude/f4/img/minesec_sheet.png">    </p:cNvPr>
           <p:cNvPicPr>
             <a:picLocks noChangeAspect="1"/>
           </p:cNvPicPr>
@@ -10418,8 +10844,8 @@
         </p:blipFill>
         <p:spPr>
           <a:xfrm>
-            <a:off x="2246610" y="1783080"/>
-            <a:ext cx="7698475" cy="4270248"/>
+            <a:off x="0" y="658368"/>
+            <a:ext cx="5120640" cy="5833872"/>
           </a:xfrm>
           <a:prstGeom prst="rect">
             <a:avLst/>
@@ -10428,14 +10854,14 @@
       </p:pic>
       <p:sp>
         <p:nvSpPr>
-          <p:cNvPr id="5" name="Text 2"/>
+          <p:cNvPr id="4" name="Text 1"/>
           <p:cNvSpPr/>
           <p:nvPr/>
         </p:nvSpPr>
         <p:spPr>
           <a:xfrm>
-            <a:off x="457200" y="6089904"/>
-            <a:ext cx="11277295" cy="347472"/>
+            <a:off x="5349240" y="1005840"/>
+            <a:ext cx="6522415" cy="731520"/>
           </a:xfrm>
           <a:prstGeom prst="rect">
             <a:avLst/>
@@ -10444,24 +10870,68 @@
           <a:ln/>
         </p:spPr>
         <p:txBody>
-          <a:bodyPr wrap="square" lIns="0" tIns="0" rIns="0" bIns="0" rtlCol="0" anchor="ctr"/>
+          <a:bodyPr wrap="square" lIns="0" tIns="0" rIns="0" bIns="0" rtlCol="0" anchor="ctr">
+            <a:normAutofit/>
+          </a:bodyPr>
           <a:lstStyle/>
           <a:p>
             <a:pPr algn="ctr" indent="0" marL="0">
               <a:buNone/>
             </a:pPr>
             <a:r>
-              <a:rPr lang="en-US" sz="1800" i="1" dirty="0">
-                <a:solidFill>
-                  <a:srgbClr val="555555"/>
+              <a:rPr lang="en-US" sz="3600" b="1" dirty="0">
+                <a:solidFill>
+                  <a:srgbClr val="990011"/>
                 </a:solidFill>
                 <a:latin typeface="Times New Roman" pitchFamily="34" charset="0"/>
                 <a:ea typeface="Times New Roman" pitchFamily="34" charset="-122"/>
                 <a:cs typeface="Times New Roman" pitchFamily="34" charset="-120"/>
               </a:rPr>
-              <a:t>A train.</a:t>
-            </a:r>
-            <a:endParaRPr lang="en-US" sz="1800" dirty="0"/>
+              <a:t>Activity 2: Question</a:t>
+            </a:r>
+            <a:endParaRPr lang="en-US" sz="3600" dirty="0"/>
+          </a:p>
+        </p:txBody>
+      </p:sp>
+      <p:sp>
+        <p:nvSpPr>
+          <p:cNvPr id="5" name="Text 2"/>
+          <p:cNvSpPr/>
+          <p:nvPr/>
+        </p:nvSpPr>
+        <p:spPr>
+          <a:xfrm>
+            <a:off x="5349240" y="1783080"/>
+            <a:ext cx="6522415" cy="4663440"/>
+          </a:xfrm>
+          <a:prstGeom prst="rect">
+            <a:avLst/>
+          </a:prstGeom>
+          <a:noFill/>
+          <a:ln/>
+        </p:spPr>
+        <p:txBody>
+          <a:bodyPr wrap="square" lIns="0" tIns="0" rIns="0" bIns="0" rtlCol="0" anchor="t"/>
+          <a:lstStyle/>
+          <a:p>
+            <a:pPr algn="l" indent="0" marL="0">
+              <a:spcAft>
+                <a:spcPts val="800"/>
+              </a:spcAft>
+              <a:buNone/>
+            </a:pPr>
+            <a:r>
+              <a:rPr lang="en-US" sz="4000" dirty="0">
+                <a:solidFill>
+                  <a:srgbClr val="111111"/>
+                </a:solidFill>
+                <a:latin typeface="Times New Roman" pitchFamily="34" charset="0"/>
+                <a:ea typeface="Times New Roman" pitchFamily="34" charset="-122"/>
+                <a:cs typeface="Times New Roman" pitchFamily="34" charset="-120"/>
+              </a:rPr>
+              <a:t>Why does cotton move from the North to factories in Douala?</a:t>
+            </a:r>
+            <a:endParaRPr lang="en-US" sz="4000" dirty="0"/>
           </a:p>
         </p:txBody>
       </p:sp>
@@ -10571,7 +11041,7 @@
                 <a:ea typeface="Calibri" pitchFamily="34" charset="-122"/>
                 <a:cs typeface="Calibri" pitchFamily="34" charset="-120"/>
               </a:rPr>
-              <a:t>2. FACTORS: TRANSFERABILITY</a:t>
+              <a:t>2. COMPLEMENTARITY</a:t>
             </a:r>
             <a:endParaRPr lang="en-US" sz="1400" dirty="0"/>
           </a:p>
@@ -10636,7 +11106,7 @@
                 <a:ea typeface="Times New Roman" pitchFamily="34" charset="-122"/>
                 <a:cs typeface="Times New Roman" pitchFamily="34" charset="-120"/>
               </a:rPr>
-              <a:t>Activity 3: Question</a:t>
+              <a:t>Activity 2: Answer</a:t>
             </a:r>
             <a:endParaRPr lang="en-US" sz="3600" dirty="0"/>
           </a:p>
@@ -10678,7 +11148,7 @@
                 <a:ea typeface="Times New Roman" pitchFamily="34" charset="-122"/>
                 <a:cs typeface="Times New Roman" pitchFamily="34" charset="-120"/>
               </a:rPr>
-              <a:t>How does the railway increase interaction?</a:t>
+              <a:t>The North has a surplus of cotton and the factories need it.</a:t>
             </a:r>
             <a:endParaRPr lang="en-US" sz="4000" dirty="0"/>
           </a:p>
@@ -10790,15 +11260,54 @@
                 <a:ea typeface="Calibri" pitchFamily="34" charset="-122"/>
                 <a:cs typeface="Calibri" pitchFamily="34" charset="-120"/>
               </a:rPr>
-              <a:t>2. FACTORS: TRANSFERABILITY</a:t>
+              <a:t>2. TRANSFERABILITY</a:t>
             </a:r>
             <a:endParaRPr lang="en-US" sz="1400" dirty="0"/>
+          </a:p>
+        </p:txBody>
+      </p:sp>
+      <p:sp>
+        <p:nvSpPr>
+          <p:cNvPr id="3" name="Text 1"/>
+          <p:cNvSpPr/>
+          <p:nvPr/>
+        </p:nvSpPr>
+        <p:spPr>
+          <a:xfrm>
+            <a:off x="457200" y="1005840"/>
+            <a:ext cx="11277295" cy="731520"/>
+          </a:xfrm>
+          <a:prstGeom prst="rect">
+            <a:avLst/>
+          </a:prstGeom>
+          <a:noFill/>
+          <a:ln/>
+        </p:spPr>
+        <p:txBody>
+          <a:bodyPr wrap="square" lIns="0" tIns="0" rIns="0" bIns="0" rtlCol="0" anchor="ctr"/>
+          <a:lstStyle/>
+          <a:p>
+            <a:pPr algn="ctr" indent="0" marL="0">
+              <a:buNone/>
+            </a:pPr>
+            <a:r>
+              <a:rPr lang="en-US" sz="3600" b="1" dirty="0">
+                <a:solidFill>
+                  <a:srgbClr val="990011"/>
+                </a:solidFill>
+                <a:latin typeface="Times New Roman" pitchFamily="34" charset="0"/>
+                <a:ea typeface="Times New Roman" pitchFamily="34" charset="-122"/>
+                <a:cs typeface="Times New Roman" pitchFamily="34" charset="-120"/>
+              </a:rPr>
+              <a:t>Activity 3</a:t>
+            </a:r>
+            <a:endParaRPr lang="en-US" sz="3600" dirty="0"/>
           </a:p>
         </p:txBody>
       </p:sp>
       <p:pic>
         <p:nvPicPr>
-          <p:cNvPr id="3" name="Image 0" descr="/home/claude/f4/img/minesec_sheet.png">    </p:cNvPr>
+          <p:cNvPr id="4" name="Image 0" descr="/home/claude/f4/img/v2/usa_truck.jpg">    </p:cNvPr>
           <p:cNvPicPr>
             <a:picLocks noChangeAspect="1"/>
           </p:cNvPicPr>
@@ -10812,8 +11321,8 @@
         </p:blipFill>
         <p:spPr>
           <a:xfrm>
-            <a:off x="0" y="658368"/>
-            <a:ext cx="5120640" cy="5833872"/>
+            <a:off x="2246610" y="1783080"/>
+            <a:ext cx="7698475" cy="4270248"/>
           </a:xfrm>
           <a:prstGeom prst="rect">
             <a:avLst/>
@@ -10822,14 +11331,14 @@
       </p:pic>
       <p:sp>
         <p:nvSpPr>
-          <p:cNvPr id="4" name="Text 1"/>
+          <p:cNvPr id="5" name="Text 2"/>
           <p:cNvSpPr/>
           <p:nvPr/>
         </p:nvSpPr>
         <p:spPr>
           <a:xfrm>
-            <a:off x="5349240" y="1005840"/>
-            <a:ext cx="6522415" cy="731520"/>
+            <a:off x="457200" y="6089904"/>
+            <a:ext cx="11277295" cy="347472"/>
           </a:xfrm>
           <a:prstGeom prst="rect">
             <a:avLst/>
@@ -10838,68 +11347,24 @@
           <a:ln/>
         </p:spPr>
         <p:txBody>
-          <a:bodyPr wrap="square" lIns="0" tIns="0" rIns="0" bIns="0" rtlCol="0" anchor="ctr">
-            <a:normAutofit/>
-          </a:bodyPr>
+          <a:bodyPr wrap="square" lIns="0" tIns="0" rIns="0" bIns="0" rtlCol="0" anchor="ctr"/>
           <a:lstStyle/>
           <a:p>
             <a:pPr algn="ctr" indent="0" marL="0">
               <a:buNone/>
             </a:pPr>
             <a:r>
-              <a:rPr lang="en-US" sz="3600" b="1" dirty="0">
-                <a:solidFill>
-                  <a:srgbClr val="990011"/>
+              <a:rPr lang="en-US" sz="1800" i="1" dirty="0">
+                <a:solidFill>
+                  <a:srgbClr val="555555"/>
                 </a:solidFill>
                 <a:latin typeface="Times New Roman" pitchFamily="34" charset="0"/>
                 <a:ea typeface="Times New Roman" pitchFamily="34" charset="-122"/>
                 <a:cs typeface="Times New Roman" pitchFamily="34" charset="-120"/>
               </a:rPr>
-              <a:t>Activity 3: Answer</a:t>
-            </a:r>
-            <a:endParaRPr lang="en-US" sz="3600" dirty="0"/>
-          </a:p>
-        </p:txBody>
-      </p:sp>
-      <p:sp>
-        <p:nvSpPr>
-          <p:cNvPr id="5" name="Text 2"/>
-          <p:cNvSpPr/>
-          <p:nvPr/>
-        </p:nvSpPr>
-        <p:spPr>
-          <a:xfrm>
-            <a:off x="5349240" y="1783080"/>
-            <a:ext cx="6522415" cy="4663440"/>
-          </a:xfrm>
-          <a:prstGeom prst="rect">
-            <a:avLst/>
-          </a:prstGeom>
-          <a:noFill/>
-          <a:ln/>
-        </p:spPr>
-        <p:txBody>
-          <a:bodyPr wrap="square" lIns="0" tIns="0" rIns="0" bIns="0" rtlCol="0" anchor="t"/>
-          <a:lstStyle/>
-          <a:p>
-            <a:pPr algn="l" indent="0" marL="0">
-              <a:spcAft>
-                <a:spcPts val="800"/>
-              </a:spcAft>
-              <a:buNone/>
-            </a:pPr>
-            <a:r>
-              <a:rPr lang="en-US" sz="4000" dirty="0">
-                <a:solidFill>
-                  <a:srgbClr val="111111"/>
-                </a:solidFill>
-                <a:latin typeface="Times New Roman" pitchFamily="34" charset="0"/>
-                <a:ea typeface="Times New Roman" pitchFamily="34" charset="-122"/>
-                <a:cs typeface="Times New Roman" pitchFamily="34" charset="-120"/>
-              </a:rPr>
-              <a:t>It lowers the cost and time of moving people and goods.</a:t>
-            </a:r>
-            <a:endParaRPr lang="en-US" sz="4000" dirty="0"/>
+              <a:t>A lorry on the road.</a:t>
+            </a:r>
+            <a:endParaRPr lang="en-US" sz="1800" dirty="0"/>
           </a:p>
         </p:txBody>
       </p:sp>
@@ -11009,54 +11474,15 @@
                 <a:ea typeface="Calibri" pitchFamily="34" charset="-122"/>
                 <a:cs typeface="Calibri" pitchFamily="34" charset="-120"/>
               </a:rPr>
-              <a:t>2. FACTORS: INFORMATION</a:t>
+              <a:t>2. TRANSFERABILITY</a:t>
             </a:r>
             <a:endParaRPr lang="en-US" sz="1400" dirty="0"/>
-          </a:p>
-        </p:txBody>
-      </p:sp>
-      <p:sp>
-        <p:nvSpPr>
-          <p:cNvPr id="3" name="Text 1"/>
-          <p:cNvSpPr/>
-          <p:nvPr/>
-        </p:nvSpPr>
-        <p:spPr>
-          <a:xfrm>
-            <a:off x="457200" y="1005840"/>
-            <a:ext cx="11277295" cy="731520"/>
-          </a:xfrm>
-          <a:prstGeom prst="rect">
-            <a:avLst/>
-          </a:prstGeom>
-          <a:noFill/>
-          <a:ln/>
-        </p:spPr>
-        <p:txBody>
-          <a:bodyPr wrap="square" lIns="0" tIns="0" rIns="0" bIns="0" rtlCol="0" anchor="ctr"/>
-          <a:lstStyle/>
-          <a:p>
-            <a:pPr algn="ctr" indent="0" marL="0">
-              <a:buNone/>
-            </a:pPr>
-            <a:r>
-              <a:rPr lang="en-US" sz="3600" b="1" dirty="0">
-                <a:solidFill>
-                  <a:srgbClr val="990011"/>
-                </a:solidFill>
-                <a:latin typeface="Times New Roman" pitchFamily="34" charset="0"/>
-                <a:ea typeface="Times New Roman" pitchFamily="34" charset="-122"/>
-                <a:cs typeface="Times New Roman" pitchFamily="34" charset="-120"/>
-              </a:rPr>
-              <a:t>Activity 4</a:t>
-            </a:r>
-            <a:endParaRPr lang="en-US" sz="3600" dirty="0"/>
           </a:p>
         </p:txBody>
       </p:sp>
       <p:pic>
         <p:nvPicPr>
-          <p:cNvPr id="4" name="Image 0" descr="/home/claude/f4/img/v2/f2t_phone_farmer.jpg">    </p:cNvPr>
+          <p:cNvPr id="3" name="Image 0" descr="/home/claude/f4/img/minesec_sheet.png">    </p:cNvPr>
           <p:cNvPicPr>
             <a:picLocks noChangeAspect="1"/>
           </p:cNvPicPr>
@@ -11070,8 +11496,8 @@
         </p:blipFill>
         <p:spPr>
           <a:xfrm>
-            <a:off x="2250369" y="1783080"/>
-            <a:ext cx="7690957" cy="4270248"/>
+            <a:off x="0" y="658368"/>
+            <a:ext cx="5120640" cy="5833872"/>
           </a:xfrm>
           <a:prstGeom prst="rect">
             <a:avLst/>
@@ -11080,14 +11506,14 @@
       </p:pic>
       <p:sp>
         <p:nvSpPr>
-          <p:cNvPr id="5" name="Text 2"/>
+          <p:cNvPr id="4" name="Text 1"/>
           <p:cNvSpPr/>
           <p:nvPr/>
         </p:nvSpPr>
         <p:spPr>
           <a:xfrm>
-            <a:off x="457200" y="6089904"/>
-            <a:ext cx="11277295" cy="347472"/>
+            <a:off x="5349240" y="1005840"/>
+            <a:ext cx="6522415" cy="731520"/>
           </a:xfrm>
           <a:prstGeom prst="rect">
             <a:avLst/>
@@ -11096,24 +11522,68 @@
           <a:ln/>
         </p:spPr>
         <p:txBody>
-          <a:bodyPr wrap="square" lIns="0" tIns="0" rIns="0" bIns="0" rtlCol="0" anchor="ctr"/>
+          <a:bodyPr wrap="square" lIns="0" tIns="0" rIns="0" bIns="0" rtlCol="0" anchor="ctr">
+            <a:normAutofit/>
+          </a:bodyPr>
           <a:lstStyle/>
           <a:p>
             <a:pPr algn="ctr" indent="0" marL="0">
               <a:buNone/>
             </a:pPr>
             <a:r>
-              <a:rPr lang="en-US" sz="1800" i="1" dirty="0">
-                <a:solidFill>
-                  <a:srgbClr val="555555"/>
+              <a:rPr lang="en-US" sz="3600" b="1" dirty="0">
+                <a:solidFill>
+                  <a:srgbClr val="990011"/>
                 </a:solidFill>
                 <a:latin typeface="Times New Roman" pitchFamily="34" charset="0"/>
                 <a:ea typeface="Times New Roman" pitchFamily="34" charset="-122"/>
                 <a:cs typeface="Times New Roman" pitchFamily="34" charset="-120"/>
               </a:rPr>
-              <a:t>A farmer using a mobile phone.</a:t>
-            </a:r>
-            <a:endParaRPr lang="en-US" sz="1800" dirty="0"/>
+              <a:t>Activity 3: Question</a:t>
+            </a:r>
+            <a:endParaRPr lang="en-US" sz="3600" dirty="0"/>
+          </a:p>
+        </p:txBody>
+      </p:sp>
+      <p:sp>
+        <p:nvSpPr>
+          <p:cNvPr id="5" name="Text 2"/>
+          <p:cNvSpPr/>
+          <p:nvPr/>
+        </p:nvSpPr>
+        <p:spPr>
+          <a:xfrm>
+            <a:off x="5349240" y="1783080"/>
+            <a:ext cx="6522415" cy="4663440"/>
+          </a:xfrm>
+          <a:prstGeom prst="rect">
+            <a:avLst/>
+          </a:prstGeom>
+          <a:noFill/>
+          <a:ln/>
+        </p:spPr>
+        <p:txBody>
+          <a:bodyPr wrap="square" lIns="0" tIns="0" rIns="0" bIns="0" rtlCol="0" anchor="t"/>
+          <a:lstStyle/>
+          <a:p>
+            <a:pPr algn="l" indent="0" marL="0">
+              <a:spcAft>
+                <a:spcPts val="800"/>
+              </a:spcAft>
+              <a:buNone/>
+            </a:pPr>
+            <a:r>
+              <a:rPr lang="en-US" sz="4000" dirty="0">
+                <a:solidFill>
+                  <a:srgbClr val="111111"/>
+                </a:solidFill>
+                <a:latin typeface="Times New Roman" pitchFamily="34" charset="0"/>
+                <a:ea typeface="Times New Roman" pitchFamily="34" charset="-122"/>
+                <a:cs typeface="Times New Roman" pitchFamily="34" charset="-120"/>
+              </a:rPr>
+              <a:t>Why are onions sent from Garoua to Maroua by road and not by air?</a:t>
+            </a:r>
+            <a:endParaRPr lang="en-US" sz="4000" dirty="0"/>
           </a:p>
         </p:txBody>
       </p:sp>
@@ -11223,7 +11693,7 @@
                 <a:ea typeface="Calibri" pitchFamily="34" charset="-122"/>
                 <a:cs typeface="Calibri" pitchFamily="34" charset="-120"/>
               </a:rPr>
-              <a:t>2. FACTORS: INFORMATION</a:t>
+              <a:t>2. TRANSFERABILITY</a:t>
             </a:r>
             <a:endParaRPr lang="en-US" sz="1400" dirty="0"/>
           </a:p>
@@ -11288,7 +11758,7 @@
                 <a:ea typeface="Times New Roman" pitchFamily="34" charset="-122"/>
                 <a:cs typeface="Times New Roman" pitchFamily="34" charset="-120"/>
               </a:rPr>
-              <a:t>Activity 4: Question</a:t>
+              <a:t>Activity 3: Answer</a:t>
             </a:r>
             <a:endParaRPr lang="en-US" sz="3600" dirty="0"/>
           </a:p>
@@ -11330,7 +11800,7 @@
                 <a:ea typeface="Times New Roman" pitchFamily="34" charset="-122"/>
                 <a:cs typeface="Times New Roman" pitchFamily="34" charset="-120"/>
               </a:rPr>
-              <a:t>How do phones change spatial interaction?</a:t>
+              <a:t>Road transport is cheaper for heavy, low-value goods.</a:t>
             </a:r>
             <a:endParaRPr lang="en-US" sz="4000" dirty="0"/>
           </a:p>
@@ -12013,7 +12483,7 @@
                           <a:ea typeface="Calibri" pitchFamily="34" charset="-122"/>
                           <a:cs typeface="Calibri" pitchFamily="34" charset="-120"/>
                         </a:rPr>
-                        <a:t>Spatial interaction, complementarity, transferability, intervening opportunity, friction of distance.</a:t>
+                        <a:t>Spatial interaction, network, complementarity, transferability, intervening opportunity, distance decay, Ullman.</a:t>
                       </a:r>
                       <a:endParaRPr lang="en-US" sz="1700" dirty="0">
                         <a:latin typeface="Calibri" charset="0"/>
@@ -12151,7 +12621,7 @@
                           <a:ea typeface="Calibri" pitchFamily="34" charset="-122"/>
                           <a:cs typeface="Calibri" pitchFamily="34" charset="-120"/>
                         </a:rPr>
-                        <a:t>Meaning and factors of spatial interaction.</a:t>
+                        <a:t>Meaning of spatial interaction (tangible and intangible flows, networks, measurement); Ullman's factors: complementarity, transferability, intervening opportunity, distance decay.</a:t>
                       </a:r>
                       <a:endParaRPr lang="en-US" sz="1700" dirty="0">
                         <a:latin typeface="Calibri" charset="0"/>
@@ -12289,7 +12759,7 @@
                           <a:ea typeface="Calibri" pitchFamily="34" charset="-122"/>
                           <a:cs typeface="Calibri" pitchFamily="34" charset="-120"/>
                         </a:rPr>
-                        <a:t>Learners are able to explain why places interact through flows of people, goods and information.</a:t>
+                        <a:t>Learners are able to explain the flows of people, goods and information between places using the factors of spatial interaction.</a:t>
                       </a:r>
                       <a:endParaRPr lang="en-US" sz="1700" dirty="0">
                         <a:latin typeface="Calibri" charset="0"/>
@@ -12451,15 +12921,54 @@
                 <a:ea typeface="Calibri" pitchFamily="34" charset="-122"/>
                 <a:cs typeface="Calibri" pitchFamily="34" charset="-120"/>
               </a:rPr>
-              <a:t>2. FACTORS: INFORMATION</a:t>
+              <a:t>3. INTERVENING OPPORTUNITY</a:t>
             </a:r>
             <a:endParaRPr lang="en-US" sz="1400" dirty="0"/>
+          </a:p>
+        </p:txBody>
+      </p:sp>
+      <p:sp>
+        <p:nvSpPr>
+          <p:cNvPr id="3" name="Text 1"/>
+          <p:cNvSpPr/>
+          <p:nvPr/>
+        </p:nvSpPr>
+        <p:spPr>
+          <a:xfrm>
+            <a:off x="457200" y="1005840"/>
+            <a:ext cx="11277295" cy="731520"/>
+          </a:xfrm>
+          <a:prstGeom prst="rect">
+            <a:avLst/>
+          </a:prstGeom>
+          <a:noFill/>
+          <a:ln/>
+        </p:spPr>
+        <p:txBody>
+          <a:bodyPr wrap="square" lIns="0" tIns="0" rIns="0" bIns="0" rtlCol="0" anchor="ctr"/>
+          <a:lstStyle/>
+          <a:p>
+            <a:pPr algn="ctr" indent="0" marL="0">
+              <a:buNone/>
+            </a:pPr>
+            <a:r>
+              <a:rPr lang="en-US" sz="3600" b="1" dirty="0">
+                <a:solidFill>
+                  <a:srgbClr val="990011"/>
+                </a:solidFill>
+                <a:latin typeface="Times New Roman" pitchFamily="34" charset="0"/>
+                <a:ea typeface="Times New Roman" pitchFamily="34" charset="-122"/>
+                <a:cs typeface="Times New Roman" pitchFamily="34" charset="-120"/>
+              </a:rPr>
+              <a:t>Activity 4</a:t>
+            </a:r>
+            <a:endParaRPr lang="en-US" sz="3600" dirty="0"/>
           </a:p>
         </p:txBody>
       </p:sp>
       <p:pic>
         <p:nvPicPr>
-          <p:cNvPr id="3" name="Image 0" descr="/home/claude/f4/img/minesec_sheet.png">    </p:cNvPr>
+          <p:cNvPr id="4" name="Image 0" descr="/home/claude/f4/img/v2/stouffer_big.png">    </p:cNvPr>
           <p:cNvPicPr>
             <a:picLocks noChangeAspect="1"/>
           </p:cNvPicPr>
@@ -12473,8 +12982,8 @@
         </p:blipFill>
         <p:spPr>
           <a:xfrm>
-            <a:off x="0" y="658368"/>
-            <a:ext cx="5120640" cy="5833872"/>
+            <a:off x="629930" y="1783080"/>
+            <a:ext cx="10931835" cy="4270248"/>
           </a:xfrm>
           <a:prstGeom prst="rect">
             <a:avLst/>
@@ -12483,14 +12992,14 @@
       </p:pic>
       <p:sp>
         <p:nvSpPr>
-          <p:cNvPr id="4" name="Text 1"/>
+          <p:cNvPr id="5" name="Text 2"/>
           <p:cNvSpPr/>
           <p:nvPr/>
         </p:nvSpPr>
         <p:spPr>
           <a:xfrm>
-            <a:off x="5349240" y="1005840"/>
-            <a:ext cx="6522415" cy="731520"/>
+            <a:off x="457200" y="6089904"/>
+            <a:ext cx="11277295" cy="347472"/>
           </a:xfrm>
           <a:prstGeom prst="rect">
             <a:avLst/>
@@ -12499,68 +13008,24 @@
           <a:ln/>
         </p:spPr>
         <p:txBody>
-          <a:bodyPr wrap="square" lIns="0" tIns="0" rIns="0" bIns="0" rtlCol="0" anchor="ctr">
-            <a:normAutofit/>
-          </a:bodyPr>
+          <a:bodyPr wrap="square" lIns="0" tIns="0" rIns="0" bIns="0" rtlCol="0" anchor="ctr"/>
           <a:lstStyle/>
           <a:p>
             <a:pPr algn="ctr" indent="0" marL="0">
               <a:buNone/>
             </a:pPr>
             <a:r>
-              <a:rPr lang="en-US" sz="3600" b="1" dirty="0">
-                <a:solidFill>
-                  <a:srgbClr val="990011"/>
+              <a:rPr lang="en-US" sz="1800" i="1" dirty="0">
+                <a:solidFill>
+                  <a:srgbClr val="555555"/>
                 </a:solidFill>
                 <a:latin typeface="Times New Roman" pitchFamily="34" charset="0"/>
                 <a:ea typeface="Times New Roman" pitchFamily="34" charset="-122"/>
                 <a:cs typeface="Times New Roman" pitchFamily="34" charset="-120"/>
               </a:rPr>
-              <a:t>Activity 4: Answer</a:t>
-            </a:r>
-            <a:endParaRPr lang="en-US" sz="3600" dirty="0"/>
-          </a:p>
-        </p:txBody>
-      </p:sp>
-      <p:sp>
-        <p:nvSpPr>
-          <p:cNvPr id="5" name="Text 2"/>
-          <p:cNvSpPr/>
-          <p:nvPr/>
-        </p:nvSpPr>
-        <p:spPr>
-          <a:xfrm>
-            <a:off x="5349240" y="1783080"/>
-            <a:ext cx="6522415" cy="4663440"/>
-          </a:xfrm>
-          <a:prstGeom prst="rect">
-            <a:avLst/>
-          </a:prstGeom>
-          <a:noFill/>
-          <a:ln/>
-        </p:spPr>
-        <p:txBody>
-          <a:bodyPr wrap="square" lIns="0" tIns="0" rIns="0" bIns="0" rtlCol="0" anchor="t"/>
-          <a:lstStyle/>
-          <a:p>
-            <a:pPr algn="l" indent="0" marL="0">
-              <a:spcAft>
-                <a:spcPts val="800"/>
-              </a:spcAft>
-              <a:buNone/>
-            </a:pPr>
-            <a:r>
-              <a:rPr lang="en-US" sz="4000" dirty="0">
-                <a:solidFill>
-                  <a:srgbClr val="111111"/>
-                </a:solidFill>
-                <a:latin typeface="Times New Roman" pitchFamily="34" charset="0"/>
-                <a:ea typeface="Times New Roman" pitchFamily="34" charset="-122"/>
-                <a:cs typeface="Times New Roman" pitchFamily="34" charset="-120"/>
-              </a:rPr>
-              <a:t>They move information instantly and help trade.</a:t>
-            </a:r>
-            <a:endParaRPr lang="en-US" sz="4000" dirty="0"/>
+              <a:t>A nearer opportunity.</a:t>
+            </a:r>
+            <a:endParaRPr lang="en-US" sz="1800" dirty="0"/>
           </a:p>
         </p:txBody>
       </p:sp>
@@ -12670,54 +13135,15 @@
                 <a:ea typeface="Calibri" pitchFamily="34" charset="-122"/>
                 <a:cs typeface="Calibri" pitchFamily="34" charset="-120"/>
               </a:rPr>
-              <a:t>2. OTHER FACTORS</a:t>
+              <a:t>3. INTERVENING OPPORTUNITY</a:t>
             </a:r>
             <a:endParaRPr lang="en-US" sz="1400" dirty="0"/>
-          </a:p>
-        </p:txBody>
-      </p:sp>
-      <p:sp>
-        <p:nvSpPr>
-          <p:cNvPr id="3" name="Text 1"/>
-          <p:cNvSpPr/>
-          <p:nvPr/>
-        </p:nvSpPr>
-        <p:spPr>
-          <a:xfrm>
-            <a:off x="457200" y="1005840"/>
-            <a:ext cx="11277295" cy="731520"/>
-          </a:xfrm>
-          <a:prstGeom prst="rect">
-            <a:avLst/>
-          </a:prstGeom>
-          <a:noFill/>
-          <a:ln/>
-        </p:spPr>
-        <p:txBody>
-          <a:bodyPr wrap="square" lIns="0" tIns="0" rIns="0" bIns="0" rtlCol="0" anchor="ctr"/>
-          <a:lstStyle/>
-          <a:p>
-            <a:pPr algn="ctr" indent="0" marL="0">
-              <a:buNone/>
-            </a:pPr>
-            <a:r>
-              <a:rPr lang="en-US" sz="3600" b="1" dirty="0">
-                <a:solidFill>
-                  <a:srgbClr val="990011"/>
-                </a:solidFill>
-                <a:latin typeface="Times New Roman" pitchFamily="34" charset="0"/>
-                <a:ea typeface="Times New Roman" pitchFamily="34" charset="-122"/>
-                <a:cs typeface="Times New Roman" pitchFamily="34" charset="-120"/>
-              </a:rPr>
-              <a:t>Activity 5</a:t>
-            </a:r>
-            <a:endParaRPr lang="en-US" sz="3600" dirty="0"/>
           </a:p>
         </p:txBody>
       </p:sp>
       <p:pic>
         <p:nvPicPr>
-          <p:cNvPr id="4" name="Image 0" descr="/home/claude/f4/img/v2/f2t_moto_taxi.jpg">    </p:cNvPr>
+          <p:cNvPr id="3" name="Image 0" descr="/home/claude/f4/img/minesec_sheet.png">    </p:cNvPr>
           <p:cNvPicPr>
             <a:picLocks noChangeAspect="1"/>
           </p:cNvPicPr>
@@ -12731,8 +13157,8 @@
         </p:blipFill>
         <p:spPr>
           <a:xfrm>
-            <a:off x="2246610" y="1783080"/>
-            <a:ext cx="7698475" cy="4270248"/>
+            <a:off x="0" y="658368"/>
+            <a:ext cx="5120640" cy="5833872"/>
           </a:xfrm>
           <a:prstGeom prst="rect">
             <a:avLst/>
@@ -12741,14 +13167,14 @@
       </p:pic>
       <p:sp>
         <p:nvSpPr>
-          <p:cNvPr id="5" name="Text 2"/>
+          <p:cNvPr id="4" name="Text 1"/>
           <p:cNvSpPr/>
           <p:nvPr/>
         </p:nvSpPr>
         <p:spPr>
           <a:xfrm>
-            <a:off x="457200" y="6089904"/>
-            <a:ext cx="11277295" cy="347472"/>
+            <a:off x="5349240" y="1005840"/>
+            <a:ext cx="6522415" cy="731520"/>
           </a:xfrm>
           <a:prstGeom prst="rect">
             <a:avLst/>
@@ -12757,24 +13183,68 @@
           <a:ln/>
         </p:spPr>
         <p:txBody>
-          <a:bodyPr wrap="square" lIns="0" tIns="0" rIns="0" bIns="0" rtlCol="0" anchor="ctr"/>
+          <a:bodyPr wrap="square" lIns="0" tIns="0" rIns="0" bIns="0" rtlCol="0" anchor="ctr">
+            <a:normAutofit/>
+          </a:bodyPr>
           <a:lstStyle/>
           <a:p>
             <a:pPr algn="ctr" indent="0" marL="0">
               <a:buNone/>
             </a:pPr>
             <a:r>
-              <a:rPr lang="en-US" sz="1800" i="1" dirty="0">
-                <a:solidFill>
-                  <a:srgbClr val="555555"/>
+              <a:rPr lang="en-US" sz="3600" b="1" dirty="0">
+                <a:solidFill>
+                  <a:srgbClr val="990011"/>
                 </a:solidFill>
                 <a:latin typeface="Times New Roman" pitchFamily="34" charset="0"/>
                 <a:ea typeface="Times New Roman" pitchFamily="34" charset="-122"/>
                 <a:cs typeface="Times New Roman" pitchFamily="34" charset="-120"/>
               </a:rPr>
-              <a:t>Motorbike taxis.</a:t>
-            </a:r>
-            <a:endParaRPr lang="en-US" sz="1800" dirty="0"/>
+              <a:t>Activity 4: Question</a:t>
+            </a:r>
+            <a:endParaRPr lang="en-US" sz="3600" dirty="0"/>
+          </a:p>
+        </p:txBody>
+      </p:sp>
+      <p:sp>
+        <p:nvSpPr>
+          <p:cNvPr id="5" name="Text 2"/>
+          <p:cNvSpPr/>
+          <p:nvPr/>
+        </p:nvSpPr>
+        <p:spPr>
+          <a:xfrm>
+            <a:off x="5349240" y="1783080"/>
+            <a:ext cx="6522415" cy="4663440"/>
+          </a:xfrm>
+          <a:prstGeom prst="rect">
+            <a:avLst/>
+          </a:prstGeom>
+          <a:noFill/>
+          <a:ln/>
+        </p:spPr>
+        <p:txBody>
+          <a:bodyPr wrap="square" lIns="0" tIns="0" rIns="0" bIns="0" rtlCol="0" anchor="t"/>
+          <a:lstStyle/>
+          <a:p>
+            <a:pPr algn="l" indent="0" marL="0">
+              <a:spcAft>
+                <a:spcPts val="800"/>
+              </a:spcAft>
+              <a:buNone/>
+            </a:pPr>
+            <a:r>
+              <a:rPr lang="en-US" sz="4000" dirty="0">
+                <a:solidFill>
+                  <a:srgbClr val="111111"/>
+                </a:solidFill>
+                <a:latin typeface="Times New Roman" pitchFamily="34" charset="0"/>
+                <a:ea typeface="Times New Roman" pitchFamily="34" charset="-122"/>
+                <a:cs typeface="Times New Roman" pitchFamily="34" charset="-120"/>
+              </a:rPr>
+              <a:t>How can a new university in Ngaoundéré change the flow of students to Yaoundé?</a:t>
+            </a:r>
+            <a:endParaRPr lang="en-US" sz="4000" dirty="0"/>
           </a:p>
         </p:txBody>
       </p:sp>
@@ -12884,7 +13354,7 @@
                 <a:ea typeface="Calibri" pitchFamily="34" charset="-122"/>
                 <a:cs typeface="Calibri" pitchFamily="34" charset="-120"/>
               </a:rPr>
-              <a:t>2. OTHER FACTORS</a:t>
+              <a:t>3. INTERVENING OPPORTUNITY</a:t>
             </a:r>
             <a:endParaRPr lang="en-US" sz="1400" dirty="0"/>
           </a:p>
@@ -12949,7 +13419,7 @@
                 <a:ea typeface="Times New Roman" pitchFamily="34" charset="-122"/>
                 <a:cs typeface="Times New Roman" pitchFamily="34" charset="-120"/>
               </a:rPr>
-              <a:t>Activity 5: Question</a:t>
+              <a:t>Activity 4: Answer</a:t>
             </a:r>
             <a:endParaRPr lang="en-US" sz="3600" dirty="0"/>
           </a:p>
@@ -12991,7 +13461,7 @@
                 <a:ea typeface="Times New Roman" pitchFamily="34" charset="-122"/>
                 <a:cs typeface="Times New Roman" pitchFamily="34" charset="-120"/>
               </a:rPr>
-              <a:t>Give two factors that reduce interaction.</a:t>
+              <a:t>It reduces it, because it is a nearer intervening opportunity.</a:t>
             </a:r>
             <a:endParaRPr lang="en-US" sz="4000" dirty="0"/>
           </a:p>
@@ -13103,15 +13573,54 @@
                 <a:ea typeface="Calibri" pitchFamily="34" charset="-122"/>
                 <a:cs typeface="Calibri" pitchFamily="34" charset="-120"/>
               </a:rPr>
-              <a:t>2. OTHER FACTORS</a:t>
+              <a:t>3. DISTANCE DECAY</a:t>
             </a:r>
             <a:endParaRPr lang="en-US" sz="1400" dirty="0"/>
+          </a:p>
+        </p:txBody>
+      </p:sp>
+      <p:sp>
+        <p:nvSpPr>
+          <p:cNvPr id="3" name="Text 1"/>
+          <p:cNvSpPr/>
+          <p:nvPr/>
+        </p:nvSpPr>
+        <p:spPr>
+          <a:xfrm>
+            <a:off x="457200" y="1005840"/>
+            <a:ext cx="11277295" cy="731520"/>
+          </a:xfrm>
+          <a:prstGeom prst="rect">
+            <a:avLst/>
+          </a:prstGeom>
+          <a:noFill/>
+          <a:ln/>
+        </p:spPr>
+        <p:txBody>
+          <a:bodyPr wrap="square" lIns="0" tIns="0" rIns="0" bIns="0" rtlCol="0" anchor="ctr"/>
+          <a:lstStyle/>
+          <a:p>
+            <a:pPr algn="ctr" indent="0" marL="0">
+              <a:buNone/>
+            </a:pPr>
+            <a:r>
+              <a:rPr lang="en-US" sz="3600" b="1" dirty="0">
+                <a:solidFill>
+                  <a:srgbClr val="990011"/>
+                </a:solidFill>
+                <a:latin typeface="Times New Roman" pitchFamily="34" charset="0"/>
+                <a:ea typeface="Times New Roman" pitchFamily="34" charset="-122"/>
+                <a:cs typeface="Times New Roman" pitchFamily="34" charset="-120"/>
+              </a:rPr>
+              <a:t>Activity 5</a:t>
+            </a:r>
+            <a:endParaRPr lang="en-US" sz="3600" dirty="0"/>
           </a:p>
         </p:txBody>
       </p:sp>
       <p:pic>
         <p:nvPicPr>
-          <p:cNvPr id="3" name="Image 0" descr="/home/claude/f4/img/minesec_sheet.png">    </p:cNvPr>
+          <p:cNvPr id="4" name="Image 0" descr="/home/claude/f4/img/v2/zipf_big.png">    </p:cNvPr>
           <p:cNvPicPr>
             <a:picLocks noChangeAspect="1"/>
           </p:cNvPicPr>
@@ -13125,8 +13634,8 @@
         </p:blipFill>
         <p:spPr>
           <a:xfrm>
-            <a:off x="0" y="658368"/>
-            <a:ext cx="5120640" cy="5833872"/>
+            <a:off x="1215564" y="1783080"/>
+            <a:ext cx="9760567" cy="4270248"/>
           </a:xfrm>
           <a:prstGeom prst="rect">
             <a:avLst/>
@@ -13135,14 +13644,14 @@
       </p:pic>
       <p:sp>
         <p:nvSpPr>
-          <p:cNvPr id="4" name="Text 1"/>
+          <p:cNvPr id="5" name="Text 2"/>
           <p:cNvSpPr/>
           <p:nvPr/>
         </p:nvSpPr>
         <p:spPr>
           <a:xfrm>
-            <a:off x="5349240" y="1005840"/>
-            <a:ext cx="6522415" cy="731520"/>
+            <a:off x="457200" y="6089904"/>
+            <a:ext cx="11277295" cy="347472"/>
           </a:xfrm>
           <a:prstGeom prst="rect">
             <a:avLst/>
@@ -13151,68 +13660,24 @@
           <a:ln/>
         </p:spPr>
         <p:txBody>
-          <a:bodyPr wrap="square" lIns="0" tIns="0" rIns="0" bIns="0" rtlCol="0" anchor="ctr">
-            <a:normAutofit/>
-          </a:bodyPr>
+          <a:bodyPr wrap="square" lIns="0" tIns="0" rIns="0" bIns="0" rtlCol="0" anchor="ctr"/>
           <a:lstStyle/>
           <a:p>
             <a:pPr algn="ctr" indent="0" marL="0">
               <a:buNone/>
             </a:pPr>
             <a:r>
-              <a:rPr lang="en-US" sz="3600" b="1" dirty="0">
-                <a:solidFill>
-                  <a:srgbClr val="990011"/>
+              <a:rPr lang="en-US" sz="1800" i="1" dirty="0">
+                <a:solidFill>
+                  <a:srgbClr val="555555"/>
                 </a:solidFill>
                 <a:latin typeface="Times New Roman" pitchFamily="34" charset="0"/>
                 <a:ea typeface="Times New Roman" pitchFamily="34" charset="-122"/>
                 <a:cs typeface="Times New Roman" pitchFamily="34" charset="-120"/>
               </a:rPr>
-              <a:t>Activity 5: Answer</a:t>
-            </a:r>
-            <a:endParaRPr lang="en-US" sz="3600" dirty="0"/>
-          </a:p>
-        </p:txBody>
-      </p:sp>
-      <p:sp>
-        <p:nvSpPr>
-          <p:cNvPr id="5" name="Text 2"/>
-          <p:cNvSpPr/>
-          <p:nvPr/>
-        </p:nvSpPr>
-        <p:spPr>
-          <a:xfrm>
-            <a:off x="5349240" y="1783080"/>
-            <a:ext cx="6522415" cy="4663440"/>
-          </a:xfrm>
-          <a:prstGeom prst="rect">
-            <a:avLst/>
-          </a:prstGeom>
-          <a:noFill/>
-          <a:ln/>
-        </p:spPr>
-        <p:txBody>
-          <a:bodyPr wrap="square" lIns="0" tIns="0" rIns="0" bIns="0" rtlCol="0" anchor="t"/>
-          <a:lstStyle/>
-          <a:p>
-            <a:pPr algn="l" indent="0" marL="0">
-              <a:spcAft>
-                <a:spcPts val="800"/>
-              </a:spcAft>
-              <a:buNone/>
-            </a:pPr>
-            <a:r>
-              <a:rPr lang="en-US" sz="4000" dirty="0">
-                <a:solidFill>
-                  <a:srgbClr val="111111"/>
-                </a:solidFill>
-                <a:latin typeface="Times New Roman" pitchFamily="34" charset="0"/>
-                <a:ea typeface="Times New Roman" pitchFamily="34" charset="-122"/>
-                <a:cs typeface="Times New Roman" pitchFamily="34" charset="-120"/>
-              </a:rPr>
-              <a:t>Long distance and poor roads (also borders, insecurity, cost).</a:t>
-            </a:r>
-            <a:endParaRPr lang="en-US" sz="4000" dirty="0"/>
+              <a:t>Interaction and distance.</a:t>
+            </a:r>
+            <a:endParaRPr lang="en-US" sz="1800" dirty="0"/>
           </a:p>
         </p:txBody>
       </p:sp>
@@ -13322,7 +13787,7 @@
                 <a:ea typeface="Calibri" pitchFamily="34" charset="-122"/>
                 <a:cs typeface="Calibri" pitchFamily="34" charset="-120"/>
               </a:rPr>
-              <a:t>BOARD SUMMARY</a:t>
+              <a:t>3. DISTANCE DECAY</a:t>
             </a:r>
             <a:endParaRPr lang="en-US" sz="1400" dirty="0"/>
           </a:p>
@@ -13387,7 +13852,7 @@
                 <a:ea typeface="Times New Roman" pitchFamily="34" charset="-122"/>
                 <a:cs typeface="Times New Roman" pitchFamily="34" charset="-120"/>
               </a:rPr>
-              <a:t>Board Summary</a:t>
+              <a:t>Activity 5: Question</a:t>
             </a:r>
             <a:endParaRPr lang="en-US" sz="3600" dirty="0"/>
           </a:p>
@@ -13421,7 +13886,7 @@
               <a:buNone/>
             </a:pPr>
             <a:r>
-              <a:rPr lang="en-US" sz="4000" b="1" dirty="0">
+              <a:rPr lang="en-US" sz="4000" dirty="0">
                 <a:solidFill>
                   <a:srgbClr val="111111"/>
                 </a:solidFill>
@@ -13429,47 +13894,7 @@
                 <a:ea typeface="Times New Roman" pitchFamily="34" charset="-122"/>
                 <a:cs typeface="Times New Roman" pitchFamily="34" charset="-120"/>
               </a:rPr>
-              <a:t>Topic: Population Change over Space (Migration)</a:t>
-            </a:r>
-            <a:endParaRPr lang="en-US" sz="4000" dirty="0"/>
-          </a:p>
-          <a:p>
-            <a:pPr algn="l" indent="0" marL="0">
-              <a:spcAft>
-                <a:spcPts val="800"/>
-              </a:spcAft>
-              <a:buNone/>
-            </a:pPr>
-            <a:r>
-              <a:rPr lang="en-US" sz="4000" b="1" dirty="0">
-                <a:solidFill>
-                  <a:srgbClr val="111111"/>
-                </a:solidFill>
-                <a:latin typeface="Times New Roman" pitchFamily="34" charset="0"/>
-                <a:ea typeface="Times New Roman" pitchFamily="34" charset="-122"/>
-                <a:cs typeface="Times New Roman" pitchFamily="34" charset="-120"/>
-              </a:rPr>
-              <a:t>Sub-topic: Migration Laws</a:t>
-            </a:r>
-            <a:endParaRPr lang="en-US" sz="4000" dirty="0"/>
-          </a:p>
-          <a:p>
-            <a:pPr algn="l" indent="0" marL="0">
-              <a:spcAft>
-                <a:spcPts val="800"/>
-              </a:spcAft>
-              <a:buNone/>
-            </a:pPr>
-            <a:r>
-              <a:rPr lang="en-US" sz="4000" b="1" dirty="0">
-                <a:solidFill>
-                  <a:srgbClr val="990011"/>
-                </a:solidFill>
-                <a:latin typeface="Times New Roman" pitchFamily="34" charset="0"/>
-                <a:ea typeface="Times New Roman" pitchFamily="34" charset="-122"/>
-                <a:cs typeface="Times New Roman" pitchFamily="34" charset="-120"/>
-              </a:rPr>
-              <a:t>Lesson 14: Spatial Interaction</a:t>
+              <a:t>Why do you visit a friend in your quarter more often than one in Kribi?</a:t>
             </a:r>
             <a:endParaRPr lang="en-US" sz="4000" dirty="0"/>
           </a:p>
@@ -13581,7 +14006,7 @@
                 <a:ea typeface="Calibri" pitchFamily="34" charset="-122"/>
                 <a:cs typeface="Calibri" pitchFamily="34" charset="-120"/>
               </a:rPr>
-              <a:t>BOARD SUMMARY</a:t>
+              <a:t>3. DISTANCE DECAY</a:t>
             </a:r>
             <a:endParaRPr lang="en-US" sz="1400" dirty="0"/>
           </a:p>
@@ -13604,7 +14029,7 @@
         <p:spPr>
           <a:xfrm>
             <a:off x="0" y="658368"/>
-            <a:ext cx="3840480" cy="5833872"/>
+            <a:ext cx="5120640" cy="5833872"/>
           </a:xfrm>
           <a:prstGeom prst="rect">
             <a:avLst/>
@@ -13619,8 +14044,8 @@
         </p:nvSpPr>
         <p:spPr>
           <a:xfrm>
-            <a:off x="4069080" y="1005840"/>
-            <a:ext cx="7802575" cy="731520"/>
+            <a:off x="5349240" y="1005840"/>
+            <a:ext cx="6522415" cy="731520"/>
           </a:xfrm>
           <a:prstGeom prst="rect">
             <a:avLst/>
@@ -13646,7 +14071,7 @@
                 <a:ea typeface="Times New Roman" pitchFamily="34" charset="-122"/>
                 <a:cs typeface="Times New Roman" pitchFamily="34" charset="-120"/>
               </a:rPr>
-              <a:t>1. Meaning of Spatial Interaction</a:t>
+              <a:t>Activity 5: Answer</a:t>
             </a:r>
             <a:endParaRPr lang="en-US" sz="3600" dirty="0"/>
           </a:p>
@@ -13660,8 +14085,8 @@
         </p:nvSpPr>
         <p:spPr>
           <a:xfrm>
-            <a:off x="4069080" y="1783080"/>
-            <a:ext cx="7802575" cy="4663440"/>
+            <a:off x="5349240" y="1783080"/>
+            <a:ext cx="6522415" cy="4663440"/>
           </a:xfrm>
           <a:prstGeom prst="rect">
             <a:avLst/>
@@ -13680,7 +14105,7 @@
               <a:buNone/>
             </a:pPr>
             <a:r>
-              <a:rPr lang="en-US" sz="4000" i="1" dirty="0">
+              <a:rPr lang="en-US" sz="4000" dirty="0">
                 <a:solidFill>
                   <a:srgbClr val="111111"/>
                 </a:solidFill>
@@ -13688,44 +14113,7 @@
                 <a:ea typeface="Times New Roman" pitchFamily="34" charset="-122"/>
                 <a:cs typeface="Times New Roman" pitchFamily="34" charset="-120"/>
               </a:rPr>
-              <a:t>Spatial interaction can be understood as follows:</a:t>
-            </a:r>
-            <a:endParaRPr lang="en-US" sz="4000" dirty="0"/>
-          </a:p>
-          <a:p>
-            <a:pPr algn="l" indent="0" marL="0">
-              <a:spcAft>
-                <a:spcPts val="800"/>
-              </a:spcAft>
-              <a:buNone/>
-            </a:pPr>
-            <a:r>
-              <a:rPr lang="en-US" sz="4000" b="1" dirty="0">
-                <a:solidFill>
-                  <a:srgbClr val="111111"/>
-                </a:solidFill>
-                <a:latin typeface="Times New Roman" pitchFamily="34" charset="0"/>
-                <a:ea typeface="Times New Roman" pitchFamily="34" charset="-122"/>
-                <a:cs typeface="Times New Roman" pitchFamily="34" charset="-120"/>
-              </a:rPr>
-              <a:t>Spatial interaction: </a:t>
-            </a:r>
-            <a:pPr algn="l" indent="0" marL="0">
-              <a:spcAft>
-                <a:spcPts val="800"/>
-              </a:spcAft>
-              <a:buNone/>
-            </a:pPr>
-            <a:r>
-              <a:rPr lang="en-US" sz="4000" dirty="0">
-                <a:solidFill>
-                  <a:srgbClr val="111111"/>
-                </a:solidFill>
-                <a:latin typeface="Times New Roman" pitchFamily="34" charset="0"/>
-                <a:ea typeface="Times New Roman" pitchFamily="34" charset="-122"/>
-                <a:cs typeface="Times New Roman" pitchFamily="34" charset="-120"/>
-              </a:rPr>
-              <a:t>It is the movement of people, goods, money and information between places. Examples are migration, trade, commuting and phone calls.</a:t>
+              <a:t>Distance increases time, effort and cost.</a:t>
             </a:r>
             <a:endParaRPr lang="en-US" sz="4000" dirty="0"/>
           </a:p>
@@ -13843,48 +14231,9 @@
           </a:p>
         </p:txBody>
       </p:sp>
-      <p:sp>
-        <p:nvSpPr>
-          <p:cNvPr id="3" name="Text 1"/>
-          <p:cNvSpPr/>
-          <p:nvPr/>
-        </p:nvSpPr>
-        <p:spPr>
-          <a:xfrm>
-            <a:off x="457200" y="1005840"/>
-            <a:ext cx="11277295" cy="731520"/>
-          </a:xfrm>
-          <a:prstGeom prst="rect">
-            <a:avLst/>
-          </a:prstGeom>
-          <a:noFill/>
-          <a:ln/>
-        </p:spPr>
-        <p:txBody>
-          <a:bodyPr wrap="square" lIns="0" tIns="0" rIns="0" bIns="0" rtlCol="0" anchor="ctr"/>
-          <a:lstStyle/>
-          <a:p>
-            <a:pPr algn="ctr" indent="0" marL="0">
-              <a:buNone/>
-            </a:pPr>
-            <a:r>
-              <a:rPr lang="en-US" sz="3600" b="1" dirty="0">
-                <a:solidFill>
-                  <a:srgbClr val="990011"/>
-                </a:solidFill>
-                <a:latin typeface="Times New Roman" pitchFamily="34" charset="0"/>
-                <a:ea typeface="Times New Roman" pitchFamily="34" charset="-122"/>
-                <a:cs typeface="Times New Roman" pitchFamily="34" charset="-120"/>
-              </a:rPr>
-              <a:t>1. Meaning of Spatial Interaction</a:t>
-            </a:r>
-            <a:endParaRPr lang="en-US" sz="3600" dirty="0"/>
-          </a:p>
-        </p:txBody>
-      </p:sp>
       <p:pic>
         <p:nvPicPr>
-          <p:cNvPr id="4" name="Image 0" descr="/home/claude/f4/img/v2/ullman_big.png">    </p:cNvPr>
+          <p:cNvPr id="3" name="Image 0" descr="/home/claude/f4/img/minesec_sheet.png">    </p:cNvPr>
           <p:cNvPicPr>
             <a:picLocks noChangeAspect="1"/>
           </p:cNvPicPr>
@@ -13898,8 +14247,8 @@
         </p:blipFill>
         <p:spPr>
           <a:xfrm>
-            <a:off x="629930" y="1783080"/>
-            <a:ext cx="10931835" cy="4270248"/>
+            <a:off x="0" y="658368"/>
+            <a:ext cx="5120640" cy="5833872"/>
           </a:xfrm>
           <a:prstGeom prst="rect">
             <a:avLst/>
@@ -13908,14 +14257,14 @@
       </p:pic>
       <p:sp>
         <p:nvSpPr>
-          <p:cNvPr id="5" name="Text 2"/>
+          <p:cNvPr id="4" name="Text 1"/>
           <p:cNvSpPr/>
           <p:nvPr/>
         </p:nvSpPr>
         <p:spPr>
           <a:xfrm>
-            <a:off x="457200" y="6089904"/>
-            <a:ext cx="11277295" cy="347472"/>
+            <a:off x="5349240" y="1005840"/>
+            <a:ext cx="6522415" cy="731520"/>
           </a:xfrm>
           <a:prstGeom prst="rect">
             <a:avLst/>
@@ -13924,24 +14273,108 @@
           <a:ln/>
         </p:spPr>
         <p:txBody>
-          <a:bodyPr wrap="square" lIns="0" tIns="0" rIns="0" bIns="0" rtlCol="0" anchor="ctr"/>
+          <a:bodyPr wrap="square" lIns="0" tIns="0" rIns="0" bIns="0" rtlCol="0" anchor="ctr">
+            <a:normAutofit/>
+          </a:bodyPr>
           <a:lstStyle/>
           <a:p>
             <a:pPr algn="ctr" indent="0" marL="0">
               <a:buNone/>
             </a:pPr>
             <a:r>
-              <a:rPr lang="en-US" sz="1800" i="1" dirty="0">
-                <a:solidFill>
-                  <a:srgbClr val="555555"/>
+              <a:rPr lang="en-US" sz="3600" b="1" dirty="0">
+                <a:solidFill>
+                  <a:srgbClr val="990011"/>
                 </a:solidFill>
                 <a:latin typeface="Times New Roman" pitchFamily="34" charset="0"/>
                 <a:ea typeface="Times New Roman" pitchFamily="34" charset="-122"/>
                 <a:cs typeface="Times New Roman" pitchFamily="34" charset="-120"/>
               </a:rPr>
-              <a:t>Illustration: Ullman's bases of interaction</a:t>
-            </a:r>
-            <a:endParaRPr lang="en-US" sz="1800" dirty="0"/>
+              <a:t>Board Summary</a:t>
+            </a:r>
+            <a:endParaRPr lang="en-US" sz="3600" dirty="0"/>
+          </a:p>
+        </p:txBody>
+      </p:sp>
+      <p:sp>
+        <p:nvSpPr>
+          <p:cNvPr id="5" name="Text 2"/>
+          <p:cNvSpPr/>
+          <p:nvPr/>
+        </p:nvSpPr>
+        <p:spPr>
+          <a:xfrm>
+            <a:off x="5349240" y="1783080"/>
+            <a:ext cx="6522415" cy="4663440"/>
+          </a:xfrm>
+          <a:prstGeom prst="rect">
+            <a:avLst/>
+          </a:prstGeom>
+          <a:noFill/>
+          <a:ln/>
+        </p:spPr>
+        <p:txBody>
+          <a:bodyPr wrap="square" lIns="0" tIns="0" rIns="0" bIns="0" rtlCol="0" anchor="t"/>
+          <a:lstStyle/>
+          <a:p>
+            <a:pPr algn="l" indent="0" marL="0">
+              <a:spcAft>
+                <a:spcPts val="800"/>
+              </a:spcAft>
+              <a:buNone/>
+            </a:pPr>
+            <a:r>
+              <a:rPr lang="en-US" sz="4000" b="1" dirty="0">
+                <a:solidFill>
+                  <a:srgbClr val="111111"/>
+                </a:solidFill>
+                <a:latin typeface="Times New Roman" pitchFamily="34" charset="0"/>
+                <a:ea typeface="Times New Roman" pitchFamily="34" charset="-122"/>
+                <a:cs typeface="Times New Roman" pitchFamily="34" charset="-120"/>
+              </a:rPr>
+              <a:t>Topic: Population Change over Space (Migration)</a:t>
+            </a:r>
+            <a:endParaRPr lang="en-US" sz="4000" dirty="0"/>
+          </a:p>
+          <a:p>
+            <a:pPr algn="l" indent="0" marL="0">
+              <a:spcAft>
+                <a:spcPts val="800"/>
+              </a:spcAft>
+              <a:buNone/>
+            </a:pPr>
+            <a:r>
+              <a:rPr lang="en-US" sz="4000" b="1" dirty="0">
+                <a:solidFill>
+                  <a:srgbClr val="111111"/>
+                </a:solidFill>
+                <a:latin typeface="Times New Roman" pitchFamily="34" charset="0"/>
+                <a:ea typeface="Times New Roman" pitchFamily="34" charset="-122"/>
+                <a:cs typeface="Times New Roman" pitchFamily="34" charset="-120"/>
+              </a:rPr>
+              <a:t>Sub-topic: Migration Laws</a:t>
+            </a:r>
+            <a:endParaRPr lang="en-US" sz="4000" dirty="0"/>
+          </a:p>
+          <a:p>
+            <a:pPr algn="l" indent="0" marL="0">
+              <a:spcAft>
+                <a:spcPts val="800"/>
+              </a:spcAft>
+              <a:buNone/>
+            </a:pPr>
+            <a:r>
+              <a:rPr lang="en-US" sz="4000" b="1" dirty="0">
+                <a:solidFill>
+                  <a:srgbClr val="990011"/>
+                </a:solidFill>
+                <a:latin typeface="Times New Roman" pitchFamily="34" charset="0"/>
+                <a:ea typeface="Times New Roman" pitchFamily="34" charset="-122"/>
+                <a:cs typeface="Times New Roman" pitchFamily="34" charset="-120"/>
+              </a:rPr>
+              <a:t>Lesson 14: Spatial Interaction</a:t>
+            </a:r>
+            <a:endParaRPr lang="en-US" sz="4000" dirty="0"/>
           </a:p>
         </p:txBody>
       </p:sp>
@@ -14074,7 +14507,7 @@
         <p:spPr>
           <a:xfrm>
             <a:off x="0" y="658368"/>
-            <a:ext cx="3840480" cy="5833872"/>
+            <a:ext cx="5120640" cy="5833872"/>
           </a:xfrm>
           <a:prstGeom prst="rect">
             <a:avLst/>
@@ -14089,8 +14522,8 @@
         </p:nvSpPr>
         <p:spPr>
           <a:xfrm>
-            <a:off x="4069080" y="1005840"/>
-            <a:ext cx="7802575" cy="731520"/>
+            <a:off x="5349240" y="1005840"/>
+            <a:ext cx="6522415" cy="731520"/>
           </a:xfrm>
           <a:prstGeom prst="rect">
             <a:avLst/>
@@ -14116,7 +14549,7 @@
                 <a:ea typeface="Times New Roman" pitchFamily="34" charset="-122"/>
                 <a:cs typeface="Times New Roman" pitchFamily="34" charset="-120"/>
               </a:rPr>
-              <a:t>2. Factors of Spatial Interaction</a:t>
+              <a:t>DEFINITIONS</a:t>
             </a:r>
             <a:endParaRPr lang="en-US" sz="3600" dirty="0"/>
           </a:p>
@@ -14130,8 +14563,8 @@
         </p:nvSpPr>
         <p:spPr>
           <a:xfrm>
-            <a:off x="4069080" y="1783080"/>
-            <a:ext cx="7802575" cy="4663440"/>
+            <a:off x="5349240" y="1783080"/>
+            <a:ext cx="6522415" cy="4663440"/>
           </a:xfrm>
           <a:prstGeom prst="rect">
             <a:avLst/>
@@ -14158,7 +14591,7 @@
                 <a:ea typeface="Times New Roman" pitchFamily="34" charset="-122"/>
                 <a:cs typeface="Times New Roman" pitchFamily="34" charset="-120"/>
               </a:rPr>
-              <a:t>Ullman identified three main factors:</a:t>
+              <a:t>The key terms of this lesson are defined as follows:</a:t>
             </a:r>
             <a:endParaRPr lang="en-US" sz="4000" dirty="0"/>
           </a:p>
@@ -14178,7 +14611,7 @@
                 <a:ea typeface="Times New Roman" pitchFamily="34" charset="-122"/>
                 <a:cs typeface="Times New Roman" pitchFamily="34" charset="-120"/>
               </a:rPr>
-              <a:t>Complementarity: </a:t>
+              <a:t>Spatial interaction: </a:t>
             </a:r>
             <a:pPr algn="l" indent="0" marL="0">
               <a:spcAft>
@@ -14195,7 +14628,7 @@
                 <a:ea typeface="Times New Roman" pitchFamily="34" charset="-122"/>
                 <a:cs typeface="Times New Roman" pitchFamily="34" charset="-120"/>
               </a:rPr>
-              <a:t>One place has a surplus of something that another place needs. Cattle from the North are sent to the South, and manufactured goods go North.</a:t>
+              <a:t>It is the movement of people, goods, services and information between places.</a:t>
             </a:r>
             <a:endParaRPr lang="en-US" sz="4000" dirty="0"/>
           </a:p>
@@ -14330,7 +14763,7 @@
         <p:spPr>
           <a:xfrm>
             <a:off x="0" y="658368"/>
-            <a:ext cx="5120640" cy="5833872"/>
+            <a:ext cx="3840480" cy="5833872"/>
           </a:xfrm>
           <a:prstGeom prst="rect">
             <a:avLst/>
@@ -14345,8 +14778,8 @@
         </p:nvSpPr>
         <p:spPr>
           <a:xfrm>
-            <a:off x="5349240" y="1005840"/>
-            <a:ext cx="6522415" cy="731520"/>
+            <a:off x="4069080" y="1005840"/>
+            <a:ext cx="7802575" cy="731520"/>
           </a:xfrm>
           <a:prstGeom prst="rect">
             <a:avLst/>
@@ -14372,7 +14805,7 @@
                 <a:ea typeface="Times New Roman" pitchFamily="34" charset="-122"/>
                 <a:cs typeface="Times New Roman" pitchFamily="34" charset="-120"/>
               </a:rPr>
-              <a:t>2. Factors of Spatial Interaction (continued)</a:t>
+              <a:t>DEFINITIONS (continued)</a:t>
             </a:r>
             <a:endParaRPr lang="en-US" sz="3600" dirty="0"/>
           </a:p>
@@ -14386,8 +14819,8 @@
         </p:nvSpPr>
         <p:spPr>
           <a:xfrm>
-            <a:off x="5349240" y="1783080"/>
-            <a:ext cx="6522415" cy="4663440"/>
+            <a:off x="4069080" y="1783080"/>
+            <a:ext cx="7802575" cy="4663440"/>
           </a:xfrm>
           <a:prstGeom prst="rect">
             <a:avLst/>
@@ -14414,7 +14847,7 @@
                 <a:ea typeface="Times New Roman" pitchFamily="34" charset="-122"/>
                 <a:cs typeface="Times New Roman" pitchFamily="34" charset="-120"/>
               </a:rPr>
-              <a:t>Transferability: </a:t>
+              <a:t>Network: </a:t>
             </a:r>
             <a:pPr algn="l" indent="0" marL="0">
               <a:spcAft>
@@ -14431,7 +14864,44 @@
                 <a:ea typeface="Times New Roman" pitchFamily="34" charset="-122"/>
                 <a:cs typeface="Times New Roman" pitchFamily="34" charset="-120"/>
               </a:rPr>
-              <a:t>Goods and people can move only if transport costs and time are acceptable. The railway and good roads increase interaction.</a:t>
+              <a:t>It is a set of links (roads, telephone, internet, television) that connects places.</a:t>
+            </a:r>
+            <a:endParaRPr lang="en-US" sz="4000" dirty="0"/>
+          </a:p>
+          <a:p>
+            <a:pPr algn="l" indent="0" marL="0">
+              <a:spcAft>
+                <a:spcPts val="800"/>
+              </a:spcAft>
+              <a:buNone/>
+            </a:pPr>
+            <a:r>
+              <a:rPr lang="en-US" sz="4000" b="1" dirty="0">
+                <a:solidFill>
+                  <a:srgbClr val="111111"/>
+                </a:solidFill>
+                <a:latin typeface="Times New Roman" pitchFamily="34" charset="0"/>
+                <a:ea typeface="Times New Roman" pitchFamily="34" charset="-122"/>
+                <a:cs typeface="Times New Roman" pitchFamily="34" charset="-120"/>
+              </a:rPr>
+              <a:t>Complementarity: </a:t>
+            </a:r>
+            <a:pPr algn="l" indent="0" marL="0">
+              <a:spcAft>
+                <a:spcPts val="800"/>
+              </a:spcAft>
+              <a:buNone/>
+            </a:pPr>
+            <a:r>
+              <a:rPr lang="en-US" sz="4000" dirty="0">
+                <a:solidFill>
+                  <a:srgbClr val="111111"/>
+                </a:solidFill>
+                <a:latin typeface="Times New Roman" pitchFamily="34" charset="0"/>
+                <a:ea typeface="Times New Roman" pitchFamily="34" charset="-122"/>
+                <a:cs typeface="Times New Roman" pitchFamily="34" charset="-120"/>
+              </a:rPr>
+              <a:t>It is the situation where one place has a surplus of what another place needs.</a:t>
             </a:r>
             <a:endParaRPr lang="en-US" sz="4000" dirty="0"/>
           </a:p>
@@ -14608,7 +15078,7 @@
                 <a:ea typeface="Times New Roman" pitchFamily="34" charset="-122"/>
                 <a:cs typeface="Times New Roman" pitchFamily="34" charset="-120"/>
               </a:rPr>
-              <a:t>2. Factors of Spatial Interaction (continued)</a:t>
+              <a:t>DEFINITIONS (continued)</a:t>
             </a:r>
             <a:endParaRPr lang="en-US" sz="3600" dirty="0"/>
           </a:p>
@@ -14650,7 +15120,7 @@
                 <a:ea typeface="Times New Roman" pitchFamily="34" charset="-122"/>
                 <a:cs typeface="Times New Roman" pitchFamily="34" charset="-120"/>
               </a:rPr>
-              <a:t>Intervening opportunity: </a:t>
+              <a:t>Transferability: </a:t>
             </a:r>
             <a:pPr algn="l" indent="0" marL="0">
               <a:spcAft>
@@ -14667,7 +15137,44 @@
                 <a:ea typeface="Times New Roman" pitchFamily="34" charset="-122"/>
                 <a:cs typeface="Times New Roman" pitchFamily="34" charset="-120"/>
               </a:rPr>
-              <a:t>A closer source of the same good reduces interaction with a distant place. Buyers go to the nearest market that has the product.</a:t>
+              <a:t>It is the ease and cost of moving goods or people between two places.</a:t>
+            </a:r>
+            <a:endParaRPr lang="en-US" sz="4000" dirty="0"/>
+          </a:p>
+          <a:p>
+            <a:pPr algn="l" indent="0" marL="0">
+              <a:spcAft>
+                <a:spcPts val="800"/>
+              </a:spcAft>
+              <a:buNone/>
+            </a:pPr>
+            <a:r>
+              <a:rPr lang="en-US" sz="4000" b="1" dirty="0">
+                <a:solidFill>
+                  <a:srgbClr val="111111"/>
+                </a:solidFill>
+                <a:latin typeface="Times New Roman" pitchFamily="34" charset="0"/>
+                <a:ea typeface="Times New Roman" pitchFamily="34" charset="-122"/>
+                <a:cs typeface="Times New Roman" pitchFamily="34" charset="-120"/>
+              </a:rPr>
+              <a:t>Distance decay: </a:t>
+            </a:r>
+            <a:pPr algn="l" indent="0" marL="0">
+              <a:spcAft>
+                <a:spcPts val="800"/>
+              </a:spcAft>
+              <a:buNone/>
+            </a:pPr>
+            <a:r>
+              <a:rPr lang="en-US" sz="4000" dirty="0">
+                <a:solidFill>
+                  <a:srgbClr val="111111"/>
+                </a:solidFill>
+                <a:latin typeface="Times New Roman" pitchFamily="34" charset="0"/>
+                <a:ea typeface="Times New Roman" pitchFamily="34" charset="-122"/>
+                <a:cs typeface="Times New Roman" pitchFamily="34" charset="-120"/>
+              </a:rPr>
+              <a:t>It is the decrease of interaction as distance increases.</a:t>
             </a:r>
             <a:endParaRPr lang="en-US" sz="4000" dirty="0"/>
           </a:p>
@@ -14906,7 +15413,7 @@
                 <a:ea typeface="Times New Roman" pitchFamily="34" charset="-122"/>
                 <a:cs typeface="Times New Roman" pitchFamily="34" charset="-120"/>
               </a:rPr>
-              <a:t>Use the gravity model to compare Douala–Yaoundé and Douala–Garoua.</a:t>
+              <a:t>Define spatial interaction.</a:t>
             </a:r>
             <a:endParaRPr lang="en-US" sz="4000" dirty="0"/>
           </a:p>
@@ -15024,9 +15531,129 @@
           </a:p>
         </p:txBody>
       </p:sp>
+      <p:sp>
+        <p:nvSpPr>
+          <p:cNvPr id="3" name="Text 1"/>
+          <p:cNvSpPr/>
+          <p:nvPr/>
+        </p:nvSpPr>
+        <p:spPr>
+          <a:xfrm>
+            <a:off x="365760" y="1005840"/>
+            <a:ext cx="11460175" cy="731520"/>
+          </a:xfrm>
+          <a:prstGeom prst="rect">
+            <a:avLst/>
+          </a:prstGeom>
+          <a:noFill/>
+          <a:ln/>
+        </p:spPr>
+        <p:txBody>
+          <a:bodyPr wrap="square" lIns="0" tIns="0" rIns="0" bIns="0" rtlCol="0" anchor="ctr">
+            <a:normAutofit/>
+          </a:bodyPr>
+          <a:lstStyle/>
+          <a:p>
+            <a:pPr algn="ctr" indent="0" marL="0">
+              <a:buNone/>
+            </a:pPr>
+            <a:r>
+              <a:rPr lang="en-US" sz="3600" b="1" dirty="0">
+                <a:solidFill>
+                  <a:srgbClr val="990011"/>
+                </a:solidFill>
+                <a:latin typeface="Times New Roman" pitchFamily="34" charset="0"/>
+                <a:ea typeface="Times New Roman" pitchFamily="34" charset="-122"/>
+                <a:cs typeface="Times New Roman" pitchFamily="34" charset="-120"/>
+              </a:rPr>
+              <a:t>1. Meaning of Spatial Interaction</a:t>
+            </a:r>
+            <a:endParaRPr lang="en-US" sz="3600" dirty="0"/>
+          </a:p>
+        </p:txBody>
+      </p:sp>
+      <p:sp>
+        <p:nvSpPr>
+          <p:cNvPr id="4" name="Text 2"/>
+          <p:cNvSpPr/>
+          <p:nvPr/>
+        </p:nvSpPr>
+        <p:spPr>
+          <a:xfrm>
+            <a:off x="365760" y="1783080"/>
+            <a:ext cx="4846320" cy="4617720"/>
+          </a:xfrm>
+          <a:prstGeom prst="rect">
+            <a:avLst/>
+          </a:prstGeom>
+          <a:noFill/>
+          <a:ln/>
+        </p:spPr>
+        <p:txBody>
+          <a:bodyPr wrap="square" lIns="0" tIns="0" rIns="0" bIns="0" rtlCol="0" anchor="t"/>
+          <a:lstStyle/>
+          <a:p>
+            <a:pPr algn="l" indent="0" marL="0">
+              <a:spcAft>
+                <a:spcPts val="800"/>
+              </a:spcAft>
+              <a:buNone/>
+            </a:pPr>
+            <a:r>
+              <a:rPr lang="en-US" sz="3600" i="1" dirty="0">
+                <a:solidFill>
+                  <a:srgbClr val="111111"/>
+                </a:solidFill>
+                <a:latin typeface="Times New Roman" pitchFamily="34" charset="0"/>
+                <a:ea typeface="Times New Roman" pitchFamily="34" charset="-122"/>
+                <a:cs typeface="Times New Roman" pitchFamily="34" charset="-120"/>
+              </a:rPr>
+              <a:t>Spatial interaction is presented as follows:</a:t>
+            </a:r>
+            <a:endParaRPr lang="en-US" sz="3600" dirty="0"/>
+          </a:p>
+          <a:p>
+            <a:pPr algn="l" indent="0" marL="0">
+              <a:spcAft>
+                <a:spcPts val="800"/>
+              </a:spcAft>
+              <a:buNone/>
+            </a:pPr>
+            <a:r>
+              <a:rPr lang="en-US" sz="3600" b="1" dirty="0">
+                <a:solidFill>
+                  <a:srgbClr val="111111"/>
+                </a:solidFill>
+                <a:latin typeface="Times New Roman" pitchFamily="34" charset="0"/>
+                <a:ea typeface="Times New Roman" pitchFamily="34" charset="-122"/>
+                <a:cs typeface="Times New Roman" pitchFamily="34" charset="-120"/>
+              </a:rPr>
+              <a:t>Tangible flows: </a:t>
+            </a:r>
+            <a:pPr algn="l" indent="0" marL="0">
+              <a:spcAft>
+                <a:spcPts val="800"/>
+              </a:spcAft>
+              <a:buNone/>
+            </a:pPr>
+            <a:r>
+              <a:rPr lang="en-US" sz="3600" dirty="0">
+                <a:solidFill>
+                  <a:srgbClr val="111111"/>
+                </a:solidFill>
+                <a:latin typeface="Times New Roman" pitchFamily="34" charset="0"/>
+                <a:ea typeface="Times New Roman" pitchFamily="34" charset="-122"/>
+                <a:cs typeface="Times New Roman" pitchFamily="34" charset="-120"/>
+              </a:rPr>
+              <a:t>They are movements of people and goods, such as lorries carrying cotton from Garoua to the port of Douala.</a:t>
+            </a:r>
+            <a:endParaRPr lang="en-US" sz="3600" dirty="0"/>
+          </a:p>
+        </p:txBody>
+      </p:sp>
       <p:pic>
         <p:nvPicPr>
-          <p:cNvPr id="3" name="Image 0" descr="/home/claude/f4/img/minesec_sheet.png">    </p:cNvPr>
+          <p:cNvPr id="5" name="Image 0" descr="/home/claude/f4/img/v2/usa_truck.jpg">    </p:cNvPr>
           <p:cNvPicPr>
             <a:picLocks noChangeAspect="1"/>
           </p:cNvPicPr>
@@ -15040,8 +15667,8 @@
         </p:blipFill>
         <p:spPr>
           <a:xfrm>
-            <a:off x="0" y="658368"/>
-            <a:ext cx="2468880" cy="5833872"/>
+            <a:off x="5349240" y="2071212"/>
+            <a:ext cx="6659575" cy="3693983"/>
           </a:xfrm>
           <a:prstGeom prst="rect">
             <a:avLst/>
@@ -15050,14 +15677,14 @@
       </p:pic>
       <p:sp>
         <p:nvSpPr>
-          <p:cNvPr id="4" name="Text 1"/>
+          <p:cNvPr id="6" name="Text 3"/>
           <p:cNvSpPr/>
           <p:nvPr/>
         </p:nvSpPr>
         <p:spPr>
           <a:xfrm>
-            <a:off x="2697480" y="1005840"/>
-            <a:ext cx="9174175" cy="731520"/>
+            <a:off x="5349240" y="6089904"/>
+            <a:ext cx="6659575" cy="347472"/>
           </a:xfrm>
           <a:prstGeom prst="rect">
             <a:avLst/>
@@ -15066,144 +15693,24 @@
           <a:ln/>
         </p:spPr>
         <p:txBody>
-          <a:bodyPr wrap="square" lIns="0" tIns="0" rIns="0" bIns="0" rtlCol="0" anchor="ctr">
-            <a:normAutofit/>
-          </a:bodyPr>
+          <a:bodyPr wrap="square" lIns="0" tIns="0" rIns="0" bIns="0" rtlCol="0" anchor="ctr"/>
           <a:lstStyle/>
           <a:p>
             <a:pPr algn="ctr" indent="0" marL="0">
               <a:buNone/>
             </a:pPr>
             <a:r>
-              <a:rPr lang="en-US" sz="3600" b="1" dirty="0">
-                <a:solidFill>
-                  <a:srgbClr val="990011"/>
+              <a:rPr lang="en-US" sz="1600" i="1" dirty="0">
+                <a:solidFill>
+                  <a:srgbClr val="555555"/>
                 </a:solidFill>
                 <a:latin typeface="Times New Roman" pitchFamily="34" charset="0"/>
                 <a:ea typeface="Times New Roman" pitchFamily="34" charset="-122"/>
                 <a:cs typeface="Times New Roman" pitchFamily="34" charset="-120"/>
               </a:rPr>
-              <a:t>2. Factors of Spatial Interaction</a:t>
-            </a:r>
-            <a:endParaRPr lang="en-US" sz="3600" dirty="0"/>
-          </a:p>
-        </p:txBody>
-      </p:sp>
-      <p:sp>
-        <p:nvSpPr>
-          <p:cNvPr id="5" name="Text 2"/>
-          <p:cNvSpPr/>
-          <p:nvPr/>
-        </p:nvSpPr>
-        <p:spPr>
-          <a:xfrm>
-            <a:off x="2697480" y="1737360"/>
-            <a:ext cx="9174175" cy="457200"/>
-          </a:xfrm>
-          <a:prstGeom prst="rect">
-            <a:avLst/>
-          </a:prstGeom>
-          <a:noFill/>
-          <a:ln/>
-        </p:spPr>
-        <p:txBody>
-          <a:bodyPr wrap="square" lIns="0" tIns="0" rIns="0" bIns="0" rtlCol="0" anchor="ctr"/>
-          <a:lstStyle/>
-          <a:p>
-            <a:pPr algn="l" indent="0" marL="0">
-              <a:buNone/>
-            </a:pPr>
-            <a:r>
-              <a:rPr lang="en-US" sz="3200" b="1" dirty="0">
-                <a:solidFill>
-                  <a:srgbClr val="990011"/>
-                </a:solidFill>
-                <a:latin typeface="Times New Roman" pitchFamily="34" charset="0"/>
-                <a:ea typeface="Times New Roman" pitchFamily="34" charset="-122"/>
-                <a:cs typeface="Times New Roman" pitchFamily="34" charset="-120"/>
-              </a:rPr>
-              <a:t>Other Factors</a:t>
-            </a:r>
-            <a:endParaRPr lang="en-US" sz="3200" dirty="0"/>
-          </a:p>
-        </p:txBody>
-      </p:sp>
-      <p:sp>
-        <p:nvSpPr>
-          <p:cNvPr id="6" name="Text 3"/>
-          <p:cNvSpPr/>
-          <p:nvPr/>
-        </p:nvSpPr>
-        <p:spPr>
-          <a:xfrm>
-            <a:off x="2697480" y="2240280"/>
-            <a:ext cx="9174175" cy="4206240"/>
-          </a:xfrm>
-          <a:prstGeom prst="rect">
-            <a:avLst/>
-          </a:prstGeom>
-          <a:noFill/>
-          <a:ln/>
-        </p:spPr>
-        <p:txBody>
-          <a:bodyPr wrap="square" lIns="0" tIns="0" rIns="0" bIns="0" rtlCol="0" anchor="t"/>
-          <a:lstStyle/>
-          <a:p>
-            <a:pPr algn="l" indent="0" marL="0">
-              <a:spcAft>
-                <a:spcPts val="800"/>
-              </a:spcAft>
-              <a:buNone/>
-            </a:pPr>
-            <a:r>
-              <a:rPr lang="en-US" sz="4000" i="1" dirty="0">
-                <a:solidFill>
-                  <a:srgbClr val="111111"/>
-                </a:solidFill>
-                <a:latin typeface="Times New Roman" pitchFamily="34" charset="0"/>
-                <a:ea typeface="Times New Roman" pitchFamily="34" charset="-122"/>
-                <a:cs typeface="Times New Roman" pitchFamily="34" charset="-120"/>
-              </a:rPr>
-              <a:t>Other factors also affect interaction:</a:t>
-            </a:r>
-            <a:endParaRPr lang="en-US" sz="4000" dirty="0"/>
-          </a:p>
-          <a:p>
-            <a:pPr algn="l" indent="0" marL="0">
-              <a:spcAft>
-                <a:spcPts val="800"/>
-              </a:spcAft>
-              <a:buNone/>
-            </a:pPr>
-            <a:r>
-              <a:rPr lang="en-US" sz="4000" b="1" dirty="0">
-                <a:solidFill>
-                  <a:srgbClr val="111111"/>
-                </a:solidFill>
-                <a:latin typeface="Times New Roman" pitchFamily="34" charset="0"/>
-                <a:ea typeface="Times New Roman" pitchFamily="34" charset="-122"/>
-                <a:cs typeface="Times New Roman" pitchFamily="34" charset="-120"/>
-              </a:rPr>
-              <a:t>Information and communication: </a:t>
-            </a:r>
-            <a:pPr algn="l" indent="0" marL="0">
-              <a:spcAft>
-                <a:spcPts val="800"/>
-              </a:spcAft>
-              <a:buNone/>
-            </a:pPr>
-            <a:r>
-              <a:rPr lang="en-US" sz="4000" dirty="0">
-                <a:solidFill>
-                  <a:srgbClr val="111111"/>
-                </a:solidFill>
-                <a:latin typeface="Times New Roman" pitchFamily="34" charset="0"/>
-                <a:ea typeface="Times New Roman" pitchFamily="34" charset="-122"/>
-                <a:cs typeface="Times New Roman" pitchFamily="34" charset="-120"/>
-              </a:rPr>
-              <a:t>Phones, radio and the internet spread information about opportunities. They increase migration and trade.</a:t>
-            </a:r>
-            <a:endParaRPr lang="en-US" sz="4000" dirty="0"/>
+              <a:t>Illustration: goods on the road</a:t>
+            </a:r>
+            <a:endParaRPr lang="en-US" sz="1600" dirty="0"/>
           </a:p>
         </p:txBody>
       </p:sp>
@@ -15319,9 +15826,109 @@
           </a:p>
         </p:txBody>
       </p:sp>
+      <p:sp>
+        <p:nvSpPr>
+          <p:cNvPr id="3" name="Text 1"/>
+          <p:cNvSpPr/>
+          <p:nvPr/>
+        </p:nvSpPr>
+        <p:spPr>
+          <a:xfrm>
+            <a:off x="365760" y="1005840"/>
+            <a:ext cx="11460175" cy="731520"/>
+          </a:xfrm>
+          <a:prstGeom prst="rect">
+            <a:avLst/>
+          </a:prstGeom>
+          <a:noFill/>
+          <a:ln/>
+        </p:spPr>
+        <p:txBody>
+          <a:bodyPr wrap="square" lIns="0" tIns="0" rIns="0" bIns="0" rtlCol="0" anchor="ctr">
+            <a:normAutofit/>
+          </a:bodyPr>
+          <a:lstStyle/>
+          <a:p>
+            <a:pPr algn="ctr" indent="0" marL="0">
+              <a:buNone/>
+            </a:pPr>
+            <a:r>
+              <a:rPr lang="en-US" sz="3600" b="1" dirty="0">
+                <a:solidFill>
+                  <a:srgbClr val="990011"/>
+                </a:solidFill>
+                <a:latin typeface="Times New Roman" pitchFamily="34" charset="0"/>
+                <a:ea typeface="Times New Roman" pitchFamily="34" charset="-122"/>
+                <a:cs typeface="Times New Roman" pitchFamily="34" charset="-120"/>
+              </a:rPr>
+              <a:t>1. Meaning of Spatial Interaction</a:t>
+            </a:r>
+            <a:endParaRPr lang="en-US" sz="3600" dirty="0"/>
+          </a:p>
+        </p:txBody>
+      </p:sp>
+      <p:sp>
+        <p:nvSpPr>
+          <p:cNvPr id="4" name="Text 2"/>
+          <p:cNvSpPr/>
+          <p:nvPr/>
+        </p:nvSpPr>
+        <p:spPr>
+          <a:xfrm>
+            <a:off x="365760" y="1783080"/>
+            <a:ext cx="4846320" cy="4617720"/>
+          </a:xfrm>
+          <a:prstGeom prst="rect">
+            <a:avLst/>
+          </a:prstGeom>
+          <a:noFill/>
+          <a:ln/>
+        </p:spPr>
+        <p:txBody>
+          <a:bodyPr wrap="square" lIns="0" tIns="0" rIns="0" bIns="0" rtlCol="0" anchor="t"/>
+          <a:lstStyle/>
+          <a:p>
+            <a:pPr algn="l" indent="0" marL="0">
+              <a:spcAft>
+                <a:spcPts val="800"/>
+              </a:spcAft>
+              <a:buNone/>
+            </a:pPr>
+            <a:r>
+              <a:rPr lang="en-US" sz="3600" b="1" dirty="0">
+                <a:solidFill>
+                  <a:srgbClr val="111111"/>
+                </a:solidFill>
+                <a:latin typeface="Times New Roman" pitchFamily="34" charset="0"/>
+                <a:ea typeface="Times New Roman" pitchFamily="34" charset="-122"/>
+                <a:cs typeface="Times New Roman" pitchFamily="34" charset="-120"/>
+              </a:rPr>
+              <a:t>Intangible flows: </a:t>
+            </a:r>
+            <a:pPr algn="l" indent="0" marL="0">
+              <a:spcAft>
+                <a:spcPts val="800"/>
+              </a:spcAft>
+              <a:buNone/>
+            </a:pPr>
+            <a:r>
+              <a:rPr lang="en-US" sz="3600" dirty="0">
+                <a:solidFill>
+                  <a:srgbClr val="111111"/>
+                </a:solidFill>
+                <a:latin typeface="Times New Roman" pitchFamily="34" charset="0"/>
+                <a:ea typeface="Times New Roman" pitchFamily="34" charset="-122"/>
+                <a:cs typeface="Times New Roman" pitchFamily="34" charset="-120"/>
+              </a:rPr>
+              <a:t>They are movements of information and services, such as phone calls and mobile money transfers between Garoua and Douala.</a:t>
+            </a:r>
+            <a:endParaRPr lang="en-US" sz="3600" dirty="0"/>
+          </a:p>
+        </p:txBody>
+      </p:sp>
       <p:pic>
         <p:nvPicPr>
-          <p:cNvPr id="3" name="Image 0" descr="/home/claude/f4/img/minesec_sheet.png">    </p:cNvPr>
+          <p:cNvPr id="5" name="Image 0" descr="/home/claude/f4/img/v2/f2t_mobile_money.jpg">    </p:cNvPr>
           <p:cNvPicPr>
             <a:picLocks noChangeAspect="1"/>
           </p:cNvPicPr>
@@ -15335,8 +15942,8 @@
         </p:blipFill>
         <p:spPr>
           <a:xfrm>
-            <a:off x="0" y="658368"/>
-            <a:ext cx="5120640" cy="5833872"/>
+            <a:off x="5349240" y="2071212"/>
+            <a:ext cx="6659575" cy="3693983"/>
           </a:xfrm>
           <a:prstGeom prst="rect">
             <a:avLst/>
@@ -15345,14 +15952,14 @@
       </p:pic>
       <p:sp>
         <p:nvSpPr>
-          <p:cNvPr id="4" name="Text 1"/>
+          <p:cNvPr id="6" name="Text 3"/>
           <p:cNvSpPr/>
           <p:nvPr/>
         </p:nvSpPr>
         <p:spPr>
           <a:xfrm>
-            <a:off x="5349240" y="1005840"/>
-            <a:ext cx="6522415" cy="731520"/>
+            <a:off x="5349240" y="6089904"/>
+            <a:ext cx="6659575" cy="347472"/>
           </a:xfrm>
           <a:prstGeom prst="rect">
             <a:avLst/>
@@ -15361,124 +15968,24 @@
           <a:ln/>
         </p:spPr>
         <p:txBody>
-          <a:bodyPr wrap="square" lIns="0" tIns="0" rIns="0" bIns="0" rtlCol="0" anchor="ctr">
-            <a:normAutofit/>
-          </a:bodyPr>
+          <a:bodyPr wrap="square" lIns="0" tIns="0" rIns="0" bIns="0" rtlCol="0" anchor="ctr"/>
           <a:lstStyle/>
           <a:p>
             <a:pPr algn="ctr" indent="0" marL="0">
               <a:buNone/>
             </a:pPr>
             <a:r>
-              <a:rPr lang="en-US" sz="3600" b="1" dirty="0">
-                <a:solidFill>
-                  <a:srgbClr val="990011"/>
+              <a:rPr lang="en-US" sz="1600" i="1" dirty="0">
+                <a:solidFill>
+                  <a:srgbClr val="555555"/>
                 </a:solidFill>
                 <a:latin typeface="Times New Roman" pitchFamily="34" charset="0"/>
                 <a:ea typeface="Times New Roman" pitchFamily="34" charset="-122"/>
                 <a:cs typeface="Times New Roman" pitchFamily="34" charset="-120"/>
               </a:rPr>
-              <a:t>2. Factors of Spatial Interaction</a:t>
-            </a:r>
-            <a:endParaRPr lang="en-US" sz="3600" dirty="0"/>
-          </a:p>
-        </p:txBody>
-      </p:sp>
-      <p:sp>
-        <p:nvSpPr>
-          <p:cNvPr id="5" name="Text 2"/>
-          <p:cNvSpPr/>
-          <p:nvPr/>
-        </p:nvSpPr>
-        <p:spPr>
-          <a:xfrm>
-            <a:off x="5349240" y="1737360"/>
-            <a:ext cx="6522415" cy="457200"/>
-          </a:xfrm>
-          <a:prstGeom prst="rect">
-            <a:avLst/>
-          </a:prstGeom>
-          <a:noFill/>
-          <a:ln/>
-        </p:spPr>
-        <p:txBody>
-          <a:bodyPr wrap="square" lIns="0" tIns="0" rIns="0" bIns="0" rtlCol="0" anchor="ctr"/>
-          <a:lstStyle/>
-          <a:p>
-            <a:pPr algn="l" indent="0" marL="0">
-              <a:buNone/>
-            </a:pPr>
-            <a:r>
-              <a:rPr lang="en-US" sz="3200" b="1" dirty="0">
-                <a:solidFill>
-                  <a:srgbClr val="990011"/>
-                </a:solidFill>
-                <a:latin typeface="Times New Roman" pitchFamily="34" charset="0"/>
-                <a:ea typeface="Times New Roman" pitchFamily="34" charset="-122"/>
-                <a:cs typeface="Times New Roman" pitchFamily="34" charset="-120"/>
-              </a:rPr>
-              <a:t>Other Factors (continued)</a:t>
-            </a:r>
-            <a:endParaRPr lang="en-US" sz="3200" dirty="0"/>
-          </a:p>
-        </p:txBody>
-      </p:sp>
-      <p:sp>
-        <p:nvSpPr>
-          <p:cNvPr id="6" name="Text 3"/>
-          <p:cNvSpPr/>
-          <p:nvPr/>
-        </p:nvSpPr>
-        <p:spPr>
-          <a:xfrm>
-            <a:off x="5349240" y="2240280"/>
-            <a:ext cx="6522415" cy="4206240"/>
-          </a:xfrm>
-          <a:prstGeom prst="rect">
-            <a:avLst/>
-          </a:prstGeom>
-          <a:noFill/>
-          <a:ln/>
-        </p:spPr>
-        <p:txBody>
-          <a:bodyPr wrap="square" lIns="0" tIns="0" rIns="0" bIns="0" rtlCol="0" anchor="t"/>
-          <a:lstStyle/>
-          <a:p>
-            <a:pPr algn="l" indent="0" marL="0">
-              <a:spcAft>
-                <a:spcPts val="800"/>
-              </a:spcAft>
-              <a:buNone/>
-            </a:pPr>
-            <a:r>
-              <a:rPr lang="en-US" sz="4000" b="1" dirty="0">
-                <a:solidFill>
-                  <a:srgbClr val="111111"/>
-                </a:solidFill>
-                <a:latin typeface="Times New Roman" pitchFamily="34" charset="0"/>
-                <a:ea typeface="Times New Roman" pitchFamily="34" charset="-122"/>
-                <a:cs typeface="Times New Roman" pitchFamily="34" charset="-120"/>
-              </a:rPr>
-              <a:t>Barriers: </a:t>
-            </a:r>
-            <a:pPr algn="l" indent="0" marL="0">
-              <a:spcAft>
-                <a:spcPts val="800"/>
-              </a:spcAft>
-              <a:buNone/>
-            </a:pPr>
-            <a:r>
-              <a:rPr lang="en-US" sz="4000" dirty="0">
-                <a:solidFill>
-                  <a:srgbClr val="111111"/>
-                </a:solidFill>
-                <a:latin typeface="Times New Roman" pitchFamily="34" charset="0"/>
-                <a:ea typeface="Times New Roman" pitchFamily="34" charset="-122"/>
-                <a:cs typeface="Times New Roman" pitchFamily="34" charset="-120"/>
-              </a:rPr>
-              <a:t>Distance, borders, language, insecurity and bad roads reduce interaction. Political decisions such as border closures stop exchanges.</a:t>
-            </a:r>
-            <a:endParaRPr lang="en-US" sz="4000" dirty="0"/>
+              <a:t>Illustration: mobile money</a:t>
+            </a:r>
+            <a:endParaRPr lang="en-US" sz="1600" dirty="0"/>
           </a:p>
         </p:txBody>
       </p:sp>
@@ -15588,7 +16095,7 @@
                 <a:ea typeface="Calibri" pitchFamily="34" charset="-122"/>
                 <a:cs typeface="Calibri" pitchFamily="34" charset="-120"/>
               </a:rPr>
-              <a:t>FORMATIVE EVALUATION</a:t>
+              <a:t>BOARD SUMMARY</a:t>
             </a:r>
             <a:endParaRPr lang="en-US" sz="1400" dirty="0"/>
           </a:p>
@@ -15611,7 +16118,7 @@
         <p:spPr>
           <a:xfrm>
             <a:off x="0" y="658368"/>
-            <a:ext cx="5120640" cy="5833872"/>
+            <a:ext cx="3840480" cy="5833872"/>
           </a:xfrm>
           <a:prstGeom prst="rect">
             <a:avLst/>
@@ -15626,8 +16133,8 @@
         </p:nvSpPr>
         <p:spPr>
           <a:xfrm>
-            <a:off x="5349240" y="1005840"/>
-            <a:ext cx="6522415" cy="731520"/>
+            <a:off x="4069080" y="1005840"/>
+            <a:ext cx="7802575" cy="731520"/>
           </a:xfrm>
           <a:prstGeom prst="rect">
             <a:avLst/>
@@ -15653,7 +16160,7 @@
                 <a:ea typeface="Times New Roman" pitchFamily="34" charset="-122"/>
                 <a:cs typeface="Times New Roman" pitchFamily="34" charset="-120"/>
               </a:rPr>
-              <a:t>Evaluation 1</a:t>
+              <a:t>1. Meaning of Spatial Interaction</a:t>
             </a:r>
             <a:endParaRPr lang="en-US" sz="3600" dirty="0"/>
           </a:p>
@@ -15667,8 +16174,8 @@
         </p:nvSpPr>
         <p:spPr>
           <a:xfrm>
-            <a:off x="5349240" y="1783080"/>
-            <a:ext cx="6522415" cy="4663440"/>
+            <a:off x="4069080" y="1783080"/>
+            <a:ext cx="7802575" cy="4663440"/>
           </a:xfrm>
           <a:prstGeom prst="rect">
             <a:avLst/>
@@ -15687,7 +16194,7 @@
               <a:buNone/>
             </a:pPr>
             <a:r>
-              <a:rPr lang="en-US" sz="4000" dirty="0">
+              <a:rPr lang="en-US" sz="4000" b="1" dirty="0">
                 <a:solidFill>
                   <a:srgbClr val="111111"/>
                 </a:solidFill>
@@ -15695,7 +16202,61 @@
                 <a:ea typeface="Times New Roman" pitchFamily="34" charset="-122"/>
                 <a:cs typeface="Times New Roman" pitchFamily="34" charset="-120"/>
               </a:rPr>
-              <a:t>Name Ullman's three bases of spatial interaction.</a:t>
+              <a:t>Networks: </a:t>
+            </a:r>
+            <a:pPr algn="l" indent="0" marL="0">
+              <a:spcAft>
+                <a:spcPts val="800"/>
+              </a:spcAft>
+              <a:buNone/>
+            </a:pPr>
+            <a:r>
+              <a:rPr lang="en-US" sz="4000" dirty="0">
+                <a:solidFill>
+                  <a:srgbClr val="111111"/>
+                </a:solidFill>
+                <a:latin typeface="Times New Roman" pitchFamily="34" charset="0"/>
+                <a:ea typeface="Times New Roman" pitchFamily="34" charset="-122"/>
+                <a:cs typeface="Times New Roman" pitchFamily="34" charset="-120"/>
+              </a:rPr>
+              <a:t>Flows use networks: roads, railways, telephone, television and the internet.</a:t>
+            </a:r>
+            <a:endParaRPr lang="en-US" sz="4000" dirty="0"/>
+          </a:p>
+          <a:p>
+            <a:pPr algn="l" indent="0" marL="0">
+              <a:spcAft>
+                <a:spcPts val="800"/>
+              </a:spcAft>
+              <a:buNone/>
+            </a:pPr>
+            <a:r>
+              <a:rPr lang="en-US" sz="4000" b="1" dirty="0">
+                <a:solidFill>
+                  <a:srgbClr val="111111"/>
+                </a:solidFill>
+                <a:latin typeface="Times New Roman" pitchFamily="34" charset="0"/>
+                <a:ea typeface="Times New Roman" pitchFamily="34" charset="-122"/>
+                <a:cs typeface="Times New Roman" pitchFamily="34" charset="-120"/>
+              </a:rPr>
+              <a:t>Measurement: </a:t>
+            </a:r>
+            <a:pPr algn="l" indent="0" marL="0">
+              <a:spcAft>
+                <a:spcPts val="800"/>
+              </a:spcAft>
+              <a:buNone/>
+            </a:pPr>
+            <a:r>
+              <a:rPr lang="en-US" sz="4000" dirty="0">
+                <a:solidFill>
+                  <a:srgbClr val="111111"/>
+                </a:solidFill>
+                <a:latin typeface="Times New Roman" pitchFamily="34" charset="0"/>
+                <a:ea typeface="Times New Roman" pitchFamily="34" charset="-122"/>
+                <a:cs typeface="Times New Roman" pitchFamily="34" charset="-120"/>
+              </a:rPr>
+              <a:t>The volume of interaction can be estimated with the gravity formula: I = Pi × Pj ÷ d².</a:t>
             </a:r>
             <a:endParaRPr lang="en-US" sz="4000" dirty="0"/>
           </a:p>
@@ -15807,15 +16368,135 @@
                 <a:ea typeface="Calibri" pitchFamily="34" charset="-122"/>
                 <a:cs typeface="Calibri" pitchFamily="34" charset="-120"/>
               </a:rPr>
-              <a:t>FORMATIVE EVALUATION</a:t>
+              <a:t>BOARD SUMMARY</a:t>
             </a:r>
             <a:endParaRPr lang="en-US" sz="1400" dirty="0"/>
+          </a:p>
+        </p:txBody>
+      </p:sp>
+      <p:sp>
+        <p:nvSpPr>
+          <p:cNvPr id="3" name="Text 1"/>
+          <p:cNvSpPr/>
+          <p:nvPr/>
+        </p:nvSpPr>
+        <p:spPr>
+          <a:xfrm>
+            <a:off x="365760" y="1005840"/>
+            <a:ext cx="11460175" cy="731520"/>
+          </a:xfrm>
+          <a:prstGeom prst="rect">
+            <a:avLst/>
+          </a:prstGeom>
+          <a:noFill/>
+          <a:ln/>
+        </p:spPr>
+        <p:txBody>
+          <a:bodyPr wrap="square" lIns="0" tIns="0" rIns="0" bIns="0" rtlCol="0" anchor="ctr">
+            <a:normAutofit/>
+          </a:bodyPr>
+          <a:lstStyle/>
+          <a:p>
+            <a:pPr algn="ctr" indent="0" marL="0">
+              <a:buNone/>
+            </a:pPr>
+            <a:r>
+              <a:rPr lang="en-US" sz="3600" b="1" dirty="0">
+                <a:solidFill>
+                  <a:srgbClr val="990011"/>
+                </a:solidFill>
+                <a:latin typeface="Times New Roman" pitchFamily="34" charset="0"/>
+                <a:ea typeface="Times New Roman" pitchFamily="34" charset="-122"/>
+                <a:cs typeface="Times New Roman" pitchFamily="34" charset="-120"/>
+              </a:rPr>
+              <a:t>2. Factors of Spatial Interaction (Ullman)</a:t>
+            </a:r>
+            <a:endParaRPr lang="en-US" sz="3600" dirty="0"/>
+          </a:p>
+        </p:txBody>
+      </p:sp>
+      <p:sp>
+        <p:nvSpPr>
+          <p:cNvPr id="4" name="Text 2"/>
+          <p:cNvSpPr/>
+          <p:nvPr/>
+        </p:nvSpPr>
+        <p:spPr>
+          <a:xfrm>
+            <a:off x="365760" y="1783080"/>
+            <a:ext cx="4846320" cy="4617720"/>
+          </a:xfrm>
+          <a:prstGeom prst="rect">
+            <a:avLst/>
+          </a:prstGeom>
+          <a:noFill/>
+          <a:ln/>
+        </p:spPr>
+        <p:txBody>
+          <a:bodyPr wrap="square" lIns="0" tIns="0" rIns="0" bIns="0" rtlCol="0" anchor="t"/>
+          <a:lstStyle/>
+          <a:p>
+            <a:pPr algn="l" indent="0" marL="0">
+              <a:spcAft>
+                <a:spcPts val="800"/>
+              </a:spcAft>
+              <a:buNone/>
+            </a:pPr>
+            <a:r>
+              <a:rPr lang="en-US" sz="3000" i="1" dirty="0">
+                <a:solidFill>
+                  <a:srgbClr val="111111"/>
+                </a:solidFill>
+                <a:latin typeface="Times New Roman" pitchFamily="34" charset="0"/>
+                <a:ea typeface="Times New Roman" pitchFamily="34" charset="-122"/>
+                <a:cs typeface="Times New Roman" pitchFamily="34" charset="-120"/>
+              </a:rPr>
+              <a:t>The factors of spatial interaction identified by Edward Ullman are the following:</a:t>
+            </a:r>
+            <a:endParaRPr lang="en-US" sz="3000" dirty="0"/>
+          </a:p>
+          <a:p>
+            <a:pPr algn="l" indent="0" marL="0">
+              <a:spcAft>
+                <a:spcPts val="800"/>
+              </a:spcAft>
+              <a:buNone/>
+            </a:pPr>
+            <a:r>
+              <a:rPr lang="en-US" sz="3000" b="1" dirty="0">
+                <a:solidFill>
+                  <a:srgbClr val="111111"/>
+                </a:solidFill>
+                <a:latin typeface="Times New Roman" pitchFamily="34" charset="0"/>
+                <a:ea typeface="Times New Roman" pitchFamily="34" charset="-122"/>
+                <a:cs typeface="Times New Roman" pitchFamily="34" charset="-120"/>
+              </a:rPr>
+              <a:t>Complementarity: </a:t>
+            </a:r>
+            <a:pPr algn="l" indent="0" marL="0">
+              <a:spcAft>
+                <a:spcPts val="800"/>
+              </a:spcAft>
+              <a:buNone/>
+            </a:pPr>
+            <a:r>
+              <a:rPr lang="en-US" sz="3000" dirty="0">
+                <a:solidFill>
+                  <a:srgbClr val="111111"/>
+                </a:solidFill>
+                <a:latin typeface="Times New Roman" pitchFamily="34" charset="0"/>
+                <a:ea typeface="Times New Roman" pitchFamily="34" charset="-122"/>
+                <a:cs typeface="Times New Roman" pitchFamily="34" charset="-120"/>
+              </a:rPr>
+              <a:t>One area has a surplus and another has a demand, as the cotton of the North and the textile factories of Douala.</a:t>
+            </a:r>
+            <a:endParaRPr lang="en-US" sz="3000" dirty="0"/>
           </a:p>
         </p:txBody>
       </p:sp>
       <p:pic>
         <p:nvPicPr>
-          <p:cNvPr id="3" name="Image 0" descr="/home/claude/f4/img/minesec_sheet.png">    </p:cNvPr>
+          <p:cNvPr id="5" name="Image 0" descr="/home/claude/f4/img/v2/pop2_ullman4.png">    </p:cNvPr>
           <p:cNvPicPr>
             <a:picLocks noChangeAspect="1"/>
           </p:cNvPicPr>
@@ -15829,8 +16510,8 @@
         </p:blipFill>
         <p:spPr>
           <a:xfrm>
-            <a:off x="0" y="658368"/>
-            <a:ext cx="5120640" cy="5833872"/>
+            <a:off x="5349240" y="2617506"/>
+            <a:ext cx="6659575" cy="2601397"/>
           </a:xfrm>
           <a:prstGeom prst="rect">
             <a:avLst/>
@@ -15839,14 +16520,14 @@
       </p:pic>
       <p:sp>
         <p:nvSpPr>
-          <p:cNvPr id="4" name="Text 1"/>
+          <p:cNvPr id="6" name="Text 3"/>
           <p:cNvSpPr/>
           <p:nvPr/>
         </p:nvSpPr>
         <p:spPr>
           <a:xfrm>
-            <a:off x="5349240" y="1005840"/>
-            <a:ext cx="6522415" cy="731520"/>
+            <a:off x="5349240" y="6089904"/>
+            <a:ext cx="6659575" cy="347472"/>
           </a:xfrm>
           <a:prstGeom prst="rect">
             <a:avLst/>
@@ -15855,68 +16536,24 @@
           <a:ln/>
         </p:spPr>
         <p:txBody>
-          <a:bodyPr wrap="square" lIns="0" tIns="0" rIns="0" bIns="0" rtlCol="0" anchor="ctr">
-            <a:normAutofit/>
-          </a:bodyPr>
+          <a:bodyPr wrap="square" lIns="0" tIns="0" rIns="0" bIns="0" rtlCol="0" anchor="ctr"/>
           <a:lstStyle/>
           <a:p>
             <a:pPr algn="ctr" indent="0" marL="0">
               <a:buNone/>
             </a:pPr>
             <a:r>
-              <a:rPr lang="en-US" sz="3600" b="1" dirty="0">
-                <a:solidFill>
-                  <a:srgbClr val="990011"/>
+              <a:rPr lang="en-US" sz="1600" i="1" dirty="0">
+                <a:solidFill>
+                  <a:srgbClr val="555555"/>
                 </a:solidFill>
                 <a:latin typeface="Times New Roman" pitchFamily="34" charset="0"/>
                 <a:ea typeface="Times New Roman" pitchFamily="34" charset="-122"/>
                 <a:cs typeface="Times New Roman" pitchFamily="34" charset="-120"/>
               </a:rPr>
-              <a:t>Expected Answer</a:t>
-            </a:r>
-            <a:endParaRPr lang="en-US" sz="3600" dirty="0"/>
-          </a:p>
-        </p:txBody>
-      </p:sp>
-      <p:sp>
-        <p:nvSpPr>
-          <p:cNvPr id="5" name="Text 2"/>
-          <p:cNvSpPr/>
-          <p:nvPr/>
-        </p:nvSpPr>
-        <p:spPr>
-          <a:xfrm>
-            <a:off x="5349240" y="1783080"/>
-            <a:ext cx="6522415" cy="4663440"/>
-          </a:xfrm>
-          <a:prstGeom prst="rect">
-            <a:avLst/>
-          </a:prstGeom>
-          <a:noFill/>
-          <a:ln/>
-        </p:spPr>
-        <p:txBody>
-          <a:bodyPr wrap="square" lIns="0" tIns="0" rIns="0" bIns="0" rtlCol="0" anchor="t"/>
-          <a:lstStyle/>
-          <a:p>
-            <a:pPr algn="l" indent="0" marL="0">
-              <a:spcAft>
-                <a:spcPts val="800"/>
-              </a:spcAft>
-              <a:buNone/>
-            </a:pPr>
-            <a:r>
-              <a:rPr lang="en-US" sz="4000" dirty="0">
-                <a:solidFill>
-                  <a:srgbClr val="111111"/>
-                </a:solidFill>
-                <a:latin typeface="Times New Roman" pitchFamily="34" charset="0"/>
-                <a:ea typeface="Times New Roman" pitchFamily="34" charset="-122"/>
-                <a:cs typeface="Times New Roman" pitchFamily="34" charset="-120"/>
-              </a:rPr>
-              <a:t>Complementarity, transferability and intervening opportunity.</a:t>
-            </a:r>
-            <a:endParaRPr lang="en-US" sz="4000" dirty="0"/>
+              <a:t>Illustration: factors of spatial interaction</a:t>
+            </a:r>
+            <a:endParaRPr lang="en-US" sz="1600" dirty="0"/>
           </a:p>
         </p:txBody>
       </p:sp>
@@ -16026,15 +16663,115 @@
                 <a:ea typeface="Calibri" pitchFamily="34" charset="-122"/>
                 <a:cs typeface="Calibri" pitchFamily="34" charset="-120"/>
               </a:rPr>
-              <a:t>FORMATIVE EVALUATION</a:t>
+              <a:t>BOARD SUMMARY</a:t>
             </a:r>
             <a:endParaRPr lang="en-US" sz="1400" dirty="0"/>
+          </a:p>
+        </p:txBody>
+      </p:sp>
+      <p:sp>
+        <p:nvSpPr>
+          <p:cNvPr id="3" name="Text 1"/>
+          <p:cNvSpPr/>
+          <p:nvPr/>
+        </p:nvSpPr>
+        <p:spPr>
+          <a:xfrm>
+            <a:off x="365760" y="1005840"/>
+            <a:ext cx="11460175" cy="731520"/>
+          </a:xfrm>
+          <a:prstGeom prst="rect">
+            <a:avLst/>
+          </a:prstGeom>
+          <a:noFill/>
+          <a:ln/>
+        </p:spPr>
+        <p:txBody>
+          <a:bodyPr wrap="square" lIns="0" tIns="0" rIns="0" bIns="0" rtlCol="0" anchor="ctr">
+            <a:normAutofit/>
+          </a:bodyPr>
+          <a:lstStyle/>
+          <a:p>
+            <a:pPr algn="ctr" indent="0" marL="0">
+              <a:buNone/>
+            </a:pPr>
+            <a:r>
+              <a:rPr lang="en-US" sz="3600" b="1" dirty="0">
+                <a:solidFill>
+                  <a:srgbClr val="990011"/>
+                </a:solidFill>
+                <a:latin typeface="Times New Roman" pitchFamily="34" charset="0"/>
+                <a:ea typeface="Times New Roman" pitchFamily="34" charset="-122"/>
+                <a:cs typeface="Times New Roman" pitchFamily="34" charset="-120"/>
+              </a:rPr>
+              <a:t>2. Factors of Spatial Interaction (Ullman)</a:t>
+            </a:r>
+            <a:endParaRPr lang="en-US" sz="3600" dirty="0"/>
+          </a:p>
+        </p:txBody>
+      </p:sp>
+      <p:sp>
+        <p:nvSpPr>
+          <p:cNvPr id="4" name="Text 2"/>
+          <p:cNvSpPr/>
+          <p:nvPr/>
+        </p:nvSpPr>
+        <p:spPr>
+          <a:xfrm>
+            <a:off x="365760" y="1783080"/>
+            <a:ext cx="4846320" cy="4617720"/>
+          </a:xfrm>
+          <a:prstGeom prst="rect">
+            <a:avLst/>
+          </a:prstGeom>
+          <a:noFill/>
+          <a:ln/>
+        </p:spPr>
+        <p:txBody>
+          <a:bodyPr wrap="square" lIns="0" tIns="0" rIns="0" bIns="0" rtlCol="0" anchor="t"/>
+          <a:lstStyle/>
+          <a:p>
+            <a:pPr algn="l" indent="0" marL="0">
+              <a:spcAft>
+                <a:spcPts val="800"/>
+              </a:spcAft>
+              <a:buNone/>
+            </a:pPr>
+            <a:r>
+              <a:rPr lang="en-US" sz="3600" b="1" dirty="0">
+                <a:solidFill>
+                  <a:srgbClr val="111111"/>
+                </a:solidFill>
+                <a:latin typeface="Times New Roman" pitchFamily="34" charset="0"/>
+                <a:ea typeface="Times New Roman" pitchFamily="34" charset="-122"/>
+                <a:cs typeface="Times New Roman" pitchFamily="34" charset="-120"/>
+              </a:rPr>
+              <a:t>Transferability: </a:t>
+            </a:r>
+            <a:pPr algn="l" indent="0" marL="0">
+              <a:spcAft>
+                <a:spcPts val="800"/>
+              </a:spcAft>
+              <a:buNone/>
+            </a:pPr>
+            <a:r>
+              <a:rPr lang="en-US" sz="3600" dirty="0">
+                <a:solidFill>
+                  <a:srgbClr val="111111"/>
+                </a:solidFill>
+                <a:latin typeface="Times New Roman" pitchFamily="34" charset="0"/>
+                <a:ea typeface="Times New Roman" pitchFamily="34" charset="-122"/>
+                <a:cs typeface="Times New Roman" pitchFamily="34" charset="-120"/>
+              </a:rPr>
+              <a:t>Goods must be cheap and easy to move; good roads allow onions to go from Garoua to Maroua by lorry.</a:t>
+            </a:r>
+            <a:endParaRPr lang="en-US" sz="3600" dirty="0"/>
           </a:p>
         </p:txBody>
       </p:sp>
       <p:pic>
         <p:nvPicPr>
-          <p:cNvPr id="3" name="Image 0" descr="/home/claude/f4/img/minesec_sheet.png">    </p:cNvPr>
+          <p:cNvPr id="5" name="Image 0" descr="/home/claude/f4/img/v2/f2t_cotton_harvest.jpg">    </p:cNvPr>
           <p:cNvPicPr>
             <a:picLocks noChangeAspect="1"/>
           </p:cNvPicPr>
@@ -16048,8 +16785,8 @@
         </p:blipFill>
         <p:spPr>
           <a:xfrm>
-            <a:off x="0" y="658368"/>
-            <a:ext cx="5120640" cy="5833872"/>
+            <a:off x="5349240" y="2069407"/>
+            <a:ext cx="6659575" cy="3697594"/>
           </a:xfrm>
           <a:prstGeom prst="rect">
             <a:avLst/>
@@ -16058,14 +16795,14 @@
       </p:pic>
       <p:sp>
         <p:nvSpPr>
-          <p:cNvPr id="4" name="Text 1"/>
+          <p:cNvPr id="6" name="Text 3"/>
           <p:cNvSpPr/>
           <p:nvPr/>
         </p:nvSpPr>
         <p:spPr>
           <a:xfrm>
-            <a:off x="5349240" y="1005840"/>
-            <a:ext cx="6522415" cy="731520"/>
+            <a:off x="5349240" y="6089904"/>
+            <a:ext cx="6659575" cy="347472"/>
           </a:xfrm>
           <a:prstGeom prst="rect">
             <a:avLst/>
@@ -16074,68 +16811,24 @@
           <a:ln/>
         </p:spPr>
         <p:txBody>
-          <a:bodyPr wrap="square" lIns="0" tIns="0" rIns="0" bIns="0" rtlCol="0" anchor="ctr">
-            <a:normAutofit/>
-          </a:bodyPr>
+          <a:bodyPr wrap="square" lIns="0" tIns="0" rIns="0" bIns="0" rtlCol="0" anchor="ctr"/>
           <a:lstStyle/>
           <a:p>
             <a:pPr algn="ctr" indent="0" marL="0">
               <a:buNone/>
             </a:pPr>
             <a:r>
-              <a:rPr lang="en-US" sz="3600" b="1" dirty="0">
-                <a:solidFill>
-                  <a:srgbClr val="990011"/>
+              <a:rPr lang="en-US" sz="1600" i="1" dirty="0">
+                <a:solidFill>
+                  <a:srgbClr val="555555"/>
                 </a:solidFill>
                 <a:latin typeface="Times New Roman" pitchFamily="34" charset="0"/>
                 <a:ea typeface="Times New Roman" pitchFamily="34" charset="-122"/>
                 <a:cs typeface="Times New Roman" pitchFamily="34" charset="-120"/>
               </a:rPr>
-              <a:t>Evaluation 2</a:t>
-            </a:r>
-            <a:endParaRPr lang="en-US" sz="3600" dirty="0"/>
-          </a:p>
-        </p:txBody>
-      </p:sp>
-      <p:sp>
-        <p:nvSpPr>
-          <p:cNvPr id="5" name="Text 2"/>
-          <p:cNvSpPr/>
-          <p:nvPr/>
-        </p:nvSpPr>
-        <p:spPr>
-          <a:xfrm>
-            <a:off x="5349240" y="1783080"/>
-            <a:ext cx="6522415" cy="4663440"/>
-          </a:xfrm>
-          <a:prstGeom prst="rect">
-            <a:avLst/>
-          </a:prstGeom>
-          <a:noFill/>
-          <a:ln/>
-        </p:spPr>
-        <p:txBody>
-          <a:bodyPr wrap="square" lIns="0" tIns="0" rIns="0" bIns="0" rtlCol="0" anchor="t"/>
-          <a:lstStyle/>
-          <a:p>
-            <a:pPr algn="l" indent="0" marL="0">
-              <a:spcAft>
-                <a:spcPts val="800"/>
-              </a:spcAft>
-              <a:buNone/>
-            </a:pPr>
-            <a:r>
-              <a:rPr lang="en-US" sz="4000" dirty="0">
-                <a:solidFill>
-                  <a:srgbClr val="111111"/>
-                </a:solidFill>
-                <a:latin typeface="Times New Roman" pitchFamily="34" charset="0"/>
-                <a:ea typeface="Times New Roman" pitchFamily="34" charset="-122"/>
-                <a:cs typeface="Times New Roman" pitchFamily="34" charset="-120"/>
-              </a:rPr>
-              <a:t>How does a new road affect interaction?</a:t>
-            </a:r>
-            <a:endParaRPr lang="en-US" sz="4000" dirty="0"/>
+              <a:t>Illustration: cotton, a surplus of the North</a:t>
+            </a:r>
+            <a:endParaRPr lang="en-US" sz="1600" dirty="0"/>
           </a:p>
         </p:txBody>
       </p:sp>
@@ -16245,15 +16938,115 @@
                 <a:ea typeface="Calibri" pitchFamily="34" charset="-122"/>
                 <a:cs typeface="Calibri" pitchFamily="34" charset="-120"/>
               </a:rPr>
-              <a:t>FORMATIVE EVALUATION</a:t>
+              <a:t>BOARD SUMMARY</a:t>
             </a:r>
             <a:endParaRPr lang="en-US" sz="1400" dirty="0"/>
+          </a:p>
+        </p:txBody>
+      </p:sp>
+      <p:sp>
+        <p:nvSpPr>
+          <p:cNvPr id="3" name="Text 1"/>
+          <p:cNvSpPr/>
+          <p:nvPr/>
+        </p:nvSpPr>
+        <p:spPr>
+          <a:xfrm>
+            <a:off x="365760" y="1005840"/>
+            <a:ext cx="11460175" cy="731520"/>
+          </a:xfrm>
+          <a:prstGeom prst="rect">
+            <a:avLst/>
+          </a:prstGeom>
+          <a:noFill/>
+          <a:ln/>
+        </p:spPr>
+        <p:txBody>
+          <a:bodyPr wrap="square" lIns="0" tIns="0" rIns="0" bIns="0" rtlCol="0" anchor="ctr">
+            <a:normAutofit/>
+          </a:bodyPr>
+          <a:lstStyle/>
+          <a:p>
+            <a:pPr algn="ctr" indent="0" marL="0">
+              <a:buNone/>
+            </a:pPr>
+            <a:r>
+              <a:rPr lang="en-US" sz="3600" b="1" dirty="0">
+                <a:solidFill>
+                  <a:srgbClr val="990011"/>
+                </a:solidFill>
+                <a:latin typeface="Times New Roman" pitchFamily="34" charset="0"/>
+                <a:ea typeface="Times New Roman" pitchFamily="34" charset="-122"/>
+                <a:cs typeface="Times New Roman" pitchFamily="34" charset="-120"/>
+              </a:rPr>
+              <a:t>2. Factors of Spatial Interaction (Ullman)</a:t>
+            </a:r>
+            <a:endParaRPr lang="en-US" sz="3600" dirty="0"/>
+          </a:p>
+        </p:txBody>
+      </p:sp>
+      <p:sp>
+        <p:nvSpPr>
+          <p:cNvPr id="4" name="Text 2"/>
+          <p:cNvSpPr/>
+          <p:nvPr/>
+        </p:nvSpPr>
+        <p:spPr>
+          <a:xfrm>
+            <a:off x="365760" y="1783080"/>
+            <a:ext cx="4846320" cy="4617720"/>
+          </a:xfrm>
+          <a:prstGeom prst="rect">
+            <a:avLst/>
+          </a:prstGeom>
+          <a:noFill/>
+          <a:ln/>
+        </p:spPr>
+        <p:txBody>
+          <a:bodyPr wrap="square" lIns="0" tIns="0" rIns="0" bIns="0" rtlCol="0" anchor="t"/>
+          <a:lstStyle/>
+          <a:p>
+            <a:pPr algn="l" indent="0" marL="0">
+              <a:spcAft>
+                <a:spcPts val="800"/>
+              </a:spcAft>
+              <a:buNone/>
+            </a:pPr>
+            <a:r>
+              <a:rPr lang="en-US" sz="3600" b="1" dirty="0">
+                <a:solidFill>
+                  <a:srgbClr val="111111"/>
+                </a:solidFill>
+                <a:latin typeface="Times New Roman" pitchFamily="34" charset="0"/>
+                <a:ea typeface="Times New Roman" pitchFamily="34" charset="-122"/>
+                <a:cs typeface="Times New Roman" pitchFamily="34" charset="-120"/>
+              </a:rPr>
+              <a:t>Intervening opportunity: </a:t>
+            </a:r>
+            <a:pPr algn="l" indent="0" marL="0">
+              <a:spcAft>
+                <a:spcPts val="800"/>
+              </a:spcAft>
+              <a:buNone/>
+            </a:pPr>
+            <a:r>
+              <a:rPr lang="en-US" sz="3600" dirty="0">
+                <a:solidFill>
+                  <a:srgbClr val="111111"/>
+                </a:solidFill>
+                <a:latin typeface="Times New Roman" pitchFamily="34" charset="0"/>
+                <a:ea typeface="Times New Roman" pitchFamily="34" charset="-122"/>
+                <a:cs typeface="Times New Roman" pitchFamily="34" charset="-120"/>
+              </a:rPr>
+              <a:t>A nearer or cheaper place replaces a distant one, as a new university in Ngaoundéré for students of Garoua.</a:t>
+            </a:r>
+            <a:endParaRPr lang="en-US" sz="3600" dirty="0"/>
           </a:p>
         </p:txBody>
       </p:sp>
       <p:pic>
         <p:nvPicPr>
-          <p:cNvPr id="3" name="Image 0" descr="/home/claude/f4/img/minesec_sheet.png">    </p:cNvPr>
+          <p:cNvPr id="5" name="Image 0" descr="/home/claude/f4/img/v2/stouffer_big.png">    </p:cNvPr>
           <p:cNvPicPr>
             <a:picLocks noChangeAspect="1"/>
           </p:cNvPicPr>
@@ -16267,8 +17060,8 @@
         </p:blipFill>
         <p:spPr>
           <a:xfrm>
-            <a:off x="0" y="658368"/>
-            <a:ext cx="5120640" cy="5833872"/>
+            <a:off x="5349240" y="2617506"/>
+            <a:ext cx="6659575" cy="2601397"/>
           </a:xfrm>
           <a:prstGeom prst="rect">
             <a:avLst/>
@@ -16277,14 +17070,14 @@
       </p:pic>
       <p:sp>
         <p:nvSpPr>
-          <p:cNvPr id="4" name="Text 1"/>
+          <p:cNvPr id="6" name="Text 3"/>
           <p:cNvSpPr/>
           <p:nvPr/>
         </p:nvSpPr>
         <p:spPr>
           <a:xfrm>
-            <a:off x="5349240" y="1005840"/>
-            <a:ext cx="6522415" cy="731520"/>
+            <a:off x="5349240" y="6089904"/>
+            <a:ext cx="6659575" cy="347472"/>
           </a:xfrm>
           <a:prstGeom prst="rect">
             <a:avLst/>
@@ -16293,68 +17086,24 @@
           <a:ln/>
         </p:spPr>
         <p:txBody>
-          <a:bodyPr wrap="square" lIns="0" tIns="0" rIns="0" bIns="0" rtlCol="0" anchor="ctr">
-            <a:normAutofit/>
-          </a:bodyPr>
+          <a:bodyPr wrap="square" lIns="0" tIns="0" rIns="0" bIns="0" rtlCol="0" anchor="ctr"/>
           <a:lstStyle/>
           <a:p>
             <a:pPr algn="ctr" indent="0" marL="0">
               <a:buNone/>
             </a:pPr>
             <a:r>
-              <a:rPr lang="en-US" sz="3600" b="1" dirty="0">
-                <a:solidFill>
-                  <a:srgbClr val="990011"/>
+              <a:rPr lang="en-US" sz="1600" i="1" dirty="0">
+                <a:solidFill>
+                  <a:srgbClr val="555555"/>
                 </a:solidFill>
                 <a:latin typeface="Times New Roman" pitchFamily="34" charset="0"/>
                 <a:ea typeface="Times New Roman" pitchFamily="34" charset="-122"/>
                 <a:cs typeface="Times New Roman" pitchFamily="34" charset="-120"/>
               </a:rPr>
-              <a:t>Expected Answer</a:t>
-            </a:r>
-            <a:endParaRPr lang="en-US" sz="3600" dirty="0"/>
-          </a:p>
-        </p:txBody>
-      </p:sp>
-      <p:sp>
-        <p:nvSpPr>
-          <p:cNvPr id="5" name="Text 2"/>
-          <p:cNvSpPr/>
-          <p:nvPr/>
-        </p:nvSpPr>
-        <p:spPr>
-          <a:xfrm>
-            <a:off x="5349240" y="1783080"/>
-            <a:ext cx="6522415" cy="4663440"/>
-          </a:xfrm>
-          <a:prstGeom prst="rect">
-            <a:avLst/>
-          </a:prstGeom>
-          <a:noFill/>
-          <a:ln/>
-        </p:spPr>
-        <p:txBody>
-          <a:bodyPr wrap="square" lIns="0" tIns="0" rIns="0" bIns="0" rtlCol="0" anchor="t"/>
-          <a:lstStyle/>
-          <a:p>
-            <a:pPr algn="l" indent="0" marL="0">
-              <a:spcAft>
-                <a:spcPts val="800"/>
-              </a:spcAft>
-              <a:buNone/>
-            </a:pPr>
-            <a:r>
-              <a:rPr lang="en-US" sz="4000" dirty="0">
-                <a:solidFill>
-                  <a:srgbClr val="111111"/>
-                </a:solidFill>
-                <a:latin typeface="Times New Roman" pitchFamily="34" charset="0"/>
-                <a:ea typeface="Times New Roman" pitchFamily="34" charset="-122"/>
-                <a:cs typeface="Times New Roman" pitchFamily="34" charset="-120"/>
-              </a:rPr>
-              <a:t>It increases transferability by lowering cost and time.</a:t>
-            </a:r>
-            <a:endParaRPr lang="en-US" sz="4000" dirty="0"/>
+              <a:t>Illustration: a nearer opportunity</a:t>
+            </a:r>
+            <a:endParaRPr lang="en-US" sz="1600" dirty="0"/>
           </a:p>
         </p:txBody>
       </p:sp>
@@ -16464,15 +17213,115 @@
                 <a:ea typeface="Calibri" pitchFamily="34" charset="-122"/>
                 <a:cs typeface="Calibri" pitchFamily="34" charset="-120"/>
               </a:rPr>
-              <a:t>REMEDIATION</a:t>
+              <a:t>BOARD SUMMARY</a:t>
             </a:r>
             <a:endParaRPr lang="en-US" sz="1400" dirty="0"/>
+          </a:p>
+        </p:txBody>
+      </p:sp>
+      <p:sp>
+        <p:nvSpPr>
+          <p:cNvPr id="3" name="Text 1"/>
+          <p:cNvSpPr/>
+          <p:nvPr/>
+        </p:nvSpPr>
+        <p:spPr>
+          <a:xfrm>
+            <a:off x="365760" y="1005840"/>
+            <a:ext cx="11460175" cy="731520"/>
+          </a:xfrm>
+          <a:prstGeom prst="rect">
+            <a:avLst/>
+          </a:prstGeom>
+          <a:noFill/>
+          <a:ln/>
+        </p:spPr>
+        <p:txBody>
+          <a:bodyPr wrap="square" lIns="0" tIns="0" rIns="0" bIns="0" rtlCol="0" anchor="ctr">
+            <a:normAutofit/>
+          </a:bodyPr>
+          <a:lstStyle/>
+          <a:p>
+            <a:pPr algn="ctr" indent="0" marL="0">
+              <a:buNone/>
+            </a:pPr>
+            <a:r>
+              <a:rPr lang="en-US" sz="3600" b="1" dirty="0">
+                <a:solidFill>
+                  <a:srgbClr val="990011"/>
+                </a:solidFill>
+                <a:latin typeface="Times New Roman" pitchFamily="34" charset="0"/>
+                <a:ea typeface="Times New Roman" pitchFamily="34" charset="-122"/>
+                <a:cs typeface="Times New Roman" pitchFamily="34" charset="-120"/>
+              </a:rPr>
+              <a:t>2. Factors of Spatial Interaction (Ullman)</a:t>
+            </a:r>
+            <a:endParaRPr lang="en-US" sz="3600" dirty="0"/>
+          </a:p>
+        </p:txBody>
+      </p:sp>
+      <p:sp>
+        <p:nvSpPr>
+          <p:cNvPr id="4" name="Text 2"/>
+          <p:cNvSpPr/>
+          <p:nvPr/>
+        </p:nvSpPr>
+        <p:spPr>
+          <a:xfrm>
+            <a:off x="365760" y="1783080"/>
+            <a:ext cx="4846320" cy="4617720"/>
+          </a:xfrm>
+          <a:prstGeom prst="rect">
+            <a:avLst/>
+          </a:prstGeom>
+          <a:noFill/>
+          <a:ln/>
+        </p:spPr>
+        <p:txBody>
+          <a:bodyPr wrap="square" lIns="0" tIns="0" rIns="0" bIns="0" rtlCol="0" anchor="t"/>
+          <a:lstStyle/>
+          <a:p>
+            <a:pPr algn="l" indent="0" marL="0">
+              <a:spcAft>
+                <a:spcPts val="800"/>
+              </a:spcAft>
+              <a:buNone/>
+            </a:pPr>
+            <a:r>
+              <a:rPr lang="en-US" sz="3600" b="1" dirty="0">
+                <a:solidFill>
+                  <a:srgbClr val="111111"/>
+                </a:solidFill>
+                <a:latin typeface="Times New Roman" pitchFamily="34" charset="0"/>
+                <a:ea typeface="Times New Roman" pitchFamily="34" charset="-122"/>
+                <a:cs typeface="Times New Roman" pitchFamily="34" charset="-120"/>
+              </a:rPr>
+              <a:t>Distance decay: </a:t>
+            </a:r>
+            <a:pPr algn="l" indent="0" marL="0">
+              <a:spcAft>
+                <a:spcPts val="800"/>
+              </a:spcAft>
+              <a:buNone/>
+            </a:pPr>
+            <a:r>
+              <a:rPr lang="en-US" sz="3600" dirty="0">
+                <a:solidFill>
+                  <a:srgbClr val="111111"/>
+                </a:solidFill>
+                <a:latin typeface="Times New Roman" pitchFamily="34" charset="0"/>
+                <a:ea typeface="Times New Roman" pitchFamily="34" charset="-122"/>
+                <a:cs typeface="Times New Roman" pitchFamily="34" charset="-120"/>
+              </a:rPr>
+              <a:t>Interaction falls as distance rises, so people visit friends in their quarter more than friends in Kribi.</a:t>
+            </a:r>
+            <a:endParaRPr lang="en-US" sz="3600" dirty="0"/>
           </a:p>
         </p:txBody>
       </p:sp>
       <p:pic>
         <p:nvPicPr>
-          <p:cNvPr id="3" name="Image 0" descr="/home/claude/f4/img/minesec_sheet.png">    </p:cNvPr>
+          <p:cNvPr id="5" name="Image 0" descr="/home/claude/f4/img/v2/zipf_big.png">    </p:cNvPr>
           <p:cNvPicPr>
             <a:picLocks noChangeAspect="1"/>
           </p:cNvPicPr>
@@ -16486,8 +17335,8 @@
         </p:blipFill>
         <p:spPr>
           <a:xfrm>
-            <a:off x="0" y="658368"/>
-            <a:ext cx="3840480" cy="5833872"/>
+            <a:off x="5349240" y="2461422"/>
+            <a:ext cx="6659575" cy="2913564"/>
           </a:xfrm>
           <a:prstGeom prst="rect">
             <a:avLst/>
@@ -16496,14 +17345,14 @@
       </p:pic>
       <p:sp>
         <p:nvSpPr>
-          <p:cNvPr id="4" name="Text 1"/>
+          <p:cNvPr id="6" name="Text 3"/>
           <p:cNvSpPr/>
           <p:nvPr/>
         </p:nvSpPr>
         <p:spPr>
           <a:xfrm>
-            <a:off x="4069080" y="1005840"/>
-            <a:ext cx="7802575" cy="731520"/>
+            <a:off x="5349240" y="6089904"/>
+            <a:ext cx="6659575" cy="347472"/>
           </a:xfrm>
           <a:prstGeom prst="rect">
             <a:avLst/>
@@ -16512,134 +17361,24 @@
           <a:ln/>
         </p:spPr>
         <p:txBody>
-          <a:bodyPr wrap="square" lIns="0" tIns="0" rIns="0" bIns="0" rtlCol="0" anchor="ctr">
-            <a:normAutofit/>
-          </a:bodyPr>
+          <a:bodyPr wrap="square" lIns="0" tIns="0" rIns="0" bIns="0" rtlCol="0" anchor="ctr"/>
           <a:lstStyle/>
           <a:p>
             <a:pPr algn="ctr" indent="0" marL="0">
               <a:buNone/>
             </a:pPr>
             <a:r>
-              <a:rPr lang="en-US" sz="3600" b="1" dirty="0">
-                <a:solidFill>
-                  <a:srgbClr val="990011"/>
+              <a:rPr lang="en-US" sz="1600" i="1" dirty="0">
+                <a:solidFill>
+                  <a:srgbClr val="555555"/>
                 </a:solidFill>
                 <a:latin typeface="Times New Roman" pitchFamily="34" charset="0"/>
                 <a:ea typeface="Times New Roman" pitchFamily="34" charset="-122"/>
                 <a:cs typeface="Times New Roman" pitchFamily="34" charset="-120"/>
               </a:rPr>
-              <a:t>Remediation</a:t>
-            </a:r>
-            <a:endParaRPr lang="en-US" sz="3600" dirty="0"/>
-          </a:p>
-        </p:txBody>
-      </p:sp>
-      <p:sp>
-        <p:nvSpPr>
-          <p:cNvPr id="5" name="Text 2"/>
-          <p:cNvSpPr/>
-          <p:nvPr/>
-        </p:nvSpPr>
-        <p:spPr>
-          <a:xfrm>
-            <a:off x="4069080" y="1783080"/>
-            <a:ext cx="7802575" cy="4663440"/>
-          </a:xfrm>
-          <a:prstGeom prst="rect">
-            <a:avLst/>
-          </a:prstGeom>
-          <a:noFill/>
-          <a:ln/>
-        </p:spPr>
-        <p:txBody>
-          <a:bodyPr wrap="square" lIns="0" tIns="0" rIns="0" bIns="0" rtlCol="0" anchor="t"/>
-          <a:lstStyle/>
-          <a:p>
-            <a:pPr algn="l" indent="0" marL="0">
-              <a:spcAft>
-                <a:spcPts val="800"/>
-              </a:spcAft>
-              <a:buNone/>
-            </a:pPr>
-            <a:r>
-              <a:rPr lang="en-US" sz="4000" b="1" dirty="0">
-                <a:solidFill>
-                  <a:srgbClr val="111111"/>
-                </a:solidFill>
-                <a:latin typeface="Times New Roman" pitchFamily="34" charset="0"/>
-                <a:ea typeface="Times New Roman" pitchFamily="34" charset="-122"/>
-                <a:cs typeface="Times New Roman" pitchFamily="34" charset="-120"/>
-              </a:rPr>
-              <a:t>Fill in the blanks:</a:t>
-            </a:r>
-            <a:endParaRPr lang="en-US" sz="4000" dirty="0"/>
-          </a:p>
-          <a:p>
-            <a:pPr algn="l" marL="342900" indent="-342900">
-              <a:spcAft>
-                <a:spcPts val="800"/>
-              </a:spcAft>
-              <a:buSzPct val="100000"/>
-              <a:buFont typeface="+mj-lt"/>
-              <a:buAutoNum type="arabicPeriod" startAt="1"/>
-            </a:pPr>
-            <a:r>
-              <a:rPr lang="en-US" sz="4000" dirty="0">
-                <a:solidFill>
-                  <a:srgbClr val="111111"/>
-                </a:solidFill>
-                <a:latin typeface="Times New Roman" pitchFamily="34" charset="0"/>
-                <a:ea typeface="Times New Roman" pitchFamily="34" charset="-122"/>
-                <a:cs typeface="Times New Roman" pitchFamily="34" charset="-120"/>
-              </a:rPr>
-              <a:t>Movement between places is spatial ______.</a:t>
-            </a:r>
-            <a:endParaRPr lang="en-US" sz="4000" dirty="0"/>
-          </a:p>
-          <a:p>
-            <a:pPr algn="l" marL="342900" indent="-342900">
-              <a:spcAft>
-                <a:spcPts val="800"/>
-              </a:spcAft>
-              <a:buSzPct val="100000"/>
-              <a:buFont typeface="+mj-lt"/>
-              <a:buAutoNum type="arabicPeriod" startAt="1"/>
-            </a:pPr>
-            <a:r>
-              <a:rPr lang="en-US" sz="4000" dirty="0">
-                <a:solidFill>
-                  <a:srgbClr val="111111"/>
-                </a:solidFill>
-                <a:latin typeface="Times New Roman" pitchFamily="34" charset="0"/>
-                <a:ea typeface="Times New Roman" pitchFamily="34" charset="-122"/>
-                <a:cs typeface="Times New Roman" pitchFamily="34" charset="-120"/>
-              </a:rPr>
-              <a:t>One place needing what another has is ______.</a:t>
-            </a:r>
-            <a:endParaRPr lang="en-US" sz="4000" dirty="0"/>
-          </a:p>
-          <a:p>
-            <a:pPr algn="l" marL="342900" indent="-342900">
-              <a:spcAft>
-                <a:spcPts val="800"/>
-              </a:spcAft>
-              <a:buSzPct val="100000"/>
-              <a:buFont typeface="+mj-lt"/>
-              <a:buAutoNum type="arabicPeriod" startAt="1"/>
-            </a:pPr>
-            <a:r>
-              <a:rPr lang="en-US" sz="4000" dirty="0">
-                <a:solidFill>
-                  <a:srgbClr val="111111"/>
-                </a:solidFill>
-                <a:latin typeface="Times New Roman" pitchFamily="34" charset="0"/>
-                <a:ea typeface="Times New Roman" pitchFamily="34" charset="-122"/>
-                <a:cs typeface="Times New Roman" pitchFamily="34" charset="-120"/>
-              </a:rPr>
-              <a:t>Ease of movement is ______.</a:t>
-            </a:r>
-            <a:endParaRPr lang="en-US" sz="4000" dirty="0"/>
+              <a:t>Illustration: interaction and distance</a:t>
+            </a:r>
+            <a:endParaRPr lang="en-US" sz="1600" dirty="0"/>
           </a:p>
         </p:txBody>
       </p:sp>
@@ -16749,7 +17488,7 @@
                 <a:ea typeface="Calibri" pitchFamily="34" charset="-122"/>
                 <a:cs typeface="Calibri" pitchFamily="34" charset="-120"/>
               </a:rPr>
-              <a:t>HOMEWORK</a:t>
+              <a:t>FORMATIVE EVALUATION</a:t>
             </a:r>
             <a:endParaRPr lang="en-US" sz="1400" dirty="0"/>
           </a:p>
@@ -16814,7 +17553,7 @@
                 <a:ea typeface="Times New Roman" pitchFamily="34" charset="-122"/>
                 <a:cs typeface="Times New Roman" pitchFamily="34" charset="-120"/>
               </a:rPr>
-              <a:t>Homework</a:t>
+              <a:t>Evaluation 1</a:t>
             </a:r>
             <a:endParaRPr lang="en-US" sz="3600" dirty="0"/>
           </a:p>
@@ -16856,7 +17595,7 @@
                 <a:ea typeface="Times New Roman" pitchFamily="34" charset="-122"/>
                 <a:cs typeface="Times New Roman" pitchFamily="34" charset="-120"/>
               </a:rPr>
-              <a:t>List goods that come to your town from other regions and say why.</a:t>
+              <a:t>Explain complementarity with an example.</a:t>
             </a:r>
             <a:endParaRPr lang="en-US" sz="4000" dirty="0"/>
           </a:p>
@@ -16968,7 +17707,7 @@
                 <a:ea typeface="Calibri" pitchFamily="34" charset="-122"/>
                 <a:cs typeface="Calibri" pitchFamily="34" charset="-120"/>
               </a:rPr>
-              <a:t>NEXT LESSON</a:t>
+              <a:t>FORMATIVE EVALUATION</a:t>
             </a:r>
             <a:endParaRPr lang="en-US" sz="1400" dirty="0"/>
           </a:p>
@@ -17033,7 +17772,7 @@
                 <a:ea typeface="Times New Roman" pitchFamily="34" charset="-122"/>
                 <a:cs typeface="Times New Roman" pitchFamily="34" charset="-120"/>
               </a:rPr>
-              <a:t>Next Lesson</a:t>
+              <a:t>Expected Answer</a:t>
             </a:r>
             <a:endParaRPr lang="en-US" sz="3600" dirty="0"/>
           </a:p>
@@ -17057,17 +17796,17 @@
           <a:ln/>
         </p:spPr>
         <p:txBody>
-          <a:bodyPr wrap="square" lIns="0" tIns="0" rIns="0" bIns="0" rtlCol="0" anchor="ctr"/>
-          <a:lstStyle/>
-          <a:p>
-            <a:pPr algn="ctr" indent="0" marL="0">
+          <a:bodyPr wrap="square" lIns="0" tIns="0" rIns="0" bIns="0" rtlCol="0" anchor="t"/>
+          <a:lstStyle/>
+          <a:p>
+            <a:pPr algn="l" indent="0" marL="0">
               <a:spcAft>
                 <a:spcPts val="800"/>
               </a:spcAft>
               <a:buNone/>
             </a:pPr>
             <a:r>
-              <a:rPr lang="en-US" sz="4000" b="1" dirty="0">
+              <a:rPr lang="en-US" sz="4000" dirty="0">
                 <a:solidFill>
                   <a:srgbClr val="111111"/>
                 </a:solidFill>
@@ -17075,27 +17814,7 @@
                 <a:ea typeface="Times New Roman" pitchFamily="34" charset="-122"/>
                 <a:cs typeface="Times New Roman" pitchFamily="34" charset="-120"/>
               </a:rPr>
-              <a:t>Our next lesson will be on:</a:t>
-            </a:r>
-            <a:endParaRPr lang="en-US" sz="4000" dirty="0"/>
-          </a:p>
-          <a:p>
-            <a:pPr algn="ctr" indent="0" marL="0">
-              <a:spcAft>
-                <a:spcPts val="800"/>
-              </a:spcAft>
-              <a:buNone/>
-            </a:pPr>
-            <a:r>
-              <a:rPr lang="en-US" sz="4000" b="1" dirty="0">
-                <a:solidFill>
-                  <a:srgbClr val="990011"/>
-                </a:solidFill>
-                <a:latin typeface="Times New Roman" pitchFamily="34" charset="0"/>
-                <a:ea typeface="Times New Roman" pitchFamily="34" charset="-122"/>
-                <a:cs typeface="Times New Roman" pitchFamily="34" charset="-120"/>
-              </a:rPr>
-              <a:t>Lesson 15: Types of Migration</a:t>
+              <a:t>One place has a surplus that another needs, e.g. cotton from the North sent to textile factories in Douala.</a:t>
             </a:r>
             <a:endParaRPr lang="en-US" sz="4000" dirty="0"/>
           </a:p>
@@ -17207,6 +17926,1406 @@
                 <a:ea typeface="Calibri" pitchFamily="34" charset="-122"/>
                 <a:cs typeface="Calibri" pitchFamily="34" charset="-120"/>
               </a:rPr>
+              <a:t>FORMATIVE EVALUATION</a:t>
+            </a:r>
+            <a:endParaRPr lang="en-US" sz="1400" dirty="0"/>
+          </a:p>
+        </p:txBody>
+      </p:sp>
+      <p:pic>
+        <p:nvPicPr>
+          <p:cNvPr id="3" name="Image 0" descr="/home/claude/f4/img/minesec_sheet.png">    </p:cNvPr>
+          <p:cNvPicPr>
+            <a:picLocks noChangeAspect="1"/>
+          </p:cNvPicPr>
+          <p:nvPr/>
+        </p:nvPicPr>
+        <p:blipFill>
+          <a:blip r:embed="rId1"/>
+          <a:stretch>
+            <a:fillRect/>
+          </a:stretch>
+        </p:blipFill>
+        <p:spPr>
+          <a:xfrm>
+            <a:off x="0" y="658368"/>
+            <a:ext cx="5120640" cy="5833872"/>
+          </a:xfrm>
+          <a:prstGeom prst="rect">
+            <a:avLst/>
+          </a:prstGeom>
+        </p:spPr>
+      </p:pic>
+      <p:sp>
+        <p:nvSpPr>
+          <p:cNvPr id="4" name="Text 1"/>
+          <p:cNvSpPr/>
+          <p:nvPr/>
+        </p:nvSpPr>
+        <p:spPr>
+          <a:xfrm>
+            <a:off x="5349240" y="1005840"/>
+            <a:ext cx="6522415" cy="731520"/>
+          </a:xfrm>
+          <a:prstGeom prst="rect">
+            <a:avLst/>
+          </a:prstGeom>
+          <a:noFill/>
+          <a:ln/>
+        </p:spPr>
+        <p:txBody>
+          <a:bodyPr wrap="square" lIns="0" tIns="0" rIns="0" bIns="0" rtlCol="0" anchor="ctr">
+            <a:normAutofit/>
+          </a:bodyPr>
+          <a:lstStyle/>
+          <a:p>
+            <a:pPr algn="ctr" indent="0" marL="0">
+              <a:buNone/>
+            </a:pPr>
+            <a:r>
+              <a:rPr lang="en-US" sz="3600" b="1" dirty="0">
+                <a:solidFill>
+                  <a:srgbClr val="990011"/>
+                </a:solidFill>
+                <a:latin typeface="Times New Roman" pitchFamily="34" charset="0"/>
+                <a:ea typeface="Times New Roman" pitchFamily="34" charset="-122"/>
+                <a:cs typeface="Times New Roman" pitchFamily="34" charset="-120"/>
+              </a:rPr>
+              <a:t>Evaluation 2</a:t>
+            </a:r>
+            <a:endParaRPr lang="en-US" sz="3600" dirty="0"/>
+          </a:p>
+        </p:txBody>
+      </p:sp>
+      <p:sp>
+        <p:nvSpPr>
+          <p:cNvPr id="5" name="Text 2"/>
+          <p:cNvSpPr/>
+          <p:nvPr/>
+        </p:nvSpPr>
+        <p:spPr>
+          <a:xfrm>
+            <a:off x="5349240" y="1783080"/>
+            <a:ext cx="6522415" cy="4663440"/>
+          </a:xfrm>
+          <a:prstGeom prst="rect">
+            <a:avLst/>
+          </a:prstGeom>
+          <a:noFill/>
+          <a:ln/>
+        </p:spPr>
+        <p:txBody>
+          <a:bodyPr wrap="square" lIns="0" tIns="0" rIns="0" bIns="0" rtlCol="0" anchor="t"/>
+          <a:lstStyle/>
+          <a:p>
+            <a:pPr algn="l" indent="0" marL="0">
+              <a:spcAft>
+                <a:spcPts val="800"/>
+              </a:spcAft>
+              <a:buNone/>
+            </a:pPr>
+            <a:r>
+              <a:rPr lang="en-US" sz="4000" dirty="0">
+                <a:solidFill>
+                  <a:srgbClr val="111111"/>
+                </a:solidFill>
+                <a:latin typeface="Times New Roman" pitchFamily="34" charset="0"/>
+                <a:ea typeface="Times New Roman" pitchFamily="34" charset="-122"/>
+                <a:cs typeface="Times New Roman" pitchFamily="34" charset="-120"/>
+              </a:rPr>
+              <a:t>What is distance decay?</a:t>
+            </a:r>
+            <a:endParaRPr lang="en-US" sz="4000" dirty="0"/>
+          </a:p>
+        </p:txBody>
+      </p:sp>
+      <p:sp>
+        <p:nvSpPr>
+          <p:cNvPr id="25" name="Slide Number Placeholder 0"/>
+          <p:cNvSpPr>
+            <a:spLocks noGrp="1"/>
+          </p:cNvSpPr>
+          <p:nvPr>
+            <p:ph type="sldNum" sz="quarter" idx="4294967295"/>
+          </p:nvPr>
+        </p:nvSpPr>
+        <p:spPr>
+          <a:xfrm>
+            <a:off x="27432" y="91440"/>
+            <a:ext cx="585216" cy="475488"/>
+          </a:xfrm>
+          <a:prstGeom prst="rect">
+            <a:avLst/>
+          </a:prstGeom>
+          <a:extLst>
+            <a:ext uri="{C572A759-6A51-4108-AA02-DFA0A04FC94B}">
+              <ma14:wrappingTextBoxFlag xmlns:ma14="http://schemas.microsoft.com/office/mac/drawingml/2011/main" val="0"/>
+            </a:ext>
+          </a:extLst>
+        </p:spPr>
+        <p:txBody>
+          <a:bodyPr/>
+          <a:lstStyle>
+            <a:lvl1pPr>
+              <a:defRPr sz="2000">
+                <a:solidFill>
+                  <a:srgbClr val="FFFFFF"/>
+                </a:solidFill>
+                <a:latin typeface="Calibri"/>
+                <a:ea typeface="Calibri"/>
+                <a:cs typeface="Calibri"/>
+              </a:defRPr>
+            </a:lvl1pPr>
+          </a:lstStyle>
+          <a:p>
+            <a:pPr algn="ctr"/>
+            <a:fld id="{F7021451-1387-4CA6-816F-3879F97B5CBC}" type="slidenum">
+              <a:rPr b="1" lang="en-US"/>
+              <a:t>49</a:t>
+            </a:fld>
+            <a:endParaRPr lang="en-US"/>
+          </a:p>
+        </p:txBody>
+      </p:sp>
+    </p:spTree>
+  </p:cSld>
+  <p:clrMapOvr>
+    <a:masterClrMapping/>
+  </p:clrMapOvr>
+</p:sld>
+</file>
+
+<file path=ppt/slides/slide5.xml><?xml version="1.0" encoding="utf-8"?>
+<p:sld xmlns:a="http://schemas.openxmlformats.org/drawingml/2006/main" xmlns:r="http://schemas.openxmlformats.org/officeDocument/2006/relationships" xmlns:p="http://schemas.openxmlformats.org/presentationml/2006/main">
+  <p:cSld name="Slide 5">
+    <p:spTree>
+      <p:nvGrpSpPr>
+        <p:cNvPr id="1" name=""/>
+        <p:cNvGrpSpPr/>
+        <p:nvPr/>
+      </p:nvGrpSpPr>
+      <p:grpSpPr>
+        <a:xfrm>
+          <a:off x="0" y="0"/>
+          <a:ext cx="0" cy="0"/>
+          <a:chOff x="0" y="0"/>
+          <a:chExt cx="0" cy="0"/>
+        </a:xfrm>
+      </p:grpSpPr>
+      <p:sp>
+        <p:nvSpPr>
+          <p:cNvPr id="2" name="Text 0"/>
+          <p:cNvSpPr/>
+          <p:nvPr/>
+        </p:nvSpPr>
+        <p:spPr>
+          <a:xfrm>
+            <a:off x="457200" y="713232"/>
+            <a:ext cx="11368735" cy="274320"/>
+          </a:xfrm>
+          <a:prstGeom prst="rect">
+            <a:avLst/>
+          </a:prstGeom>
+          <a:noFill/>
+          <a:ln/>
+        </p:spPr>
+        <p:txBody>
+          <a:bodyPr wrap="square" lIns="0" tIns="0" rIns="0" bIns="0" rtlCol="0" anchor="ctr"/>
+          <a:lstStyle/>
+          <a:p>
+            <a:pPr algn="r" indent="0" marL="0">
+              <a:buNone/>
+            </a:pPr>
+            <a:r>
+              <a:rPr lang="en-US" sz="1400" b="1" dirty="0">
+                <a:solidFill>
+                  <a:srgbClr val="1C3F6E"/>
+                </a:solidFill>
+                <a:latin typeface="Calibri" pitchFamily="34" charset="0"/>
+                <a:ea typeface="Calibri" pitchFamily="34" charset="-122"/>
+                <a:cs typeface="Calibri" pitchFamily="34" charset="-120"/>
+              </a:rPr>
+              <a:t>HOMEWORK CORRECTION</a:t>
+            </a:r>
+            <a:endParaRPr lang="en-US" sz="1400" dirty="0"/>
+          </a:p>
+        </p:txBody>
+      </p:sp>
+      <p:pic>
+        <p:nvPicPr>
+          <p:cNvPr id="3" name="Image 0" descr="/home/claude/f4/img/minesec_sheet.png">    </p:cNvPr>
+          <p:cNvPicPr>
+            <a:picLocks noChangeAspect="1"/>
+          </p:cNvPicPr>
+          <p:nvPr/>
+        </p:nvPicPr>
+        <p:blipFill>
+          <a:blip r:embed="rId1"/>
+          <a:stretch>
+            <a:fillRect/>
+          </a:stretch>
+        </p:blipFill>
+        <p:spPr>
+          <a:xfrm>
+            <a:off x="0" y="658368"/>
+            <a:ext cx="5120640" cy="5833872"/>
+          </a:xfrm>
+          <a:prstGeom prst="rect">
+            <a:avLst/>
+          </a:prstGeom>
+        </p:spPr>
+      </p:pic>
+      <p:sp>
+        <p:nvSpPr>
+          <p:cNvPr id="4" name="Text 1"/>
+          <p:cNvSpPr/>
+          <p:nvPr/>
+        </p:nvSpPr>
+        <p:spPr>
+          <a:xfrm>
+            <a:off x="5349240" y="1005840"/>
+            <a:ext cx="6522415" cy="731520"/>
+          </a:xfrm>
+          <a:prstGeom prst="rect">
+            <a:avLst/>
+          </a:prstGeom>
+          <a:noFill/>
+          <a:ln/>
+        </p:spPr>
+        <p:txBody>
+          <a:bodyPr wrap="square" lIns="0" tIns="0" rIns="0" bIns="0" rtlCol="0" anchor="ctr">
+            <a:normAutofit/>
+          </a:bodyPr>
+          <a:lstStyle/>
+          <a:p>
+            <a:pPr algn="ctr" indent="0" marL="0">
+              <a:buNone/>
+            </a:pPr>
+            <a:r>
+              <a:rPr lang="en-US" sz="3600" b="1" dirty="0">
+                <a:solidFill>
+                  <a:srgbClr val="990011"/>
+                </a:solidFill>
+                <a:latin typeface="Times New Roman" pitchFamily="34" charset="0"/>
+                <a:ea typeface="Times New Roman" pitchFamily="34" charset="-122"/>
+                <a:cs typeface="Times New Roman" pitchFamily="34" charset="-120"/>
+              </a:rPr>
+              <a:t>Correction: Possible Answer</a:t>
+            </a:r>
+            <a:endParaRPr lang="en-US" sz="3600" dirty="0"/>
+          </a:p>
+        </p:txBody>
+      </p:sp>
+      <p:sp>
+        <p:nvSpPr>
+          <p:cNvPr id="5" name="Text 2"/>
+          <p:cNvSpPr/>
+          <p:nvPr/>
+        </p:nvSpPr>
+        <p:spPr>
+          <a:xfrm>
+            <a:off x="5349240" y="1783080"/>
+            <a:ext cx="6522415" cy="4663440"/>
+          </a:xfrm>
+          <a:prstGeom prst="rect">
+            <a:avLst/>
+          </a:prstGeom>
+          <a:noFill/>
+          <a:ln/>
+        </p:spPr>
+        <p:txBody>
+          <a:bodyPr wrap="square" lIns="0" tIns="0" rIns="0" bIns="0" rtlCol="0" anchor="t"/>
+          <a:lstStyle/>
+          <a:p>
+            <a:pPr algn="l" indent="0" marL="0">
+              <a:spcAft>
+                <a:spcPts val="800"/>
+              </a:spcAft>
+              <a:buNone/>
+            </a:pPr>
+            <a:r>
+              <a:rPr lang="en-US" sz="4000" dirty="0">
+                <a:solidFill>
+                  <a:srgbClr val="111111"/>
+                </a:solidFill>
+                <a:latin typeface="Times New Roman" pitchFamily="34" charset="0"/>
+                <a:ea typeface="Times New Roman" pitchFamily="34" charset="-122"/>
+                <a:cs typeface="Times New Roman" pitchFamily="34" charset="-120"/>
+              </a:rPr>
+              <a:t>Spatial interaction is the movement of people, goods, services and information between places.</a:t>
+            </a:r>
+            <a:endParaRPr lang="en-US" sz="4000" dirty="0"/>
+          </a:p>
+        </p:txBody>
+      </p:sp>
+      <p:sp>
+        <p:nvSpPr>
+          <p:cNvPr id="25" name="Slide Number Placeholder 0"/>
+          <p:cNvSpPr>
+            <a:spLocks noGrp="1"/>
+          </p:cNvSpPr>
+          <p:nvPr>
+            <p:ph type="sldNum" sz="quarter" idx="4294967295"/>
+          </p:nvPr>
+        </p:nvSpPr>
+        <p:spPr>
+          <a:xfrm>
+            <a:off x="27432" y="91440"/>
+            <a:ext cx="585216" cy="475488"/>
+          </a:xfrm>
+          <a:prstGeom prst="rect">
+            <a:avLst/>
+          </a:prstGeom>
+          <a:extLst>
+            <a:ext uri="{C572A759-6A51-4108-AA02-DFA0A04FC94B}">
+              <ma14:wrappingTextBoxFlag xmlns:ma14="http://schemas.microsoft.com/office/mac/drawingml/2011/main" val="0"/>
+            </a:ext>
+          </a:extLst>
+        </p:spPr>
+        <p:txBody>
+          <a:bodyPr/>
+          <a:lstStyle>
+            <a:lvl1pPr>
+              <a:defRPr sz="2000">
+                <a:solidFill>
+                  <a:srgbClr val="FFFFFF"/>
+                </a:solidFill>
+                <a:latin typeface="Calibri"/>
+                <a:ea typeface="Calibri"/>
+                <a:cs typeface="Calibri"/>
+              </a:defRPr>
+            </a:lvl1pPr>
+          </a:lstStyle>
+          <a:p>
+            <a:pPr algn="ctr"/>
+            <a:fld id="{F7021451-1387-4CA6-816F-3879F97B5CBC}" type="slidenum">
+              <a:rPr b="1" lang="en-US"/>
+              <a:t>5</a:t>
+            </a:fld>
+            <a:endParaRPr lang="en-US"/>
+          </a:p>
+        </p:txBody>
+      </p:sp>
+    </p:spTree>
+  </p:cSld>
+  <p:clrMapOvr>
+    <a:masterClrMapping/>
+  </p:clrMapOvr>
+</p:sld>
+</file>
+
+<file path=ppt/slides/slide50.xml><?xml version="1.0" encoding="utf-8"?>
+<p:sld xmlns:a="http://schemas.openxmlformats.org/drawingml/2006/main" xmlns:r="http://schemas.openxmlformats.org/officeDocument/2006/relationships" xmlns:p="http://schemas.openxmlformats.org/presentationml/2006/main">
+  <p:cSld name="Slide 50">
+    <p:spTree>
+      <p:nvGrpSpPr>
+        <p:cNvPr id="1" name=""/>
+        <p:cNvGrpSpPr/>
+        <p:nvPr/>
+      </p:nvGrpSpPr>
+      <p:grpSpPr>
+        <a:xfrm>
+          <a:off x="0" y="0"/>
+          <a:ext cx="0" cy="0"/>
+          <a:chOff x="0" y="0"/>
+          <a:chExt cx="0" cy="0"/>
+        </a:xfrm>
+      </p:grpSpPr>
+      <p:sp>
+        <p:nvSpPr>
+          <p:cNvPr id="2" name="Text 0"/>
+          <p:cNvSpPr/>
+          <p:nvPr/>
+        </p:nvSpPr>
+        <p:spPr>
+          <a:xfrm>
+            <a:off x="457200" y="713232"/>
+            <a:ext cx="11368735" cy="274320"/>
+          </a:xfrm>
+          <a:prstGeom prst="rect">
+            <a:avLst/>
+          </a:prstGeom>
+          <a:noFill/>
+          <a:ln/>
+        </p:spPr>
+        <p:txBody>
+          <a:bodyPr wrap="square" lIns="0" tIns="0" rIns="0" bIns="0" rtlCol="0" anchor="ctr"/>
+          <a:lstStyle/>
+          <a:p>
+            <a:pPr algn="r" indent="0" marL="0">
+              <a:buNone/>
+            </a:pPr>
+            <a:r>
+              <a:rPr lang="en-US" sz="1400" b="1" dirty="0">
+                <a:solidFill>
+                  <a:srgbClr val="1C3F6E"/>
+                </a:solidFill>
+                <a:latin typeface="Calibri" pitchFamily="34" charset="0"/>
+                <a:ea typeface="Calibri" pitchFamily="34" charset="-122"/>
+                <a:cs typeface="Calibri" pitchFamily="34" charset="-120"/>
+              </a:rPr>
+              <a:t>FORMATIVE EVALUATION</a:t>
+            </a:r>
+            <a:endParaRPr lang="en-US" sz="1400" dirty="0"/>
+          </a:p>
+        </p:txBody>
+      </p:sp>
+      <p:pic>
+        <p:nvPicPr>
+          <p:cNvPr id="3" name="Image 0" descr="/home/claude/f4/img/minesec_sheet.png">    </p:cNvPr>
+          <p:cNvPicPr>
+            <a:picLocks noChangeAspect="1"/>
+          </p:cNvPicPr>
+          <p:nvPr/>
+        </p:nvPicPr>
+        <p:blipFill>
+          <a:blip r:embed="rId1"/>
+          <a:stretch>
+            <a:fillRect/>
+          </a:stretch>
+        </p:blipFill>
+        <p:spPr>
+          <a:xfrm>
+            <a:off x="0" y="658368"/>
+            <a:ext cx="5120640" cy="5833872"/>
+          </a:xfrm>
+          <a:prstGeom prst="rect">
+            <a:avLst/>
+          </a:prstGeom>
+        </p:spPr>
+      </p:pic>
+      <p:sp>
+        <p:nvSpPr>
+          <p:cNvPr id="4" name="Text 1"/>
+          <p:cNvSpPr/>
+          <p:nvPr/>
+        </p:nvSpPr>
+        <p:spPr>
+          <a:xfrm>
+            <a:off x="5349240" y="1005840"/>
+            <a:ext cx="6522415" cy="731520"/>
+          </a:xfrm>
+          <a:prstGeom prst="rect">
+            <a:avLst/>
+          </a:prstGeom>
+          <a:noFill/>
+          <a:ln/>
+        </p:spPr>
+        <p:txBody>
+          <a:bodyPr wrap="square" lIns="0" tIns="0" rIns="0" bIns="0" rtlCol="0" anchor="ctr">
+            <a:normAutofit/>
+          </a:bodyPr>
+          <a:lstStyle/>
+          <a:p>
+            <a:pPr algn="ctr" indent="0" marL="0">
+              <a:buNone/>
+            </a:pPr>
+            <a:r>
+              <a:rPr lang="en-US" sz="3600" b="1" dirty="0">
+                <a:solidFill>
+                  <a:srgbClr val="990011"/>
+                </a:solidFill>
+                <a:latin typeface="Times New Roman" pitchFamily="34" charset="0"/>
+                <a:ea typeface="Times New Roman" pitchFamily="34" charset="-122"/>
+                <a:cs typeface="Times New Roman" pitchFamily="34" charset="-120"/>
+              </a:rPr>
+              <a:t>Expected Answer</a:t>
+            </a:r>
+            <a:endParaRPr lang="en-US" sz="3600" dirty="0"/>
+          </a:p>
+        </p:txBody>
+      </p:sp>
+      <p:sp>
+        <p:nvSpPr>
+          <p:cNvPr id="5" name="Text 2"/>
+          <p:cNvSpPr/>
+          <p:nvPr/>
+        </p:nvSpPr>
+        <p:spPr>
+          <a:xfrm>
+            <a:off x="5349240" y="1783080"/>
+            <a:ext cx="6522415" cy="4663440"/>
+          </a:xfrm>
+          <a:prstGeom prst="rect">
+            <a:avLst/>
+          </a:prstGeom>
+          <a:noFill/>
+          <a:ln/>
+        </p:spPr>
+        <p:txBody>
+          <a:bodyPr wrap="square" lIns="0" tIns="0" rIns="0" bIns="0" rtlCol="0" anchor="t"/>
+          <a:lstStyle/>
+          <a:p>
+            <a:pPr algn="l" indent="0" marL="0">
+              <a:spcAft>
+                <a:spcPts val="800"/>
+              </a:spcAft>
+              <a:buNone/>
+            </a:pPr>
+            <a:r>
+              <a:rPr lang="en-US" sz="4000" dirty="0">
+                <a:solidFill>
+                  <a:srgbClr val="111111"/>
+                </a:solidFill>
+                <a:latin typeface="Times New Roman" pitchFamily="34" charset="0"/>
+                <a:ea typeface="Times New Roman" pitchFamily="34" charset="-122"/>
+                <a:cs typeface="Times New Roman" pitchFamily="34" charset="-120"/>
+              </a:rPr>
+              <a:t>The decrease of interaction between places as distance increases.</a:t>
+            </a:r>
+            <a:endParaRPr lang="en-US" sz="4000" dirty="0"/>
+          </a:p>
+        </p:txBody>
+      </p:sp>
+      <p:sp>
+        <p:nvSpPr>
+          <p:cNvPr id="25" name="Slide Number Placeholder 0"/>
+          <p:cNvSpPr>
+            <a:spLocks noGrp="1"/>
+          </p:cNvSpPr>
+          <p:nvPr>
+            <p:ph type="sldNum" sz="quarter" idx="4294967295"/>
+          </p:nvPr>
+        </p:nvSpPr>
+        <p:spPr>
+          <a:xfrm>
+            <a:off x="27432" y="91440"/>
+            <a:ext cx="585216" cy="475488"/>
+          </a:xfrm>
+          <a:prstGeom prst="rect">
+            <a:avLst/>
+          </a:prstGeom>
+          <a:extLst>
+            <a:ext uri="{C572A759-6A51-4108-AA02-DFA0A04FC94B}">
+              <ma14:wrappingTextBoxFlag xmlns:ma14="http://schemas.microsoft.com/office/mac/drawingml/2011/main" val="0"/>
+            </a:ext>
+          </a:extLst>
+        </p:spPr>
+        <p:txBody>
+          <a:bodyPr/>
+          <a:lstStyle>
+            <a:lvl1pPr>
+              <a:defRPr sz="2000">
+                <a:solidFill>
+                  <a:srgbClr val="FFFFFF"/>
+                </a:solidFill>
+                <a:latin typeface="Calibri"/>
+                <a:ea typeface="Calibri"/>
+                <a:cs typeface="Calibri"/>
+              </a:defRPr>
+            </a:lvl1pPr>
+          </a:lstStyle>
+          <a:p>
+            <a:pPr algn="ctr"/>
+            <a:fld id="{F7021451-1387-4CA6-816F-3879F97B5CBC}" type="slidenum">
+              <a:rPr b="1" lang="en-US"/>
+              <a:t>50</a:t>
+            </a:fld>
+            <a:endParaRPr lang="en-US"/>
+          </a:p>
+        </p:txBody>
+      </p:sp>
+    </p:spTree>
+  </p:cSld>
+  <p:clrMapOvr>
+    <a:masterClrMapping/>
+  </p:clrMapOvr>
+</p:sld>
+</file>
+
+<file path=ppt/slides/slide51.xml><?xml version="1.0" encoding="utf-8"?>
+<p:sld xmlns:a="http://schemas.openxmlformats.org/drawingml/2006/main" xmlns:r="http://schemas.openxmlformats.org/officeDocument/2006/relationships" xmlns:p="http://schemas.openxmlformats.org/presentationml/2006/main">
+  <p:cSld name="Slide 51">
+    <p:spTree>
+      <p:nvGrpSpPr>
+        <p:cNvPr id="1" name=""/>
+        <p:cNvGrpSpPr/>
+        <p:nvPr/>
+      </p:nvGrpSpPr>
+      <p:grpSpPr>
+        <a:xfrm>
+          <a:off x="0" y="0"/>
+          <a:ext cx="0" cy="0"/>
+          <a:chOff x="0" y="0"/>
+          <a:chExt cx="0" cy="0"/>
+        </a:xfrm>
+      </p:grpSpPr>
+      <p:sp>
+        <p:nvSpPr>
+          <p:cNvPr id="2" name="Text 0"/>
+          <p:cNvSpPr/>
+          <p:nvPr/>
+        </p:nvSpPr>
+        <p:spPr>
+          <a:xfrm>
+            <a:off x="457200" y="713232"/>
+            <a:ext cx="11368735" cy="274320"/>
+          </a:xfrm>
+          <a:prstGeom prst="rect">
+            <a:avLst/>
+          </a:prstGeom>
+          <a:noFill/>
+          <a:ln/>
+        </p:spPr>
+        <p:txBody>
+          <a:bodyPr wrap="square" lIns="0" tIns="0" rIns="0" bIns="0" rtlCol="0" anchor="ctr"/>
+          <a:lstStyle/>
+          <a:p>
+            <a:pPr algn="r" indent="0" marL="0">
+              <a:buNone/>
+            </a:pPr>
+            <a:r>
+              <a:rPr lang="en-US" sz="1400" b="1" dirty="0">
+                <a:solidFill>
+                  <a:srgbClr val="1C3F6E"/>
+                </a:solidFill>
+                <a:latin typeface="Calibri" pitchFamily="34" charset="0"/>
+                <a:ea typeface="Calibri" pitchFamily="34" charset="-122"/>
+                <a:cs typeface="Calibri" pitchFamily="34" charset="-120"/>
+              </a:rPr>
+              <a:t>REMEDIATION</a:t>
+            </a:r>
+            <a:endParaRPr lang="en-US" sz="1400" dirty="0"/>
+          </a:p>
+        </p:txBody>
+      </p:sp>
+      <p:pic>
+        <p:nvPicPr>
+          <p:cNvPr id="3" name="Image 0" descr="/home/claude/f4/img/minesec_sheet.png">    </p:cNvPr>
+          <p:cNvPicPr>
+            <a:picLocks noChangeAspect="1"/>
+          </p:cNvPicPr>
+          <p:nvPr/>
+        </p:nvPicPr>
+        <p:blipFill>
+          <a:blip r:embed="rId1"/>
+          <a:stretch>
+            <a:fillRect/>
+          </a:stretch>
+        </p:blipFill>
+        <p:spPr>
+          <a:xfrm>
+            <a:off x="0" y="658368"/>
+            <a:ext cx="1463040" cy="5833872"/>
+          </a:xfrm>
+          <a:prstGeom prst="rect">
+            <a:avLst/>
+          </a:prstGeom>
+        </p:spPr>
+      </p:pic>
+      <p:sp>
+        <p:nvSpPr>
+          <p:cNvPr id="4" name="Text 1"/>
+          <p:cNvSpPr/>
+          <p:nvPr/>
+        </p:nvSpPr>
+        <p:spPr>
+          <a:xfrm>
+            <a:off x="1691640" y="1005840"/>
+            <a:ext cx="10180015" cy="731520"/>
+          </a:xfrm>
+          <a:prstGeom prst="rect">
+            <a:avLst/>
+          </a:prstGeom>
+          <a:noFill/>
+          <a:ln/>
+        </p:spPr>
+        <p:txBody>
+          <a:bodyPr wrap="square" lIns="0" tIns="0" rIns="0" bIns="0" rtlCol="0" anchor="ctr">
+            <a:normAutofit/>
+          </a:bodyPr>
+          <a:lstStyle/>
+          <a:p>
+            <a:pPr algn="ctr" indent="0" marL="0">
+              <a:buNone/>
+            </a:pPr>
+            <a:r>
+              <a:rPr lang="en-US" sz="3600" b="1" dirty="0">
+                <a:solidFill>
+                  <a:srgbClr val="990011"/>
+                </a:solidFill>
+                <a:latin typeface="Times New Roman" pitchFamily="34" charset="0"/>
+                <a:ea typeface="Times New Roman" pitchFamily="34" charset="-122"/>
+                <a:cs typeface="Times New Roman" pitchFamily="34" charset="-120"/>
+              </a:rPr>
+              <a:t>Remediation</a:t>
+            </a:r>
+            <a:endParaRPr lang="en-US" sz="3600" dirty="0"/>
+          </a:p>
+        </p:txBody>
+      </p:sp>
+      <p:sp>
+        <p:nvSpPr>
+          <p:cNvPr id="5" name="Text 2"/>
+          <p:cNvSpPr/>
+          <p:nvPr/>
+        </p:nvSpPr>
+        <p:spPr>
+          <a:xfrm>
+            <a:off x="1691640" y="1783080"/>
+            <a:ext cx="10180015" cy="4663440"/>
+          </a:xfrm>
+          <a:prstGeom prst="rect">
+            <a:avLst/>
+          </a:prstGeom>
+          <a:noFill/>
+          <a:ln/>
+        </p:spPr>
+        <p:txBody>
+          <a:bodyPr wrap="square" lIns="0" tIns="0" rIns="0" bIns="0" rtlCol="0" anchor="t"/>
+          <a:lstStyle/>
+          <a:p>
+            <a:pPr algn="l" indent="0" marL="0">
+              <a:spcAft>
+                <a:spcPts val="800"/>
+              </a:spcAft>
+              <a:buNone/>
+            </a:pPr>
+            <a:r>
+              <a:rPr lang="en-US" sz="4000" b="1" dirty="0">
+                <a:solidFill>
+                  <a:srgbClr val="111111"/>
+                </a:solidFill>
+                <a:latin typeface="Times New Roman" pitchFamily="34" charset="0"/>
+                <a:ea typeface="Times New Roman" pitchFamily="34" charset="-122"/>
+                <a:cs typeface="Times New Roman" pitchFamily="34" charset="-120"/>
+              </a:rPr>
+              <a:t>Fill in the blanks:</a:t>
+            </a:r>
+            <a:endParaRPr lang="en-US" sz="4000" dirty="0"/>
+          </a:p>
+          <a:p>
+            <a:pPr algn="l" marL="342900" indent="-342900">
+              <a:spcAft>
+                <a:spcPts val="800"/>
+              </a:spcAft>
+              <a:buSzPct val="100000"/>
+              <a:buFont typeface="+mj-lt"/>
+              <a:buAutoNum type="arabicPeriod" startAt="1"/>
+            </a:pPr>
+            <a:r>
+              <a:rPr lang="en-US" sz="4000" dirty="0">
+                <a:solidFill>
+                  <a:srgbClr val="111111"/>
+                </a:solidFill>
+                <a:latin typeface="Times New Roman" pitchFamily="34" charset="0"/>
+                <a:ea typeface="Times New Roman" pitchFamily="34" charset="-122"/>
+                <a:cs typeface="Times New Roman" pitchFamily="34" charset="-120"/>
+              </a:rPr>
+              <a:t>The movement of goods, people and information is spatial ______.</a:t>
+            </a:r>
+            <a:endParaRPr lang="en-US" sz="4000" dirty="0"/>
+          </a:p>
+          <a:p>
+            <a:pPr algn="l" marL="342900" indent="-342900">
+              <a:spcAft>
+                <a:spcPts val="800"/>
+              </a:spcAft>
+              <a:buSzPct val="100000"/>
+              <a:buFont typeface="+mj-lt"/>
+              <a:buAutoNum type="arabicPeriod" startAt="1"/>
+            </a:pPr>
+            <a:r>
+              <a:rPr lang="en-US" sz="4000" dirty="0">
+                <a:solidFill>
+                  <a:srgbClr val="111111"/>
+                </a:solidFill>
+                <a:latin typeface="Times New Roman" pitchFamily="34" charset="0"/>
+                <a:ea typeface="Times New Roman" pitchFamily="34" charset="-122"/>
+                <a:cs typeface="Times New Roman" pitchFamily="34" charset="-120"/>
+              </a:rPr>
+              <a:t>The ease of moving goods is called ______.</a:t>
+            </a:r>
+            <a:endParaRPr lang="en-US" sz="4000" dirty="0"/>
+          </a:p>
+          <a:p>
+            <a:pPr algn="l" marL="342900" indent="-342900">
+              <a:spcAft>
+                <a:spcPts val="800"/>
+              </a:spcAft>
+              <a:buSzPct val="100000"/>
+              <a:buFont typeface="+mj-lt"/>
+              <a:buAutoNum type="arabicPeriod" startAt="1"/>
+            </a:pPr>
+            <a:r>
+              <a:rPr lang="en-US" sz="4000" dirty="0">
+                <a:solidFill>
+                  <a:srgbClr val="111111"/>
+                </a:solidFill>
+                <a:latin typeface="Times New Roman" pitchFamily="34" charset="0"/>
+                <a:ea typeface="Times New Roman" pitchFamily="34" charset="-122"/>
+                <a:cs typeface="Times New Roman" pitchFamily="34" charset="-120"/>
+              </a:rPr>
+              <a:t>Interaction falls with distance: distance ______.</a:t>
+            </a:r>
+            <a:endParaRPr lang="en-US" sz="4000" dirty="0"/>
+          </a:p>
+        </p:txBody>
+      </p:sp>
+      <p:sp>
+        <p:nvSpPr>
+          <p:cNvPr id="25" name="Slide Number Placeholder 0"/>
+          <p:cNvSpPr>
+            <a:spLocks noGrp="1"/>
+          </p:cNvSpPr>
+          <p:nvPr>
+            <p:ph type="sldNum" sz="quarter" idx="4294967295"/>
+          </p:nvPr>
+        </p:nvSpPr>
+        <p:spPr>
+          <a:xfrm>
+            <a:off x="27432" y="91440"/>
+            <a:ext cx="585216" cy="475488"/>
+          </a:xfrm>
+          <a:prstGeom prst="rect">
+            <a:avLst/>
+          </a:prstGeom>
+          <a:extLst>
+            <a:ext uri="{C572A759-6A51-4108-AA02-DFA0A04FC94B}">
+              <ma14:wrappingTextBoxFlag xmlns:ma14="http://schemas.microsoft.com/office/mac/drawingml/2011/main" val="0"/>
+            </a:ext>
+          </a:extLst>
+        </p:spPr>
+        <p:txBody>
+          <a:bodyPr/>
+          <a:lstStyle>
+            <a:lvl1pPr>
+              <a:defRPr sz="2000">
+                <a:solidFill>
+                  <a:srgbClr val="FFFFFF"/>
+                </a:solidFill>
+                <a:latin typeface="Calibri"/>
+                <a:ea typeface="Calibri"/>
+                <a:cs typeface="Calibri"/>
+              </a:defRPr>
+            </a:lvl1pPr>
+          </a:lstStyle>
+          <a:p>
+            <a:pPr algn="ctr"/>
+            <a:fld id="{F7021451-1387-4CA6-816F-3879F97B5CBC}" type="slidenum">
+              <a:rPr b="1" lang="en-US"/>
+              <a:t>51</a:t>
+            </a:fld>
+            <a:endParaRPr lang="en-US"/>
+          </a:p>
+        </p:txBody>
+      </p:sp>
+    </p:spTree>
+  </p:cSld>
+  <p:clrMapOvr>
+    <a:masterClrMapping/>
+  </p:clrMapOvr>
+</p:sld>
+</file>
+
+<file path=ppt/slides/slide52.xml><?xml version="1.0" encoding="utf-8"?>
+<p:sld xmlns:a="http://schemas.openxmlformats.org/drawingml/2006/main" xmlns:r="http://schemas.openxmlformats.org/officeDocument/2006/relationships" xmlns:p="http://schemas.openxmlformats.org/presentationml/2006/main">
+  <p:cSld name="Slide 52">
+    <p:spTree>
+      <p:nvGrpSpPr>
+        <p:cNvPr id="1" name=""/>
+        <p:cNvGrpSpPr/>
+        <p:nvPr/>
+      </p:nvGrpSpPr>
+      <p:grpSpPr>
+        <a:xfrm>
+          <a:off x="0" y="0"/>
+          <a:ext cx="0" cy="0"/>
+          <a:chOff x="0" y="0"/>
+          <a:chExt cx="0" cy="0"/>
+        </a:xfrm>
+      </p:grpSpPr>
+      <p:sp>
+        <p:nvSpPr>
+          <p:cNvPr id="2" name="Text 0"/>
+          <p:cNvSpPr/>
+          <p:nvPr/>
+        </p:nvSpPr>
+        <p:spPr>
+          <a:xfrm>
+            <a:off x="457200" y="713232"/>
+            <a:ext cx="11368735" cy="274320"/>
+          </a:xfrm>
+          <a:prstGeom prst="rect">
+            <a:avLst/>
+          </a:prstGeom>
+          <a:noFill/>
+          <a:ln/>
+        </p:spPr>
+        <p:txBody>
+          <a:bodyPr wrap="square" lIns="0" tIns="0" rIns="0" bIns="0" rtlCol="0" anchor="ctr"/>
+          <a:lstStyle/>
+          <a:p>
+            <a:pPr algn="r" indent="0" marL="0">
+              <a:buNone/>
+            </a:pPr>
+            <a:r>
+              <a:rPr lang="en-US" sz="1400" b="1" dirty="0">
+                <a:solidFill>
+                  <a:srgbClr val="1C3F6E"/>
+                </a:solidFill>
+                <a:latin typeface="Calibri" pitchFamily="34" charset="0"/>
+                <a:ea typeface="Calibri" pitchFamily="34" charset="-122"/>
+                <a:cs typeface="Calibri" pitchFamily="34" charset="-120"/>
+              </a:rPr>
+              <a:t>HOMEWORK</a:t>
+            </a:r>
+            <a:endParaRPr lang="en-US" sz="1400" dirty="0"/>
+          </a:p>
+        </p:txBody>
+      </p:sp>
+      <p:pic>
+        <p:nvPicPr>
+          <p:cNvPr id="3" name="Image 0" descr="/home/claude/f4/img/minesec_sheet.png">    </p:cNvPr>
+          <p:cNvPicPr>
+            <a:picLocks noChangeAspect="1"/>
+          </p:cNvPicPr>
+          <p:nvPr/>
+        </p:nvPicPr>
+        <p:blipFill>
+          <a:blip r:embed="rId1"/>
+          <a:stretch>
+            <a:fillRect/>
+          </a:stretch>
+        </p:blipFill>
+        <p:spPr>
+          <a:xfrm>
+            <a:off x="0" y="658368"/>
+            <a:ext cx="5120640" cy="5833872"/>
+          </a:xfrm>
+          <a:prstGeom prst="rect">
+            <a:avLst/>
+          </a:prstGeom>
+        </p:spPr>
+      </p:pic>
+      <p:sp>
+        <p:nvSpPr>
+          <p:cNvPr id="4" name="Text 1"/>
+          <p:cNvSpPr/>
+          <p:nvPr/>
+        </p:nvSpPr>
+        <p:spPr>
+          <a:xfrm>
+            <a:off x="5349240" y="1005840"/>
+            <a:ext cx="6522415" cy="731520"/>
+          </a:xfrm>
+          <a:prstGeom prst="rect">
+            <a:avLst/>
+          </a:prstGeom>
+          <a:noFill/>
+          <a:ln/>
+        </p:spPr>
+        <p:txBody>
+          <a:bodyPr wrap="square" lIns="0" tIns="0" rIns="0" bIns="0" rtlCol="0" anchor="ctr">
+            <a:normAutofit/>
+          </a:bodyPr>
+          <a:lstStyle/>
+          <a:p>
+            <a:pPr algn="ctr" indent="0" marL="0">
+              <a:buNone/>
+            </a:pPr>
+            <a:r>
+              <a:rPr lang="en-US" sz="3600" b="1" dirty="0">
+                <a:solidFill>
+                  <a:srgbClr val="990011"/>
+                </a:solidFill>
+                <a:latin typeface="Times New Roman" pitchFamily="34" charset="0"/>
+                <a:ea typeface="Times New Roman" pitchFamily="34" charset="-122"/>
+                <a:cs typeface="Times New Roman" pitchFamily="34" charset="-120"/>
+              </a:rPr>
+              <a:t>Homework</a:t>
+            </a:r>
+            <a:endParaRPr lang="en-US" sz="3600" dirty="0"/>
+          </a:p>
+        </p:txBody>
+      </p:sp>
+      <p:sp>
+        <p:nvSpPr>
+          <p:cNvPr id="5" name="Text 2"/>
+          <p:cNvSpPr/>
+          <p:nvPr/>
+        </p:nvSpPr>
+        <p:spPr>
+          <a:xfrm>
+            <a:off x="5349240" y="1783080"/>
+            <a:ext cx="6522415" cy="4663440"/>
+          </a:xfrm>
+          <a:prstGeom prst="rect">
+            <a:avLst/>
+          </a:prstGeom>
+          <a:noFill/>
+          <a:ln/>
+        </p:spPr>
+        <p:txBody>
+          <a:bodyPr wrap="square" lIns="0" tIns="0" rIns="0" bIns="0" rtlCol="0" anchor="t"/>
+          <a:lstStyle/>
+          <a:p>
+            <a:pPr algn="l" indent="0" marL="0">
+              <a:spcAft>
+                <a:spcPts val="800"/>
+              </a:spcAft>
+              <a:buNone/>
+            </a:pPr>
+            <a:r>
+              <a:rPr lang="en-US" sz="4000" dirty="0">
+                <a:solidFill>
+                  <a:srgbClr val="111111"/>
+                </a:solidFill>
+                <a:latin typeface="Times New Roman" pitchFamily="34" charset="0"/>
+                <a:ea typeface="Times New Roman" pitchFamily="34" charset="-122"/>
+                <a:cs typeface="Times New Roman" pitchFamily="34" charset="-120"/>
+              </a:rPr>
+              <a:t>Define an internally displaced person.</a:t>
+            </a:r>
+            <a:endParaRPr lang="en-US" sz="4000" dirty="0"/>
+          </a:p>
+        </p:txBody>
+      </p:sp>
+      <p:sp>
+        <p:nvSpPr>
+          <p:cNvPr id="25" name="Slide Number Placeholder 0"/>
+          <p:cNvSpPr>
+            <a:spLocks noGrp="1"/>
+          </p:cNvSpPr>
+          <p:nvPr>
+            <p:ph type="sldNum" sz="quarter" idx="4294967295"/>
+          </p:nvPr>
+        </p:nvSpPr>
+        <p:spPr>
+          <a:xfrm>
+            <a:off x="27432" y="91440"/>
+            <a:ext cx="585216" cy="475488"/>
+          </a:xfrm>
+          <a:prstGeom prst="rect">
+            <a:avLst/>
+          </a:prstGeom>
+          <a:extLst>
+            <a:ext uri="{C572A759-6A51-4108-AA02-DFA0A04FC94B}">
+              <ma14:wrappingTextBoxFlag xmlns:ma14="http://schemas.microsoft.com/office/mac/drawingml/2011/main" val="0"/>
+            </a:ext>
+          </a:extLst>
+        </p:spPr>
+        <p:txBody>
+          <a:bodyPr/>
+          <a:lstStyle>
+            <a:lvl1pPr>
+              <a:defRPr sz="2000">
+                <a:solidFill>
+                  <a:srgbClr val="FFFFFF"/>
+                </a:solidFill>
+                <a:latin typeface="Calibri"/>
+                <a:ea typeface="Calibri"/>
+                <a:cs typeface="Calibri"/>
+              </a:defRPr>
+            </a:lvl1pPr>
+          </a:lstStyle>
+          <a:p>
+            <a:pPr algn="ctr"/>
+            <a:fld id="{F7021451-1387-4CA6-816F-3879F97B5CBC}" type="slidenum">
+              <a:rPr b="1" lang="en-US"/>
+              <a:t>52</a:t>
+            </a:fld>
+            <a:endParaRPr lang="en-US"/>
+          </a:p>
+        </p:txBody>
+      </p:sp>
+    </p:spTree>
+  </p:cSld>
+  <p:clrMapOvr>
+    <a:masterClrMapping/>
+  </p:clrMapOvr>
+</p:sld>
+</file>
+
+<file path=ppt/slides/slide53.xml><?xml version="1.0" encoding="utf-8"?>
+<p:sld xmlns:a="http://schemas.openxmlformats.org/drawingml/2006/main" xmlns:r="http://schemas.openxmlformats.org/officeDocument/2006/relationships" xmlns:p="http://schemas.openxmlformats.org/presentationml/2006/main">
+  <p:cSld name="Slide 53">
+    <p:spTree>
+      <p:nvGrpSpPr>
+        <p:cNvPr id="1" name=""/>
+        <p:cNvGrpSpPr/>
+        <p:nvPr/>
+      </p:nvGrpSpPr>
+      <p:grpSpPr>
+        <a:xfrm>
+          <a:off x="0" y="0"/>
+          <a:ext cx="0" cy="0"/>
+          <a:chOff x="0" y="0"/>
+          <a:chExt cx="0" cy="0"/>
+        </a:xfrm>
+      </p:grpSpPr>
+      <p:sp>
+        <p:nvSpPr>
+          <p:cNvPr id="2" name="Text 0"/>
+          <p:cNvSpPr/>
+          <p:nvPr/>
+        </p:nvSpPr>
+        <p:spPr>
+          <a:xfrm>
+            <a:off x="457200" y="713232"/>
+            <a:ext cx="11368735" cy="274320"/>
+          </a:xfrm>
+          <a:prstGeom prst="rect">
+            <a:avLst/>
+          </a:prstGeom>
+          <a:noFill/>
+          <a:ln/>
+        </p:spPr>
+        <p:txBody>
+          <a:bodyPr wrap="square" lIns="0" tIns="0" rIns="0" bIns="0" rtlCol="0" anchor="ctr"/>
+          <a:lstStyle/>
+          <a:p>
+            <a:pPr algn="r" indent="0" marL="0">
+              <a:buNone/>
+            </a:pPr>
+            <a:r>
+              <a:rPr lang="en-US" sz="1400" b="1" dirty="0">
+                <a:solidFill>
+                  <a:srgbClr val="1C3F6E"/>
+                </a:solidFill>
+                <a:latin typeface="Calibri" pitchFamily="34" charset="0"/>
+                <a:ea typeface="Calibri" pitchFamily="34" charset="-122"/>
+                <a:cs typeface="Calibri" pitchFamily="34" charset="-120"/>
+              </a:rPr>
+              <a:t>NEXT LESSON</a:t>
+            </a:r>
+            <a:endParaRPr lang="en-US" sz="1400" dirty="0"/>
+          </a:p>
+        </p:txBody>
+      </p:sp>
+      <p:pic>
+        <p:nvPicPr>
+          <p:cNvPr id="3" name="Image 0" descr="/home/claude/f4/img/minesec_sheet.png">    </p:cNvPr>
+          <p:cNvPicPr>
+            <a:picLocks noChangeAspect="1"/>
+          </p:cNvPicPr>
+          <p:nvPr/>
+        </p:nvPicPr>
+        <p:blipFill>
+          <a:blip r:embed="rId1"/>
+          <a:stretch>
+            <a:fillRect/>
+          </a:stretch>
+        </p:blipFill>
+        <p:spPr>
+          <a:xfrm>
+            <a:off x="0" y="658368"/>
+            <a:ext cx="5120640" cy="5833872"/>
+          </a:xfrm>
+          <a:prstGeom prst="rect">
+            <a:avLst/>
+          </a:prstGeom>
+        </p:spPr>
+      </p:pic>
+      <p:sp>
+        <p:nvSpPr>
+          <p:cNvPr id="4" name="Text 1"/>
+          <p:cNvSpPr/>
+          <p:nvPr/>
+        </p:nvSpPr>
+        <p:spPr>
+          <a:xfrm>
+            <a:off x="5349240" y="1005840"/>
+            <a:ext cx="6522415" cy="731520"/>
+          </a:xfrm>
+          <a:prstGeom prst="rect">
+            <a:avLst/>
+          </a:prstGeom>
+          <a:noFill/>
+          <a:ln/>
+        </p:spPr>
+        <p:txBody>
+          <a:bodyPr wrap="square" lIns="0" tIns="0" rIns="0" bIns="0" rtlCol="0" anchor="ctr">
+            <a:normAutofit/>
+          </a:bodyPr>
+          <a:lstStyle/>
+          <a:p>
+            <a:pPr algn="ctr" indent="0" marL="0">
+              <a:buNone/>
+            </a:pPr>
+            <a:r>
+              <a:rPr lang="en-US" sz="3600" b="1" dirty="0">
+                <a:solidFill>
+                  <a:srgbClr val="990011"/>
+                </a:solidFill>
+                <a:latin typeface="Times New Roman" pitchFamily="34" charset="0"/>
+                <a:ea typeface="Times New Roman" pitchFamily="34" charset="-122"/>
+                <a:cs typeface="Times New Roman" pitchFamily="34" charset="-120"/>
+              </a:rPr>
+              <a:t>Next Lesson</a:t>
+            </a:r>
+            <a:endParaRPr lang="en-US" sz="3600" dirty="0"/>
+          </a:p>
+        </p:txBody>
+      </p:sp>
+      <p:sp>
+        <p:nvSpPr>
+          <p:cNvPr id="5" name="Text 2"/>
+          <p:cNvSpPr/>
+          <p:nvPr/>
+        </p:nvSpPr>
+        <p:spPr>
+          <a:xfrm>
+            <a:off x="5349240" y="1783080"/>
+            <a:ext cx="6522415" cy="4663440"/>
+          </a:xfrm>
+          <a:prstGeom prst="rect">
+            <a:avLst/>
+          </a:prstGeom>
+          <a:noFill/>
+          <a:ln/>
+        </p:spPr>
+        <p:txBody>
+          <a:bodyPr wrap="square" lIns="0" tIns="0" rIns="0" bIns="0" rtlCol="0" anchor="ctr"/>
+          <a:lstStyle/>
+          <a:p>
+            <a:pPr algn="ctr" indent="0" marL="0">
+              <a:spcAft>
+                <a:spcPts val="800"/>
+              </a:spcAft>
+              <a:buNone/>
+            </a:pPr>
+            <a:r>
+              <a:rPr lang="en-US" sz="4000" b="1" dirty="0">
+                <a:solidFill>
+                  <a:srgbClr val="111111"/>
+                </a:solidFill>
+                <a:latin typeface="Times New Roman" pitchFamily="34" charset="0"/>
+                <a:ea typeface="Times New Roman" pitchFamily="34" charset="-122"/>
+                <a:cs typeface="Times New Roman" pitchFamily="34" charset="-120"/>
+              </a:rPr>
+              <a:t>Our next lesson will be on:</a:t>
+            </a:r>
+            <a:endParaRPr lang="en-US" sz="4000" dirty="0"/>
+          </a:p>
+          <a:p>
+            <a:pPr algn="ctr" indent="0" marL="0">
+              <a:spcAft>
+                <a:spcPts val="800"/>
+              </a:spcAft>
+              <a:buNone/>
+            </a:pPr>
+            <a:r>
+              <a:rPr lang="en-US" sz="4000" b="1" dirty="0">
+                <a:solidFill>
+                  <a:srgbClr val="990011"/>
+                </a:solidFill>
+                <a:latin typeface="Times New Roman" pitchFamily="34" charset="0"/>
+                <a:ea typeface="Times New Roman" pitchFamily="34" charset="-122"/>
+                <a:cs typeface="Times New Roman" pitchFamily="34" charset="-120"/>
+              </a:rPr>
+              <a:t>Lesson 15: Types of Migration</a:t>
+            </a:r>
+            <a:endParaRPr lang="en-US" sz="4000" dirty="0"/>
+          </a:p>
+        </p:txBody>
+      </p:sp>
+      <p:sp>
+        <p:nvSpPr>
+          <p:cNvPr id="25" name="Slide Number Placeholder 0"/>
+          <p:cNvSpPr>
+            <a:spLocks noGrp="1"/>
+          </p:cNvSpPr>
+          <p:nvPr>
+            <p:ph type="sldNum" sz="quarter" idx="4294967295"/>
+          </p:nvPr>
+        </p:nvSpPr>
+        <p:spPr>
+          <a:xfrm>
+            <a:off x="27432" y="91440"/>
+            <a:ext cx="585216" cy="475488"/>
+          </a:xfrm>
+          <a:prstGeom prst="rect">
+            <a:avLst/>
+          </a:prstGeom>
+          <a:extLst>
+            <a:ext uri="{C572A759-6A51-4108-AA02-DFA0A04FC94B}">
+              <ma14:wrappingTextBoxFlag xmlns:ma14="http://schemas.microsoft.com/office/mac/drawingml/2011/main" val="0"/>
+            </a:ext>
+          </a:extLst>
+        </p:spPr>
+        <p:txBody>
+          <a:bodyPr/>
+          <a:lstStyle>
+            <a:lvl1pPr>
+              <a:defRPr sz="2000">
+                <a:solidFill>
+                  <a:srgbClr val="FFFFFF"/>
+                </a:solidFill>
+                <a:latin typeface="Calibri"/>
+                <a:ea typeface="Calibri"/>
+                <a:cs typeface="Calibri"/>
+              </a:defRPr>
+            </a:lvl1pPr>
+          </a:lstStyle>
+          <a:p>
+            <a:pPr algn="ctr"/>
+            <a:fld id="{F7021451-1387-4CA6-816F-3879F97B5CBC}" type="slidenum">
+              <a:rPr b="1" lang="en-US"/>
+              <a:t>53</a:t>
+            </a:fld>
+            <a:endParaRPr lang="en-US"/>
+          </a:p>
+        </p:txBody>
+      </p:sp>
+    </p:spTree>
+  </p:cSld>
+  <p:clrMapOvr>
+    <a:masterClrMapping/>
+  </p:clrMapOvr>
+</p:sld>
+</file>
+
+<file path=ppt/slides/slide54.xml><?xml version="1.0" encoding="utf-8"?>
+<p:sld xmlns:a="http://schemas.openxmlformats.org/drawingml/2006/main" xmlns:r="http://schemas.openxmlformats.org/officeDocument/2006/relationships" xmlns:p="http://schemas.openxmlformats.org/presentationml/2006/main">
+  <p:cSld name="Slide 54">
+    <p:spTree>
+      <p:nvGrpSpPr>
+        <p:cNvPr id="1" name=""/>
+        <p:cNvGrpSpPr/>
+        <p:nvPr/>
+      </p:nvGrpSpPr>
+      <p:grpSpPr>
+        <a:xfrm>
+          <a:off x="0" y="0"/>
+          <a:ext cx="0" cy="0"/>
+          <a:chOff x="0" y="0"/>
+          <a:chExt cx="0" cy="0"/>
+        </a:xfrm>
+      </p:grpSpPr>
+      <p:sp>
+        <p:nvSpPr>
+          <p:cNvPr id="2" name="Text 0"/>
+          <p:cNvSpPr/>
+          <p:nvPr/>
+        </p:nvSpPr>
+        <p:spPr>
+          <a:xfrm>
+            <a:off x="457200" y="713232"/>
+            <a:ext cx="11368735" cy="274320"/>
+          </a:xfrm>
+          <a:prstGeom prst="rect">
+            <a:avLst/>
+          </a:prstGeom>
+          <a:noFill/>
+          <a:ln/>
+        </p:spPr>
+        <p:txBody>
+          <a:bodyPr wrap="square" lIns="0" tIns="0" rIns="0" bIns="0" rtlCol="0" anchor="ctr"/>
+          <a:lstStyle/>
+          <a:p>
+            <a:pPr algn="r" indent="0" marL="0">
+              <a:buNone/>
+            </a:pPr>
+            <a:r>
+              <a:rPr lang="en-US" sz="1400" b="1" dirty="0">
+                <a:solidFill>
+                  <a:srgbClr val="1C3F6E"/>
+                </a:solidFill>
+                <a:latin typeface="Calibri" pitchFamily="34" charset="0"/>
+                <a:ea typeface="Calibri" pitchFamily="34" charset="-122"/>
+                <a:cs typeface="Calibri" pitchFamily="34" charset="-120"/>
+              </a:rPr>
               <a:t>BILINGUAL GAME</a:t>
             </a:r>
             <a:endParaRPr lang="en-US" sz="1400" dirty="0"/>
@@ -17254,7 +19373,7 @@
       </p:sp>
       <p:graphicFrame>
         <p:nvGraphicFramePr>
-          <p:cNvPr id="50" name="Table 0"/>
+          <p:cNvPr id="55" name="Table 0"/>
           <p:cNvGraphicFramePr>
             <a:graphicFrameLocks noGrp="1"/>
           </p:cNvGraphicFramePr>
@@ -17434,7 +19553,7 @@
                           <a:ea typeface="Calibri" pitchFamily="34" charset="-122"/>
                           <a:cs typeface="Calibri" pitchFamily="34" charset="-120"/>
                         </a:rPr>
-                        <a:t>Interaction</a:t>
+                        <a:t>Spatial interaction</a:t>
                       </a:r>
                       <a:endParaRPr lang="en-US" sz="2200" dirty="0">
                         <a:latin typeface="Calibri" charset="0"/>
@@ -17502,7 +19621,7 @@
                           <a:ea typeface="Calibri" pitchFamily="34" charset="-122"/>
                           <a:cs typeface="Calibri" pitchFamily="34" charset="-120"/>
                         </a:rPr>
-                        <a:t>L'interaction</a:t>
+                        <a:t>L'interaction spatiale</a:t>
                       </a:r>
                       <a:endParaRPr lang="en-US" sz="2200" dirty="0">
                         <a:latin typeface="Calibri" charset="0"/>
@@ -17572,7 +19691,7 @@
                           <a:ea typeface="Calibri" pitchFamily="34" charset="-122"/>
                           <a:cs typeface="Calibri" pitchFamily="34" charset="-120"/>
                         </a:rPr>
-                        <a:t>Exchange</a:t>
+                        <a:t>Complementarity</a:t>
                       </a:r>
                       <a:endParaRPr lang="en-US" sz="2200" dirty="0">
                         <a:latin typeface="Calibri" charset="0"/>
@@ -17640,7 +19759,7 @@
                           <a:ea typeface="Calibri" pitchFamily="34" charset="-122"/>
                           <a:cs typeface="Calibri" pitchFamily="34" charset="-120"/>
                         </a:rPr>
-                        <a:t>L'échange</a:t>
+                        <a:t>La complémentarité</a:t>
                       </a:r>
                       <a:endParaRPr lang="en-US" sz="2200" dirty="0">
                         <a:latin typeface="Calibri" charset="0"/>
@@ -17710,7 +19829,7 @@
                           <a:ea typeface="Calibri" pitchFamily="34" charset="-122"/>
                           <a:cs typeface="Calibri" pitchFamily="34" charset="-120"/>
                         </a:rPr>
-                        <a:t>Transport</a:t>
+                        <a:t>Transferability</a:t>
                       </a:r>
                       <a:endParaRPr lang="en-US" sz="2200" dirty="0">
                         <a:latin typeface="Calibri" charset="0"/>
@@ -17778,7 +19897,7 @@
                           <a:ea typeface="Calibri" pitchFamily="34" charset="-122"/>
                           <a:cs typeface="Calibri" pitchFamily="34" charset="-120"/>
                         </a:rPr>
-                        <a:t>Le transport</a:t>
+                        <a:t>La transférabilité</a:t>
                       </a:r>
                       <a:endParaRPr lang="en-US" sz="2200" dirty="0">
                         <a:latin typeface="Calibri" charset="0"/>
@@ -17848,7 +19967,7 @@
                           <a:ea typeface="Calibri" pitchFamily="34" charset="-122"/>
                           <a:cs typeface="Calibri" pitchFamily="34" charset="-120"/>
                         </a:rPr>
-                        <a:t>Goods</a:t>
+                        <a:t>Distance decay</a:t>
                       </a:r>
                       <a:endParaRPr lang="en-US" sz="2200" dirty="0">
                         <a:latin typeface="Calibri" charset="0"/>
@@ -17916,7 +20035,7 @@
                           <a:ea typeface="Calibri" pitchFamily="34" charset="-122"/>
                           <a:cs typeface="Calibri" pitchFamily="34" charset="-120"/>
                         </a:rPr>
-                        <a:t>Les marchandises</a:t>
+                        <a:t>L'atténuation par la distance</a:t>
                       </a:r>
                       <a:endParaRPr lang="en-US" sz="2200" dirty="0">
                         <a:latin typeface="Calibri" charset="0"/>
@@ -17986,7 +20105,7 @@
                           <a:ea typeface="Calibri" pitchFamily="34" charset="-122"/>
                           <a:cs typeface="Calibri" pitchFamily="34" charset="-120"/>
                         </a:rPr>
-                        <a:t>Border</a:t>
+                        <a:t>Goods</a:t>
                       </a:r>
                       <a:endParaRPr lang="en-US" sz="2200" dirty="0">
                         <a:latin typeface="Calibri" charset="0"/>
@@ -18054,7 +20173,7 @@
                           <a:ea typeface="Calibri" pitchFamily="34" charset="-122"/>
                           <a:cs typeface="Calibri" pitchFamily="34" charset="-120"/>
                         </a:rPr>
-                        <a:t>La frontière</a:t>
+                        <a:t>Les marchandises</a:t>
                       </a:r>
                       <a:endParaRPr lang="en-US" sz="2200" dirty="0">
                         <a:latin typeface="Calibri" charset="0"/>
@@ -18124,7 +20243,7 @@
                           <a:ea typeface="Calibri" pitchFamily="34" charset="-122"/>
                           <a:cs typeface="Calibri" pitchFamily="34" charset="-120"/>
                         </a:rPr>
-                        <a:t>Cost</a:t>
+                        <a:t>Network</a:t>
                       </a:r>
                       <a:endParaRPr lang="en-US" sz="2200" dirty="0">
                         <a:latin typeface="Calibri" charset="0"/>
@@ -18192,7 +20311,7 @@
                           <a:ea typeface="Calibri" pitchFamily="34" charset="-122"/>
                           <a:cs typeface="Calibri" pitchFamily="34" charset="-120"/>
                         </a:rPr>
-                        <a:t>Le coût</a:t>
+                        <a:t>Le réseau</a:t>
                       </a:r>
                       <a:endParaRPr lang="en-US" sz="2200" dirty="0">
                         <a:latin typeface="Calibri" charset="0"/>
@@ -18290,7 +20409,7 @@
             <a:pPr algn="ctr"/>
             <a:fld id="{F7021451-1387-4CA6-816F-3879F97B5CBC}" type="slidenum">
               <a:rPr b="1" lang="en-US"/>
-              <a:t>49</a:t>
+              <a:t>54</a:t>
             </a:fld>
             <a:endParaRPr lang="en-US"/>
           </a:p>
@@ -18304,9 +20423,9 @@
 </p:sld>
 </file>
 
-<file path=ppt/slides/slide5.xml><?xml version="1.0" encoding="utf-8"?>
+<file path=ppt/slides/slide55.xml><?xml version="1.0" encoding="utf-8"?>
 <p:sld xmlns:a="http://schemas.openxmlformats.org/drawingml/2006/main" xmlns:r="http://schemas.openxmlformats.org/officeDocument/2006/relationships" xmlns:p="http://schemas.openxmlformats.org/presentationml/2006/main">
-  <p:cSld name="Slide 5">
+  <p:cSld name="Slide 55">
     <p:spTree>
       <p:nvGrpSpPr>
         <p:cNvPr id="1" name=""/>
@@ -18354,225 +20473,6 @@
                 <a:ea typeface="Calibri" pitchFamily="34" charset="-122"/>
                 <a:cs typeface="Calibri" pitchFamily="34" charset="-120"/>
               </a:rPr>
-              <a:t>HOMEWORK CORRECTION</a:t>
-            </a:r>
-            <a:endParaRPr lang="en-US" sz="1400" dirty="0"/>
-          </a:p>
-        </p:txBody>
-      </p:sp>
-      <p:pic>
-        <p:nvPicPr>
-          <p:cNvPr id="3" name="Image 0" descr="/home/claude/f4/img/minesec_sheet.png">    </p:cNvPr>
-          <p:cNvPicPr>
-            <a:picLocks noChangeAspect="1"/>
-          </p:cNvPicPr>
-          <p:nvPr/>
-        </p:nvPicPr>
-        <p:blipFill>
-          <a:blip r:embed="rId1"/>
-          <a:stretch>
-            <a:fillRect/>
-          </a:stretch>
-        </p:blipFill>
-        <p:spPr>
-          <a:xfrm>
-            <a:off x="0" y="658368"/>
-            <a:ext cx="3840480" cy="5833872"/>
-          </a:xfrm>
-          <a:prstGeom prst="rect">
-            <a:avLst/>
-          </a:prstGeom>
-        </p:spPr>
-      </p:pic>
-      <p:sp>
-        <p:nvSpPr>
-          <p:cNvPr id="4" name="Text 1"/>
-          <p:cNvSpPr/>
-          <p:nvPr/>
-        </p:nvSpPr>
-        <p:spPr>
-          <a:xfrm>
-            <a:off x="4069080" y="1005840"/>
-            <a:ext cx="7802575" cy="731520"/>
-          </a:xfrm>
-          <a:prstGeom prst="rect">
-            <a:avLst/>
-          </a:prstGeom>
-          <a:noFill/>
-          <a:ln/>
-        </p:spPr>
-        <p:txBody>
-          <a:bodyPr wrap="square" lIns="0" tIns="0" rIns="0" bIns="0" rtlCol="0" anchor="ctr">
-            <a:normAutofit/>
-          </a:bodyPr>
-          <a:lstStyle/>
-          <a:p>
-            <a:pPr algn="ctr" indent="0" marL="0">
-              <a:buNone/>
-            </a:pPr>
-            <a:r>
-              <a:rPr lang="en-US" sz="3600" b="1" dirty="0">
-                <a:solidFill>
-                  <a:srgbClr val="990011"/>
-                </a:solidFill>
-                <a:latin typeface="Times New Roman" pitchFamily="34" charset="0"/>
-                <a:ea typeface="Times New Roman" pitchFamily="34" charset="-122"/>
-                <a:cs typeface="Times New Roman" pitchFamily="34" charset="-120"/>
-              </a:rPr>
-              <a:t>Correction: Possible Answer</a:t>
-            </a:r>
-            <a:endParaRPr lang="en-US" sz="3600" dirty="0"/>
-          </a:p>
-        </p:txBody>
-      </p:sp>
-      <p:sp>
-        <p:nvSpPr>
-          <p:cNvPr id="5" name="Text 2"/>
-          <p:cNvSpPr/>
-          <p:nvPr/>
-        </p:nvSpPr>
-        <p:spPr>
-          <a:xfrm>
-            <a:off x="4069080" y="1783080"/>
-            <a:ext cx="7802575" cy="4663440"/>
-          </a:xfrm>
-          <a:prstGeom prst="rect">
-            <a:avLst/>
-          </a:prstGeom>
-          <a:noFill/>
-          <a:ln/>
-        </p:spPr>
-        <p:txBody>
-          <a:bodyPr wrap="square" lIns="0" tIns="0" rIns="0" bIns="0" rtlCol="0" anchor="t"/>
-          <a:lstStyle/>
-          <a:p>
-            <a:pPr algn="l" indent="0" marL="0">
-              <a:spcAft>
-                <a:spcPts val="800"/>
-              </a:spcAft>
-              <a:buNone/>
-            </a:pPr>
-            <a:r>
-              <a:rPr lang="en-US" sz="4000" dirty="0">
-                <a:solidFill>
-                  <a:srgbClr val="111111"/>
-                </a:solidFill>
-                <a:latin typeface="Times New Roman" pitchFamily="34" charset="0"/>
-                <a:ea typeface="Times New Roman" pitchFamily="34" charset="-122"/>
-                <a:cs typeface="Times New Roman" pitchFamily="34" charset="-120"/>
-              </a:rPr>
-              <a:t>Douala (3.9 M) – Yaoundé (4.1 M), 240 km: I = (3.9 × 4.1) ÷ 240² ≈ 0.00028; Douala – Garoua (0.9 M), about 1,000 km: I = (3.9 × 0.9) ÷ 1,000² ≈ 0.0000035. Douala–Yaoundé interaction is about 80 times stronger.</a:t>
-            </a:r>
-            <a:endParaRPr lang="en-US" sz="4000" dirty="0"/>
-          </a:p>
-        </p:txBody>
-      </p:sp>
-      <p:sp>
-        <p:nvSpPr>
-          <p:cNvPr id="25" name="Slide Number Placeholder 0"/>
-          <p:cNvSpPr>
-            <a:spLocks noGrp="1"/>
-          </p:cNvSpPr>
-          <p:nvPr>
-            <p:ph type="sldNum" sz="quarter" idx="4294967295"/>
-          </p:nvPr>
-        </p:nvSpPr>
-        <p:spPr>
-          <a:xfrm>
-            <a:off x="27432" y="91440"/>
-            <a:ext cx="585216" cy="475488"/>
-          </a:xfrm>
-          <a:prstGeom prst="rect">
-            <a:avLst/>
-          </a:prstGeom>
-          <a:extLst>
-            <a:ext uri="{C572A759-6A51-4108-AA02-DFA0A04FC94B}">
-              <ma14:wrappingTextBoxFlag xmlns:ma14="http://schemas.microsoft.com/office/mac/drawingml/2011/main" val="0"/>
-            </a:ext>
-          </a:extLst>
-        </p:spPr>
-        <p:txBody>
-          <a:bodyPr/>
-          <a:lstStyle>
-            <a:lvl1pPr>
-              <a:defRPr sz="2000">
-                <a:solidFill>
-                  <a:srgbClr val="FFFFFF"/>
-                </a:solidFill>
-                <a:latin typeface="Calibri"/>
-                <a:ea typeface="Calibri"/>
-                <a:cs typeface="Calibri"/>
-              </a:defRPr>
-            </a:lvl1pPr>
-          </a:lstStyle>
-          <a:p>
-            <a:pPr algn="ctr"/>
-            <a:fld id="{F7021451-1387-4CA6-816F-3879F97B5CBC}" type="slidenum">
-              <a:rPr b="1" lang="en-US"/>
-              <a:t>5</a:t>
-            </a:fld>
-            <a:endParaRPr lang="en-US"/>
-          </a:p>
-        </p:txBody>
-      </p:sp>
-    </p:spTree>
-  </p:cSld>
-  <p:clrMapOvr>
-    <a:masterClrMapping/>
-  </p:clrMapOvr>
-</p:sld>
-</file>
-
-<file path=ppt/slides/slide50.xml><?xml version="1.0" encoding="utf-8"?>
-<p:sld xmlns:a="http://schemas.openxmlformats.org/drawingml/2006/main" xmlns:r="http://schemas.openxmlformats.org/officeDocument/2006/relationships" xmlns:p="http://schemas.openxmlformats.org/presentationml/2006/main">
-  <p:cSld name="Slide 50">
-    <p:spTree>
-      <p:nvGrpSpPr>
-        <p:cNvPr id="1" name=""/>
-        <p:cNvGrpSpPr/>
-        <p:nvPr/>
-      </p:nvGrpSpPr>
-      <p:grpSpPr>
-        <a:xfrm>
-          <a:off x="0" y="0"/>
-          <a:ext cx="0" cy="0"/>
-          <a:chOff x="0" y="0"/>
-          <a:chExt cx="0" cy="0"/>
-        </a:xfrm>
-      </p:grpSpPr>
-      <p:sp>
-        <p:nvSpPr>
-          <p:cNvPr id="2" name="Text 0"/>
-          <p:cNvSpPr/>
-          <p:nvPr/>
-        </p:nvSpPr>
-        <p:spPr>
-          <a:xfrm>
-            <a:off x="457200" y="713232"/>
-            <a:ext cx="11368735" cy="274320"/>
-          </a:xfrm>
-          <a:prstGeom prst="rect">
-            <a:avLst/>
-          </a:prstGeom>
-          <a:noFill/>
-          <a:ln/>
-        </p:spPr>
-        <p:txBody>
-          <a:bodyPr wrap="square" lIns="0" tIns="0" rIns="0" bIns="0" rtlCol="0" anchor="ctr"/>
-          <a:lstStyle/>
-          <a:p>
-            <a:pPr algn="r" indent="0" marL="0">
-              <a:buNone/>
-            </a:pPr>
-            <a:r>
-              <a:rPr lang="en-US" sz="1400" b="1" dirty="0">
-                <a:solidFill>
-                  <a:srgbClr val="1C3F6E"/>
-                </a:solidFill>
-                <a:latin typeface="Calibri" pitchFamily="34" charset="0"/>
-                <a:ea typeface="Calibri" pitchFamily="34" charset="-122"/>
-                <a:cs typeface="Calibri" pitchFamily="34" charset="-120"/>
-              </a:rPr>
               <a:t>LOGBOOK</a:t>
             </a:r>
             <a:endParaRPr lang="en-US" sz="1400" dirty="0"/>
@@ -18620,7 +20520,7 @@
       </p:sp>
       <p:graphicFrame>
         <p:nvGraphicFramePr>
-          <p:cNvPr id="51" name="Table 0"/>
+          <p:cNvPr id="56" name="Table 0"/>
           <p:cNvGraphicFramePr>
             <a:graphicFrameLocks noGrp="1"/>
           </p:cNvGraphicFramePr>
@@ -19006,7 +20906,7 @@
                           <a:ea typeface="Calibri" pitchFamily="34" charset="-122"/>
                           <a:cs typeface="Calibri" pitchFamily="34" charset="-120"/>
                         </a:rPr>
-                        <a:t>Define spatial interaction. Explain Ullman's three bases of interaction. Explain other factors of spatial interaction.</a:t>
+                        <a:t>Define spatial interaction. Distinguish tangible and intangible flows. Explain complementarity and transferability. Explain intervening opportunity and distance decay.</a:t>
                       </a:r>
                       <a:endParaRPr lang="en-US" sz="1600" dirty="0">
                         <a:latin typeface="Calibri" charset="0"/>
@@ -19144,7 +21044,7 @@
                           <a:ea typeface="Calibri" pitchFamily="34" charset="-122"/>
                           <a:cs typeface="Calibri" pitchFamily="34" charset="-120"/>
                         </a:rPr>
-                        <a:t>Learners are able to explain why places interact through flows of people, goods and information.</a:t>
+                        <a:t>Learners are able to explain the flows of people, goods and information between places using the factors of spatial interaction.</a:t>
                       </a:r>
                       <a:endParaRPr lang="en-US" sz="1600" dirty="0">
                         <a:latin typeface="Calibri" charset="0"/>
@@ -19242,7 +21142,7 @@
             <a:pPr algn="ctr"/>
             <a:fld id="{F7021451-1387-4CA6-816F-3879F97B5CBC}" type="slidenum">
               <a:rPr b="1" lang="en-US"/>
-              <a:t>50</a:t>
+              <a:t>55</a:t>
             </a:fld>
             <a:endParaRPr lang="en-US"/>
           </a:p>
@@ -19256,9 +21156,9 @@
 </p:sld>
 </file>
 
-<file path=ppt/slides/slide51.xml><?xml version="1.0" encoding="utf-8"?>
+<file path=ppt/slides/slide56.xml><?xml version="1.0" encoding="utf-8"?>
 <p:sld xmlns:a="http://schemas.openxmlformats.org/drawingml/2006/main" xmlns:r="http://schemas.openxmlformats.org/officeDocument/2006/relationships" xmlns:p="http://schemas.openxmlformats.org/presentationml/2006/main">
-  <p:cSld name="Slide 51">
+  <p:cSld name="Slide 56">
     <p:spTree>
       <p:nvGrpSpPr>
         <p:cNvPr id="1" name=""/>
@@ -19353,7 +21253,7 @@
       </p:sp>
       <p:graphicFrame>
         <p:nvGraphicFramePr>
-          <p:cNvPr id="52" name="Table 0"/>
+          <p:cNvPr id="57" name="Table 0"/>
           <p:cNvGraphicFramePr>
             <a:graphicFrameLocks noGrp="1"/>
           </p:cNvGraphicFramePr>
@@ -19463,7 +21363,7 @@
                           <a:ea typeface="Calibri" pitchFamily="34" charset="-122"/>
                           <a:cs typeface="Calibri" pitchFamily="34" charset="-120"/>
                         </a:rPr>
-                        <a:t>Meaning of Spatial Interaction; Factors of Spatial Interaction; Other Factors.</a:t>
+                        <a:t>DEFINITIONS; Meaning of Spatial Interaction; Factors of Spatial Interaction (Ullman).</a:t>
                       </a:r>
                       <a:endParaRPr lang="en-US" sz="1600" dirty="0">
                         <a:latin typeface="Calibri" charset="0"/>
@@ -19739,7 +21639,7 @@
                           <a:ea typeface="Calibri" pitchFamily="34" charset="-122"/>
                           <a:cs typeface="Calibri" pitchFamily="34" charset="-120"/>
                         </a:rPr>
-                        <a:t>List goods that come to your town from other regions and say why.</a:t>
+                        <a:t>Define an internally displaced person.</a:t>
                       </a:r>
                       <a:endParaRPr lang="en-US" sz="1600" dirty="0">
                         <a:latin typeface="Calibri" charset="0"/>
@@ -20113,7 +22013,7 @@
             <a:pPr algn="ctr"/>
             <a:fld id="{F7021451-1387-4CA6-816F-3879F97B5CBC}" type="slidenum">
               <a:rPr b="1" lang="en-US"/>
-              <a:t>51</a:t>
+              <a:t>56</a:t>
             </a:fld>
             <a:endParaRPr lang="en-US"/>
           </a:p>
@@ -20127,9 +22027,9 @@
 </p:sld>
 </file>
 
-<file path=ppt/slides/slide52.xml><?xml version="1.0" encoding="utf-8"?>
+<file path=ppt/slides/slide57.xml><?xml version="1.0" encoding="utf-8"?>
 <p:sld xmlns:a="http://schemas.openxmlformats.org/drawingml/2006/main" xmlns:r="http://schemas.openxmlformats.org/officeDocument/2006/relationships" xmlns:p="http://schemas.openxmlformats.org/presentationml/2006/main">
-  <p:cSld name="Slide 52">
+  <p:cSld name="Slide 57">
     <p:spTree>
       <p:nvGrpSpPr>
         <p:cNvPr id="1" name=""/>
@@ -20306,7 +22206,7 @@
                 <a:ea typeface="Calibri" pitchFamily="34" charset="-122"/>
                 <a:cs typeface="Calibri" pitchFamily="34" charset="-120"/>
               </a:rPr>
-              <a:t>Without the projector (Activity 1): draw three boxes.</a:t>
+              <a:t>Without the projector (Activity 1): list flows between Garoua and Douala.</a:t>
             </a:r>
             <a:endParaRPr lang="en-US" sz="2000" dirty="0"/>
           </a:p>
@@ -20327,7 +22227,7 @@
                 <a:ea typeface="Calibri" pitchFamily="34" charset="-122"/>
                 <a:cs typeface="Calibri" pitchFamily="34" charset="-120"/>
               </a:rPr>
-              <a:t>Without the projector (Activity 2): list goods moved north and south.</a:t>
+              <a:t>Without the projector (Activity 2): draw an arrow from Garoua to Douala.</a:t>
             </a:r>
             <a:endParaRPr lang="en-US" sz="2000" dirty="0"/>
           </a:p>
@@ -20348,7 +22248,7 @@
                 <a:ea typeface="Calibri" pitchFamily="34" charset="-122"/>
                 <a:cs typeface="Calibri" pitchFamily="34" charset="-120"/>
               </a:rPr>
-              <a:t>Without the projector (Activity 3): mention the Transcam railway.</a:t>
+              <a:t>Without the projector (Activity 3): compare transport costs.</a:t>
             </a:r>
             <a:endParaRPr lang="en-US" sz="2000" dirty="0"/>
           </a:p>
@@ -20369,7 +22269,7 @@
                 <a:ea typeface="Calibri" pitchFamily="34" charset="-122"/>
                 <a:cs typeface="Calibri" pitchFamily="34" charset="-120"/>
               </a:rPr>
-              <a:t>Without the projector (Activity 4): discuss mobile money.</a:t>
+              <a:t>Without the projector (Activity 4): draw the route Garoua–Ngaoundéré–Yaoundé.</a:t>
             </a:r>
             <a:endParaRPr lang="en-US" sz="2000" dirty="0"/>
           </a:p>
@@ -20390,7 +22290,7 @@
                 <a:ea typeface="Calibri" pitchFamily="34" charset="-122"/>
                 <a:cs typeface="Calibri" pitchFamily="34" charset="-120"/>
               </a:rPr>
-              <a:t>Without the projector (Activity 5): describe travel in the rainy season.</a:t>
+              <a:t>Without the projector (Activity 5): ask learners where their friends live.</a:t>
             </a:r>
             <a:endParaRPr lang="en-US" sz="2000" dirty="0"/>
           </a:p>
@@ -20438,7 +22338,7 @@
             <a:pPr algn="ctr"/>
             <a:fld id="{F7021451-1387-4CA6-816F-3879F97B5CBC}" type="slidenum">
               <a:rPr b="1" lang="en-US"/>
-              <a:t>52</a:t>
+              <a:t>57</a:t>
             </a:fld>
             <a:endParaRPr lang="en-US"/>
           </a:p>
@@ -20452,9 +22352,9 @@
 </p:sld>
 </file>
 
-<file path=ppt/slides/slide53.xml><?xml version="1.0" encoding="utf-8"?>
+<file path=ppt/slides/slide58.xml><?xml version="1.0" encoding="utf-8"?>
 <p:sld xmlns:a="http://schemas.openxmlformats.org/drawingml/2006/main" xmlns:r="http://schemas.openxmlformats.org/officeDocument/2006/relationships" xmlns:p="http://schemas.openxmlformats.org/presentationml/2006/main">
-  <p:cSld name="Slide 53">
+  <p:cSld name="Slide 58">
     <p:spTree>
       <p:nvGrpSpPr>
         <p:cNvPr id="1" name=""/>
@@ -20610,7 +22510,7 @@
                 <a:ea typeface="Calibri" pitchFamily="34" charset="-122"/>
                 <a:cs typeface="Calibri" pitchFamily="34" charset="-120"/>
               </a:rPr>
-              <a:t>National Geography Syllabus, MINESEC/IGE/IP-SS, 2019 — Module 4 (Population Geography).</a:t>
+              <a:t>Geography Syllabus for Sixth Forms (Lower and Upper Sixth), MINESEC, 2019 — Module 4 (Population Geography).</a:t>
             </a:r>
             <a:endParaRPr lang="en-US" sz="1800" dirty="0"/>
           </a:p>
@@ -20631,7 +22531,7 @@
                 <a:ea typeface="Calibri" pitchFamily="34" charset="-122"/>
                 <a:cs typeface="Calibri" pitchFamily="34" charset="-120"/>
               </a:rPr>
-              <a:t>Photo, Activity 2: “Discussing the price” by 10b travelling / Carsten ten Brink, CC BY-NC-ND 2.0, via Flickr (https://www.flickr.com/photos/77334245@N00/7313656038)</a:t>
+              <a:t>Teacher's course notes: Mr KAMDEM E., Population Geography (USA), GBHS Garoua, 2026.</a:t>
             </a:r>
             <a:endParaRPr lang="en-US" sz="1800" dirty="0"/>
           </a:p>
@@ -20652,7 +22552,7 @@
                 <a:ea typeface="Calibri" pitchFamily="34" charset="-122"/>
                 <a:cs typeface="Calibri" pitchFamily="34" charset="-120"/>
               </a:rPr>
-              <a:t>Photo, Activity 3: “Train de nuit” by Huard, CC BY-NC-ND 2.0, via Flickr (https://www.flickr.com/photos/41569561@N07/5499545979)</a:t>
+              <a:t>United Nations, World Population Prospects 2024.</a:t>
             </a:r>
             <a:endParaRPr lang="en-US" sz="1800" dirty="0"/>
           </a:p>
@@ -20673,7 +22573,7 @@
                 <a:ea typeface="Calibri" pitchFamily="34" charset="-122"/>
                 <a:cs typeface="Calibri" pitchFamily="34" charset="-120"/>
               </a:rPr>
-              <a:t>Photo, Activity 4: “Using mobile technology to give feedback about the crop trials” by Bioversity International, CC BY-NC-ND 2.0, via Flickr (https://www.flickr.com/photos/50383637@N07/15019002626)</a:t>
+              <a:t>Photo, Activity 1: “Scenes from Rwanda” by International Monetary Fund, CC BY-NC-ND 2.0, via Flickr (https://www.flickr.com/photos/38851430@N07/52660758172)</a:t>
             </a:r>
             <a:endParaRPr lang="en-US" sz="1800" dirty="0"/>
           </a:p>
@@ -20694,7 +22594,7 @@
                 <a:ea typeface="Calibri" pitchFamily="34" charset="-122"/>
                 <a:cs typeface="Calibri" pitchFamily="34" charset="-120"/>
               </a:rPr>
-              <a:t>Photo, Activity 5: “Cameroon - UN Women's Gender Road Project” by UN Women Gallery, CC BY-NC-ND 2.0, via Flickr (https://www.flickr.com/photos/51431730@N04/47586053052)</a:t>
+              <a:t>Photo, Activity 2: “Cotton harvest” by CIFOR, CC BY-NC-ND 2.0, via Flickr (https://www.flickr.com/photos/45423546@N07/35706862552)</a:t>
             </a:r>
             <a:endParaRPr lang="en-US" sz="1800" dirty="0"/>
           </a:p>
@@ -20715,6 +22615,27 @@
                 <a:ea typeface="Calibri" pitchFamily="34" charset="-122"/>
                 <a:cs typeface="Calibri" pitchFamily="34" charset="-120"/>
               </a:rPr>
+              <a:t>Photo, Activity 3: “Traveling by truck” by World Bank Photo Collection, CC BY-NC-ND 2.0, via Flickr (https://www.flickr.com/photos/10816734@N03/2628517227)</a:t>
+            </a:r>
+            <a:endParaRPr lang="en-US" sz="1800" dirty="0"/>
+          </a:p>
+          <a:p>
+            <a:pPr algn="l" marL="342900" indent="-342900">
+              <a:spcAft>
+                <a:spcPts val="800"/>
+              </a:spcAft>
+              <a:buSzPct val="100000"/>
+              <a:buChar char="•"/>
+            </a:pPr>
+            <a:r>
+              <a:rPr lang="en-US" sz="1800" dirty="0">
+                <a:solidFill>
+                  <a:srgbClr val="111111"/>
+                </a:solidFill>
+                <a:latin typeface="Calibri" pitchFamily="34" charset="0"/>
+                <a:ea typeface="Calibri" pitchFamily="34" charset="-122"/>
+                <a:cs typeface="Calibri" pitchFamily="34" charset="-120"/>
+              </a:rPr>
               <a:t>Diagrams and animations: drawn for this lesson (Geography Department).</a:t>
             </a:r>
             <a:endParaRPr lang="en-US" sz="1800" dirty="0"/>
@@ -20763,7 +22684,7 @@
             <a:pPr algn="ctr"/>
             <a:fld id="{F7021451-1387-4CA6-816F-3879F97B5CBC}" type="slidenum">
               <a:rPr b="1" lang="en-US"/>
-              <a:t>53</a:t>
+              <a:t>58</a:t>
             </a:fld>
             <a:endParaRPr lang="en-US"/>
           </a:p>
@@ -21181,7 +23102,7 @@
         <p:spPr>
           <a:xfrm>
             <a:off x="0" y="658368"/>
-            <a:ext cx="5120640" cy="5833872"/>
+            <a:ext cx="1463040" cy="5833872"/>
           </a:xfrm>
           <a:prstGeom prst="rect">
             <a:avLst/>
@@ -21196,8 +23117,8 @@
         </p:nvSpPr>
         <p:spPr>
           <a:xfrm>
-            <a:off x="5349240" y="1005840"/>
-            <a:ext cx="6522415" cy="731520"/>
+            <a:off x="1691640" y="1005840"/>
+            <a:ext cx="10180015" cy="731520"/>
           </a:xfrm>
           <a:prstGeom prst="rect">
             <a:avLst/>
@@ -21237,8 +23158,8 @@
         </p:nvSpPr>
         <p:spPr>
           <a:xfrm>
-            <a:off x="5349240" y="1783080"/>
-            <a:ext cx="6522415" cy="4663440"/>
+            <a:off x="1691640" y="1783080"/>
+            <a:ext cx="10180015" cy="4663440"/>
           </a:xfrm>
           <a:prstGeom prst="rect">
             <a:avLst/>
@@ -21309,7 +23230,29 @@
                 <a:ea typeface="Times New Roman" pitchFamily="34" charset="-122"/>
                 <a:cs typeface="Times New Roman" pitchFamily="34" charset="-120"/>
               </a:rPr>
-              <a:t>Explain Ullman's three bases of interaction.</a:t>
+              <a:t>Distinguish tangible and intangible flows.</a:t>
+            </a:r>
+            <a:endParaRPr lang="en-US" sz="4000" dirty="0"/>
+          </a:p>
+          <a:p>
+            <a:pPr algn="l" marL="342900" indent="-342900">
+              <a:spcAft>
+                <a:spcPts val="800"/>
+              </a:spcAft>
+              <a:buSzPct val="100000"/>
+              <a:buFont typeface="+mj-lt"/>
+              <a:buAutoNum type="arabicPeriod" startAt="1"/>
+            </a:pPr>
+            <a:r>
+              <a:rPr lang="en-US" sz="4000" dirty="0">
+                <a:solidFill>
+                  <a:srgbClr val="111111"/>
+                </a:solidFill>
+                <a:latin typeface="Times New Roman" pitchFamily="34" charset="0"/>
+                <a:ea typeface="Times New Roman" pitchFamily="34" charset="-122"/>
+                <a:cs typeface="Times New Roman" pitchFamily="34" charset="-120"/>
+              </a:rPr>
+              <a:t>Explain complementarity and transferability.</a:t>
             </a:r>
             <a:endParaRPr lang="en-US" sz="4000" dirty="0"/>
           </a:p>
@@ -21530,7 +23473,7 @@
                 <a:ea typeface="Times New Roman" pitchFamily="34" charset="-122"/>
                 <a:cs typeface="Times New Roman" pitchFamily="34" charset="-120"/>
               </a:rPr>
-              <a:t>Explain other factors of spatial interaction.</a:t>
+              <a:t>Explain intervening opportunity and distance decay.</a:t>
             </a:r>
             <a:endParaRPr lang="en-US" sz="4000" dirty="0"/>
           </a:p>
@@ -21750,7 +23693,7 @@
                 <a:ea typeface="Times New Roman" pitchFamily="34" charset="-122"/>
                 <a:cs typeface="Times New Roman" pitchFamily="34" charset="-120"/>
               </a:rPr>
-              <a:t>Migration falls with distance.</a:t>
+              <a:t>Migration decreases with distance.</a:t>
             </a:r>
             <a:endParaRPr lang="en-US" sz="4000" dirty="0"/>
           </a:p>
@@ -21771,7 +23714,28 @@
                 <a:ea typeface="Times New Roman" pitchFamily="34" charset="-122"/>
                 <a:cs typeface="Times New Roman" pitchFamily="34" charset="-120"/>
               </a:rPr>
-              <a:t>Intervening opportunities reduce long flows.</a:t>
+              <a:t>Big towns attract more people.</a:t>
+            </a:r>
+            <a:endParaRPr lang="en-US" sz="4000" dirty="0"/>
+          </a:p>
+          <a:p>
+            <a:pPr algn="l" marL="342900" indent="-342900">
+              <a:spcAft>
+                <a:spcPts val="800"/>
+              </a:spcAft>
+              <a:buSzPct val="100000"/>
+              <a:buChar char="•"/>
+            </a:pPr>
+            <a:r>
+              <a:rPr lang="en-US" sz="4000" dirty="0">
+                <a:solidFill>
+                  <a:srgbClr val="111111"/>
+                </a:solidFill>
+                <a:latin typeface="Times New Roman" pitchFamily="34" charset="0"/>
+                <a:ea typeface="Times New Roman" pitchFamily="34" charset="-122"/>
+                <a:cs typeface="Times New Roman" pitchFamily="34" charset="-120"/>
+              </a:rPr>
+              <a:t>The gravity model uses population and distance.</a:t>
             </a:r>
             <a:endParaRPr lang="en-US" sz="4000" dirty="0"/>
           </a:p>

--- a/lecons/USA/Population Geography/18_USA_POP_L14_Spatial_Interaction.pptx
+++ b/lecons/USA/Population Geography/18_USA_POP_L14_Spatial_Interaction.pptx
@@ -62,10 +62,9 @@
     <p:sldId id="310" r:id="rId56"/>
     <p:sldId id="311" r:id="rId57"/>
     <p:sldId id="312" r:id="rId58"/>
-    <p:sldId id="313" r:id="rId59"/>
   </p:sldIdLst>
   <p:notesMasterIdLst>
-    <p:notesMasterId r:id="rId60"/>
+    <p:notesMasterId r:id="rId59"/>
   </p:notesMasterIdLst>
   <p:sldSz cx="12192000" cy="6858000"/>
   <p:notesSz cx="6858000" cy="12192000"/>
@@ -3287,7 +3286,7 @@
           <a:p>
             <a:r>
               <a:rPr lang="en-US" dirty="0"/>
-              <a:t>We continue with the definitions. On this slide we have Network and Complementarity. Write each point on a new line, with the key term first, and explain it in your own words when we revise. When you finish, we go to the next slide.</a:t>
+              <a:t>We continue with the definitions. On this slide we have Complementarity, Transferability and Distance decay. Write each point on a new line, with the key term first, and explain it in your own words when we revise.</a:t>
             </a:r>
             <a:endParaRPr lang="en-US" dirty="0"/>
           </a:p>
@@ -3375,7 +3374,7 @@
           <a:p>
             <a:r>
               <a:rPr lang="en-US" dirty="0"/>
-              <a:t>We continue with the definitions. On this slide we have Transferability and Distance decay. Write each point on a new line, with the key term first, and explain it in your own words when we revise.</a:t>
+              <a:t>Let us copy Meaning of Spatial Interaction. Spatial interaction is explained as follows. Copy the point on Tangible flows on the left, then draw the diagram on the right: a lorry. Give it a title and label it clearly.</a:t>
             </a:r>
             <a:endParaRPr lang="en-US" dirty="0"/>
           </a:p>
@@ -3551,7 +3550,7 @@
           <a:p>
             <a:r>
               <a:rPr lang="en-US" dirty="0"/>
-              <a:t>Let us copy Meaning of Spatial Interaction. Spatial interaction is presented as follows. Copy the point on Tangible flows on the left, then draw the diagram on the right: goods on the road. Give it a title and label it clearly.</a:t>
+              <a:t>Copy the point on Intangible flows on the left, then draw the diagram on the right: mobile money. Give it a title and label it clearly.</a:t>
             </a:r>
             <a:endParaRPr lang="en-US" dirty="0"/>
           </a:p>
@@ -3639,7 +3638,7 @@
           <a:p>
             <a:r>
               <a:rPr lang="en-US" dirty="0"/>
-              <a:t>Copy the point on Intangible flows on the left, then draw the diagram on the right: mobile money. Give it a title and label it clearly.</a:t>
+              <a:t>We continue with Meaning of Spatial Interaction. Copy the point on Networks and measurement: write the key term first, then its explanation.</a:t>
             </a:r>
             <a:endParaRPr lang="en-US" dirty="0"/>
           </a:p>
@@ -3727,7 +3726,7 @@
           <a:p>
             <a:r>
               <a:rPr lang="en-US" dirty="0"/>
-              <a:t>We continue with Meaning of Spatial Interaction. On this slide we have Networks and Measurement. Write each point on a new line, with the key term first, and explain it in your own words when we revise.</a:t>
+              <a:t>Let us copy Factors of Spatial Interaction. According to Edward Ullman, spatial interaction depends on the following factors. Copy the point on Complementarity on the left, then draw the diagram on the right: ullman's factors. Give it a title and label it clearly.</a:t>
             </a:r>
             <a:endParaRPr lang="en-US" dirty="0"/>
           </a:p>
@@ -3815,7 +3814,7 @@
           <a:p>
             <a:r>
               <a:rPr lang="en-US" dirty="0"/>
-              <a:t>Let us copy Factors of Spatial Interaction (Ullman). The factors of spatial interaction identified by Edward Ullman are the following. Copy the point on Complementarity on the left, then draw the diagram on the right: factors of spatial interaction. Give it a title and label it clearly.</a:t>
+              <a:t>Copy the point on Transferability on the left, then draw the diagram on the right: the cotton harvest. Give it a title and label it clearly.</a:t>
             </a:r>
             <a:endParaRPr lang="en-US" dirty="0"/>
           </a:p>
@@ -3903,7 +3902,7 @@
           <a:p>
             <a:r>
               <a:rPr lang="en-US" dirty="0"/>
-              <a:t>Copy the point on Transferability on the left, then draw the diagram on the right: cotton, a surplus of the North. Give it a title and label it clearly.</a:t>
+              <a:t>We continue with Factors of Spatial Interaction. Copy the point on Intervening opportunity: write the key term first, then its explanation.</a:t>
             </a:r>
             <a:endParaRPr lang="en-US" dirty="0"/>
           </a:p>
@@ -3991,7 +3990,7 @@
           <a:p>
             <a:r>
               <a:rPr lang="en-US" dirty="0"/>
-              <a:t>Copy the point on Intervening opportunity on the left, then draw the diagram on the right: a nearer opportunity. Give it a title and label it clearly.</a:t>
+              <a:t>Copy the point on Distance decay on the left, then draw the diagram on the right: distance decay. Give it a title and label it clearly.</a:t>
             </a:r>
             <a:endParaRPr lang="en-US" dirty="0"/>
           </a:p>
@@ -4079,7 +4078,7 @@
           <a:p>
             <a:r>
               <a:rPr lang="en-US" dirty="0"/>
-              <a:t>Copy the point on Distance decay on the left, then draw the diagram on the right: interaction and distance. Give it a title and label it clearly.</a:t>
+              <a:t>Now let us check what you have understood. Question 1: Explain complementarity with an example. Answer in your exercise book.</a:t>
             </a:r>
             <a:endParaRPr lang="en-US" dirty="0"/>
           </a:p>
@@ -4167,7 +4166,7 @@
           <a:p>
             <a:r>
               <a:rPr lang="en-US" dirty="0"/>
-              <a:t>Now let us check what you have understood. Question 1: Explain complementarity with an example. Answer in your exercise book.</a:t>
+              <a:t>The expected answer is: one place has a surplus that another needs, e.g. cotton from the North sent to textile factories in Douala. If you got it right, well done.</a:t>
             </a:r>
             <a:endParaRPr lang="en-US" dirty="0"/>
           </a:p>
@@ -4255,7 +4254,7 @@
           <a:p>
             <a:r>
               <a:rPr lang="en-US" dirty="0"/>
-              <a:t>The expected answer is: one place has a surplus that another needs, e.g. cotton from the North sent to textile factories in Douala. If you got it right, well done.</a:t>
+              <a:t>Now let us check what you have understood. Question 2: What is distance decay? Answer in your exercise book.</a:t>
             </a:r>
             <a:endParaRPr lang="en-US" dirty="0"/>
           </a:p>
@@ -4343,7 +4342,7 @@
           <a:p>
             <a:r>
               <a:rPr lang="en-US" dirty="0"/>
-              <a:t>Now let us check what you have understood. Question 2: What is distance decay? Answer in your exercise book.</a:t>
+              <a:t>The expected answer is: the decrease of interaction between places as distance increases. If you got it right, well done.</a:t>
             </a:r>
             <a:endParaRPr lang="en-US" dirty="0"/>
           </a:p>
@@ -4519,7 +4518,7 @@
           <a:p>
             <a:r>
               <a:rPr lang="en-US" dirty="0"/>
-              <a:t>The expected answer is: the decrease of interaction between places as distance increases. If you got it right, well done.</a:t>
+              <a:t>For those who need more practice, fill in the blanks in your exercise book. The answers are: number 1, interaction; number 2, transferability; number 3, decay.</a:t>
             </a:r>
             <a:endParaRPr lang="en-US" dirty="0"/>
           </a:p>
@@ -4607,7 +4606,7 @@
           <a:p>
             <a:r>
               <a:rPr lang="en-US" dirty="0"/>
-              <a:t>For those who need more practice, fill in the blanks in your exercise book. The answers are: number 1, interaction; number 2, transferability; number 3, decay.</a:t>
+              <a:t>For your homework: Define an internally displaced person. We shall correct it at the beginning of our next lesson.</a:t>
             </a:r>
             <a:endParaRPr lang="en-US" dirty="0"/>
           </a:p>
@@ -4695,7 +4694,7 @@
           <a:p>
             <a:r>
               <a:rPr lang="en-US" dirty="0"/>
-              <a:t>For your homework: Define an internally displaced person. We shall correct it at the beginning of our next lesson.</a:t>
+              <a:t>Our next lesson will be on Lesson 15: Types of Migration. Thank you for your attention, and see you next time.</a:t>
             </a:r>
             <a:endParaRPr lang="en-US" dirty="0"/>
           </a:p>
@@ -4783,7 +4782,7 @@
           <a:p>
             <a:r>
               <a:rPr lang="en-US" dirty="0"/>
-              <a:t>Our next lesson will be on Lesson 15: Types of Migration. Thank you for your attention, and see you next time.</a:t>
+              <a:t>Let us play the bilingual game. I say a word in English, and you give me the French word. Then we do the reverse.</a:t>
             </a:r>
             <a:endParaRPr lang="en-US" dirty="0"/>
           </a:p>
@@ -4871,7 +4870,7 @@
           <a:p>
             <a:r>
               <a:rPr lang="en-US" dirty="0"/>
-              <a:t>Let us play the bilingual game. I say a word in English, and you give me the French word. Then we do the reverse.</a:t>
+              <a:t>I record this information in the official logbook of the class after the lesson.</a:t>
             </a:r>
             <a:endParaRPr lang="en-US" dirty="0"/>
           </a:p>
@@ -4959,7 +4958,7 @@
           <a:p>
             <a:r>
               <a:rPr lang="en-US" dirty="0"/>
-              <a:t>I record this information in the official logbook of the class after the lesson.</a:t>
+              <a:t>I complete the second page of the logbook: the matter taught, the evaluation, the homework and the attendance.</a:t>
             </a:r>
             <a:endParaRPr lang="en-US" dirty="0"/>
           </a:p>
@@ -5047,7 +5046,7 @@
           <a:p>
             <a:r>
               <a:rPr lang="en-US" dirty="0"/>
-              <a:t>I complete the second page of the logbook: the matter taught, the evaluation, the homework and the attendance.</a:t>
+              <a:t>This slide is for me, the teacher: it gives the timing of the lesson and what to do if the projector is not available.</a:t>
             </a:r>
             <a:endParaRPr lang="en-US" dirty="0"/>
           </a:p>
@@ -5135,7 +5134,7 @@
           <a:p>
             <a:r>
               <a:rPr lang="en-US" dirty="0"/>
-              <a:t>This slide is for me, the teacher: it gives the timing of the lesson and what to do if the projector is not available.</a:t>
+              <a:t>These are the references and picture credits used to prepare this lesson.</a:t>
             </a:r>
             <a:endParaRPr lang="en-US" dirty="0"/>
           </a:p>
@@ -5159,94 +5158,6 @@
             <a:fld id="{F7021451-1387-4CA6-816F-3879F97B5CBC}" type="slidenum">
               <a:rPr lang="en-US"/>
               <a:t>57</a:t>
-            </a:fld>
-            <a:endParaRPr lang="en-US"/>
-          </a:p>
-        </p:txBody>
-      </p:sp>
-    </p:spTree>
-    <p:extLst>
-      <p:ext uri="{BB962C8B-B14F-4D97-AF65-F5344CB8AC3E}">
-        <p14:creationId xmlns:p14="http://schemas.microsoft.com/office/powerpoint/2010/main" val="1024086991"/>
-      </p:ext>
-    </p:extLst>
-  </p:cSld>
-  <p:clrMapOvr>
-    <a:masterClrMapping/>
-  </p:clrMapOvr>
-</p:notes>
-</file>
-
-<file path=ppt/notesSlides/notesSlide58.xml><?xml version="1.0" encoding="utf-8"?>
-<p:notes xmlns:a="http://schemas.openxmlformats.org/drawingml/2006/main" xmlns:r="http://schemas.openxmlformats.org/officeDocument/2006/relationships" xmlns:p="http://schemas.openxmlformats.org/presentationml/2006/main">
-  <p:cSld>
-    <p:spTree>
-      <p:nvGrpSpPr>
-        <p:cNvPr id="1" name=""/>
-        <p:cNvGrpSpPr/>
-        <p:nvPr/>
-      </p:nvGrpSpPr>
-      <p:grpSpPr>
-        <a:xfrm>
-          <a:off x="0" y="0"/>
-          <a:ext cx="0" cy="0"/>
-          <a:chOff x="0" y="0"/>
-          <a:chExt cx="0" cy="0"/>
-        </a:xfrm>
-      </p:grpSpPr>
-      <p:sp>
-        <p:nvSpPr>
-          <p:cNvPr id="2" name="Slide Image Placeholder 1"/>
-          <p:cNvSpPr>
-            <a:spLocks noGrp="1" noRot="1" noChangeAspect="1"/>
-          </p:cNvSpPr>
-          <p:nvPr>
-            <p:ph type="sldImg"/>
-          </p:nvPr>
-        </p:nvSpPr>
-        <p:spPr/>
-      </p:sp>
-      <p:sp>
-        <p:nvSpPr>
-          <p:cNvPr id="3" name="Notes Placeholder 2"/>
-          <p:cNvSpPr>
-            <a:spLocks noGrp="1"/>
-          </p:cNvSpPr>
-          <p:nvPr>
-            <p:ph type="body" idx="1"/>
-          </p:nvPr>
-        </p:nvSpPr>
-        <p:spPr/>
-        <p:txBody>
-          <a:bodyPr/>
-          <a:lstStyle/>
-          <a:p>
-            <a:r>
-              <a:rPr lang="en-US" dirty="0"/>
-              <a:t>These are the references and picture credits used to prepare this lesson.</a:t>
-            </a:r>
-            <a:endParaRPr lang="en-US" dirty="0"/>
-          </a:p>
-        </p:txBody>
-      </p:sp>
-      <p:sp>
-        <p:nvSpPr>
-          <p:cNvPr id="4" name="Slide Number Placeholder 3"/>
-          <p:cNvSpPr>
-            <a:spLocks noGrp="1"/>
-          </p:cNvSpPr>
-          <p:nvPr>
-            <p:ph type="sldNum" sz="quarter" idx="10"/>
-          </p:nvPr>
-        </p:nvSpPr>
-        <p:spPr/>
-        <p:txBody>
-          <a:bodyPr/>
-          <a:lstStyle/>
-          <a:p>
-            <a:fld id="{F7021451-1387-4CA6-816F-3879F97B5CBC}" type="slidenum">
-              <a:rPr lang="en-US"/>
-              <a:t>58</a:t>
             </a:fld>
             <a:endParaRPr lang="en-US"/>
           </a:p>
@@ -14763,7 +14674,7 @@
         <p:spPr>
           <a:xfrm>
             <a:off x="0" y="658368"/>
-            <a:ext cx="3840480" cy="5833872"/>
+            <a:ext cx="1463040" cy="5833872"/>
           </a:xfrm>
           <a:prstGeom prst="rect">
             <a:avLst/>
@@ -14778,8 +14689,8 @@
         </p:nvSpPr>
         <p:spPr>
           <a:xfrm>
-            <a:off x="4069080" y="1005840"/>
-            <a:ext cx="7802575" cy="731520"/>
+            <a:off x="1691640" y="1005840"/>
+            <a:ext cx="10180015" cy="731520"/>
           </a:xfrm>
           <a:prstGeom prst="rect">
             <a:avLst/>
@@ -14819,8 +14730,8 @@
         </p:nvSpPr>
         <p:spPr>
           <a:xfrm>
-            <a:off x="4069080" y="1783080"/>
-            <a:ext cx="7802575" cy="4663440"/>
+            <a:off x="1691640" y="1783080"/>
+            <a:ext cx="10180015" cy="4663440"/>
           </a:xfrm>
           <a:prstGeom prst="rect">
             <a:avLst/>
@@ -14847,7 +14758,7 @@
                 <a:ea typeface="Times New Roman" pitchFamily="34" charset="-122"/>
                 <a:cs typeface="Times New Roman" pitchFamily="34" charset="-120"/>
               </a:rPr>
-              <a:t>Network: </a:t>
+              <a:t>Complementarity: </a:t>
             </a:r>
             <a:pPr algn="l" indent="0" marL="0">
               <a:spcAft>
@@ -14864,7 +14775,7 @@
                 <a:ea typeface="Times New Roman" pitchFamily="34" charset="-122"/>
                 <a:cs typeface="Times New Roman" pitchFamily="34" charset="-120"/>
               </a:rPr>
-              <a:t>It is a set of links (roads, telephone, internet, television) that connects places.</a:t>
+              <a:t>It is the situation where one place has a surplus of what another place needs.</a:t>
             </a:r>
             <a:endParaRPr lang="en-US" sz="4000" dirty="0"/>
           </a:p>
@@ -14884,7 +14795,7 @@
                 <a:ea typeface="Times New Roman" pitchFamily="34" charset="-122"/>
                 <a:cs typeface="Times New Roman" pitchFamily="34" charset="-120"/>
               </a:rPr>
-              <a:t>Complementarity: </a:t>
+              <a:t>Transferability: </a:t>
             </a:r>
             <a:pPr algn="l" indent="0" marL="0">
               <a:spcAft>
@@ -14901,7 +14812,44 @@
                 <a:ea typeface="Times New Roman" pitchFamily="34" charset="-122"/>
                 <a:cs typeface="Times New Roman" pitchFamily="34" charset="-120"/>
               </a:rPr>
-              <a:t>It is the situation where one place has a surplus of what another place needs.</a:t>
+              <a:t>It is the ease and cost of moving goods or people between two places.</a:t>
+            </a:r>
+            <a:endParaRPr lang="en-US" sz="4000" dirty="0"/>
+          </a:p>
+          <a:p>
+            <a:pPr algn="l" indent="0" marL="0">
+              <a:spcAft>
+                <a:spcPts val="800"/>
+              </a:spcAft>
+              <a:buNone/>
+            </a:pPr>
+            <a:r>
+              <a:rPr lang="en-US" sz="4000" b="1" dirty="0">
+                <a:solidFill>
+                  <a:srgbClr val="111111"/>
+                </a:solidFill>
+                <a:latin typeface="Times New Roman" pitchFamily="34" charset="0"/>
+                <a:ea typeface="Times New Roman" pitchFamily="34" charset="-122"/>
+                <a:cs typeface="Times New Roman" pitchFamily="34" charset="-120"/>
+              </a:rPr>
+              <a:t>Distance decay: </a:t>
+            </a:r>
+            <a:pPr algn="l" indent="0" marL="0">
+              <a:spcAft>
+                <a:spcPts val="800"/>
+              </a:spcAft>
+              <a:buNone/>
+            </a:pPr>
+            <a:r>
+              <a:rPr lang="en-US" sz="4000" dirty="0">
+                <a:solidFill>
+                  <a:srgbClr val="111111"/>
+                </a:solidFill>
+                <a:latin typeface="Times New Roman" pitchFamily="34" charset="0"/>
+                <a:ea typeface="Times New Roman" pitchFamily="34" charset="-122"/>
+                <a:cs typeface="Times New Roman" pitchFamily="34" charset="-120"/>
+              </a:rPr>
+              <a:t>It is the decrease of interaction as distance increases.</a:t>
             </a:r>
             <a:endParaRPr lang="en-US" sz="4000" dirty="0"/>
           </a:p>
@@ -15019,9 +14967,129 @@
           </a:p>
         </p:txBody>
       </p:sp>
+      <p:sp>
+        <p:nvSpPr>
+          <p:cNvPr id="3" name="Text 1"/>
+          <p:cNvSpPr/>
+          <p:nvPr/>
+        </p:nvSpPr>
+        <p:spPr>
+          <a:xfrm>
+            <a:off x="365760" y="1005840"/>
+            <a:ext cx="11460175" cy="731520"/>
+          </a:xfrm>
+          <a:prstGeom prst="rect">
+            <a:avLst/>
+          </a:prstGeom>
+          <a:noFill/>
+          <a:ln/>
+        </p:spPr>
+        <p:txBody>
+          <a:bodyPr wrap="square" lIns="0" tIns="0" rIns="0" bIns="0" rtlCol="0" anchor="ctr">
+            <a:normAutofit/>
+          </a:bodyPr>
+          <a:lstStyle/>
+          <a:p>
+            <a:pPr algn="ctr" indent="0" marL="0">
+              <a:buNone/>
+            </a:pPr>
+            <a:r>
+              <a:rPr lang="en-US" sz="3600" b="1" dirty="0">
+                <a:solidFill>
+                  <a:srgbClr val="990011"/>
+                </a:solidFill>
+                <a:latin typeface="Times New Roman" pitchFamily="34" charset="0"/>
+                <a:ea typeface="Times New Roman" pitchFamily="34" charset="-122"/>
+                <a:cs typeface="Times New Roman" pitchFamily="34" charset="-120"/>
+              </a:rPr>
+              <a:t>1. Meaning of Spatial Interaction</a:t>
+            </a:r>
+            <a:endParaRPr lang="en-US" sz="3600" dirty="0"/>
+          </a:p>
+        </p:txBody>
+      </p:sp>
+      <p:sp>
+        <p:nvSpPr>
+          <p:cNvPr id="4" name="Text 2"/>
+          <p:cNvSpPr/>
+          <p:nvPr/>
+        </p:nvSpPr>
+        <p:spPr>
+          <a:xfrm>
+            <a:off x="365760" y="1783080"/>
+            <a:ext cx="6035040" cy="4617720"/>
+          </a:xfrm>
+          <a:prstGeom prst="rect">
+            <a:avLst/>
+          </a:prstGeom>
+          <a:noFill/>
+          <a:ln/>
+        </p:spPr>
+        <p:txBody>
+          <a:bodyPr wrap="square" lIns="0" tIns="0" rIns="0" bIns="0" rtlCol="0" anchor="t"/>
+          <a:lstStyle/>
+          <a:p>
+            <a:pPr algn="l" indent="0" marL="0">
+              <a:spcAft>
+                <a:spcPts val="800"/>
+              </a:spcAft>
+              <a:buNone/>
+            </a:pPr>
+            <a:r>
+              <a:rPr lang="en-US" sz="3600" i="1" dirty="0">
+                <a:solidFill>
+                  <a:srgbClr val="111111"/>
+                </a:solidFill>
+                <a:latin typeface="Times New Roman" pitchFamily="34" charset="0"/>
+                <a:ea typeface="Times New Roman" pitchFamily="34" charset="-122"/>
+                <a:cs typeface="Times New Roman" pitchFamily="34" charset="-120"/>
+              </a:rPr>
+              <a:t>Spatial interaction is explained as follows:</a:t>
+            </a:r>
+            <a:endParaRPr lang="en-US" sz="3600" dirty="0"/>
+          </a:p>
+          <a:p>
+            <a:pPr algn="l" indent="0" marL="0">
+              <a:spcAft>
+                <a:spcPts val="800"/>
+              </a:spcAft>
+              <a:buNone/>
+            </a:pPr>
+            <a:r>
+              <a:rPr lang="en-US" sz="3600" b="1" dirty="0">
+                <a:solidFill>
+                  <a:srgbClr val="111111"/>
+                </a:solidFill>
+                <a:latin typeface="Times New Roman" pitchFamily="34" charset="0"/>
+                <a:ea typeface="Times New Roman" pitchFamily="34" charset="-122"/>
+                <a:cs typeface="Times New Roman" pitchFamily="34" charset="-120"/>
+              </a:rPr>
+              <a:t>Tangible flows: </a:t>
+            </a:r>
+            <a:pPr algn="l" indent="0" marL="0">
+              <a:spcAft>
+                <a:spcPts val="800"/>
+              </a:spcAft>
+              <a:buNone/>
+            </a:pPr>
+            <a:r>
+              <a:rPr lang="en-US" sz="3600" dirty="0">
+                <a:solidFill>
+                  <a:srgbClr val="111111"/>
+                </a:solidFill>
+                <a:latin typeface="Times New Roman" pitchFamily="34" charset="0"/>
+                <a:ea typeface="Times New Roman" pitchFamily="34" charset="-122"/>
+                <a:cs typeface="Times New Roman" pitchFamily="34" charset="-120"/>
+              </a:rPr>
+              <a:t>They are movements of people and goods that can be seen and counted. For example, lorries carry cotton from Garoua to the port of Douala.</a:t>
+            </a:r>
+            <a:endParaRPr lang="en-US" sz="3600" dirty="0"/>
+          </a:p>
+        </p:txBody>
+      </p:sp>
       <p:pic>
         <p:nvPicPr>
-          <p:cNvPr id="3" name="Image 0" descr="/home/claude/f4/img/minesec_sheet.png">    </p:cNvPr>
+          <p:cNvPr id="5" name="Image 0" descr="/home/claude/f4/img/v2/usa_truck.jpg">    </p:cNvPr>
           <p:cNvPicPr>
             <a:picLocks noChangeAspect="1"/>
           </p:cNvPicPr>
@@ -15035,8 +15103,8 @@
         </p:blipFill>
         <p:spPr>
           <a:xfrm>
-            <a:off x="0" y="658368"/>
-            <a:ext cx="5120640" cy="5833872"/>
+            <a:off x="6537960" y="2400897"/>
+            <a:ext cx="5470855" cy="3034615"/>
           </a:xfrm>
           <a:prstGeom prst="rect">
             <a:avLst/>
@@ -15045,14 +15113,14 @@
       </p:pic>
       <p:sp>
         <p:nvSpPr>
-          <p:cNvPr id="4" name="Text 1"/>
+          <p:cNvPr id="6" name="Text 3"/>
           <p:cNvSpPr/>
           <p:nvPr/>
         </p:nvSpPr>
         <p:spPr>
           <a:xfrm>
-            <a:off x="5349240" y="1005840"/>
-            <a:ext cx="6522415" cy="731520"/>
+            <a:off x="6537960" y="6089904"/>
+            <a:ext cx="5470855" cy="347472"/>
           </a:xfrm>
           <a:prstGeom prst="rect">
             <a:avLst/>
@@ -15061,122 +15129,24 @@
           <a:ln/>
         </p:spPr>
         <p:txBody>
-          <a:bodyPr wrap="square" lIns="0" tIns="0" rIns="0" bIns="0" rtlCol="0" anchor="ctr">
-            <a:normAutofit/>
-          </a:bodyPr>
+          <a:bodyPr wrap="square" lIns="0" tIns="0" rIns="0" bIns="0" rtlCol="0" anchor="ctr"/>
           <a:lstStyle/>
           <a:p>
             <a:pPr algn="ctr" indent="0" marL="0">
               <a:buNone/>
             </a:pPr>
             <a:r>
-              <a:rPr lang="en-US" sz="3600" b="1" dirty="0">
-                <a:solidFill>
-                  <a:srgbClr val="990011"/>
+              <a:rPr lang="en-US" sz="1600" i="1" dirty="0">
+                <a:solidFill>
+                  <a:srgbClr val="555555"/>
                 </a:solidFill>
                 <a:latin typeface="Times New Roman" pitchFamily="34" charset="0"/>
                 <a:ea typeface="Times New Roman" pitchFamily="34" charset="-122"/>
                 <a:cs typeface="Times New Roman" pitchFamily="34" charset="-120"/>
               </a:rPr>
-              <a:t>DEFINITIONS (continued)</a:t>
-            </a:r>
-            <a:endParaRPr lang="en-US" sz="3600" dirty="0"/>
-          </a:p>
-        </p:txBody>
-      </p:sp>
-      <p:sp>
-        <p:nvSpPr>
-          <p:cNvPr id="5" name="Text 2"/>
-          <p:cNvSpPr/>
-          <p:nvPr/>
-        </p:nvSpPr>
-        <p:spPr>
-          <a:xfrm>
-            <a:off x="5349240" y="1783080"/>
-            <a:ext cx="6522415" cy="4663440"/>
-          </a:xfrm>
-          <a:prstGeom prst="rect">
-            <a:avLst/>
-          </a:prstGeom>
-          <a:noFill/>
-          <a:ln/>
-        </p:spPr>
-        <p:txBody>
-          <a:bodyPr wrap="square" lIns="0" tIns="0" rIns="0" bIns="0" rtlCol="0" anchor="t"/>
-          <a:lstStyle/>
-          <a:p>
-            <a:pPr algn="l" indent="0" marL="0">
-              <a:spcAft>
-                <a:spcPts val="800"/>
-              </a:spcAft>
-              <a:buNone/>
-            </a:pPr>
-            <a:r>
-              <a:rPr lang="en-US" sz="4000" b="1" dirty="0">
-                <a:solidFill>
-                  <a:srgbClr val="111111"/>
-                </a:solidFill>
-                <a:latin typeface="Times New Roman" pitchFamily="34" charset="0"/>
-                <a:ea typeface="Times New Roman" pitchFamily="34" charset="-122"/>
-                <a:cs typeface="Times New Roman" pitchFamily="34" charset="-120"/>
-              </a:rPr>
-              <a:t>Transferability: </a:t>
-            </a:r>
-            <a:pPr algn="l" indent="0" marL="0">
-              <a:spcAft>
-                <a:spcPts val="800"/>
-              </a:spcAft>
-              <a:buNone/>
-            </a:pPr>
-            <a:r>
-              <a:rPr lang="en-US" sz="4000" dirty="0">
-                <a:solidFill>
-                  <a:srgbClr val="111111"/>
-                </a:solidFill>
-                <a:latin typeface="Times New Roman" pitchFamily="34" charset="0"/>
-                <a:ea typeface="Times New Roman" pitchFamily="34" charset="-122"/>
-                <a:cs typeface="Times New Roman" pitchFamily="34" charset="-120"/>
-              </a:rPr>
-              <a:t>It is the ease and cost of moving goods or people between two places.</a:t>
-            </a:r>
-            <a:endParaRPr lang="en-US" sz="4000" dirty="0"/>
-          </a:p>
-          <a:p>
-            <a:pPr algn="l" indent="0" marL="0">
-              <a:spcAft>
-                <a:spcPts val="800"/>
-              </a:spcAft>
-              <a:buNone/>
-            </a:pPr>
-            <a:r>
-              <a:rPr lang="en-US" sz="4000" b="1" dirty="0">
-                <a:solidFill>
-                  <a:srgbClr val="111111"/>
-                </a:solidFill>
-                <a:latin typeface="Times New Roman" pitchFamily="34" charset="0"/>
-                <a:ea typeface="Times New Roman" pitchFamily="34" charset="-122"/>
-                <a:cs typeface="Times New Roman" pitchFamily="34" charset="-120"/>
-              </a:rPr>
-              <a:t>Distance decay: </a:t>
-            </a:r>
-            <a:pPr algn="l" indent="0" marL="0">
-              <a:spcAft>
-                <a:spcPts val="800"/>
-              </a:spcAft>
-              <a:buNone/>
-            </a:pPr>
-            <a:r>
-              <a:rPr lang="en-US" sz="4000" dirty="0">
-                <a:solidFill>
-                  <a:srgbClr val="111111"/>
-                </a:solidFill>
-                <a:latin typeface="Times New Roman" pitchFamily="34" charset="0"/>
-                <a:ea typeface="Times New Roman" pitchFamily="34" charset="-122"/>
-                <a:cs typeface="Times New Roman" pitchFamily="34" charset="-120"/>
-              </a:rPr>
-              <a:t>It is the decrease of interaction as distance increases.</a:t>
-            </a:r>
-            <a:endParaRPr lang="en-US" sz="4000" dirty="0"/>
+              <a:t>Illustration: a lorry</a:t>
+            </a:r>
+            <a:endParaRPr lang="en-US" sz="1600" dirty="0"/>
           </a:p>
         </p:txBody>
       </p:sp>
@@ -15581,7 +15551,7 @@
         <p:spPr>
           <a:xfrm>
             <a:off x="365760" y="1783080"/>
-            <a:ext cx="4846320" cy="4617720"/>
+            <a:ext cx="6035040" cy="4617720"/>
           </a:xfrm>
           <a:prstGeom prst="rect">
             <a:avLst/>
@@ -15600,7 +15570,7 @@
               <a:buNone/>
             </a:pPr>
             <a:r>
-              <a:rPr lang="en-US" sz="3600" i="1" dirty="0">
+              <a:rPr lang="en-US" sz="3600" b="1" dirty="0">
                 <a:solidFill>
                   <a:srgbClr val="111111"/>
                 </a:solidFill>
@@ -15608,11 +15578,8 @@
                 <a:ea typeface="Times New Roman" pitchFamily="34" charset="-122"/>
                 <a:cs typeface="Times New Roman" pitchFamily="34" charset="-120"/>
               </a:rPr>
-              <a:t>Spatial interaction is presented as follows:</a:t>
-            </a:r>
-            <a:endParaRPr lang="en-US" sz="3600" dirty="0"/>
-          </a:p>
-          <a:p>
+              <a:t>Intangible flows: </a:t>
+            </a:r>
             <a:pPr algn="l" indent="0" marL="0">
               <a:spcAft>
                 <a:spcPts val="800"/>
@@ -15620,7 +15587,7 @@
               <a:buNone/>
             </a:pPr>
             <a:r>
-              <a:rPr lang="en-US" sz="3600" b="1" dirty="0">
+              <a:rPr lang="en-US" sz="3600" dirty="0">
                 <a:solidFill>
                   <a:srgbClr val="111111"/>
                 </a:solidFill>
@@ -15628,24 +15595,7 @@
                 <a:ea typeface="Times New Roman" pitchFamily="34" charset="-122"/>
                 <a:cs typeface="Times New Roman" pitchFamily="34" charset="-120"/>
               </a:rPr>
-              <a:t>Tangible flows: </a:t>
-            </a:r>
-            <a:pPr algn="l" indent="0" marL="0">
-              <a:spcAft>
-                <a:spcPts val="800"/>
-              </a:spcAft>
-              <a:buNone/>
-            </a:pPr>
-            <a:r>
-              <a:rPr lang="en-US" sz="3600" dirty="0">
-                <a:solidFill>
-                  <a:srgbClr val="111111"/>
-                </a:solidFill>
-                <a:latin typeface="Times New Roman" pitchFamily="34" charset="0"/>
-                <a:ea typeface="Times New Roman" pitchFamily="34" charset="-122"/>
-                <a:cs typeface="Times New Roman" pitchFamily="34" charset="-120"/>
-              </a:rPr>
-              <a:t>They are movements of people and goods, such as lorries carrying cotton from Garoua to the port of Douala.</a:t>
+              <a:t>They are movements of information, money and services. For example, people make phone calls and send mobile money between Garoua and Douala.</a:t>
             </a:r>
             <a:endParaRPr lang="en-US" sz="3600" dirty="0"/>
           </a:p>
@@ -15653,7 +15603,7 @@
       </p:sp>
       <p:pic>
         <p:nvPicPr>
-          <p:cNvPr id="5" name="Image 0" descr="/home/claude/f4/img/v2/usa_truck.jpg">    </p:cNvPr>
+          <p:cNvPr id="5" name="Image 0" descr="/home/claude/f4/img/v2/f2t_mobile_money.jpg">    </p:cNvPr>
           <p:cNvPicPr>
             <a:picLocks noChangeAspect="1"/>
           </p:cNvPicPr>
@@ -15667,8 +15617,8 @@
         </p:blipFill>
         <p:spPr>
           <a:xfrm>
-            <a:off x="5349240" y="2071212"/>
-            <a:ext cx="6659575" cy="3693983"/>
+            <a:off x="6537960" y="2400897"/>
+            <a:ext cx="5470855" cy="3034615"/>
           </a:xfrm>
           <a:prstGeom prst="rect">
             <a:avLst/>
@@ -15683,8 +15633,8 @@
         </p:nvSpPr>
         <p:spPr>
           <a:xfrm>
-            <a:off x="5349240" y="6089904"/>
-            <a:ext cx="6659575" cy="347472"/>
+            <a:off x="6537960" y="6089904"/>
+            <a:ext cx="5470855" cy="347472"/>
           </a:xfrm>
           <a:prstGeom prst="rect">
             <a:avLst/>
@@ -15708,7 +15658,7 @@
                 <a:ea typeface="Times New Roman" pitchFamily="34" charset="-122"/>
                 <a:cs typeface="Times New Roman" pitchFamily="34" charset="-120"/>
               </a:rPr>
-              <a:t>Illustration: goods on the road</a:t>
+              <a:t>Illustration: mobile money</a:t>
             </a:r>
             <a:endParaRPr lang="en-US" sz="1600" dirty="0"/>
           </a:p>
@@ -15826,109 +15776,9 @@
           </a:p>
         </p:txBody>
       </p:sp>
-      <p:sp>
-        <p:nvSpPr>
-          <p:cNvPr id="3" name="Text 1"/>
-          <p:cNvSpPr/>
-          <p:nvPr/>
-        </p:nvSpPr>
-        <p:spPr>
-          <a:xfrm>
-            <a:off x="365760" y="1005840"/>
-            <a:ext cx="11460175" cy="731520"/>
-          </a:xfrm>
-          <a:prstGeom prst="rect">
-            <a:avLst/>
-          </a:prstGeom>
-          <a:noFill/>
-          <a:ln/>
-        </p:spPr>
-        <p:txBody>
-          <a:bodyPr wrap="square" lIns="0" tIns="0" rIns="0" bIns="0" rtlCol="0" anchor="ctr">
-            <a:normAutofit/>
-          </a:bodyPr>
-          <a:lstStyle/>
-          <a:p>
-            <a:pPr algn="ctr" indent="0" marL="0">
-              <a:buNone/>
-            </a:pPr>
-            <a:r>
-              <a:rPr lang="en-US" sz="3600" b="1" dirty="0">
-                <a:solidFill>
-                  <a:srgbClr val="990011"/>
-                </a:solidFill>
-                <a:latin typeface="Times New Roman" pitchFamily="34" charset="0"/>
-                <a:ea typeface="Times New Roman" pitchFamily="34" charset="-122"/>
-                <a:cs typeface="Times New Roman" pitchFamily="34" charset="-120"/>
-              </a:rPr>
-              <a:t>1. Meaning of Spatial Interaction</a:t>
-            </a:r>
-            <a:endParaRPr lang="en-US" sz="3600" dirty="0"/>
-          </a:p>
-        </p:txBody>
-      </p:sp>
-      <p:sp>
-        <p:nvSpPr>
-          <p:cNvPr id="4" name="Text 2"/>
-          <p:cNvSpPr/>
-          <p:nvPr/>
-        </p:nvSpPr>
-        <p:spPr>
-          <a:xfrm>
-            <a:off x="365760" y="1783080"/>
-            <a:ext cx="4846320" cy="4617720"/>
-          </a:xfrm>
-          <a:prstGeom prst="rect">
-            <a:avLst/>
-          </a:prstGeom>
-          <a:noFill/>
-          <a:ln/>
-        </p:spPr>
-        <p:txBody>
-          <a:bodyPr wrap="square" lIns="0" tIns="0" rIns="0" bIns="0" rtlCol="0" anchor="t"/>
-          <a:lstStyle/>
-          <a:p>
-            <a:pPr algn="l" indent="0" marL="0">
-              <a:spcAft>
-                <a:spcPts val="800"/>
-              </a:spcAft>
-              <a:buNone/>
-            </a:pPr>
-            <a:r>
-              <a:rPr lang="en-US" sz="3600" b="1" dirty="0">
-                <a:solidFill>
-                  <a:srgbClr val="111111"/>
-                </a:solidFill>
-                <a:latin typeface="Times New Roman" pitchFamily="34" charset="0"/>
-                <a:ea typeface="Times New Roman" pitchFamily="34" charset="-122"/>
-                <a:cs typeface="Times New Roman" pitchFamily="34" charset="-120"/>
-              </a:rPr>
-              <a:t>Intangible flows: </a:t>
-            </a:r>
-            <a:pPr algn="l" indent="0" marL="0">
-              <a:spcAft>
-                <a:spcPts val="800"/>
-              </a:spcAft>
-              <a:buNone/>
-            </a:pPr>
-            <a:r>
-              <a:rPr lang="en-US" sz="3600" dirty="0">
-                <a:solidFill>
-                  <a:srgbClr val="111111"/>
-                </a:solidFill>
-                <a:latin typeface="Times New Roman" pitchFamily="34" charset="0"/>
-                <a:ea typeface="Times New Roman" pitchFamily="34" charset="-122"/>
-                <a:cs typeface="Times New Roman" pitchFamily="34" charset="-120"/>
-              </a:rPr>
-              <a:t>They are movements of information and services, such as phone calls and mobile money transfers between Garoua and Douala.</a:t>
-            </a:r>
-            <a:endParaRPr lang="en-US" sz="3600" dirty="0"/>
-          </a:p>
-        </p:txBody>
-      </p:sp>
       <p:pic>
         <p:nvPicPr>
-          <p:cNvPr id="5" name="Image 0" descr="/home/claude/f4/img/v2/f2t_mobile_money.jpg">    </p:cNvPr>
+          <p:cNvPr id="3" name="Image 0" descr="/home/claude/f4/img/minesec_sheet.png">    </p:cNvPr>
           <p:cNvPicPr>
             <a:picLocks noChangeAspect="1"/>
           </p:cNvPicPr>
@@ -15942,8 +15792,8 @@
         </p:blipFill>
         <p:spPr>
           <a:xfrm>
-            <a:off x="5349240" y="2071212"/>
-            <a:ext cx="6659575" cy="3693983"/>
+            <a:off x="0" y="658368"/>
+            <a:ext cx="3840480" cy="5833872"/>
           </a:xfrm>
           <a:prstGeom prst="rect">
             <a:avLst/>
@@ -15952,14 +15802,14 @@
       </p:pic>
       <p:sp>
         <p:nvSpPr>
-          <p:cNvPr id="6" name="Text 3"/>
+          <p:cNvPr id="4" name="Text 1"/>
           <p:cNvSpPr/>
           <p:nvPr/>
         </p:nvSpPr>
         <p:spPr>
           <a:xfrm>
-            <a:off x="5349240" y="6089904"/>
-            <a:ext cx="6659575" cy="347472"/>
+            <a:off x="4069080" y="1005840"/>
+            <a:ext cx="7802575" cy="731520"/>
           </a:xfrm>
           <a:prstGeom prst="rect">
             <a:avLst/>
@@ -15968,24 +15818,85 @@
           <a:ln/>
         </p:spPr>
         <p:txBody>
-          <a:bodyPr wrap="square" lIns="0" tIns="0" rIns="0" bIns="0" rtlCol="0" anchor="ctr"/>
+          <a:bodyPr wrap="square" lIns="0" tIns="0" rIns="0" bIns="0" rtlCol="0" anchor="ctr">
+            <a:normAutofit/>
+          </a:bodyPr>
           <a:lstStyle/>
           <a:p>
             <a:pPr algn="ctr" indent="0" marL="0">
               <a:buNone/>
             </a:pPr>
             <a:r>
-              <a:rPr lang="en-US" sz="1600" i="1" dirty="0">
-                <a:solidFill>
-                  <a:srgbClr val="555555"/>
+              <a:rPr lang="en-US" sz="3600" b="1" dirty="0">
+                <a:solidFill>
+                  <a:srgbClr val="990011"/>
                 </a:solidFill>
                 <a:latin typeface="Times New Roman" pitchFamily="34" charset="0"/>
                 <a:ea typeface="Times New Roman" pitchFamily="34" charset="-122"/>
                 <a:cs typeface="Times New Roman" pitchFamily="34" charset="-120"/>
               </a:rPr>
-              <a:t>Illustration: mobile money</a:t>
-            </a:r>
-            <a:endParaRPr lang="en-US" sz="1600" dirty="0"/>
+              <a:t>1. Meaning of Spatial Interaction</a:t>
+            </a:r>
+            <a:endParaRPr lang="en-US" sz="3600" dirty="0"/>
+          </a:p>
+        </p:txBody>
+      </p:sp>
+      <p:sp>
+        <p:nvSpPr>
+          <p:cNvPr id="5" name="Text 2"/>
+          <p:cNvSpPr/>
+          <p:nvPr/>
+        </p:nvSpPr>
+        <p:spPr>
+          <a:xfrm>
+            <a:off x="4069080" y="1783080"/>
+            <a:ext cx="7802575" cy="4663440"/>
+          </a:xfrm>
+          <a:prstGeom prst="rect">
+            <a:avLst/>
+          </a:prstGeom>
+          <a:noFill/>
+          <a:ln/>
+        </p:spPr>
+        <p:txBody>
+          <a:bodyPr wrap="square" lIns="0" tIns="0" rIns="0" bIns="0" rtlCol="0" anchor="t"/>
+          <a:lstStyle/>
+          <a:p>
+            <a:pPr algn="l" indent="0" marL="0">
+              <a:spcAft>
+                <a:spcPts val="800"/>
+              </a:spcAft>
+              <a:buNone/>
+            </a:pPr>
+            <a:r>
+              <a:rPr lang="en-US" sz="4000" b="1" dirty="0">
+                <a:solidFill>
+                  <a:srgbClr val="111111"/>
+                </a:solidFill>
+                <a:latin typeface="Times New Roman" pitchFamily="34" charset="0"/>
+                <a:ea typeface="Times New Roman" pitchFamily="34" charset="-122"/>
+                <a:cs typeface="Times New Roman" pitchFamily="34" charset="-120"/>
+              </a:rPr>
+              <a:t>Networks and measurement: </a:t>
+            </a:r>
+            <a:pPr algn="l" indent="0" marL="0">
+              <a:spcAft>
+                <a:spcPts val="800"/>
+              </a:spcAft>
+              <a:buNone/>
+            </a:pPr>
+            <a:r>
+              <a:rPr lang="en-US" sz="4000" dirty="0">
+                <a:solidFill>
+                  <a:srgbClr val="111111"/>
+                </a:solidFill>
+                <a:latin typeface="Times New Roman" pitchFamily="34" charset="0"/>
+                <a:ea typeface="Times New Roman" pitchFamily="34" charset="-122"/>
+                <a:cs typeface="Times New Roman" pitchFamily="34" charset="-120"/>
+              </a:rPr>
+              <a:t>Flows use networks such as roads, railways, telephone, television and the internet. The volume of interaction can be estimated with the gravity formula: I = Pi × Pj ÷ d².</a:t>
+            </a:r>
+            <a:endParaRPr lang="en-US" sz="4000" dirty="0"/>
           </a:p>
         </p:txBody>
       </p:sp>
@@ -16101,9 +16012,129 @@
           </a:p>
         </p:txBody>
       </p:sp>
+      <p:sp>
+        <p:nvSpPr>
+          <p:cNvPr id="3" name="Text 1"/>
+          <p:cNvSpPr/>
+          <p:nvPr/>
+        </p:nvSpPr>
+        <p:spPr>
+          <a:xfrm>
+            <a:off x="365760" y="1005840"/>
+            <a:ext cx="11460175" cy="731520"/>
+          </a:xfrm>
+          <a:prstGeom prst="rect">
+            <a:avLst/>
+          </a:prstGeom>
+          <a:noFill/>
+          <a:ln/>
+        </p:spPr>
+        <p:txBody>
+          <a:bodyPr wrap="square" lIns="0" tIns="0" rIns="0" bIns="0" rtlCol="0" anchor="ctr">
+            <a:normAutofit/>
+          </a:bodyPr>
+          <a:lstStyle/>
+          <a:p>
+            <a:pPr algn="ctr" indent="0" marL="0">
+              <a:buNone/>
+            </a:pPr>
+            <a:r>
+              <a:rPr lang="en-US" sz="3600" b="1" dirty="0">
+                <a:solidFill>
+                  <a:srgbClr val="990011"/>
+                </a:solidFill>
+                <a:latin typeface="Times New Roman" pitchFamily="34" charset="0"/>
+                <a:ea typeface="Times New Roman" pitchFamily="34" charset="-122"/>
+                <a:cs typeface="Times New Roman" pitchFamily="34" charset="-120"/>
+              </a:rPr>
+              <a:t>2. Factors of Spatial Interaction</a:t>
+            </a:r>
+            <a:endParaRPr lang="en-US" sz="3600" dirty="0"/>
+          </a:p>
+        </p:txBody>
+      </p:sp>
+      <p:sp>
+        <p:nvSpPr>
+          <p:cNvPr id="4" name="Text 2"/>
+          <p:cNvSpPr/>
+          <p:nvPr/>
+        </p:nvSpPr>
+        <p:spPr>
+          <a:xfrm>
+            <a:off x="365760" y="1783080"/>
+            <a:ext cx="6035040" cy="4617720"/>
+          </a:xfrm>
+          <a:prstGeom prst="rect">
+            <a:avLst/>
+          </a:prstGeom>
+          <a:noFill/>
+          <a:ln/>
+        </p:spPr>
+        <p:txBody>
+          <a:bodyPr wrap="square" lIns="0" tIns="0" rIns="0" bIns="0" rtlCol="0" anchor="t"/>
+          <a:lstStyle/>
+          <a:p>
+            <a:pPr algn="l" indent="0" marL="0">
+              <a:spcAft>
+                <a:spcPts val="800"/>
+              </a:spcAft>
+              <a:buNone/>
+            </a:pPr>
+            <a:r>
+              <a:rPr lang="en-US" sz="3200" i="1" dirty="0">
+                <a:solidFill>
+                  <a:srgbClr val="111111"/>
+                </a:solidFill>
+                <a:latin typeface="Times New Roman" pitchFamily="34" charset="0"/>
+                <a:ea typeface="Times New Roman" pitchFamily="34" charset="-122"/>
+                <a:cs typeface="Times New Roman" pitchFamily="34" charset="-120"/>
+              </a:rPr>
+              <a:t>According to Edward Ullman, spatial interaction depends on the following factors:</a:t>
+            </a:r>
+            <a:endParaRPr lang="en-US" sz="3200" dirty="0"/>
+          </a:p>
+          <a:p>
+            <a:pPr algn="l" indent="0" marL="0">
+              <a:spcAft>
+                <a:spcPts val="800"/>
+              </a:spcAft>
+              <a:buNone/>
+            </a:pPr>
+            <a:r>
+              <a:rPr lang="en-US" sz="3200" b="1" dirty="0">
+                <a:solidFill>
+                  <a:srgbClr val="111111"/>
+                </a:solidFill>
+                <a:latin typeface="Times New Roman" pitchFamily="34" charset="0"/>
+                <a:ea typeface="Times New Roman" pitchFamily="34" charset="-122"/>
+                <a:cs typeface="Times New Roman" pitchFamily="34" charset="-120"/>
+              </a:rPr>
+              <a:t>Complementarity: </a:t>
+            </a:r>
+            <a:pPr algn="l" indent="0" marL="0">
+              <a:spcAft>
+                <a:spcPts val="800"/>
+              </a:spcAft>
+              <a:buNone/>
+            </a:pPr>
+            <a:r>
+              <a:rPr lang="en-US" sz="3200" dirty="0">
+                <a:solidFill>
+                  <a:srgbClr val="111111"/>
+                </a:solidFill>
+                <a:latin typeface="Times New Roman" pitchFamily="34" charset="0"/>
+                <a:ea typeface="Times New Roman" pitchFamily="34" charset="-122"/>
+                <a:cs typeface="Times New Roman" pitchFamily="34" charset="-120"/>
+              </a:rPr>
+              <a:t>Interaction occurs when one area has a surplus of something that another area needs. For example, the cotton of the North supplies the textile factories of the South.</a:t>
+            </a:r>
+            <a:endParaRPr lang="en-US" sz="3200" dirty="0"/>
+          </a:p>
+        </p:txBody>
+      </p:sp>
       <p:pic>
         <p:nvPicPr>
-          <p:cNvPr id="3" name="Image 0" descr="/home/claude/f4/img/minesec_sheet.png">    </p:cNvPr>
+          <p:cNvPr id="5" name="Image 0" descr="/home/claude/f4/img/v2/pop2_ullman4.png">    </p:cNvPr>
           <p:cNvPicPr>
             <a:picLocks noChangeAspect="1"/>
           </p:cNvPicPr>
@@ -16117,8 +16148,8 @@
         </p:blipFill>
         <p:spPr>
           <a:xfrm>
-            <a:off x="0" y="658368"/>
-            <a:ext cx="3840480" cy="5833872"/>
+            <a:off x="6537960" y="2849678"/>
+            <a:ext cx="5470855" cy="2137053"/>
           </a:xfrm>
           <a:prstGeom prst="rect">
             <a:avLst/>
@@ -16127,14 +16158,14 @@
       </p:pic>
       <p:sp>
         <p:nvSpPr>
-          <p:cNvPr id="4" name="Text 1"/>
+          <p:cNvPr id="6" name="Text 3"/>
           <p:cNvSpPr/>
           <p:nvPr/>
         </p:nvSpPr>
         <p:spPr>
           <a:xfrm>
-            <a:off x="4069080" y="1005840"/>
-            <a:ext cx="7802575" cy="731520"/>
+            <a:off x="6537960" y="6089904"/>
+            <a:ext cx="5470855" cy="347472"/>
           </a:xfrm>
           <a:prstGeom prst="rect">
             <a:avLst/>
@@ -16143,122 +16174,24 @@
           <a:ln/>
         </p:spPr>
         <p:txBody>
-          <a:bodyPr wrap="square" lIns="0" tIns="0" rIns="0" bIns="0" rtlCol="0" anchor="ctr">
-            <a:normAutofit/>
-          </a:bodyPr>
+          <a:bodyPr wrap="square" lIns="0" tIns="0" rIns="0" bIns="0" rtlCol="0" anchor="ctr"/>
           <a:lstStyle/>
           <a:p>
             <a:pPr algn="ctr" indent="0" marL="0">
               <a:buNone/>
             </a:pPr>
             <a:r>
-              <a:rPr lang="en-US" sz="3600" b="1" dirty="0">
-                <a:solidFill>
-                  <a:srgbClr val="990011"/>
+              <a:rPr lang="en-US" sz="1600" i="1" dirty="0">
+                <a:solidFill>
+                  <a:srgbClr val="555555"/>
                 </a:solidFill>
                 <a:latin typeface="Times New Roman" pitchFamily="34" charset="0"/>
                 <a:ea typeface="Times New Roman" pitchFamily="34" charset="-122"/>
                 <a:cs typeface="Times New Roman" pitchFamily="34" charset="-120"/>
               </a:rPr>
-              <a:t>1. Meaning of Spatial Interaction</a:t>
-            </a:r>
-            <a:endParaRPr lang="en-US" sz="3600" dirty="0"/>
-          </a:p>
-        </p:txBody>
-      </p:sp>
-      <p:sp>
-        <p:nvSpPr>
-          <p:cNvPr id="5" name="Text 2"/>
-          <p:cNvSpPr/>
-          <p:nvPr/>
-        </p:nvSpPr>
-        <p:spPr>
-          <a:xfrm>
-            <a:off x="4069080" y="1783080"/>
-            <a:ext cx="7802575" cy="4663440"/>
-          </a:xfrm>
-          <a:prstGeom prst="rect">
-            <a:avLst/>
-          </a:prstGeom>
-          <a:noFill/>
-          <a:ln/>
-        </p:spPr>
-        <p:txBody>
-          <a:bodyPr wrap="square" lIns="0" tIns="0" rIns="0" bIns="0" rtlCol="0" anchor="t"/>
-          <a:lstStyle/>
-          <a:p>
-            <a:pPr algn="l" indent="0" marL="0">
-              <a:spcAft>
-                <a:spcPts val="800"/>
-              </a:spcAft>
-              <a:buNone/>
-            </a:pPr>
-            <a:r>
-              <a:rPr lang="en-US" sz="4000" b="1" dirty="0">
-                <a:solidFill>
-                  <a:srgbClr val="111111"/>
-                </a:solidFill>
-                <a:latin typeface="Times New Roman" pitchFamily="34" charset="0"/>
-                <a:ea typeface="Times New Roman" pitchFamily="34" charset="-122"/>
-                <a:cs typeface="Times New Roman" pitchFamily="34" charset="-120"/>
-              </a:rPr>
-              <a:t>Networks: </a:t>
-            </a:r>
-            <a:pPr algn="l" indent="0" marL="0">
-              <a:spcAft>
-                <a:spcPts val="800"/>
-              </a:spcAft>
-              <a:buNone/>
-            </a:pPr>
-            <a:r>
-              <a:rPr lang="en-US" sz="4000" dirty="0">
-                <a:solidFill>
-                  <a:srgbClr val="111111"/>
-                </a:solidFill>
-                <a:latin typeface="Times New Roman" pitchFamily="34" charset="0"/>
-                <a:ea typeface="Times New Roman" pitchFamily="34" charset="-122"/>
-                <a:cs typeface="Times New Roman" pitchFamily="34" charset="-120"/>
-              </a:rPr>
-              <a:t>Flows use networks: roads, railways, telephone, television and the internet.</a:t>
-            </a:r>
-            <a:endParaRPr lang="en-US" sz="4000" dirty="0"/>
-          </a:p>
-          <a:p>
-            <a:pPr algn="l" indent="0" marL="0">
-              <a:spcAft>
-                <a:spcPts val="800"/>
-              </a:spcAft>
-              <a:buNone/>
-            </a:pPr>
-            <a:r>
-              <a:rPr lang="en-US" sz="4000" b="1" dirty="0">
-                <a:solidFill>
-                  <a:srgbClr val="111111"/>
-                </a:solidFill>
-                <a:latin typeface="Times New Roman" pitchFamily="34" charset="0"/>
-                <a:ea typeface="Times New Roman" pitchFamily="34" charset="-122"/>
-                <a:cs typeface="Times New Roman" pitchFamily="34" charset="-120"/>
-              </a:rPr>
-              <a:t>Measurement: </a:t>
-            </a:r>
-            <a:pPr algn="l" indent="0" marL="0">
-              <a:spcAft>
-                <a:spcPts val="800"/>
-              </a:spcAft>
-              <a:buNone/>
-            </a:pPr>
-            <a:r>
-              <a:rPr lang="en-US" sz="4000" dirty="0">
-                <a:solidFill>
-                  <a:srgbClr val="111111"/>
-                </a:solidFill>
-                <a:latin typeface="Times New Roman" pitchFamily="34" charset="0"/>
-                <a:ea typeface="Times New Roman" pitchFamily="34" charset="-122"/>
-                <a:cs typeface="Times New Roman" pitchFamily="34" charset="-120"/>
-              </a:rPr>
-              <a:t>The volume of interaction can be estimated with the gravity formula: I = Pi × Pj ÷ d².</a:t>
-            </a:r>
-            <a:endParaRPr lang="en-US" sz="4000" dirty="0"/>
+              <a:t>Illustration: Ullman's factors</a:t>
+            </a:r>
+            <a:endParaRPr lang="en-US" sz="1600" dirty="0"/>
           </a:p>
         </p:txBody>
       </p:sp>
@@ -16409,7 +16342,7 @@
                 <a:ea typeface="Times New Roman" pitchFamily="34" charset="-122"/>
                 <a:cs typeface="Times New Roman" pitchFamily="34" charset="-120"/>
               </a:rPr>
-              <a:t>2. Factors of Spatial Interaction (Ullman)</a:t>
+              <a:t>2. Factors of Spatial Interaction</a:t>
             </a:r>
             <a:endParaRPr lang="en-US" sz="3600" dirty="0"/>
           </a:p>
@@ -16424,7 +16357,7 @@
         <p:spPr>
           <a:xfrm>
             <a:off x="365760" y="1783080"/>
-            <a:ext cx="4846320" cy="4617720"/>
+            <a:ext cx="6035040" cy="4617720"/>
           </a:xfrm>
           <a:prstGeom prst="rect">
             <a:avLst/>
@@ -16443,7 +16376,7 @@
               <a:buNone/>
             </a:pPr>
             <a:r>
-              <a:rPr lang="en-US" sz="3000" i="1" dirty="0">
+              <a:rPr lang="en-US" sz="3600" b="1" dirty="0">
                 <a:solidFill>
                   <a:srgbClr val="111111"/>
                 </a:solidFill>
@@ -16451,11 +16384,8 @@
                 <a:ea typeface="Times New Roman" pitchFamily="34" charset="-122"/>
                 <a:cs typeface="Times New Roman" pitchFamily="34" charset="-120"/>
               </a:rPr>
-              <a:t>The factors of spatial interaction identified by Edward Ullman are the following:</a:t>
-            </a:r>
-            <a:endParaRPr lang="en-US" sz="3000" dirty="0"/>
-          </a:p>
-          <a:p>
+              <a:t>Transferability: </a:t>
+            </a:r>
             <a:pPr algn="l" indent="0" marL="0">
               <a:spcAft>
                 <a:spcPts val="800"/>
@@ -16463,7 +16393,7 @@
               <a:buNone/>
             </a:pPr>
             <a:r>
-              <a:rPr lang="en-US" sz="3000" b="1" dirty="0">
+              <a:rPr lang="en-US" sz="3600" dirty="0">
                 <a:solidFill>
                   <a:srgbClr val="111111"/>
                 </a:solidFill>
@@ -16471,32 +16401,15 @@
                 <a:ea typeface="Times New Roman" pitchFamily="34" charset="-122"/>
                 <a:cs typeface="Times New Roman" pitchFamily="34" charset="-120"/>
               </a:rPr>
-              <a:t>Complementarity: </a:t>
-            </a:r>
-            <a:pPr algn="l" indent="0" marL="0">
-              <a:spcAft>
-                <a:spcPts val="800"/>
-              </a:spcAft>
-              <a:buNone/>
-            </a:pPr>
-            <a:r>
-              <a:rPr lang="en-US" sz="3000" dirty="0">
-                <a:solidFill>
-                  <a:srgbClr val="111111"/>
-                </a:solidFill>
-                <a:latin typeface="Times New Roman" pitchFamily="34" charset="0"/>
-                <a:ea typeface="Times New Roman" pitchFamily="34" charset="-122"/>
-                <a:cs typeface="Times New Roman" pitchFamily="34" charset="-120"/>
-              </a:rPr>
-              <a:t>One area has a surplus and another has a demand, as the cotton of the North and the textile factories of Douala.</a:t>
-            </a:r>
-            <a:endParaRPr lang="en-US" sz="3000" dirty="0"/>
+              <a:t>Goods and people must be cheap and easy to move between the two places. Good roads allow onions to go from Garoua to Maroua by lorry, while a bad road reduces the trade.</a:t>
+            </a:r>
+            <a:endParaRPr lang="en-US" sz="3600" dirty="0"/>
           </a:p>
         </p:txBody>
       </p:sp>
       <p:pic>
         <p:nvPicPr>
-          <p:cNvPr id="5" name="Image 0" descr="/home/claude/f4/img/v2/pop2_ullman4.png">    </p:cNvPr>
+          <p:cNvPr id="5" name="Image 0" descr="/home/claude/f4/img/v2/f2t_cotton_harvest.jpg">    </p:cNvPr>
           <p:cNvPicPr>
             <a:picLocks noChangeAspect="1"/>
           </p:cNvPicPr>
@@ -16510,8 +16423,8 @@
         </p:blipFill>
         <p:spPr>
           <a:xfrm>
-            <a:off x="5349240" y="2617506"/>
-            <a:ext cx="6659575" cy="2601397"/>
+            <a:off x="6537960" y="2399413"/>
+            <a:ext cx="5470855" cy="3037581"/>
           </a:xfrm>
           <a:prstGeom prst="rect">
             <a:avLst/>
@@ -16526,8 +16439,8 @@
         </p:nvSpPr>
         <p:spPr>
           <a:xfrm>
-            <a:off x="5349240" y="6089904"/>
-            <a:ext cx="6659575" cy="347472"/>
+            <a:off x="6537960" y="6089904"/>
+            <a:ext cx="5470855" cy="347472"/>
           </a:xfrm>
           <a:prstGeom prst="rect">
             <a:avLst/>
@@ -16551,7 +16464,7 @@
                 <a:ea typeface="Times New Roman" pitchFamily="34" charset="-122"/>
                 <a:cs typeface="Times New Roman" pitchFamily="34" charset="-120"/>
               </a:rPr>
-              <a:t>Illustration: factors of spatial interaction</a:t>
+              <a:t>Illustration: the cotton harvest</a:t>
             </a:r>
             <a:endParaRPr lang="en-US" sz="1600" dirty="0"/>
           </a:p>
@@ -16669,109 +16582,9 @@
           </a:p>
         </p:txBody>
       </p:sp>
-      <p:sp>
-        <p:nvSpPr>
-          <p:cNvPr id="3" name="Text 1"/>
-          <p:cNvSpPr/>
-          <p:nvPr/>
-        </p:nvSpPr>
-        <p:spPr>
-          <a:xfrm>
-            <a:off x="365760" y="1005840"/>
-            <a:ext cx="11460175" cy="731520"/>
-          </a:xfrm>
-          <a:prstGeom prst="rect">
-            <a:avLst/>
-          </a:prstGeom>
-          <a:noFill/>
-          <a:ln/>
-        </p:spPr>
-        <p:txBody>
-          <a:bodyPr wrap="square" lIns="0" tIns="0" rIns="0" bIns="0" rtlCol="0" anchor="ctr">
-            <a:normAutofit/>
-          </a:bodyPr>
-          <a:lstStyle/>
-          <a:p>
-            <a:pPr algn="ctr" indent="0" marL="0">
-              <a:buNone/>
-            </a:pPr>
-            <a:r>
-              <a:rPr lang="en-US" sz="3600" b="1" dirty="0">
-                <a:solidFill>
-                  <a:srgbClr val="990011"/>
-                </a:solidFill>
-                <a:latin typeface="Times New Roman" pitchFamily="34" charset="0"/>
-                <a:ea typeface="Times New Roman" pitchFamily="34" charset="-122"/>
-                <a:cs typeface="Times New Roman" pitchFamily="34" charset="-120"/>
-              </a:rPr>
-              <a:t>2. Factors of Spatial Interaction (Ullman)</a:t>
-            </a:r>
-            <a:endParaRPr lang="en-US" sz="3600" dirty="0"/>
-          </a:p>
-        </p:txBody>
-      </p:sp>
-      <p:sp>
-        <p:nvSpPr>
-          <p:cNvPr id="4" name="Text 2"/>
-          <p:cNvSpPr/>
-          <p:nvPr/>
-        </p:nvSpPr>
-        <p:spPr>
-          <a:xfrm>
-            <a:off x="365760" y="1783080"/>
-            <a:ext cx="4846320" cy="4617720"/>
-          </a:xfrm>
-          <a:prstGeom prst="rect">
-            <a:avLst/>
-          </a:prstGeom>
-          <a:noFill/>
-          <a:ln/>
-        </p:spPr>
-        <p:txBody>
-          <a:bodyPr wrap="square" lIns="0" tIns="0" rIns="0" bIns="0" rtlCol="0" anchor="t"/>
-          <a:lstStyle/>
-          <a:p>
-            <a:pPr algn="l" indent="0" marL="0">
-              <a:spcAft>
-                <a:spcPts val="800"/>
-              </a:spcAft>
-              <a:buNone/>
-            </a:pPr>
-            <a:r>
-              <a:rPr lang="en-US" sz="3600" b="1" dirty="0">
-                <a:solidFill>
-                  <a:srgbClr val="111111"/>
-                </a:solidFill>
-                <a:latin typeface="Times New Roman" pitchFamily="34" charset="0"/>
-                <a:ea typeface="Times New Roman" pitchFamily="34" charset="-122"/>
-                <a:cs typeface="Times New Roman" pitchFamily="34" charset="-120"/>
-              </a:rPr>
-              <a:t>Transferability: </a:t>
-            </a:r>
-            <a:pPr algn="l" indent="0" marL="0">
-              <a:spcAft>
-                <a:spcPts val="800"/>
-              </a:spcAft>
-              <a:buNone/>
-            </a:pPr>
-            <a:r>
-              <a:rPr lang="en-US" sz="3600" dirty="0">
-                <a:solidFill>
-                  <a:srgbClr val="111111"/>
-                </a:solidFill>
-                <a:latin typeface="Times New Roman" pitchFamily="34" charset="0"/>
-                <a:ea typeface="Times New Roman" pitchFamily="34" charset="-122"/>
-                <a:cs typeface="Times New Roman" pitchFamily="34" charset="-120"/>
-              </a:rPr>
-              <a:t>Goods must be cheap and easy to move; good roads allow onions to go from Garoua to Maroua by lorry.</a:t>
-            </a:r>
-            <a:endParaRPr lang="en-US" sz="3600" dirty="0"/>
-          </a:p>
-        </p:txBody>
-      </p:sp>
       <p:pic>
         <p:nvPicPr>
-          <p:cNvPr id="5" name="Image 0" descr="/home/claude/f4/img/v2/f2t_cotton_harvest.jpg">    </p:cNvPr>
+          <p:cNvPr id="3" name="Image 0" descr="/home/claude/f4/img/minesec_sheet.png">    </p:cNvPr>
           <p:cNvPicPr>
             <a:picLocks noChangeAspect="1"/>
           </p:cNvPicPr>
@@ -16785,8 +16598,8 @@
         </p:blipFill>
         <p:spPr>
           <a:xfrm>
-            <a:off x="5349240" y="2069407"/>
-            <a:ext cx="6659575" cy="3697594"/>
+            <a:off x="0" y="658368"/>
+            <a:ext cx="5120640" cy="5833872"/>
           </a:xfrm>
           <a:prstGeom prst="rect">
             <a:avLst/>
@@ -16795,14 +16608,14 @@
       </p:pic>
       <p:sp>
         <p:nvSpPr>
-          <p:cNvPr id="6" name="Text 3"/>
+          <p:cNvPr id="4" name="Text 1"/>
           <p:cNvSpPr/>
           <p:nvPr/>
         </p:nvSpPr>
         <p:spPr>
           <a:xfrm>
-            <a:off x="5349240" y="6089904"/>
-            <a:ext cx="6659575" cy="347472"/>
+            <a:off x="5349240" y="1005840"/>
+            <a:ext cx="6522415" cy="731520"/>
           </a:xfrm>
           <a:prstGeom prst="rect">
             <a:avLst/>
@@ -16811,24 +16624,85 @@
           <a:ln/>
         </p:spPr>
         <p:txBody>
-          <a:bodyPr wrap="square" lIns="0" tIns="0" rIns="0" bIns="0" rtlCol="0" anchor="ctr"/>
+          <a:bodyPr wrap="square" lIns="0" tIns="0" rIns="0" bIns="0" rtlCol="0" anchor="ctr">
+            <a:normAutofit/>
+          </a:bodyPr>
           <a:lstStyle/>
           <a:p>
             <a:pPr algn="ctr" indent="0" marL="0">
               <a:buNone/>
             </a:pPr>
             <a:r>
-              <a:rPr lang="en-US" sz="1600" i="1" dirty="0">
-                <a:solidFill>
-                  <a:srgbClr val="555555"/>
+              <a:rPr lang="en-US" sz="3600" b="1" dirty="0">
+                <a:solidFill>
+                  <a:srgbClr val="990011"/>
                 </a:solidFill>
                 <a:latin typeface="Times New Roman" pitchFamily="34" charset="0"/>
                 <a:ea typeface="Times New Roman" pitchFamily="34" charset="-122"/>
                 <a:cs typeface="Times New Roman" pitchFamily="34" charset="-120"/>
               </a:rPr>
-              <a:t>Illustration: cotton, a surplus of the North</a:t>
-            </a:r>
-            <a:endParaRPr lang="en-US" sz="1600" dirty="0"/>
+              <a:t>2. Factors of Spatial Interaction</a:t>
+            </a:r>
+            <a:endParaRPr lang="en-US" sz="3600" dirty="0"/>
+          </a:p>
+        </p:txBody>
+      </p:sp>
+      <p:sp>
+        <p:nvSpPr>
+          <p:cNvPr id="5" name="Text 2"/>
+          <p:cNvSpPr/>
+          <p:nvPr/>
+        </p:nvSpPr>
+        <p:spPr>
+          <a:xfrm>
+            <a:off x="5349240" y="1783080"/>
+            <a:ext cx="6522415" cy="4663440"/>
+          </a:xfrm>
+          <a:prstGeom prst="rect">
+            <a:avLst/>
+          </a:prstGeom>
+          <a:noFill/>
+          <a:ln/>
+        </p:spPr>
+        <p:txBody>
+          <a:bodyPr wrap="square" lIns="0" tIns="0" rIns="0" bIns="0" rtlCol="0" anchor="t"/>
+          <a:lstStyle/>
+          <a:p>
+            <a:pPr algn="l" indent="0" marL="0">
+              <a:spcAft>
+                <a:spcPts val="800"/>
+              </a:spcAft>
+              <a:buNone/>
+            </a:pPr>
+            <a:r>
+              <a:rPr lang="en-US" sz="4000" b="1" dirty="0">
+                <a:solidFill>
+                  <a:srgbClr val="111111"/>
+                </a:solidFill>
+                <a:latin typeface="Times New Roman" pitchFamily="34" charset="0"/>
+                <a:ea typeface="Times New Roman" pitchFamily="34" charset="-122"/>
+                <a:cs typeface="Times New Roman" pitchFamily="34" charset="-120"/>
+              </a:rPr>
+              <a:t>Intervening opportunity: </a:t>
+            </a:r>
+            <a:pPr algn="l" indent="0" marL="0">
+              <a:spcAft>
+                <a:spcPts val="800"/>
+              </a:spcAft>
+              <a:buNone/>
+            </a:pPr>
+            <a:r>
+              <a:rPr lang="en-US" sz="4000" dirty="0">
+                <a:solidFill>
+                  <a:srgbClr val="111111"/>
+                </a:solidFill>
+                <a:latin typeface="Times New Roman" pitchFamily="34" charset="0"/>
+                <a:ea typeface="Times New Roman" pitchFamily="34" charset="-122"/>
+                <a:cs typeface="Times New Roman" pitchFamily="34" charset="-120"/>
+              </a:rPr>
+              <a:t>A nearer or cheaper place can replace a distant one. For example, the university of Ngaoundéré or of Garoua keeps northern students from travelling to Yaoundé.</a:t>
+            </a:r>
+            <a:endParaRPr lang="en-US" sz="4000" dirty="0"/>
           </a:p>
         </p:txBody>
       </p:sp>
@@ -16979,7 +16853,7 @@
                 <a:ea typeface="Times New Roman" pitchFamily="34" charset="-122"/>
                 <a:cs typeface="Times New Roman" pitchFamily="34" charset="-120"/>
               </a:rPr>
-              <a:t>2. Factors of Spatial Interaction (Ullman)</a:t>
+              <a:t>2. Factors of Spatial Interaction</a:t>
             </a:r>
             <a:endParaRPr lang="en-US" sz="3600" dirty="0"/>
           </a:p>
@@ -16994,7 +16868,7 @@
         <p:spPr>
           <a:xfrm>
             <a:off x="365760" y="1783080"/>
-            <a:ext cx="4846320" cy="4617720"/>
+            <a:ext cx="6035040" cy="4617720"/>
           </a:xfrm>
           <a:prstGeom prst="rect">
             <a:avLst/>
@@ -17021,7 +16895,7 @@
                 <a:ea typeface="Times New Roman" pitchFamily="34" charset="-122"/>
                 <a:cs typeface="Times New Roman" pitchFamily="34" charset="-120"/>
               </a:rPr>
-              <a:t>Intervening opportunity: </a:t>
+              <a:t>Distance decay: </a:t>
             </a:r>
             <a:pPr algn="l" indent="0" marL="0">
               <a:spcAft>
@@ -17038,7 +16912,7 @@
                 <a:ea typeface="Times New Roman" pitchFamily="34" charset="-122"/>
                 <a:cs typeface="Times New Roman" pitchFamily="34" charset="-120"/>
               </a:rPr>
-              <a:t>A nearer or cheaper place replaces a distant one, as a new university in Ngaoundéré for students of Garoua.</a:t>
+              <a:t>Interaction falls as distance rises, because travel costs more time and money. People therefore visit friends in their own quarter more often than friends in Kribi.</a:t>
             </a:r>
             <a:endParaRPr lang="en-US" sz="3600" dirty="0"/>
           </a:p>
@@ -17046,7 +16920,7 @@
       </p:sp>
       <p:pic>
         <p:nvPicPr>
-          <p:cNvPr id="5" name="Image 0" descr="/home/claude/f4/img/v2/stouffer_big.png">    </p:cNvPr>
+          <p:cNvPr id="5" name="Image 0" descr="/home/claude/f4/img/v2/zipf_big.png">    </p:cNvPr>
           <p:cNvPicPr>
             <a:picLocks noChangeAspect="1"/>
           </p:cNvPicPr>
@@ -17060,8 +16934,8 @@
         </p:blipFill>
         <p:spPr>
           <a:xfrm>
-            <a:off x="5349240" y="2617506"/>
-            <a:ext cx="6659575" cy="2601397"/>
+            <a:off x="6537960" y="2721454"/>
+            <a:ext cx="5470855" cy="2393499"/>
           </a:xfrm>
           <a:prstGeom prst="rect">
             <a:avLst/>
@@ -17076,8 +16950,8 @@
         </p:nvSpPr>
         <p:spPr>
           <a:xfrm>
-            <a:off x="5349240" y="6089904"/>
-            <a:ext cx="6659575" cy="347472"/>
+            <a:off x="6537960" y="6089904"/>
+            <a:ext cx="5470855" cy="347472"/>
           </a:xfrm>
           <a:prstGeom prst="rect">
             <a:avLst/>
@@ -17101,7 +16975,7 @@
                 <a:ea typeface="Times New Roman" pitchFamily="34" charset="-122"/>
                 <a:cs typeface="Times New Roman" pitchFamily="34" charset="-120"/>
               </a:rPr>
-              <a:t>Illustration: a nearer opportunity</a:t>
+              <a:t>Illustration: distance decay</a:t>
             </a:r>
             <a:endParaRPr lang="en-US" sz="1600" dirty="0"/>
           </a:p>
@@ -17213,115 +17087,15 @@
                 <a:ea typeface="Calibri" pitchFamily="34" charset="-122"/>
                 <a:cs typeface="Calibri" pitchFamily="34" charset="-120"/>
               </a:rPr>
-              <a:t>BOARD SUMMARY</a:t>
+              <a:t>FORMATIVE EVALUATION</a:t>
             </a:r>
             <a:endParaRPr lang="en-US" sz="1400" dirty="0"/>
-          </a:p>
-        </p:txBody>
-      </p:sp>
-      <p:sp>
-        <p:nvSpPr>
-          <p:cNvPr id="3" name="Text 1"/>
-          <p:cNvSpPr/>
-          <p:nvPr/>
-        </p:nvSpPr>
-        <p:spPr>
-          <a:xfrm>
-            <a:off x="365760" y="1005840"/>
-            <a:ext cx="11460175" cy="731520"/>
-          </a:xfrm>
-          <a:prstGeom prst="rect">
-            <a:avLst/>
-          </a:prstGeom>
-          <a:noFill/>
-          <a:ln/>
-        </p:spPr>
-        <p:txBody>
-          <a:bodyPr wrap="square" lIns="0" tIns="0" rIns="0" bIns="0" rtlCol="0" anchor="ctr">
-            <a:normAutofit/>
-          </a:bodyPr>
-          <a:lstStyle/>
-          <a:p>
-            <a:pPr algn="ctr" indent="0" marL="0">
-              <a:buNone/>
-            </a:pPr>
-            <a:r>
-              <a:rPr lang="en-US" sz="3600" b="1" dirty="0">
-                <a:solidFill>
-                  <a:srgbClr val="990011"/>
-                </a:solidFill>
-                <a:latin typeface="Times New Roman" pitchFamily="34" charset="0"/>
-                <a:ea typeface="Times New Roman" pitchFamily="34" charset="-122"/>
-                <a:cs typeface="Times New Roman" pitchFamily="34" charset="-120"/>
-              </a:rPr>
-              <a:t>2. Factors of Spatial Interaction (Ullman)</a:t>
-            </a:r>
-            <a:endParaRPr lang="en-US" sz="3600" dirty="0"/>
-          </a:p>
-        </p:txBody>
-      </p:sp>
-      <p:sp>
-        <p:nvSpPr>
-          <p:cNvPr id="4" name="Text 2"/>
-          <p:cNvSpPr/>
-          <p:nvPr/>
-        </p:nvSpPr>
-        <p:spPr>
-          <a:xfrm>
-            <a:off x="365760" y="1783080"/>
-            <a:ext cx="4846320" cy="4617720"/>
-          </a:xfrm>
-          <a:prstGeom prst="rect">
-            <a:avLst/>
-          </a:prstGeom>
-          <a:noFill/>
-          <a:ln/>
-        </p:spPr>
-        <p:txBody>
-          <a:bodyPr wrap="square" lIns="0" tIns="0" rIns="0" bIns="0" rtlCol="0" anchor="t"/>
-          <a:lstStyle/>
-          <a:p>
-            <a:pPr algn="l" indent="0" marL="0">
-              <a:spcAft>
-                <a:spcPts val="800"/>
-              </a:spcAft>
-              <a:buNone/>
-            </a:pPr>
-            <a:r>
-              <a:rPr lang="en-US" sz="3600" b="1" dirty="0">
-                <a:solidFill>
-                  <a:srgbClr val="111111"/>
-                </a:solidFill>
-                <a:latin typeface="Times New Roman" pitchFamily="34" charset="0"/>
-                <a:ea typeface="Times New Roman" pitchFamily="34" charset="-122"/>
-                <a:cs typeface="Times New Roman" pitchFamily="34" charset="-120"/>
-              </a:rPr>
-              <a:t>Distance decay: </a:t>
-            </a:r>
-            <a:pPr algn="l" indent="0" marL="0">
-              <a:spcAft>
-                <a:spcPts val="800"/>
-              </a:spcAft>
-              <a:buNone/>
-            </a:pPr>
-            <a:r>
-              <a:rPr lang="en-US" sz="3600" dirty="0">
-                <a:solidFill>
-                  <a:srgbClr val="111111"/>
-                </a:solidFill>
-                <a:latin typeface="Times New Roman" pitchFamily="34" charset="0"/>
-                <a:ea typeface="Times New Roman" pitchFamily="34" charset="-122"/>
-                <a:cs typeface="Times New Roman" pitchFamily="34" charset="-120"/>
-              </a:rPr>
-              <a:t>Interaction falls as distance rises, so people visit friends in their quarter more than friends in Kribi.</a:t>
-            </a:r>
-            <a:endParaRPr lang="en-US" sz="3600" dirty="0"/>
           </a:p>
         </p:txBody>
       </p:sp>
       <p:pic>
         <p:nvPicPr>
-          <p:cNvPr id="5" name="Image 0" descr="/home/claude/f4/img/v2/zipf_big.png">    </p:cNvPr>
+          <p:cNvPr id="3" name="Image 0" descr="/home/claude/f4/img/minesec_sheet.png">    </p:cNvPr>
           <p:cNvPicPr>
             <a:picLocks noChangeAspect="1"/>
           </p:cNvPicPr>
@@ -17335,8 +17109,8 @@
         </p:blipFill>
         <p:spPr>
           <a:xfrm>
-            <a:off x="5349240" y="2461422"/>
-            <a:ext cx="6659575" cy="2913564"/>
+            <a:off x="0" y="658368"/>
+            <a:ext cx="5120640" cy="5833872"/>
           </a:xfrm>
           <a:prstGeom prst="rect">
             <a:avLst/>
@@ -17345,14 +17119,14 @@
       </p:pic>
       <p:sp>
         <p:nvSpPr>
-          <p:cNvPr id="6" name="Text 3"/>
+          <p:cNvPr id="4" name="Text 1"/>
           <p:cNvSpPr/>
           <p:nvPr/>
         </p:nvSpPr>
         <p:spPr>
           <a:xfrm>
-            <a:off x="5349240" y="6089904"/>
-            <a:ext cx="6659575" cy="347472"/>
+            <a:off x="5349240" y="1005840"/>
+            <a:ext cx="6522415" cy="731520"/>
           </a:xfrm>
           <a:prstGeom prst="rect">
             <a:avLst/>
@@ -17361,24 +17135,68 @@
           <a:ln/>
         </p:spPr>
         <p:txBody>
-          <a:bodyPr wrap="square" lIns="0" tIns="0" rIns="0" bIns="0" rtlCol="0" anchor="ctr"/>
+          <a:bodyPr wrap="square" lIns="0" tIns="0" rIns="0" bIns="0" rtlCol="0" anchor="ctr">
+            <a:normAutofit/>
+          </a:bodyPr>
           <a:lstStyle/>
           <a:p>
             <a:pPr algn="ctr" indent="0" marL="0">
               <a:buNone/>
             </a:pPr>
             <a:r>
-              <a:rPr lang="en-US" sz="1600" i="1" dirty="0">
-                <a:solidFill>
-                  <a:srgbClr val="555555"/>
+              <a:rPr lang="en-US" sz="3600" b="1" dirty="0">
+                <a:solidFill>
+                  <a:srgbClr val="990011"/>
                 </a:solidFill>
                 <a:latin typeface="Times New Roman" pitchFamily="34" charset="0"/>
                 <a:ea typeface="Times New Roman" pitchFamily="34" charset="-122"/>
                 <a:cs typeface="Times New Roman" pitchFamily="34" charset="-120"/>
               </a:rPr>
-              <a:t>Illustration: interaction and distance</a:t>
-            </a:r>
-            <a:endParaRPr lang="en-US" sz="1600" dirty="0"/>
+              <a:t>Evaluation 1</a:t>
+            </a:r>
+            <a:endParaRPr lang="en-US" sz="3600" dirty="0"/>
+          </a:p>
+        </p:txBody>
+      </p:sp>
+      <p:sp>
+        <p:nvSpPr>
+          <p:cNvPr id="5" name="Text 2"/>
+          <p:cNvSpPr/>
+          <p:nvPr/>
+        </p:nvSpPr>
+        <p:spPr>
+          <a:xfrm>
+            <a:off x="5349240" y="1783080"/>
+            <a:ext cx="6522415" cy="4663440"/>
+          </a:xfrm>
+          <a:prstGeom prst="rect">
+            <a:avLst/>
+          </a:prstGeom>
+          <a:noFill/>
+          <a:ln/>
+        </p:spPr>
+        <p:txBody>
+          <a:bodyPr wrap="square" lIns="0" tIns="0" rIns="0" bIns="0" rtlCol="0" anchor="t"/>
+          <a:lstStyle/>
+          <a:p>
+            <a:pPr algn="l" indent="0" marL="0">
+              <a:spcAft>
+                <a:spcPts val="800"/>
+              </a:spcAft>
+              <a:buNone/>
+            </a:pPr>
+            <a:r>
+              <a:rPr lang="en-US" sz="4000" dirty="0">
+                <a:solidFill>
+                  <a:srgbClr val="111111"/>
+                </a:solidFill>
+                <a:latin typeface="Times New Roman" pitchFamily="34" charset="0"/>
+                <a:ea typeface="Times New Roman" pitchFamily="34" charset="-122"/>
+                <a:cs typeface="Times New Roman" pitchFamily="34" charset="-120"/>
+              </a:rPr>
+              <a:t>Explain complementarity with an example.</a:t>
+            </a:r>
+            <a:endParaRPr lang="en-US" sz="4000" dirty="0"/>
           </a:p>
         </p:txBody>
       </p:sp>
@@ -17553,7 +17371,7 @@
                 <a:ea typeface="Times New Roman" pitchFamily="34" charset="-122"/>
                 <a:cs typeface="Times New Roman" pitchFamily="34" charset="-120"/>
               </a:rPr>
-              <a:t>Evaluation 1</a:t>
+              <a:t>Expected Answer</a:t>
             </a:r>
             <a:endParaRPr lang="en-US" sz="3600" dirty="0"/>
           </a:p>
@@ -17595,7 +17413,7 @@
                 <a:ea typeface="Times New Roman" pitchFamily="34" charset="-122"/>
                 <a:cs typeface="Times New Roman" pitchFamily="34" charset="-120"/>
               </a:rPr>
-              <a:t>Explain complementarity with an example.</a:t>
+              <a:t>One place has a surplus that another needs, e.g. cotton from the North sent to textile factories in Douala.</a:t>
             </a:r>
             <a:endParaRPr lang="en-US" sz="4000" dirty="0"/>
           </a:p>
@@ -17772,7 +17590,7 @@
                 <a:ea typeface="Times New Roman" pitchFamily="34" charset="-122"/>
                 <a:cs typeface="Times New Roman" pitchFamily="34" charset="-120"/>
               </a:rPr>
-              <a:t>Expected Answer</a:t>
+              <a:t>Evaluation 2</a:t>
             </a:r>
             <a:endParaRPr lang="en-US" sz="3600" dirty="0"/>
           </a:p>
@@ -17814,7 +17632,7 @@
                 <a:ea typeface="Times New Roman" pitchFamily="34" charset="-122"/>
                 <a:cs typeface="Times New Roman" pitchFamily="34" charset="-120"/>
               </a:rPr>
-              <a:t>One place has a surplus that another needs, e.g. cotton from the North sent to textile factories in Douala.</a:t>
+              <a:t>What is distance decay?</a:t>
             </a:r>
             <a:endParaRPr lang="en-US" sz="4000" dirty="0"/>
           </a:p>
@@ -17991,7 +17809,7 @@
                 <a:ea typeface="Times New Roman" pitchFamily="34" charset="-122"/>
                 <a:cs typeface="Times New Roman" pitchFamily="34" charset="-120"/>
               </a:rPr>
-              <a:t>Evaluation 2</a:t>
+              <a:t>Expected Answer</a:t>
             </a:r>
             <a:endParaRPr lang="en-US" sz="3600" dirty="0"/>
           </a:p>
@@ -18033,7 +17851,7 @@
                 <a:ea typeface="Times New Roman" pitchFamily="34" charset="-122"/>
                 <a:cs typeface="Times New Roman" pitchFamily="34" charset="-120"/>
               </a:rPr>
-              <a:t>What is distance decay?</a:t>
+              <a:t>The decrease of interaction between places as distance increases.</a:t>
             </a:r>
             <a:endParaRPr lang="en-US" sz="4000" dirty="0"/>
           </a:p>
@@ -18364,7 +18182,7 @@
                 <a:ea typeface="Calibri" pitchFamily="34" charset="-122"/>
                 <a:cs typeface="Calibri" pitchFamily="34" charset="-120"/>
               </a:rPr>
-              <a:t>FORMATIVE EVALUATION</a:t>
+              <a:t>REMEDIATION</a:t>
             </a:r>
             <a:endParaRPr lang="en-US" sz="1400" dirty="0"/>
           </a:p>
@@ -18387,7 +18205,7 @@
         <p:spPr>
           <a:xfrm>
             <a:off x="0" y="658368"/>
-            <a:ext cx="5120640" cy="5833872"/>
+            <a:ext cx="1463040" cy="5833872"/>
           </a:xfrm>
           <a:prstGeom prst="rect">
             <a:avLst/>
@@ -18402,8 +18220,8 @@
         </p:nvSpPr>
         <p:spPr>
           <a:xfrm>
-            <a:off x="5349240" y="1005840"/>
-            <a:ext cx="6522415" cy="731520"/>
+            <a:off x="1691640" y="1005840"/>
+            <a:ext cx="10180015" cy="731520"/>
           </a:xfrm>
           <a:prstGeom prst="rect">
             <a:avLst/>
@@ -18429,7 +18247,7 @@
                 <a:ea typeface="Times New Roman" pitchFamily="34" charset="-122"/>
                 <a:cs typeface="Times New Roman" pitchFamily="34" charset="-120"/>
               </a:rPr>
-              <a:t>Expected Answer</a:t>
+              <a:t>Remediation</a:t>
             </a:r>
             <a:endParaRPr lang="en-US" sz="3600" dirty="0"/>
           </a:p>
@@ -18443,8 +18261,8 @@
         </p:nvSpPr>
         <p:spPr>
           <a:xfrm>
-            <a:off x="5349240" y="1783080"/>
-            <a:ext cx="6522415" cy="4663440"/>
+            <a:off x="1691640" y="1783080"/>
+            <a:ext cx="10180015" cy="4663440"/>
           </a:xfrm>
           <a:prstGeom prst="rect">
             <a:avLst/>
@@ -18463,7 +18281,7 @@
               <a:buNone/>
             </a:pPr>
             <a:r>
-              <a:rPr lang="en-US" sz="4000" dirty="0">
+              <a:rPr lang="en-US" sz="4000" b="1" dirty="0">
                 <a:solidFill>
                   <a:srgbClr val="111111"/>
                 </a:solidFill>
@@ -18471,7 +18289,73 @@
                 <a:ea typeface="Times New Roman" pitchFamily="34" charset="-122"/>
                 <a:cs typeface="Times New Roman" pitchFamily="34" charset="-120"/>
               </a:rPr>
-              <a:t>The decrease of interaction between places as distance increases.</a:t>
+              <a:t>Fill in the blanks:</a:t>
+            </a:r>
+            <a:endParaRPr lang="en-US" sz="4000" dirty="0"/>
+          </a:p>
+          <a:p>
+            <a:pPr algn="l" marL="342900" indent="-342900">
+              <a:spcAft>
+                <a:spcPts val="800"/>
+              </a:spcAft>
+              <a:buSzPct val="100000"/>
+              <a:buFont typeface="+mj-lt"/>
+              <a:buAutoNum type="arabicPeriod" startAt="1"/>
+            </a:pPr>
+            <a:r>
+              <a:rPr lang="en-US" sz="4000" dirty="0">
+                <a:solidFill>
+                  <a:srgbClr val="111111"/>
+                </a:solidFill>
+                <a:latin typeface="Times New Roman" pitchFamily="34" charset="0"/>
+                <a:ea typeface="Times New Roman" pitchFamily="34" charset="-122"/>
+                <a:cs typeface="Times New Roman" pitchFamily="34" charset="-120"/>
+              </a:rPr>
+              <a:t>The movement of goods, people and information is spatial ______.</a:t>
+            </a:r>
+            <a:endParaRPr lang="en-US" sz="4000" dirty="0"/>
+          </a:p>
+          <a:p>
+            <a:pPr algn="l" marL="342900" indent="-342900">
+              <a:spcAft>
+                <a:spcPts val="800"/>
+              </a:spcAft>
+              <a:buSzPct val="100000"/>
+              <a:buFont typeface="+mj-lt"/>
+              <a:buAutoNum type="arabicPeriod" startAt="1"/>
+            </a:pPr>
+            <a:r>
+              <a:rPr lang="en-US" sz="4000" dirty="0">
+                <a:solidFill>
+                  <a:srgbClr val="111111"/>
+                </a:solidFill>
+                <a:latin typeface="Times New Roman" pitchFamily="34" charset="0"/>
+                <a:ea typeface="Times New Roman" pitchFamily="34" charset="-122"/>
+                <a:cs typeface="Times New Roman" pitchFamily="34" charset="-120"/>
+              </a:rPr>
+              <a:t>The ease of moving goods is called ______.</a:t>
+            </a:r>
+            <a:endParaRPr lang="en-US" sz="4000" dirty="0"/>
+          </a:p>
+          <a:p>
+            <a:pPr algn="l" marL="342900" indent="-342900">
+              <a:spcAft>
+                <a:spcPts val="800"/>
+              </a:spcAft>
+              <a:buSzPct val="100000"/>
+              <a:buFont typeface="+mj-lt"/>
+              <a:buAutoNum type="arabicPeriod" startAt="1"/>
+            </a:pPr>
+            <a:r>
+              <a:rPr lang="en-US" sz="4000" dirty="0">
+                <a:solidFill>
+                  <a:srgbClr val="111111"/>
+                </a:solidFill>
+                <a:latin typeface="Times New Roman" pitchFamily="34" charset="0"/>
+                <a:ea typeface="Times New Roman" pitchFamily="34" charset="-122"/>
+                <a:cs typeface="Times New Roman" pitchFamily="34" charset="-120"/>
+              </a:rPr>
+              <a:t>Interaction falls with distance: distance ______.</a:t>
             </a:r>
             <a:endParaRPr lang="en-US" sz="4000" dirty="0"/>
           </a:p>
@@ -18583,7 +18467,7 @@
                 <a:ea typeface="Calibri" pitchFamily="34" charset="-122"/>
                 <a:cs typeface="Calibri" pitchFamily="34" charset="-120"/>
               </a:rPr>
-              <a:t>REMEDIATION</a:t>
+              <a:t>HOMEWORK</a:t>
             </a:r>
             <a:endParaRPr lang="en-US" sz="1400" dirty="0"/>
           </a:p>
@@ -18606,7 +18490,7 @@
         <p:spPr>
           <a:xfrm>
             <a:off x="0" y="658368"/>
-            <a:ext cx="1463040" cy="5833872"/>
+            <a:ext cx="5120640" cy="5833872"/>
           </a:xfrm>
           <a:prstGeom prst="rect">
             <a:avLst/>
@@ -18621,8 +18505,8 @@
         </p:nvSpPr>
         <p:spPr>
           <a:xfrm>
-            <a:off x="1691640" y="1005840"/>
-            <a:ext cx="10180015" cy="731520"/>
+            <a:off x="5349240" y="1005840"/>
+            <a:ext cx="6522415" cy="731520"/>
           </a:xfrm>
           <a:prstGeom prst="rect">
             <a:avLst/>
@@ -18648,7 +18532,7 @@
                 <a:ea typeface="Times New Roman" pitchFamily="34" charset="-122"/>
                 <a:cs typeface="Times New Roman" pitchFamily="34" charset="-120"/>
               </a:rPr>
-              <a:t>Remediation</a:t>
+              <a:t>Homework</a:t>
             </a:r>
             <a:endParaRPr lang="en-US" sz="3600" dirty="0"/>
           </a:p>
@@ -18662,8 +18546,8 @@
         </p:nvSpPr>
         <p:spPr>
           <a:xfrm>
-            <a:off x="1691640" y="1783080"/>
-            <a:ext cx="10180015" cy="4663440"/>
+            <a:off x="5349240" y="1783080"/>
+            <a:ext cx="6522415" cy="4663440"/>
           </a:xfrm>
           <a:prstGeom prst="rect">
             <a:avLst/>
@@ -18682,7 +18566,7 @@
               <a:buNone/>
             </a:pPr>
             <a:r>
-              <a:rPr lang="en-US" sz="4000" b="1" dirty="0">
+              <a:rPr lang="en-US" sz="4000" dirty="0">
                 <a:solidFill>
                   <a:srgbClr val="111111"/>
                 </a:solidFill>
@@ -18690,73 +18574,7 @@
                 <a:ea typeface="Times New Roman" pitchFamily="34" charset="-122"/>
                 <a:cs typeface="Times New Roman" pitchFamily="34" charset="-120"/>
               </a:rPr>
-              <a:t>Fill in the blanks:</a:t>
-            </a:r>
-            <a:endParaRPr lang="en-US" sz="4000" dirty="0"/>
-          </a:p>
-          <a:p>
-            <a:pPr algn="l" marL="342900" indent="-342900">
-              <a:spcAft>
-                <a:spcPts val="800"/>
-              </a:spcAft>
-              <a:buSzPct val="100000"/>
-              <a:buFont typeface="+mj-lt"/>
-              <a:buAutoNum type="arabicPeriod" startAt="1"/>
-            </a:pPr>
-            <a:r>
-              <a:rPr lang="en-US" sz="4000" dirty="0">
-                <a:solidFill>
-                  <a:srgbClr val="111111"/>
-                </a:solidFill>
-                <a:latin typeface="Times New Roman" pitchFamily="34" charset="0"/>
-                <a:ea typeface="Times New Roman" pitchFamily="34" charset="-122"/>
-                <a:cs typeface="Times New Roman" pitchFamily="34" charset="-120"/>
-              </a:rPr>
-              <a:t>The movement of goods, people and information is spatial ______.</a:t>
-            </a:r>
-            <a:endParaRPr lang="en-US" sz="4000" dirty="0"/>
-          </a:p>
-          <a:p>
-            <a:pPr algn="l" marL="342900" indent="-342900">
-              <a:spcAft>
-                <a:spcPts val="800"/>
-              </a:spcAft>
-              <a:buSzPct val="100000"/>
-              <a:buFont typeface="+mj-lt"/>
-              <a:buAutoNum type="arabicPeriod" startAt="1"/>
-            </a:pPr>
-            <a:r>
-              <a:rPr lang="en-US" sz="4000" dirty="0">
-                <a:solidFill>
-                  <a:srgbClr val="111111"/>
-                </a:solidFill>
-                <a:latin typeface="Times New Roman" pitchFamily="34" charset="0"/>
-                <a:ea typeface="Times New Roman" pitchFamily="34" charset="-122"/>
-                <a:cs typeface="Times New Roman" pitchFamily="34" charset="-120"/>
-              </a:rPr>
-              <a:t>The ease of moving goods is called ______.</a:t>
-            </a:r>
-            <a:endParaRPr lang="en-US" sz="4000" dirty="0"/>
-          </a:p>
-          <a:p>
-            <a:pPr algn="l" marL="342900" indent="-342900">
-              <a:spcAft>
-                <a:spcPts val="800"/>
-              </a:spcAft>
-              <a:buSzPct val="100000"/>
-              <a:buFont typeface="+mj-lt"/>
-              <a:buAutoNum type="arabicPeriod" startAt="1"/>
-            </a:pPr>
-            <a:r>
-              <a:rPr lang="en-US" sz="4000" dirty="0">
-                <a:solidFill>
-                  <a:srgbClr val="111111"/>
-                </a:solidFill>
-                <a:latin typeface="Times New Roman" pitchFamily="34" charset="0"/>
-                <a:ea typeface="Times New Roman" pitchFamily="34" charset="-122"/>
-                <a:cs typeface="Times New Roman" pitchFamily="34" charset="-120"/>
-              </a:rPr>
-              <a:t>Interaction falls with distance: distance ______.</a:t>
+              <a:t>Define an internally displaced person.</a:t>
             </a:r>
             <a:endParaRPr lang="en-US" sz="4000" dirty="0"/>
           </a:p>
@@ -18868,7 +18686,7 @@
                 <a:ea typeface="Calibri" pitchFamily="34" charset="-122"/>
                 <a:cs typeface="Calibri" pitchFamily="34" charset="-120"/>
               </a:rPr>
-              <a:t>HOMEWORK</a:t>
+              <a:t>NEXT LESSON</a:t>
             </a:r>
             <a:endParaRPr lang="en-US" sz="1400" dirty="0"/>
           </a:p>
@@ -18933,7 +18751,7 @@
                 <a:ea typeface="Times New Roman" pitchFamily="34" charset="-122"/>
                 <a:cs typeface="Times New Roman" pitchFamily="34" charset="-120"/>
               </a:rPr>
-              <a:t>Homework</a:t>
+              <a:t>Next Lesson</a:t>
             </a:r>
             <a:endParaRPr lang="en-US" sz="3600" dirty="0"/>
           </a:p>
@@ -18957,17 +18775,17 @@
           <a:ln/>
         </p:spPr>
         <p:txBody>
-          <a:bodyPr wrap="square" lIns="0" tIns="0" rIns="0" bIns="0" rtlCol="0" anchor="t"/>
-          <a:lstStyle/>
-          <a:p>
-            <a:pPr algn="l" indent="0" marL="0">
+          <a:bodyPr wrap="square" lIns="0" tIns="0" rIns="0" bIns="0" rtlCol="0" anchor="ctr"/>
+          <a:lstStyle/>
+          <a:p>
+            <a:pPr algn="ctr" indent="0" marL="0">
               <a:spcAft>
                 <a:spcPts val="800"/>
               </a:spcAft>
               <a:buNone/>
             </a:pPr>
             <a:r>
-              <a:rPr lang="en-US" sz="4000" dirty="0">
+              <a:rPr lang="en-US" sz="4000" b="1" dirty="0">
                 <a:solidFill>
                   <a:srgbClr val="111111"/>
                 </a:solidFill>
@@ -18975,7 +18793,27 @@
                 <a:ea typeface="Times New Roman" pitchFamily="34" charset="-122"/>
                 <a:cs typeface="Times New Roman" pitchFamily="34" charset="-120"/>
               </a:rPr>
-              <a:t>Define an internally displaced person.</a:t>
+              <a:t>Our next lesson will be on:</a:t>
+            </a:r>
+            <a:endParaRPr lang="en-US" sz="4000" dirty="0"/>
+          </a:p>
+          <a:p>
+            <a:pPr algn="ctr" indent="0" marL="0">
+              <a:spcAft>
+                <a:spcPts val="800"/>
+              </a:spcAft>
+              <a:buNone/>
+            </a:pPr>
+            <a:r>
+              <a:rPr lang="en-US" sz="4000" b="1" dirty="0">
+                <a:solidFill>
+                  <a:srgbClr val="990011"/>
+                </a:solidFill>
+                <a:latin typeface="Times New Roman" pitchFamily="34" charset="0"/>
+                <a:ea typeface="Times New Roman" pitchFamily="34" charset="-122"/>
+                <a:cs typeface="Times New Roman" pitchFamily="34" charset="-120"/>
+              </a:rPr>
+              <a:t>Lesson 15: Types of Migration</a:t>
             </a:r>
             <a:endParaRPr lang="en-US" sz="4000" dirty="0"/>
           </a:p>
@@ -19087,245 +18925,6 @@
                 <a:ea typeface="Calibri" pitchFamily="34" charset="-122"/>
                 <a:cs typeface="Calibri" pitchFamily="34" charset="-120"/>
               </a:rPr>
-              <a:t>NEXT LESSON</a:t>
-            </a:r>
-            <a:endParaRPr lang="en-US" sz="1400" dirty="0"/>
-          </a:p>
-        </p:txBody>
-      </p:sp>
-      <p:pic>
-        <p:nvPicPr>
-          <p:cNvPr id="3" name="Image 0" descr="/home/claude/f4/img/minesec_sheet.png">    </p:cNvPr>
-          <p:cNvPicPr>
-            <a:picLocks noChangeAspect="1"/>
-          </p:cNvPicPr>
-          <p:nvPr/>
-        </p:nvPicPr>
-        <p:blipFill>
-          <a:blip r:embed="rId1"/>
-          <a:stretch>
-            <a:fillRect/>
-          </a:stretch>
-        </p:blipFill>
-        <p:spPr>
-          <a:xfrm>
-            <a:off x="0" y="658368"/>
-            <a:ext cx="5120640" cy="5833872"/>
-          </a:xfrm>
-          <a:prstGeom prst="rect">
-            <a:avLst/>
-          </a:prstGeom>
-        </p:spPr>
-      </p:pic>
-      <p:sp>
-        <p:nvSpPr>
-          <p:cNvPr id="4" name="Text 1"/>
-          <p:cNvSpPr/>
-          <p:nvPr/>
-        </p:nvSpPr>
-        <p:spPr>
-          <a:xfrm>
-            <a:off x="5349240" y="1005840"/>
-            <a:ext cx="6522415" cy="731520"/>
-          </a:xfrm>
-          <a:prstGeom prst="rect">
-            <a:avLst/>
-          </a:prstGeom>
-          <a:noFill/>
-          <a:ln/>
-        </p:spPr>
-        <p:txBody>
-          <a:bodyPr wrap="square" lIns="0" tIns="0" rIns="0" bIns="0" rtlCol="0" anchor="ctr">
-            <a:normAutofit/>
-          </a:bodyPr>
-          <a:lstStyle/>
-          <a:p>
-            <a:pPr algn="ctr" indent="0" marL="0">
-              <a:buNone/>
-            </a:pPr>
-            <a:r>
-              <a:rPr lang="en-US" sz="3600" b="1" dirty="0">
-                <a:solidFill>
-                  <a:srgbClr val="990011"/>
-                </a:solidFill>
-                <a:latin typeface="Times New Roman" pitchFamily="34" charset="0"/>
-                <a:ea typeface="Times New Roman" pitchFamily="34" charset="-122"/>
-                <a:cs typeface="Times New Roman" pitchFamily="34" charset="-120"/>
-              </a:rPr>
-              <a:t>Next Lesson</a:t>
-            </a:r>
-            <a:endParaRPr lang="en-US" sz="3600" dirty="0"/>
-          </a:p>
-        </p:txBody>
-      </p:sp>
-      <p:sp>
-        <p:nvSpPr>
-          <p:cNvPr id="5" name="Text 2"/>
-          <p:cNvSpPr/>
-          <p:nvPr/>
-        </p:nvSpPr>
-        <p:spPr>
-          <a:xfrm>
-            <a:off x="5349240" y="1783080"/>
-            <a:ext cx="6522415" cy="4663440"/>
-          </a:xfrm>
-          <a:prstGeom prst="rect">
-            <a:avLst/>
-          </a:prstGeom>
-          <a:noFill/>
-          <a:ln/>
-        </p:spPr>
-        <p:txBody>
-          <a:bodyPr wrap="square" lIns="0" tIns="0" rIns="0" bIns="0" rtlCol="0" anchor="ctr"/>
-          <a:lstStyle/>
-          <a:p>
-            <a:pPr algn="ctr" indent="0" marL="0">
-              <a:spcAft>
-                <a:spcPts val="800"/>
-              </a:spcAft>
-              <a:buNone/>
-            </a:pPr>
-            <a:r>
-              <a:rPr lang="en-US" sz="4000" b="1" dirty="0">
-                <a:solidFill>
-                  <a:srgbClr val="111111"/>
-                </a:solidFill>
-                <a:latin typeface="Times New Roman" pitchFamily="34" charset="0"/>
-                <a:ea typeface="Times New Roman" pitchFamily="34" charset="-122"/>
-                <a:cs typeface="Times New Roman" pitchFamily="34" charset="-120"/>
-              </a:rPr>
-              <a:t>Our next lesson will be on:</a:t>
-            </a:r>
-            <a:endParaRPr lang="en-US" sz="4000" dirty="0"/>
-          </a:p>
-          <a:p>
-            <a:pPr algn="ctr" indent="0" marL="0">
-              <a:spcAft>
-                <a:spcPts val="800"/>
-              </a:spcAft>
-              <a:buNone/>
-            </a:pPr>
-            <a:r>
-              <a:rPr lang="en-US" sz="4000" b="1" dirty="0">
-                <a:solidFill>
-                  <a:srgbClr val="990011"/>
-                </a:solidFill>
-                <a:latin typeface="Times New Roman" pitchFamily="34" charset="0"/>
-                <a:ea typeface="Times New Roman" pitchFamily="34" charset="-122"/>
-                <a:cs typeface="Times New Roman" pitchFamily="34" charset="-120"/>
-              </a:rPr>
-              <a:t>Lesson 15: Types of Migration</a:t>
-            </a:r>
-            <a:endParaRPr lang="en-US" sz="4000" dirty="0"/>
-          </a:p>
-        </p:txBody>
-      </p:sp>
-      <p:sp>
-        <p:nvSpPr>
-          <p:cNvPr id="25" name="Slide Number Placeholder 0"/>
-          <p:cNvSpPr>
-            <a:spLocks noGrp="1"/>
-          </p:cNvSpPr>
-          <p:nvPr>
-            <p:ph type="sldNum" sz="quarter" idx="4294967295"/>
-          </p:nvPr>
-        </p:nvSpPr>
-        <p:spPr>
-          <a:xfrm>
-            <a:off x="27432" y="91440"/>
-            <a:ext cx="585216" cy="475488"/>
-          </a:xfrm>
-          <a:prstGeom prst="rect">
-            <a:avLst/>
-          </a:prstGeom>
-          <a:extLst>
-            <a:ext uri="{C572A759-6A51-4108-AA02-DFA0A04FC94B}">
-              <ma14:wrappingTextBoxFlag xmlns:ma14="http://schemas.microsoft.com/office/mac/drawingml/2011/main" val="0"/>
-            </a:ext>
-          </a:extLst>
-        </p:spPr>
-        <p:txBody>
-          <a:bodyPr/>
-          <a:lstStyle>
-            <a:lvl1pPr>
-              <a:defRPr sz="2000">
-                <a:solidFill>
-                  <a:srgbClr val="FFFFFF"/>
-                </a:solidFill>
-                <a:latin typeface="Calibri"/>
-                <a:ea typeface="Calibri"/>
-                <a:cs typeface="Calibri"/>
-              </a:defRPr>
-            </a:lvl1pPr>
-          </a:lstStyle>
-          <a:p>
-            <a:pPr algn="ctr"/>
-            <a:fld id="{F7021451-1387-4CA6-816F-3879F97B5CBC}" type="slidenum">
-              <a:rPr b="1" lang="en-US"/>
-              <a:t>53</a:t>
-            </a:fld>
-            <a:endParaRPr lang="en-US"/>
-          </a:p>
-        </p:txBody>
-      </p:sp>
-    </p:spTree>
-  </p:cSld>
-  <p:clrMapOvr>
-    <a:masterClrMapping/>
-  </p:clrMapOvr>
-</p:sld>
-</file>
-
-<file path=ppt/slides/slide54.xml><?xml version="1.0" encoding="utf-8"?>
-<p:sld xmlns:a="http://schemas.openxmlformats.org/drawingml/2006/main" xmlns:r="http://schemas.openxmlformats.org/officeDocument/2006/relationships" xmlns:p="http://schemas.openxmlformats.org/presentationml/2006/main">
-  <p:cSld name="Slide 54">
-    <p:spTree>
-      <p:nvGrpSpPr>
-        <p:cNvPr id="1" name=""/>
-        <p:cNvGrpSpPr/>
-        <p:nvPr/>
-      </p:nvGrpSpPr>
-      <p:grpSpPr>
-        <a:xfrm>
-          <a:off x="0" y="0"/>
-          <a:ext cx="0" cy="0"/>
-          <a:chOff x="0" y="0"/>
-          <a:chExt cx="0" cy="0"/>
-        </a:xfrm>
-      </p:grpSpPr>
-      <p:sp>
-        <p:nvSpPr>
-          <p:cNvPr id="2" name="Text 0"/>
-          <p:cNvSpPr/>
-          <p:nvPr/>
-        </p:nvSpPr>
-        <p:spPr>
-          <a:xfrm>
-            <a:off x="457200" y="713232"/>
-            <a:ext cx="11368735" cy="274320"/>
-          </a:xfrm>
-          <a:prstGeom prst="rect">
-            <a:avLst/>
-          </a:prstGeom>
-          <a:noFill/>
-          <a:ln/>
-        </p:spPr>
-        <p:txBody>
-          <a:bodyPr wrap="square" lIns="0" tIns="0" rIns="0" bIns="0" rtlCol="0" anchor="ctr"/>
-          <a:lstStyle/>
-          <a:p>
-            <a:pPr algn="r" indent="0" marL="0">
-              <a:buNone/>
-            </a:pPr>
-            <a:r>
-              <a:rPr lang="en-US" sz="1400" b="1" dirty="0">
-                <a:solidFill>
-                  <a:srgbClr val="1C3F6E"/>
-                </a:solidFill>
-                <a:latin typeface="Calibri" pitchFamily="34" charset="0"/>
-                <a:ea typeface="Calibri" pitchFamily="34" charset="-122"/>
-                <a:cs typeface="Calibri" pitchFamily="34" charset="-120"/>
-              </a:rPr>
               <a:t>BILINGUAL GAME</a:t>
             </a:r>
             <a:endParaRPr lang="en-US" sz="1400" dirty="0"/>
@@ -19373,7 +18972,7 @@
       </p:sp>
       <p:graphicFrame>
         <p:nvGraphicFramePr>
-          <p:cNvPr id="55" name="Table 0"/>
+          <p:cNvPr id="54" name="Table 0"/>
           <p:cNvGraphicFramePr>
             <a:graphicFrameLocks noGrp="1"/>
           </p:cNvGraphicFramePr>
@@ -20409,7 +20008,7 @@
             <a:pPr algn="ctr"/>
             <a:fld id="{F7021451-1387-4CA6-816F-3879F97B5CBC}" type="slidenum">
               <a:rPr b="1" lang="en-US"/>
-              <a:t>54</a:t>
+              <a:t>53</a:t>
             </a:fld>
             <a:endParaRPr lang="en-US"/>
           </a:p>
@@ -20423,9 +20022,9 @@
 </p:sld>
 </file>
 
-<file path=ppt/slides/slide55.xml><?xml version="1.0" encoding="utf-8"?>
+<file path=ppt/slides/slide54.xml><?xml version="1.0" encoding="utf-8"?>
 <p:sld xmlns:a="http://schemas.openxmlformats.org/drawingml/2006/main" xmlns:r="http://schemas.openxmlformats.org/officeDocument/2006/relationships" xmlns:p="http://schemas.openxmlformats.org/presentationml/2006/main">
-  <p:cSld name="Slide 55">
+  <p:cSld name="Slide 54">
     <p:spTree>
       <p:nvGrpSpPr>
         <p:cNvPr id="1" name=""/>
@@ -20520,7 +20119,7 @@
       </p:sp>
       <p:graphicFrame>
         <p:nvGraphicFramePr>
-          <p:cNvPr id="56" name="Table 0"/>
+          <p:cNvPr id="55" name="Table 0"/>
           <p:cNvGraphicFramePr>
             <a:graphicFrameLocks noGrp="1"/>
           </p:cNvGraphicFramePr>
@@ -21142,7 +20741,7 @@
             <a:pPr algn="ctr"/>
             <a:fld id="{F7021451-1387-4CA6-816F-3879F97B5CBC}" type="slidenum">
               <a:rPr b="1" lang="en-US"/>
-              <a:t>55</a:t>
+              <a:t>54</a:t>
             </a:fld>
             <a:endParaRPr lang="en-US"/>
           </a:p>
@@ -21156,9 +20755,9 @@
 </p:sld>
 </file>
 
-<file path=ppt/slides/slide56.xml><?xml version="1.0" encoding="utf-8"?>
+<file path=ppt/slides/slide55.xml><?xml version="1.0" encoding="utf-8"?>
 <p:sld xmlns:a="http://schemas.openxmlformats.org/drawingml/2006/main" xmlns:r="http://schemas.openxmlformats.org/officeDocument/2006/relationships" xmlns:p="http://schemas.openxmlformats.org/presentationml/2006/main">
-  <p:cSld name="Slide 56">
+  <p:cSld name="Slide 55">
     <p:spTree>
       <p:nvGrpSpPr>
         <p:cNvPr id="1" name=""/>
@@ -21253,7 +20852,7 @@
       </p:sp>
       <p:graphicFrame>
         <p:nvGraphicFramePr>
-          <p:cNvPr id="57" name="Table 0"/>
+          <p:cNvPr id="56" name="Table 0"/>
           <p:cNvGraphicFramePr>
             <a:graphicFrameLocks noGrp="1"/>
           </p:cNvGraphicFramePr>
@@ -21363,7 +20962,7 @@
                           <a:ea typeface="Calibri" pitchFamily="34" charset="-122"/>
                           <a:cs typeface="Calibri" pitchFamily="34" charset="-120"/>
                         </a:rPr>
-                        <a:t>DEFINITIONS; Meaning of Spatial Interaction; Factors of Spatial Interaction (Ullman).</a:t>
+                        <a:t>DEFINITIONS; Meaning of Spatial Interaction; Factors of Spatial Interaction.</a:t>
                       </a:r>
                       <a:endParaRPr lang="en-US" sz="1600" dirty="0">
                         <a:latin typeface="Calibri" charset="0"/>
@@ -22013,6 +21612,331 @@
             <a:pPr algn="ctr"/>
             <a:fld id="{F7021451-1387-4CA6-816F-3879F97B5CBC}" type="slidenum">
               <a:rPr b="1" lang="en-US"/>
+              <a:t>55</a:t>
+            </a:fld>
+            <a:endParaRPr lang="en-US"/>
+          </a:p>
+        </p:txBody>
+      </p:sp>
+    </p:spTree>
+  </p:cSld>
+  <p:clrMapOvr>
+    <a:masterClrMapping/>
+  </p:clrMapOvr>
+</p:sld>
+</file>
+
+<file path=ppt/slides/slide56.xml><?xml version="1.0" encoding="utf-8"?>
+<p:sld xmlns:a="http://schemas.openxmlformats.org/drawingml/2006/main" xmlns:r="http://schemas.openxmlformats.org/officeDocument/2006/relationships" xmlns:p="http://schemas.openxmlformats.org/presentationml/2006/main">
+  <p:cSld name="Slide 56">
+    <p:spTree>
+      <p:nvGrpSpPr>
+        <p:cNvPr id="1" name=""/>
+        <p:cNvGrpSpPr/>
+        <p:nvPr/>
+      </p:nvGrpSpPr>
+      <p:grpSpPr>
+        <a:xfrm>
+          <a:off x="0" y="0"/>
+          <a:ext cx="0" cy="0"/>
+          <a:chOff x="0" y="0"/>
+          <a:chExt cx="0" cy="0"/>
+        </a:xfrm>
+      </p:grpSpPr>
+      <p:sp>
+        <p:nvSpPr>
+          <p:cNvPr id="2" name="Text 0"/>
+          <p:cNvSpPr/>
+          <p:nvPr/>
+        </p:nvSpPr>
+        <p:spPr>
+          <a:xfrm>
+            <a:off x="457200" y="713232"/>
+            <a:ext cx="11368735" cy="274320"/>
+          </a:xfrm>
+          <a:prstGeom prst="rect">
+            <a:avLst/>
+          </a:prstGeom>
+          <a:noFill/>
+          <a:ln/>
+        </p:spPr>
+        <p:txBody>
+          <a:bodyPr wrap="square" lIns="0" tIns="0" rIns="0" bIns="0" rtlCol="0" anchor="ctr"/>
+          <a:lstStyle/>
+          <a:p>
+            <a:pPr algn="r" indent="0" marL="0">
+              <a:buNone/>
+            </a:pPr>
+            <a:r>
+              <a:rPr lang="en-US" sz="1400" b="1" dirty="0">
+                <a:solidFill>
+                  <a:srgbClr val="1C3F6E"/>
+                </a:solidFill>
+                <a:latin typeface="Calibri" pitchFamily="34" charset="0"/>
+                <a:ea typeface="Calibri" pitchFamily="34" charset="-122"/>
+                <a:cs typeface="Calibri" pitchFamily="34" charset="-120"/>
+              </a:rPr>
+              <a:t>TEACHER'S NOTE</a:t>
+            </a:r>
+            <a:endParaRPr lang="en-US" sz="1400" dirty="0"/>
+          </a:p>
+        </p:txBody>
+      </p:sp>
+      <p:pic>
+        <p:nvPicPr>
+          <p:cNvPr id="3" name="Image 0" descr="/home/claude/f4/img/minesec_sheet.png">    </p:cNvPr>
+          <p:cNvPicPr>
+            <a:picLocks noChangeAspect="1"/>
+          </p:cNvPicPr>
+          <p:nvPr/>
+        </p:nvPicPr>
+        <p:blipFill>
+          <a:blip r:embed="rId1"/>
+          <a:stretch>
+            <a:fillRect/>
+          </a:stretch>
+        </p:blipFill>
+        <p:spPr>
+          <a:xfrm>
+            <a:off x="0" y="658368"/>
+            <a:ext cx="3840480" cy="5833872"/>
+          </a:xfrm>
+          <a:prstGeom prst="rect">
+            <a:avLst/>
+          </a:prstGeom>
+        </p:spPr>
+      </p:pic>
+      <p:sp>
+        <p:nvSpPr>
+          <p:cNvPr id="4" name="Text 1"/>
+          <p:cNvSpPr/>
+          <p:nvPr/>
+        </p:nvSpPr>
+        <p:spPr>
+          <a:xfrm>
+            <a:off x="4069080" y="1005840"/>
+            <a:ext cx="7802575" cy="731520"/>
+          </a:xfrm>
+          <a:prstGeom prst="rect">
+            <a:avLst/>
+          </a:prstGeom>
+          <a:noFill/>
+          <a:ln/>
+        </p:spPr>
+        <p:txBody>
+          <a:bodyPr wrap="square" lIns="0" tIns="0" rIns="0" bIns="0" rtlCol="0" anchor="ctr">
+            <a:normAutofit/>
+          </a:bodyPr>
+          <a:lstStyle/>
+          <a:p>
+            <a:pPr algn="ctr" indent="0" marL="0">
+              <a:buNone/>
+            </a:pPr>
+            <a:r>
+              <a:rPr lang="en-US" sz="3600" b="1" dirty="0">
+                <a:solidFill>
+                  <a:srgbClr val="990011"/>
+                </a:solidFill>
+                <a:latin typeface="Times New Roman" pitchFamily="34" charset="0"/>
+                <a:ea typeface="Times New Roman" pitchFamily="34" charset="-122"/>
+                <a:cs typeface="Times New Roman" pitchFamily="34" charset="-120"/>
+              </a:rPr>
+              <a:t>Teacher's Note</a:t>
+            </a:r>
+            <a:endParaRPr lang="en-US" sz="3600" dirty="0"/>
+          </a:p>
+        </p:txBody>
+      </p:sp>
+      <p:sp>
+        <p:nvSpPr>
+          <p:cNvPr id="5" name="Text 2"/>
+          <p:cNvSpPr/>
+          <p:nvPr/>
+        </p:nvSpPr>
+        <p:spPr>
+          <a:xfrm>
+            <a:off x="4069080" y="1783080"/>
+            <a:ext cx="7802575" cy="4663440"/>
+          </a:xfrm>
+          <a:prstGeom prst="rect">
+            <a:avLst/>
+          </a:prstGeom>
+          <a:noFill/>
+          <a:ln/>
+        </p:spPr>
+        <p:txBody>
+          <a:bodyPr wrap="square" lIns="0" tIns="0" rIns="0" bIns="0" rtlCol="0" anchor="t"/>
+          <a:lstStyle/>
+          <a:p>
+            <a:pPr algn="l" marL="342900" indent="-342900">
+              <a:spcAft>
+                <a:spcPts val="800"/>
+              </a:spcAft>
+              <a:buSzPct val="100000"/>
+              <a:buChar char="•"/>
+            </a:pPr>
+            <a:r>
+              <a:rPr lang="en-US" sz="2000" dirty="0">
+                <a:solidFill>
+                  <a:srgbClr val="111111"/>
+                </a:solidFill>
+                <a:latin typeface="Calibri" pitchFamily="34" charset="0"/>
+                <a:ea typeface="Calibri" pitchFamily="34" charset="-122"/>
+                <a:cs typeface="Calibri" pitchFamily="34" charset="-120"/>
+              </a:rPr>
+              <a:t>Timing: Homework correction, plan, objectives 8 min | Recall, situation, action 10 min | 5 activities 30 min | Board summary (copying) 30 min | Evaluation, remediation 10 min | Homework, next lesson 5 min | Logbook 7 min</a:t>
+            </a:r>
+            <a:endParaRPr lang="en-US" sz="2000" dirty="0"/>
+          </a:p>
+          <a:p>
+            <a:pPr algn="l" marL="342900" indent="-342900">
+              <a:spcAft>
+                <a:spcPts val="800"/>
+              </a:spcAft>
+              <a:buSzPct val="100000"/>
+              <a:buChar char="•"/>
+            </a:pPr>
+            <a:r>
+              <a:rPr lang="en-US" sz="2000" dirty="0">
+                <a:solidFill>
+                  <a:srgbClr val="111111"/>
+                </a:solidFill>
+                <a:latin typeface="Calibri" pitchFamily="34" charset="0"/>
+                <a:ea typeface="Calibri" pitchFamily="34" charset="-122"/>
+                <a:cs typeface="Calibri" pitchFamily="34" charset="-120"/>
+              </a:rPr>
+              <a:t>Without the projector (Activity 1): list flows between Garoua and Douala.</a:t>
+            </a:r>
+            <a:endParaRPr lang="en-US" sz="2000" dirty="0"/>
+          </a:p>
+          <a:p>
+            <a:pPr algn="l" marL="342900" indent="-342900">
+              <a:spcAft>
+                <a:spcPts val="800"/>
+              </a:spcAft>
+              <a:buSzPct val="100000"/>
+              <a:buChar char="•"/>
+            </a:pPr>
+            <a:r>
+              <a:rPr lang="en-US" sz="2000" dirty="0">
+                <a:solidFill>
+                  <a:srgbClr val="111111"/>
+                </a:solidFill>
+                <a:latin typeface="Calibri" pitchFamily="34" charset="0"/>
+                <a:ea typeface="Calibri" pitchFamily="34" charset="-122"/>
+                <a:cs typeface="Calibri" pitchFamily="34" charset="-120"/>
+              </a:rPr>
+              <a:t>Without the projector (Activity 2): draw an arrow from Garoua to Douala.</a:t>
+            </a:r>
+            <a:endParaRPr lang="en-US" sz="2000" dirty="0"/>
+          </a:p>
+          <a:p>
+            <a:pPr algn="l" marL="342900" indent="-342900">
+              <a:spcAft>
+                <a:spcPts val="800"/>
+              </a:spcAft>
+              <a:buSzPct val="100000"/>
+              <a:buChar char="•"/>
+            </a:pPr>
+            <a:r>
+              <a:rPr lang="en-US" sz="2000" dirty="0">
+                <a:solidFill>
+                  <a:srgbClr val="111111"/>
+                </a:solidFill>
+                <a:latin typeface="Calibri" pitchFamily="34" charset="0"/>
+                <a:ea typeface="Calibri" pitchFamily="34" charset="-122"/>
+                <a:cs typeface="Calibri" pitchFamily="34" charset="-120"/>
+              </a:rPr>
+              <a:t>Without the projector (Activity 3): compare transport costs.</a:t>
+            </a:r>
+            <a:endParaRPr lang="en-US" sz="2000" dirty="0"/>
+          </a:p>
+          <a:p>
+            <a:pPr algn="l" marL="342900" indent="-342900">
+              <a:spcAft>
+                <a:spcPts val="800"/>
+              </a:spcAft>
+              <a:buSzPct val="100000"/>
+              <a:buChar char="•"/>
+            </a:pPr>
+            <a:r>
+              <a:rPr lang="en-US" sz="2000" dirty="0">
+                <a:solidFill>
+                  <a:srgbClr val="111111"/>
+                </a:solidFill>
+                <a:latin typeface="Calibri" pitchFamily="34" charset="0"/>
+                <a:ea typeface="Calibri" pitchFamily="34" charset="-122"/>
+                <a:cs typeface="Calibri" pitchFamily="34" charset="-120"/>
+              </a:rPr>
+              <a:t>Without the projector (Activity 4): draw the route Garoua–Ngaoundéré–Yaoundé.</a:t>
+            </a:r>
+            <a:endParaRPr lang="en-US" sz="2000" dirty="0"/>
+          </a:p>
+          <a:p>
+            <a:pPr algn="l" marL="342900" indent="-342900">
+              <a:spcAft>
+                <a:spcPts val="800"/>
+              </a:spcAft>
+              <a:buSzPct val="100000"/>
+              <a:buChar char="•"/>
+            </a:pPr>
+            <a:r>
+              <a:rPr lang="en-US" sz="2000" dirty="0">
+                <a:solidFill>
+                  <a:srgbClr val="111111"/>
+                </a:solidFill>
+                <a:latin typeface="Calibri" pitchFamily="34" charset="0"/>
+                <a:ea typeface="Calibri" pitchFamily="34" charset="-122"/>
+                <a:cs typeface="Calibri" pitchFamily="34" charset="-120"/>
+              </a:rPr>
+              <a:t>Without the projector (Activity 5): ask learners where their friends live.</a:t>
+            </a:r>
+            <a:endParaRPr lang="en-US" sz="2000" dirty="0"/>
+          </a:p>
+        </p:txBody>
+      </p:sp>
+      <p:sp>
+        <p:nvSpPr>
+          <p:cNvPr id="25" name="Slide Number Placeholder 0"/>
+          <p:cNvSpPr>
+            <a:spLocks noGrp="1"/>
+          </p:cNvSpPr>
+          <p:nvPr>
+            <p:ph type="sldNum" sz="quarter" idx="4294967295"/>
+          </p:nvPr>
+        </p:nvSpPr>
+        <p:spPr>
+          <a:xfrm>
+            <a:off x="27432" y="91440"/>
+            <a:ext cx="585216" cy="475488"/>
+          </a:xfrm>
+          <a:prstGeom prst="rect">
+            <a:avLst/>
+          </a:prstGeom>
+          <a:extLst>
+            <a:ext uri="{C572A759-6A51-4108-AA02-DFA0A04FC94B}">
+              <ma14:wrappingTextBoxFlag xmlns:ma14="http://schemas.microsoft.com/office/mac/drawingml/2011/main" val="0"/>
+            </a:ext>
+          </a:extLst>
+        </p:spPr>
+        <p:txBody>
+          <a:bodyPr/>
+          <a:lstStyle>
+            <a:lvl1pPr>
+              <a:defRPr sz="2000">
+                <a:solidFill>
+                  <a:srgbClr val="FFFFFF"/>
+                </a:solidFill>
+                <a:latin typeface="Calibri"/>
+                <a:ea typeface="Calibri"/>
+                <a:cs typeface="Calibri"/>
+              </a:defRPr>
+            </a:lvl1pPr>
+          </a:lstStyle>
+          <a:p>
+            <a:pPr algn="ctr"/>
+            <a:fld id="{F7021451-1387-4CA6-816F-3879F97B5CBC}" type="slidenum">
+              <a:rPr b="1" lang="en-US"/>
               <a:t>56</a:t>
             </a:fld>
             <a:endParaRPr lang="en-US"/>
@@ -22077,7 +22001,7 @@
                 <a:ea typeface="Calibri" pitchFamily="34" charset="-122"/>
                 <a:cs typeface="Calibri" pitchFamily="34" charset="-120"/>
               </a:rPr>
-              <a:t>TEACHER'S NOTE</a:t>
+              <a:t>REFERENCES</a:t>
             </a:r>
             <a:endParaRPr lang="en-US" sz="1400" dirty="0"/>
           </a:p>
@@ -22142,7 +22066,7 @@
                 <a:ea typeface="Times New Roman" pitchFamily="34" charset="-122"/>
                 <a:cs typeface="Times New Roman" pitchFamily="34" charset="-120"/>
               </a:rPr>
-              <a:t>Teacher's Note</a:t>
+              <a:t>References</a:t>
             </a:r>
             <a:endParaRPr lang="en-US" sz="3600" dirty="0"/>
           </a:p>
@@ -22177,7 +22101,7 @@
               <a:buChar char="•"/>
             </a:pPr>
             <a:r>
-              <a:rPr lang="en-US" sz="2000" dirty="0">
+              <a:rPr lang="en-US" sz="1800" dirty="0">
                 <a:solidFill>
                   <a:srgbClr val="111111"/>
                 </a:solidFill>
@@ -22185,9 +22109,9 @@
                 <a:ea typeface="Calibri" pitchFamily="34" charset="-122"/>
                 <a:cs typeface="Calibri" pitchFamily="34" charset="-120"/>
               </a:rPr>
-              <a:t>Timing: Homework correction, plan, objectives 8 min | Recall, situation, action 10 min | 5 activities 30 min | Board summary (copying) 30 min | Evaluation, remediation 10 min | Homework, next lesson 5 min | Logbook 7 min</a:t>
-            </a:r>
-            <a:endParaRPr lang="en-US" sz="2000" dirty="0"/>
+              <a:t>Geography Syllabus for Sixth Forms (Lower and Upper Sixth), MINESEC, 2019 — Module 4 (Population Geography).</a:t>
+            </a:r>
+            <a:endParaRPr lang="en-US" sz="1800" dirty="0"/>
           </a:p>
           <a:p>
             <a:pPr algn="l" marL="342900" indent="-342900">
@@ -22198,7 +22122,7 @@
               <a:buChar char="•"/>
             </a:pPr>
             <a:r>
-              <a:rPr lang="en-US" sz="2000" dirty="0">
+              <a:rPr lang="en-US" sz="1800" dirty="0">
                 <a:solidFill>
                   <a:srgbClr val="111111"/>
                 </a:solidFill>
@@ -22206,9 +22130,9 @@
                 <a:ea typeface="Calibri" pitchFamily="34" charset="-122"/>
                 <a:cs typeface="Calibri" pitchFamily="34" charset="-120"/>
               </a:rPr>
-              <a:t>Without the projector (Activity 1): list flows between Garoua and Douala.</a:t>
-            </a:r>
-            <a:endParaRPr lang="en-US" sz="2000" dirty="0"/>
+              <a:t>Teacher's course notes: Mr KAMDEM E., Population Geography (USA), GBHS Garoua, 2026.</a:t>
+            </a:r>
+            <a:endParaRPr lang="en-US" sz="1800" dirty="0"/>
           </a:p>
           <a:p>
             <a:pPr algn="l" marL="342900" indent="-342900">
@@ -22219,7 +22143,7 @@
               <a:buChar char="•"/>
             </a:pPr>
             <a:r>
-              <a:rPr lang="en-US" sz="2000" dirty="0">
+              <a:rPr lang="en-US" sz="1800" dirty="0">
                 <a:solidFill>
                   <a:srgbClr val="111111"/>
                 </a:solidFill>
@@ -22227,9 +22151,9 @@
                 <a:ea typeface="Calibri" pitchFamily="34" charset="-122"/>
                 <a:cs typeface="Calibri" pitchFamily="34" charset="-120"/>
               </a:rPr>
-              <a:t>Without the projector (Activity 2): draw an arrow from Garoua to Douala.</a:t>
-            </a:r>
-            <a:endParaRPr lang="en-US" sz="2000" dirty="0"/>
+              <a:t>United Nations, World Population Prospects 2024.</a:t>
+            </a:r>
+            <a:endParaRPr lang="en-US" sz="1800" dirty="0"/>
           </a:p>
           <a:p>
             <a:pPr algn="l" marL="342900" indent="-342900">
@@ -22240,7 +22164,7 @@
               <a:buChar char="•"/>
             </a:pPr>
             <a:r>
-              <a:rPr lang="en-US" sz="2000" dirty="0">
+              <a:rPr lang="en-US" sz="1800" dirty="0">
                 <a:solidFill>
                   <a:srgbClr val="111111"/>
                 </a:solidFill>
@@ -22248,9 +22172,9 @@
                 <a:ea typeface="Calibri" pitchFamily="34" charset="-122"/>
                 <a:cs typeface="Calibri" pitchFamily="34" charset="-120"/>
               </a:rPr>
-              <a:t>Without the projector (Activity 3): compare transport costs.</a:t>
-            </a:r>
-            <a:endParaRPr lang="en-US" sz="2000" dirty="0"/>
+              <a:t>Photo, Activity 1: “Scenes from Rwanda” by International Monetary Fund, CC BY-NC-ND 2.0, via Flickr (https://www.flickr.com/photos/38851430@N07/52660758172)</a:t>
+            </a:r>
+            <a:endParaRPr lang="en-US" sz="1800" dirty="0"/>
           </a:p>
           <a:p>
             <a:pPr algn="l" marL="342900" indent="-342900">
@@ -22261,7 +22185,7 @@
               <a:buChar char="•"/>
             </a:pPr>
             <a:r>
-              <a:rPr lang="en-US" sz="2000" dirty="0">
+              <a:rPr lang="en-US" sz="1800" dirty="0">
                 <a:solidFill>
                   <a:srgbClr val="111111"/>
                 </a:solidFill>
@@ -22269,9 +22193,9 @@
                 <a:ea typeface="Calibri" pitchFamily="34" charset="-122"/>
                 <a:cs typeface="Calibri" pitchFamily="34" charset="-120"/>
               </a:rPr>
-              <a:t>Without the projector (Activity 4): draw the route Garoua–Ngaoundéré–Yaoundé.</a:t>
-            </a:r>
-            <a:endParaRPr lang="en-US" sz="2000" dirty="0"/>
+              <a:t>Photo, Activity 2: “Cotton harvest” by CIFOR, CC BY-NC-ND 2.0, via Flickr (https://www.flickr.com/photos/45423546@N07/35706862552)</a:t>
+            </a:r>
+            <a:endParaRPr lang="en-US" sz="1800" dirty="0"/>
           </a:p>
           <a:p>
             <a:pPr algn="l" marL="342900" indent="-342900">
@@ -22282,7 +22206,7 @@
               <a:buChar char="•"/>
             </a:pPr>
             <a:r>
-              <a:rPr lang="en-US" sz="2000" dirty="0">
+              <a:rPr lang="en-US" sz="1800" dirty="0">
                 <a:solidFill>
                   <a:srgbClr val="111111"/>
                 </a:solidFill>
@@ -22290,209 +22214,10 @@
                 <a:ea typeface="Calibri" pitchFamily="34" charset="-122"/>
                 <a:cs typeface="Calibri" pitchFamily="34" charset="-120"/>
               </a:rPr>
-              <a:t>Without the projector (Activity 5): ask learners where their friends live.</a:t>
-            </a:r>
-            <a:endParaRPr lang="en-US" sz="2000" dirty="0"/>
-          </a:p>
-        </p:txBody>
-      </p:sp>
-      <p:sp>
-        <p:nvSpPr>
-          <p:cNvPr id="25" name="Slide Number Placeholder 0"/>
-          <p:cNvSpPr>
-            <a:spLocks noGrp="1"/>
-          </p:cNvSpPr>
-          <p:nvPr>
-            <p:ph type="sldNum" sz="quarter" idx="4294967295"/>
-          </p:nvPr>
-        </p:nvSpPr>
-        <p:spPr>
-          <a:xfrm>
-            <a:off x="27432" y="91440"/>
-            <a:ext cx="585216" cy="475488"/>
-          </a:xfrm>
-          <a:prstGeom prst="rect">
-            <a:avLst/>
-          </a:prstGeom>
-          <a:extLst>
-            <a:ext uri="{C572A759-6A51-4108-AA02-DFA0A04FC94B}">
-              <ma14:wrappingTextBoxFlag xmlns:ma14="http://schemas.microsoft.com/office/mac/drawingml/2011/main" val="0"/>
-            </a:ext>
-          </a:extLst>
-        </p:spPr>
-        <p:txBody>
-          <a:bodyPr/>
-          <a:lstStyle>
-            <a:lvl1pPr>
-              <a:defRPr sz="2000">
-                <a:solidFill>
-                  <a:srgbClr val="FFFFFF"/>
-                </a:solidFill>
-                <a:latin typeface="Calibri"/>
-                <a:ea typeface="Calibri"/>
-                <a:cs typeface="Calibri"/>
-              </a:defRPr>
-            </a:lvl1pPr>
-          </a:lstStyle>
-          <a:p>
-            <a:pPr algn="ctr"/>
-            <a:fld id="{F7021451-1387-4CA6-816F-3879F97B5CBC}" type="slidenum">
-              <a:rPr b="1" lang="en-US"/>
-              <a:t>57</a:t>
-            </a:fld>
-            <a:endParaRPr lang="en-US"/>
-          </a:p>
-        </p:txBody>
-      </p:sp>
-    </p:spTree>
-  </p:cSld>
-  <p:clrMapOvr>
-    <a:masterClrMapping/>
-  </p:clrMapOvr>
-</p:sld>
-</file>
-
-<file path=ppt/slides/slide58.xml><?xml version="1.0" encoding="utf-8"?>
-<p:sld xmlns:a="http://schemas.openxmlformats.org/drawingml/2006/main" xmlns:r="http://schemas.openxmlformats.org/officeDocument/2006/relationships" xmlns:p="http://schemas.openxmlformats.org/presentationml/2006/main">
-  <p:cSld name="Slide 58">
-    <p:spTree>
-      <p:nvGrpSpPr>
-        <p:cNvPr id="1" name=""/>
-        <p:cNvGrpSpPr/>
-        <p:nvPr/>
-      </p:nvGrpSpPr>
-      <p:grpSpPr>
-        <a:xfrm>
-          <a:off x="0" y="0"/>
-          <a:ext cx="0" cy="0"/>
-          <a:chOff x="0" y="0"/>
-          <a:chExt cx="0" cy="0"/>
-        </a:xfrm>
-      </p:grpSpPr>
-      <p:sp>
-        <p:nvSpPr>
-          <p:cNvPr id="2" name="Text 0"/>
-          <p:cNvSpPr/>
-          <p:nvPr/>
-        </p:nvSpPr>
-        <p:spPr>
-          <a:xfrm>
-            <a:off x="457200" y="713232"/>
-            <a:ext cx="11368735" cy="274320"/>
-          </a:xfrm>
-          <a:prstGeom prst="rect">
-            <a:avLst/>
-          </a:prstGeom>
-          <a:noFill/>
-          <a:ln/>
-        </p:spPr>
-        <p:txBody>
-          <a:bodyPr wrap="square" lIns="0" tIns="0" rIns="0" bIns="0" rtlCol="0" anchor="ctr"/>
-          <a:lstStyle/>
-          <a:p>
-            <a:pPr algn="r" indent="0" marL="0">
-              <a:buNone/>
-            </a:pPr>
-            <a:r>
-              <a:rPr lang="en-US" sz="1400" b="1" dirty="0">
-                <a:solidFill>
-                  <a:srgbClr val="1C3F6E"/>
-                </a:solidFill>
-                <a:latin typeface="Calibri" pitchFamily="34" charset="0"/>
-                <a:ea typeface="Calibri" pitchFamily="34" charset="-122"/>
-                <a:cs typeface="Calibri" pitchFamily="34" charset="-120"/>
-              </a:rPr>
-              <a:t>REFERENCES</a:t>
-            </a:r>
-            <a:endParaRPr lang="en-US" sz="1400" dirty="0"/>
-          </a:p>
-        </p:txBody>
-      </p:sp>
-      <p:pic>
-        <p:nvPicPr>
-          <p:cNvPr id="3" name="Image 0" descr="/home/claude/f4/img/minesec_sheet.png">    </p:cNvPr>
-          <p:cNvPicPr>
-            <a:picLocks noChangeAspect="1"/>
-          </p:cNvPicPr>
-          <p:nvPr/>
-        </p:nvPicPr>
-        <p:blipFill>
-          <a:blip r:embed="rId1"/>
-          <a:stretch>
-            <a:fillRect/>
-          </a:stretch>
-        </p:blipFill>
-        <p:spPr>
-          <a:xfrm>
-            <a:off x="0" y="658368"/>
-            <a:ext cx="3840480" cy="5833872"/>
-          </a:xfrm>
-          <a:prstGeom prst="rect">
-            <a:avLst/>
-          </a:prstGeom>
-        </p:spPr>
-      </p:pic>
-      <p:sp>
-        <p:nvSpPr>
-          <p:cNvPr id="4" name="Text 1"/>
-          <p:cNvSpPr/>
-          <p:nvPr/>
-        </p:nvSpPr>
-        <p:spPr>
-          <a:xfrm>
-            <a:off x="4069080" y="1005840"/>
-            <a:ext cx="7802575" cy="731520"/>
-          </a:xfrm>
-          <a:prstGeom prst="rect">
-            <a:avLst/>
-          </a:prstGeom>
-          <a:noFill/>
-          <a:ln/>
-        </p:spPr>
-        <p:txBody>
-          <a:bodyPr wrap="square" lIns="0" tIns="0" rIns="0" bIns="0" rtlCol="0" anchor="ctr">
-            <a:normAutofit/>
-          </a:bodyPr>
-          <a:lstStyle/>
-          <a:p>
-            <a:pPr algn="ctr" indent="0" marL="0">
-              <a:buNone/>
-            </a:pPr>
-            <a:r>
-              <a:rPr lang="en-US" sz="3600" b="1" dirty="0">
-                <a:solidFill>
-                  <a:srgbClr val="990011"/>
-                </a:solidFill>
-                <a:latin typeface="Times New Roman" pitchFamily="34" charset="0"/>
-                <a:ea typeface="Times New Roman" pitchFamily="34" charset="-122"/>
-                <a:cs typeface="Times New Roman" pitchFamily="34" charset="-120"/>
-              </a:rPr>
-              <a:t>References</a:t>
-            </a:r>
-            <a:endParaRPr lang="en-US" sz="3600" dirty="0"/>
-          </a:p>
-        </p:txBody>
-      </p:sp>
-      <p:sp>
-        <p:nvSpPr>
-          <p:cNvPr id="5" name="Text 2"/>
-          <p:cNvSpPr/>
-          <p:nvPr/>
-        </p:nvSpPr>
-        <p:spPr>
-          <a:xfrm>
-            <a:off x="4069080" y="1783080"/>
-            <a:ext cx="7802575" cy="4663440"/>
-          </a:xfrm>
-          <a:prstGeom prst="rect">
-            <a:avLst/>
-          </a:prstGeom>
-          <a:noFill/>
-          <a:ln/>
-        </p:spPr>
-        <p:txBody>
-          <a:bodyPr wrap="square" lIns="0" tIns="0" rIns="0" bIns="0" rtlCol="0" anchor="t"/>
-          <a:lstStyle/>
+              <a:t>Photo, Activity 3: “Traveling by truck” by World Bank Photo Collection, CC BY-NC-ND 2.0, via Flickr (https://www.flickr.com/photos/10816734@N03/2628517227)</a:t>
+            </a:r>
+            <a:endParaRPr lang="en-US" sz="1800" dirty="0"/>
+          </a:p>
           <a:p>
             <a:pPr algn="l" marL="342900" indent="-342900">
               <a:spcAft>
@@ -22510,132 +22235,6 @@
                 <a:ea typeface="Calibri" pitchFamily="34" charset="-122"/>
                 <a:cs typeface="Calibri" pitchFamily="34" charset="-120"/>
               </a:rPr>
-              <a:t>Geography Syllabus for Sixth Forms (Lower and Upper Sixth), MINESEC, 2019 — Module 4 (Population Geography).</a:t>
-            </a:r>
-            <a:endParaRPr lang="en-US" sz="1800" dirty="0"/>
-          </a:p>
-          <a:p>
-            <a:pPr algn="l" marL="342900" indent="-342900">
-              <a:spcAft>
-                <a:spcPts val="800"/>
-              </a:spcAft>
-              <a:buSzPct val="100000"/>
-              <a:buChar char="•"/>
-            </a:pPr>
-            <a:r>
-              <a:rPr lang="en-US" sz="1800" dirty="0">
-                <a:solidFill>
-                  <a:srgbClr val="111111"/>
-                </a:solidFill>
-                <a:latin typeface="Calibri" pitchFamily="34" charset="0"/>
-                <a:ea typeface="Calibri" pitchFamily="34" charset="-122"/>
-                <a:cs typeface="Calibri" pitchFamily="34" charset="-120"/>
-              </a:rPr>
-              <a:t>Teacher's course notes: Mr KAMDEM E., Population Geography (USA), GBHS Garoua, 2026.</a:t>
-            </a:r>
-            <a:endParaRPr lang="en-US" sz="1800" dirty="0"/>
-          </a:p>
-          <a:p>
-            <a:pPr algn="l" marL="342900" indent="-342900">
-              <a:spcAft>
-                <a:spcPts val="800"/>
-              </a:spcAft>
-              <a:buSzPct val="100000"/>
-              <a:buChar char="•"/>
-            </a:pPr>
-            <a:r>
-              <a:rPr lang="en-US" sz="1800" dirty="0">
-                <a:solidFill>
-                  <a:srgbClr val="111111"/>
-                </a:solidFill>
-                <a:latin typeface="Calibri" pitchFamily="34" charset="0"/>
-                <a:ea typeface="Calibri" pitchFamily="34" charset="-122"/>
-                <a:cs typeface="Calibri" pitchFamily="34" charset="-120"/>
-              </a:rPr>
-              <a:t>United Nations, World Population Prospects 2024.</a:t>
-            </a:r>
-            <a:endParaRPr lang="en-US" sz="1800" dirty="0"/>
-          </a:p>
-          <a:p>
-            <a:pPr algn="l" marL="342900" indent="-342900">
-              <a:spcAft>
-                <a:spcPts val="800"/>
-              </a:spcAft>
-              <a:buSzPct val="100000"/>
-              <a:buChar char="•"/>
-            </a:pPr>
-            <a:r>
-              <a:rPr lang="en-US" sz="1800" dirty="0">
-                <a:solidFill>
-                  <a:srgbClr val="111111"/>
-                </a:solidFill>
-                <a:latin typeface="Calibri" pitchFamily="34" charset="0"/>
-                <a:ea typeface="Calibri" pitchFamily="34" charset="-122"/>
-                <a:cs typeface="Calibri" pitchFamily="34" charset="-120"/>
-              </a:rPr>
-              <a:t>Photo, Activity 1: “Scenes from Rwanda” by International Monetary Fund, CC BY-NC-ND 2.0, via Flickr (https://www.flickr.com/photos/38851430@N07/52660758172)</a:t>
-            </a:r>
-            <a:endParaRPr lang="en-US" sz="1800" dirty="0"/>
-          </a:p>
-          <a:p>
-            <a:pPr algn="l" marL="342900" indent="-342900">
-              <a:spcAft>
-                <a:spcPts val="800"/>
-              </a:spcAft>
-              <a:buSzPct val="100000"/>
-              <a:buChar char="•"/>
-            </a:pPr>
-            <a:r>
-              <a:rPr lang="en-US" sz="1800" dirty="0">
-                <a:solidFill>
-                  <a:srgbClr val="111111"/>
-                </a:solidFill>
-                <a:latin typeface="Calibri" pitchFamily="34" charset="0"/>
-                <a:ea typeface="Calibri" pitchFamily="34" charset="-122"/>
-                <a:cs typeface="Calibri" pitchFamily="34" charset="-120"/>
-              </a:rPr>
-              <a:t>Photo, Activity 2: “Cotton harvest” by CIFOR, CC BY-NC-ND 2.0, via Flickr (https://www.flickr.com/photos/45423546@N07/35706862552)</a:t>
-            </a:r>
-            <a:endParaRPr lang="en-US" sz="1800" dirty="0"/>
-          </a:p>
-          <a:p>
-            <a:pPr algn="l" marL="342900" indent="-342900">
-              <a:spcAft>
-                <a:spcPts val="800"/>
-              </a:spcAft>
-              <a:buSzPct val="100000"/>
-              <a:buChar char="•"/>
-            </a:pPr>
-            <a:r>
-              <a:rPr lang="en-US" sz="1800" dirty="0">
-                <a:solidFill>
-                  <a:srgbClr val="111111"/>
-                </a:solidFill>
-                <a:latin typeface="Calibri" pitchFamily="34" charset="0"/>
-                <a:ea typeface="Calibri" pitchFamily="34" charset="-122"/>
-                <a:cs typeface="Calibri" pitchFamily="34" charset="-120"/>
-              </a:rPr>
-              <a:t>Photo, Activity 3: “Traveling by truck” by World Bank Photo Collection, CC BY-NC-ND 2.0, via Flickr (https://www.flickr.com/photos/10816734@N03/2628517227)</a:t>
-            </a:r>
-            <a:endParaRPr lang="en-US" sz="1800" dirty="0"/>
-          </a:p>
-          <a:p>
-            <a:pPr algn="l" marL="342900" indent="-342900">
-              <a:spcAft>
-                <a:spcPts val="800"/>
-              </a:spcAft>
-              <a:buSzPct val="100000"/>
-              <a:buChar char="•"/>
-            </a:pPr>
-            <a:r>
-              <a:rPr lang="en-US" sz="1800" dirty="0">
-                <a:solidFill>
-                  <a:srgbClr val="111111"/>
-                </a:solidFill>
-                <a:latin typeface="Calibri" pitchFamily="34" charset="0"/>
-                <a:ea typeface="Calibri" pitchFamily="34" charset="-122"/>
-                <a:cs typeface="Calibri" pitchFamily="34" charset="-120"/>
-              </a:rPr>
               <a:t>Diagrams and animations: drawn for this lesson (Geography Department).</a:t>
             </a:r>
             <a:endParaRPr lang="en-US" sz="1800" dirty="0"/>
@@ -22684,7 +22283,7 @@
             <a:pPr algn="ctr"/>
             <a:fld id="{F7021451-1387-4CA6-816F-3879F97B5CBC}" type="slidenum">
               <a:rPr b="1" lang="en-US"/>
-              <a:t>58</a:t>
+              <a:t>57</a:t>
             </a:fld>
             <a:endParaRPr lang="en-US"/>
           </a:p>

--- a/lecons/USA/Population Geography/18_USA_POP_L14_Spatial_Interaction.pptx
+++ b/lecons/USA/Population Geography/18_USA_POP_L14_Spatial_Interaction.pptx
@@ -62,9 +62,10 @@
     <p:sldId id="310" r:id="rId56"/>
     <p:sldId id="311" r:id="rId57"/>
     <p:sldId id="312" r:id="rId58"/>
+    <p:sldId id="313" r:id="rId59"/>
   </p:sldIdLst>
   <p:notesMasterIdLst>
-    <p:notesMasterId r:id="rId59"/>
+    <p:notesMasterId r:id="rId60"/>
   </p:notesMasterIdLst>
   <p:sldSz cx="12192000" cy="6858000"/>
   <p:notesSz cx="6858000" cy="12192000"/>
@@ -3638,7 +3639,7 @@
           <a:p>
             <a:r>
               <a:rPr lang="en-US" dirty="0"/>
-              <a:t>We continue with Meaning of Spatial Interaction. Copy the point on Networks and measurement: write the key term first, then its explanation.</a:t>
+              <a:t>We continue with Meaning of Spatial Interaction. Copy the point on Networks: write the key term first, then its explanation.</a:t>
             </a:r>
             <a:endParaRPr lang="en-US" dirty="0"/>
           </a:p>
@@ -3726,7 +3727,7 @@
           <a:p>
             <a:r>
               <a:rPr lang="en-US" dirty="0"/>
-              <a:t>Let us copy Factors of Spatial Interaction. According to Edward Ullman, spatial interaction depends on the following factors. Copy the point on Complementarity on the left, then draw the diagram on the right: ullman's factors. Give it a title and label it clearly.</a:t>
+              <a:t>We continue with Meaning of Spatial Interaction. Copy the point on Measurement: write the key term first, then its explanation.</a:t>
             </a:r>
             <a:endParaRPr lang="en-US" dirty="0"/>
           </a:p>
@@ -3814,7 +3815,7 @@
           <a:p>
             <a:r>
               <a:rPr lang="en-US" dirty="0"/>
-              <a:t>Copy the point on Transferability on the left, then draw the diagram on the right: the cotton harvest. Give it a title and label it clearly.</a:t>
+              <a:t>Let us copy Factors of Spatial Interaction. According to Edward Ullman, spatial interaction depends on the following factors. Copy the point on Complementarity on the left, then draw the diagram on the right: ullman's factors. Give it a title and label it clearly.</a:t>
             </a:r>
             <a:endParaRPr lang="en-US" dirty="0"/>
           </a:p>
@@ -3902,7 +3903,7 @@
           <a:p>
             <a:r>
               <a:rPr lang="en-US" dirty="0"/>
-              <a:t>We continue with Factors of Spatial Interaction. Copy the point on Intervening opportunity: write the key term first, then its explanation.</a:t>
+              <a:t>Copy the point on Transferability on the left, then draw the diagram on the right: the cotton harvest. Give it a title and label it clearly.</a:t>
             </a:r>
             <a:endParaRPr lang="en-US" dirty="0"/>
           </a:p>
@@ -3990,7 +3991,7 @@
           <a:p>
             <a:r>
               <a:rPr lang="en-US" dirty="0"/>
-              <a:t>Copy the point on Distance decay on the left, then draw the diagram on the right: distance decay. Give it a title and label it clearly.</a:t>
+              <a:t>We continue with Factors of Spatial Interaction. Copy the point on Intervening opportunity: write the key term first, then its explanation.</a:t>
             </a:r>
             <a:endParaRPr lang="en-US" dirty="0"/>
           </a:p>
@@ -4078,7 +4079,7 @@
           <a:p>
             <a:r>
               <a:rPr lang="en-US" dirty="0"/>
-              <a:t>Now let us check what you have understood. Question 1: Explain complementarity with an example. Answer in your exercise book.</a:t>
+              <a:t>Copy the point on Distance decay on the left, then draw the diagram on the right: distance decay. Give it a title and label it clearly.</a:t>
             </a:r>
             <a:endParaRPr lang="en-US" dirty="0"/>
           </a:p>
@@ -4166,7 +4167,7 @@
           <a:p>
             <a:r>
               <a:rPr lang="en-US" dirty="0"/>
-              <a:t>The expected answer is: one place has a surplus that another needs, e.g. cotton from the North sent to textile factories in Douala. If you got it right, well done.</a:t>
+              <a:t>Now let us check what you have understood. Question 1: Explain complementarity with an example. Answer in your exercise book.</a:t>
             </a:r>
             <a:endParaRPr lang="en-US" dirty="0"/>
           </a:p>
@@ -4254,7 +4255,7 @@
           <a:p>
             <a:r>
               <a:rPr lang="en-US" dirty="0"/>
-              <a:t>Now let us check what you have understood. Question 2: What is distance decay? Answer in your exercise book.</a:t>
+              <a:t>The expected answer is: one place has a surplus that another needs, e.g. cotton from the North sent to textile factories in Douala. If you got it right, well done.</a:t>
             </a:r>
             <a:endParaRPr lang="en-US" dirty="0"/>
           </a:p>
@@ -4342,7 +4343,7 @@
           <a:p>
             <a:r>
               <a:rPr lang="en-US" dirty="0"/>
-              <a:t>The expected answer is: the decrease of interaction between places as distance increases. If you got it right, well done.</a:t>
+              <a:t>Now let us check what you have understood. Question 2: What is distance decay? Answer in your exercise book.</a:t>
             </a:r>
             <a:endParaRPr lang="en-US" dirty="0"/>
           </a:p>
@@ -4518,7 +4519,7 @@
           <a:p>
             <a:r>
               <a:rPr lang="en-US" dirty="0"/>
-              <a:t>For those who need more practice, fill in the blanks in your exercise book. The answers are: number 1, interaction; number 2, transferability; number 3, decay.</a:t>
+              <a:t>The expected answer is: the decrease of interaction between places as distance increases. If you got it right, well done.</a:t>
             </a:r>
             <a:endParaRPr lang="en-US" dirty="0"/>
           </a:p>
@@ -4606,7 +4607,7 @@
           <a:p>
             <a:r>
               <a:rPr lang="en-US" dirty="0"/>
-              <a:t>For your homework: Define an internally displaced person. We shall correct it at the beginning of our next lesson.</a:t>
+              <a:t>For those who need more practice, fill in the blanks in your exercise book. The answers are: number 1, interaction; number 2, transferability; number 3, decay.</a:t>
             </a:r>
             <a:endParaRPr lang="en-US" dirty="0"/>
           </a:p>
@@ -4694,7 +4695,7 @@
           <a:p>
             <a:r>
               <a:rPr lang="en-US" dirty="0"/>
-              <a:t>Our next lesson will be on Lesson 15: Types of Migration. Thank you for your attention, and see you next time.</a:t>
+              <a:t>For your homework: Define an internally displaced person. We shall correct it at the beginning of our next lesson.</a:t>
             </a:r>
             <a:endParaRPr lang="en-US" dirty="0"/>
           </a:p>
@@ -4782,7 +4783,7 @@
           <a:p>
             <a:r>
               <a:rPr lang="en-US" dirty="0"/>
-              <a:t>Let us play the bilingual game. I say a word in English, and you give me the French word. Then we do the reverse.</a:t>
+              <a:t>Our next lesson will be on Lesson 15: Types of Migration. Thank you for your attention, and see you next time.</a:t>
             </a:r>
             <a:endParaRPr lang="en-US" dirty="0"/>
           </a:p>
@@ -4870,7 +4871,7 @@
           <a:p>
             <a:r>
               <a:rPr lang="en-US" dirty="0"/>
-              <a:t>I record this information in the official logbook of the class after the lesson.</a:t>
+              <a:t>Let us play the bilingual game. I say a word in English, and you give me the French word. Then we do the reverse.</a:t>
             </a:r>
             <a:endParaRPr lang="en-US" dirty="0"/>
           </a:p>
@@ -4958,7 +4959,7 @@
           <a:p>
             <a:r>
               <a:rPr lang="en-US" dirty="0"/>
-              <a:t>I complete the second page of the logbook: the matter taught, the evaluation, the homework and the attendance.</a:t>
+              <a:t>I record this information in the official logbook of the class after the lesson.</a:t>
             </a:r>
             <a:endParaRPr lang="en-US" dirty="0"/>
           </a:p>
@@ -5046,7 +5047,7 @@
           <a:p>
             <a:r>
               <a:rPr lang="en-US" dirty="0"/>
-              <a:t>This slide is for me, the teacher: it gives the timing of the lesson and what to do if the projector is not available.</a:t>
+              <a:t>I complete the second page of the logbook: the matter taught, the evaluation, the homework and the attendance.</a:t>
             </a:r>
             <a:endParaRPr lang="en-US" dirty="0"/>
           </a:p>
@@ -5134,7 +5135,7 @@
           <a:p>
             <a:r>
               <a:rPr lang="en-US" dirty="0"/>
-              <a:t>These are the references and picture credits used to prepare this lesson.</a:t>
+              <a:t>This slide is for me, the teacher: it gives the timing of the lesson and what to do if the projector is not available.</a:t>
             </a:r>
             <a:endParaRPr lang="en-US" dirty="0"/>
           </a:p>
@@ -5158,6 +5159,94 @@
             <a:fld id="{F7021451-1387-4CA6-816F-3879F97B5CBC}" type="slidenum">
               <a:rPr lang="en-US"/>
               <a:t>57</a:t>
+            </a:fld>
+            <a:endParaRPr lang="en-US"/>
+          </a:p>
+        </p:txBody>
+      </p:sp>
+    </p:spTree>
+    <p:extLst>
+      <p:ext uri="{BB962C8B-B14F-4D97-AF65-F5344CB8AC3E}">
+        <p14:creationId xmlns:p14="http://schemas.microsoft.com/office/powerpoint/2010/main" val="1024086991"/>
+      </p:ext>
+    </p:extLst>
+  </p:cSld>
+  <p:clrMapOvr>
+    <a:masterClrMapping/>
+  </p:clrMapOvr>
+</p:notes>
+</file>
+
+<file path=ppt/notesSlides/notesSlide58.xml><?xml version="1.0" encoding="utf-8"?>
+<p:notes xmlns:a="http://schemas.openxmlformats.org/drawingml/2006/main" xmlns:r="http://schemas.openxmlformats.org/officeDocument/2006/relationships" xmlns:p="http://schemas.openxmlformats.org/presentationml/2006/main">
+  <p:cSld>
+    <p:spTree>
+      <p:nvGrpSpPr>
+        <p:cNvPr id="1" name=""/>
+        <p:cNvGrpSpPr/>
+        <p:nvPr/>
+      </p:nvGrpSpPr>
+      <p:grpSpPr>
+        <a:xfrm>
+          <a:off x="0" y="0"/>
+          <a:ext cx="0" cy="0"/>
+          <a:chOff x="0" y="0"/>
+          <a:chExt cx="0" cy="0"/>
+        </a:xfrm>
+      </p:grpSpPr>
+      <p:sp>
+        <p:nvSpPr>
+          <p:cNvPr id="2" name="Slide Image Placeholder 1"/>
+          <p:cNvSpPr>
+            <a:spLocks noGrp="1" noRot="1" noChangeAspect="1"/>
+          </p:cNvSpPr>
+          <p:nvPr>
+            <p:ph type="sldImg"/>
+          </p:nvPr>
+        </p:nvSpPr>
+        <p:spPr/>
+      </p:sp>
+      <p:sp>
+        <p:nvSpPr>
+          <p:cNvPr id="3" name="Notes Placeholder 2"/>
+          <p:cNvSpPr>
+            <a:spLocks noGrp="1"/>
+          </p:cNvSpPr>
+          <p:nvPr>
+            <p:ph type="body" idx="1"/>
+          </p:nvPr>
+        </p:nvSpPr>
+        <p:spPr/>
+        <p:txBody>
+          <a:bodyPr/>
+          <a:lstStyle/>
+          <a:p>
+            <a:r>
+              <a:rPr lang="en-US" dirty="0"/>
+              <a:t>These are the references and picture credits used to prepare this lesson.</a:t>
+            </a:r>
+            <a:endParaRPr lang="en-US" dirty="0"/>
+          </a:p>
+        </p:txBody>
+      </p:sp>
+      <p:sp>
+        <p:nvSpPr>
+          <p:cNvPr id="4" name="Slide Number Placeholder 3"/>
+          <p:cNvSpPr>
+            <a:spLocks noGrp="1"/>
+          </p:cNvSpPr>
+          <p:nvPr>
+            <p:ph type="sldNum" sz="quarter" idx="10"/>
+          </p:nvPr>
+        </p:nvSpPr>
+        <p:spPr/>
+        <p:txBody>
+          <a:bodyPr/>
+          <a:lstStyle/>
+          <a:p>
+            <a:fld id="{F7021451-1387-4CA6-816F-3879F97B5CBC}" type="slidenum">
+              <a:rPr lang="en-US"/>
+              <a:t>58</a:t>
             </a:fld>
             <a:endParaRPr lang="en-US"/>
           </a:p>
@@ -15793,7 +15882,7 @@
         <p:spPr>
           <a:xfrm>
             <a:off x="0" y="658368"/>
-            <a:ext cx="3840480" cy="5833872"/>
+            <a:ext cx="5120640" cy="5833872"/>
           </a:xfrm>
           <a:prstGeom prst="rect">
             <a:avLst/>
@@ -15808,8 +15897,8 @@
         </p:nvSpPr>
         <p:spPr>
           <a:xfrm>
-            <a:off x="4069080" y="1005840"/>
-            <a:ext cx="7802575" cy="731520"/>
+            <a:off x="5349240" y="1005840"/>
+            <a:ext cx="6522415" cy="731520"/>
           </a:xfrm>
           <a:prstGeom prst="rect">
             <a:avLst/>
@@ -15849,8 +15938,8 @@
         </p:nvSpPr>
         <p:spPr>
           <a:xfrm>
-            <a:off x="4069080" y="1783080"/>
-            <a:ext cx="7802575" cy="4663440"/>
+            <a:off x="5349240" y="1783080"/>
+            <a:ext cx="6522415" cy="4663440"/>
           </a:xfrm>
           <a:prstGeom prst="rect">
             <a:avLst/>
@@ -15877,7 +15966,7 @@
                 <a:ea typeface="Times New Roman" pitchFamily="34" charset="-122"/>
                 <a:cs typeface="Times New Roman" pitchFamily="34" charset="-120"/>
               </a:rPr>
-              <a:t>Networks and measurement: </a:t>
+              <a:t>Networks: </a:t>
             </a:r>
             <a:pPr algn="l" indent="0" marL="0">
               <a:spcAft>
@@ -15894,7 +15983,7 @@
                 <a:ea typeface="Times New Roman" pitchFamily="34" charset="-122"/>
                 <a:cs typeface="Times New Roman" pitchFamily="34" charset="-120"/>
               </a:rPr>
-              <a:t>Flows use networks such as roads, railways, telephone, television and the internet. The volume of interaction can be estimated with the gravity formula: I = Pi × Pj ÷ d².</a:t>
+              <a:t>Flows use networks such as roads, railways, telephone lines, television and the internet. The denser the network, the stronger the interaction between places.</a:t>
             </a:r>
             <a:endParaRPr lang="en-US" sz="4000" dirty="0"/>
           </a:p>
@@ -16012,129 +16101,9 @@
           </a:p>
         </p:txBody>
       </p:sp>
-      <p:sp>
-        <p:nvSpPr>
-          <p:cNvPr id="3" name="Text 1"/>
-          <p:cNvSpPr/>
-          <p:nvPr/>
-        </p:nvSpPr>
-        <p:spPr>
-          <a:xfrm>
-            <a:off x="365760" y="1005840"/>
-            <a:ext cx="11460175" cy="731520"/>
-          </a:xfrm>
-          <a:prstGeom prst="rect">
-            <a:avLst/>
-          </a:prstGeom>
-          <a:noFill/>
-          <a:ln/>
-        </p:spPr>
-        <p:txBody>
-          <a:bodyPr wrap="square" lIns="0" tIns="0" rIns="0" bIns="0" rtlCol="0" anchor="ctr">
-            <a:normAutofit/>
-          </a:bodyPr>
-          <a:lstStyle/>
-          <a:p>
-            <a:pPr algn="ctr" indent="0" marL="0">
-              <a:buNone/>
-            </a:pPr>
-            <a:r>
-              <a:rPr lang="en-US" sz="3600" b="1" dirty="0">
-                <a:solidFill>
-                  <a:srgbClr val="990011"/>
-                </a:solidFill>
-                <a:latin typeface="Times New Roman" pitchFamily="34" charset="0"/>
-                <a:ea typeface="Times New Roman" pitchFamily="34" charset="-122"/>
-                <a:cs typeface="Times New Roman" pitchFamily="34" charset="-120"/>
-              </a:rPr>
-              <a:t>2. Factors of Spatial Interaction</a:t>
-            </a:r>
-            <a:endParaRPr lang="en-US" sz="3600" dirty="0"/>
-          </a:p>
-        </p:txBody>
-      </p:sp>
-      <p:sp>
-        <p:nvSpPr>
-          <p:cNvPr id="4" name="Text 2"/>
-          <p:cNvSpPr/>
-          <p:nvPr/>
-        </p:nvSpPr>
-        <p:spPr>
-          <a:xfrm>
-            <a:off x="365760" y="1783080"/>
-            <a:ext cx="6035040" cy="4617720"/>
-          </a:xfrm>
-          <a:prstGeom prst="rect">
-            <a:avLst/>
-          </a:prstGeom>
-          <a:noFill/>
-          <a:ln/>
-        </p:spPr>
-        <p:txBody>
-          <a:bodyPr wrap="square" lIns="0" tIns="0" rIns="0" bIns="0" rtlCol="0" anchor="t"/>
-          <a:lstStyle/>
-          <a:p>
-            <a:pPr algn="l" indent="0" marL="0">
-              <a:spcAft>
-                <a:spcPts val="800"/>
-              </a:spcAft>
-              <a:buNone/>
-            </a:pPr>
-            <a:r>
-              <a:rPr lang="en-US" sz="3200" i="1" dirty="0">
-                <a:solidFill>
-                  <a:srgbClr val="111111"/>
-                </a:solidFill>
-                <a:latin typeface="Times New Roman" pitchFamily="34" charset="0"/>
-                <a:ea typeface="Times New Roman" pitchFamily="34" charset="-122"/>
-                <a:cs typeface="Times New Roman" pitchFamily="34" charset="-120"/>
-              </a:rPr>
-              <a:t>According to Edward Ullman, spatial interaction depends on the following factors:</a:t>
-            </a:r>
-            <a:endParaRPr lang="en-US" sz="3200" dirty="0"/>
-          </a:p>
-          <a:p>
-            <a:pPr algn="l" indent="0" marL="0">
-              <a:spcAft>
-                <a:spcPts val="800"/>
-              </a:spcAft>
-              <a:buNone/>
-            </a:pPr>
-            <a:r>
-              <a:rPr lang="en-US" sz="3200" b="1" dirty="0">
-                <a:solidFill>
-                  <a:srgbClr val="111111"/>
-                </a:solidFill>
-                <a:latin typeface="Times New Roman" pitchFamily="34" charset="0"/>
-                <a:ea typeface="Times New Roman" pitchFamily="34" charset="-122"/>
-                <a:cs typeface="Times New Roman" pitchFamily="34" charset="-120"/>
-              </a:rPr>
-              <a:t>Complementarity: </a:t>
-            </a:r>
-            <a:pPr algn="l" indent="0" marL="0">
-              <a:spcAft>
-                <a:spcPts val="800"/>
-              </a:spcAft>
-              <a:buNone/>
-            </a:pPr>
-            <a:r>
-              <a:rPr lang="en-US" sz="3200" dirty="0">
-                <a:solidFill>
-                  <a:srgbClr val="111111"/>
-                </a:solidFill>
-                <a:latin typeface="Times New Roman" pitchFamily="34" charset="0"/>
-                <a:ea typeface="Times New Roman" pitchFamily="34" charset="-122"/>
-                <a:cs typeface="Times New Roman" pitchFamily="34" charset="-120"/>
-              </a:rPr>
-              <a:t>Interaction occurs when one area has a surplus of something that another area needs. For example, the cotton of the North supplies the textile factories of the South.</a:t>
-            </a:r>
-            <a:endParaRPr lang="en-US" sz="3200" dirty="0"/>
-          </a:p>
-        </p:txBody>
-      </p:sp>
       <p:pic>
         <p:nvPicPr>
-          <p:cNvPr id="5" name="Image 0" descr="/home/claude/f4/img/v2/pop2_ullman4.png">    </p:cNvPr>
+          <p:cNvPr id="3" name="Image 0" descr="/home/claude/f4/img/minesec_sheet.png">    </p:cNvPr>
           <p:cNvPicPr>
             <a:picLocks noChangeAspect="1"/>
           </p:cNvPicPr>
@@ -16148,8 +16117,8 @@
         </p:blipFill>
         <p:spPr>
           <a:xfrm>
-            <a:off x="6537960" y="2849678"/>
-            <a:ext cx="5470855" cy="2137053"/>
+            <a:off x="0" y="658368"/>
+            <a:ext cx="5120640" cy="5833872"/>
           </a:xfrm>
           <a:prstGeom prst="rect">
             <a:avLst/>
@@ -16158,14 +16127,14 @@
       </p:pic>
       <p:sp>
         <p:nvSpPr>
-          <p:cNvPr id="6" name="Text 3"/>
+          <p:cNvPr id="4" name="Text 1"/>
           <p:cNvSpPr/>
           <p:nvPr/>
         </p:nvSpPr>
         <p:spPr>
           <a:xfrm>
-            <a:off x="6537960" y="6089904"/>
-            <a:ext cx="5470855" cy="347472"/>
+            <a:off x="5349240" y="1005840"/>
+            <a:ext cx="6522415" cy="731520"/>
           </a:xfrm>
           <a:prstGeom prst="rect">
             <a:avLst/>
@@ -16174,24 +16143,85 @@
           <a:ln/>
         </p:spPr>
         <p:txBody>
-          <a:bodyPr wrap="square" lIns="0" tIns="0" rIns="0" bIns="0" rtlCol="0" anchor="ctr"/>
+          <a:bodyPr wrap="square" lIns="0" tIns="0" rIns="0" bIns="0" rtlCol="0" anchor="ctr">
+            <a:normAutofit/>
+          </a:bodyPr>
           <a:lstStyle/>
           <a:p>
             <a:pPr algn="ctr" indent="0" marL="0">
               <a:buNone/>
             </a:pPr>
             <a:r>
-              <a:rPr lang="en-US" sz="1600" i="1" dirty="0">
-                <a:solidFill>
-                  <a:srgbClr val="555555"/>
+              <a:rPr lang="en-US" sz="3600" b="1" dirty="0">
+                <a:solidFill>
+                  <a:srgbClr val="990011"/>
                 </a:solidFill>
                 <a:latin typeface="Times New Roman" pitchFamily="34" charset="0"/>
                 <a:ea typeface="Times New Roman" pitchFamily="34" charset="-122"/>
                 <a:cs typeface="Times New Roman" pitchFamily="34" charset="-120"/>
               </a:rPr>
-              <a:t>Illustration: Ullman's factors</a:t>
-            </a:r>
-            <a:endParaRPr lang="en-US" sz="1600" dirty="0"/>
+              <a:t>1. Meaning of Spatial Interaction</a:t>
+            </a:r>
+            <a:endParaRPr lang="en-US" sz="3600" dirty="0"/>
+          </a:p>
+        </p:txBody>
+      </p:sp>
+      <p:sp>
+        <p:nvSpPr>
+          <p:cNvPr id="5" name="Text 2"/>
+          <p:cNvSpPr/>
+          <p:nvPr/>
+        </p:nvSpPr>
+        <p:spPr>
+          <a:xfrm>
+            <a:off x="5349240" y="1783080"/>
+            <a:ext cx="6522415" cy="4663440"/>
+          </a:xfrm>
+          <a:prstGeom prst="rect">
+            <a:avLst/>
+          </a:prstGeom>
+          <a:noFill/>
+          <a:ln/>
+        </p:spPr>
+        <p:txBody>
+          <a:bodyPr wrap="square" lIns="0" tIns="0" rIns="0" bIns="0" rtlCol="0" anchor="t"/>
+          <a:lstStyle/>
+          <a:p>
+            <a:pPr algn="l" indent="0" marL="0">
+              <a:spcAft>
+                <a:spcPts val="800"/>
+              </a:spcAft>
+              <a:buNone/>
+            </a:pPr>
+            <a:r>
+              <a:rPr lang="en-US" sz="4000" b="1" dirty="0">
+                <a:solidFill>
+                  <a:srgbClr val="111111"/>
+                </a:solidFill>
+                <a:latin typeface="Times New Roman" pitchFamily="34" charset="0"/>
+                <a:ea typeface="Times New Roman" pitchFamily="34" charset="-122"/>
+                <a:cs typeface="Times New Roman" pitchFamily="34" charset="-120"/>
+              </a:rPr>
+              <a:t>Measurement: </a:t>
+            </a:r>
+            <a:pPr algn="l" indent="0" marL="0">
+              <a:spcAft>
+                <a:spcPts val="800"/>
+              </a:spcAft>
+              <a:buNone/>
+            </a:pPr>
+            <a:r>
+              <a:rPr lang="en-US" sz="4000" dirty="0">
+                <a:solidFill>
+                  <a:srgbClr val="111111"/>
+                </a:solidFill>
+                <a:latin typeface="Times New Roman" pitchFamily="34" charset="0"/>
+                <a:ea typeface="Times New Roman" pitchFamily="34" charset="-122"/>
+                <a:cs typeface="Times New Roman" pitchFamily="34" charset="-120"/>
+              </a:rPr>
+              <a:t>The volume of interaction between two places can be estimated with the gravity formula: I = Pi × Pj ÷ d². Large towns close to each other interact the most.</a:t>
+            </a:r>
+            <a:endParaRPr lang="en-US" sz="4000" dirty="0"/>
           </a:p>
         </p:txBody>
       </p:sp>
@@ -16376,7 +16406,7 @@
               <a:buNone/>
             </a:pPr>
             <a:r>
-              <a:rPr lang="en-US" sz="3600" b="1" dirty="0">
+              <a:rPr lang="en-US" sz="3200" i="1" dirty="0">
                 <a:solidFill>
                   <a:srgbClr val="111111"/>
                 </a:solidFill>
@@ -16384,8 +16414,11 @@
                 <a:ea typeface="Times New Roman" pitchFamily="34" charset="-122"/>
                 <a:cs typeface="Times New Roman" pitchFamily="34" charset="-120"/>
               </a:rPr>
-              <a:t>Transferability: </a:t>
-            </a:r>
+              <a:t>According to Edward Ullman, spatial interaction depends on the following factors:</a:t>
+            </a:r>
+            <a:endParaRPr lang="en-US" sz="3200" dirty="0"/>
+          </a:p>
+          <a:p>
             <a:pPr algn="l" indent="0" marL="0">
               <a:spcAft>
                 <a:spcPts val="800"/>
@@ -16393,7 +16426,7 @@
               <a:buNone/>
             </a:pPr>
             <a:r>
-              <a:rPr lang="en-US" sz="3600" dirty="0">
+              <a:rPr lang="en-US" sz="3200" b="1" dirty="0">
                 <a:solidFill>
                   <a:srgbClr val="111111"/>
                 </a:solidFill>
@@ -16401,15 +16434,32 @@
                 <a:ea typeface="Times New Roman" pitchFamily="34" charset="-122"/>
                 <a:cs typeface="Times New Roman" pitchFamily="34" charset="-120"/>
               </a:rPr>
-              <a:t>Goods and people must be cheap and easy to move between the two places. Good roads allow onions to go from Garoua to Maroua by lorry, while a bad road reduces the trade.</a:t>
-            </a:r>
-            <a:endParaRPr lang="en-US" sz="3600" dirty="0"/>
+              <a:t>Complementarity: </a:t>
+            </a:r>
+            <a:pPr algn="l" indent="0" marL="0">
+              <a:spcAft>
+                <a:spcPts val="800"/>
+              </a:spcAft>
+              <a:buNone/>
+            </a:pPr>
+            <a:r>
+              <a:rPr lang="en-US" sz="3200" dirty="0">
+                <a:solidFill>
+                  <a:srgbClr val="111111"/>
+                </a:solidFill>
+                <a:latin typeface="Times New Roman" pitchFamily="34" charset="0"/>
+                <a:ea typeface="Times New Roman" pitchFamily="34" charset="-122"/>
+                <a:cs typeface="Times New Roman" pitchFamily="34" charset="-120"/>
+              </a:rPr>
+              <a:t>Interaction occurs when one area has a surplus of something that another area needs. For example, the cotton of the North supplies the textile factories of the South.</a:t>
+            </a:r>
+            <a:endParaRPr lang="en-US" sz="3200" dirty="0"/>
           </a:p>
         </p:txBody>
       </p:sp>
       <p:pic>
         <p:nvPicPr>
-          <p:cNvPr id="5" name="Image 0" descr="/home/claude/f4/img/v2/f2t_cotton_harvest.jpg">    </p:cNvPr>
+          <p:cNvPr id="5" name="Image 0" descr="/home/claude/f4/img/v2/pop2_ullman4.png">    </p:cNvPr>
           <p:cNvPicPr>
             <a:picLocks noChangeAspect="1"/>
           </p:cNvPicPr>
@@ -16423,8 +16473,8 @@
         </p:blipFill>
         <p:spPr>
           <a:xfrm>
-            <a:off x="6537960" y="2399413"/>
-            <a:ext cx="5470855" cy="3037581"/>
+            <a:off x="6537960" y="2849678"/>
+            <a:ext cx="5470855" cy="2137053"/>
           </a:xfrm>
           <a:prstGeom prst="rect">
             <a:avLst/>
@@ -16464,7 +16514,7 @@
                 <a:ea typeface="Times New Roman" pitchFamily="34" charset="-122"/>
                 <a:cs typeface="Times New Roman" pitchFamily="34" charset="-120"/>
               </a:rPr>
-              <a:t>Illustration: the cotton harvest</a:t>
+              <a:t>Illustration: Ullman's factors</a:t>
             </a:r>
             <a:endParaRPr lang="en-US" sz="1600" dirty="0"/>
           </a:p>
@@ -16582,9 +16632,109 @@
           </a:p>
         </p:txBody>
       </p:sp>
+      <p:sp>
+        <p:nvSpPr>
+          <p:cNvPr id="3" name="Text 1"/>
+          <p:cNvSpPr/>
+          <p:nvPr/>
+        </p:nvSpPr>
+        <p:spPr>
+          <a:xfrm>
+            <a:off x="365760" y="1005840"/>
+            <a:ext cx="11460175" cy="731520"/>
+          </a:xfrm>
+          <a:prstGeom prst="rect">
+            <a:avLst/>
+          </a:prstGeom>
+          <a:noFill/>
+          <a:ln/>
+        </p:spPr>
+        <p:txBody>
+          <a:bodyPr wrap="square" lIns="0" tIns="0" rIns="0" bIns="0" rtlCol="0" anchor="ctr">
+            <a:normAutofit/>
+          </a:bodyPr>
+          <a:lstStyle/>
+          <a:p>
+            <a:pPr algn="ctr" indent="0" marL="0">
+              <a:buNone/>
+            </a:pPr>
+            <a:r>
+              <a:rPr lang="en-US" sz="3600" b="1" dirty="0">
+                <a:solidFill>
+                  <a:srgbClr val="990011"/>
+                </a:solidFill>
+                <a:latin typeface="Times New Roman" pitchFamily="34" charset="0"/>
+                <a:ea typeface="Times New Roman" pitchFamily="34" charset="-122"/>
+                <a:cs typeface="Times New Roman" pitchFamily="34" charset="-120"/>
+              </a:rPr>
+              <a:t>2. Factors of Spatial Interaction</a:t>
+            </a:r>
+            <a:endParaRPr lang="en-US" sz="3600" dirty="0"/>
+          </a:p>
+        </p:txBody>
+      </p:sp>
+      <p:sp>
+        <p:nvSpPr>
+          <p:cNvPr id="4" name="Text 2"/>
+          <p:cNvSpPr/>
+          <p:nvPr/>
+        </p:nvSpPr>
+        <p:spPr>
+          <a:xfrm>
+            <a:off x="365760" y="1783080"/>
+            <a:ext cx="6035040" cy="4617720"/>
+          </a:xfrm>
+          <a:prstGeom prst="rect">
+            <a:avLst/>
+          </a:prstGeom>
+          <a:noFill/>
+          <a:ln/>
+        </p:spPr>
+        <p:txBody>
+          <a:bodyPr wrap="square" lIns="0" tIns="0" rIns="0" bIns="0" rtlCol="0" anchor="t"/>
+          <a:lstStyle/>
+          <a:p>
+            <a:pPr algn="l" indent="0" marL="0">
+              <a:spcAft>
+                <a:spcPts val="800"/>
+              </a:spcAft>
+              <a:buNone/>
+            </a:pPr>
+            <a:r>
+              <a:rPr lang="en-US" sz="3600" b="1" dirty="0">
+                <a:solidFill>
+                  <a:srgbClr val="111111"/>
+                </a:solidFill>
+                <a:latin typeface="Times New Roman" pitchFamily="34" charset="0"/>
+                <a:ea typeface="Times New Roman" pitchFamily="34" charset="-122"/>
+                <a:cs typeface="Times New Roman" pitchFamily="34" charset="-120"/>
+              </a:rPr>
+              <a:t>Transferability: </a:t>
+            </a:r>
+            <a:pPr algn="l" indent="0" marL="0">
+              <a:spcAft>
+                <a:spcPts val="800"/>
+              </a:spcAft>
+              <a:buNone/>
+            </a:pPr>
+            <a:r>
+              <a:rPr lang="en-US" sz="3600" dirty="0">
+                <a:solidFill>
+                  <a:srgbClr val="111111"/>
+                </a:solidFill>
+                <a:latin typeface="Times New Roman" pitchFamily="34" charset="0"/>
+                <a:ea typeface="Times New Roman" pitchFamily="34" charset="-122"/>
+                <a:cs typeface="Times New Roman" pitchFamily="34" charset="-120"/>
+              </a:rPr>
+              <a:t>Goods and people must be cheap and easy to move between the two places. Good roads allow onions to go from Garoua to Maroua by lorry, while a bad road reduces the trade.</a:t>
+            </a:r>
+            <a:endParaRPr lang="en-US" sz="3600" dirty="0"/>
+          </a:p>
+        </p:txBody>
+      </p:sp>
       <p:pic>
         <p:nvPicPr>
-          <p:cNvPr id="3" name="Image 0" descr="/home/claude/f4/img/minesec_sheet.png">    </p:cNvPr>
+          <p:cNvPr id="5" name="Image 0" descr="/home/claude/f4/img/v2/f2t_cotton_harvest.jpg">    </p:cNvPr>
           <p:cNvPicPr>
             <a:picLocks noChangeAspect="1"/>
           </p:cNvPicPr>
@@ -16598,8 +16748,8 @@
         </p:blipFill>
         <p:spPr>
           <a:xfrm>
-            <a:off x="0" y="658368"/>
-            <a:ext cx="5120640" cy="5833872"/>
+            <a:off x="6537960" y="2399413"/>
+            <a:ext cx="5470855" cy="3037581"/>
           </a:xfrm>
           <a:prstGeom prst="rect">
             <a:avLst/>
@@ -16608,14 +16758,14 @@
       </p:pic>
       <p:sp>
         <p:nvSpPr>
-          <p:cNvPr id="4" name="Text 1"/>
+          <p:cNvPr id="6" name="Text 3"/>
           <p:cNvSpPr/>
           <p:nvPr/>
         </p:nvSpPr>
         <p:spPr>
           <a:xfrm>
-            <a:off x="5349240" y="1005840"/>
-            <a:ext cx="6522415" cy="731520"/>
+            <a:off x="6537960" y="6089904"/>
+            <a:ext cx="5470855" cy="347472"/>
           </a:xfrm>
           <a:prstGeom prst="rect">
             <a:avLst/>
@@ -16624,85 +16774,24 @@
           <a:ln/>
         </p:spPr>
         <p:txBody>
-          <a:bodyPr wrap="square" lIns="0" tIns="0" rIns="0" bIns="0" rtlCol="0" anchor="ctr">
-            <a:normAutofit/>
-          </a:bodyPr>
+          <a:bodyPr wrap="square" lIns="0" tIns="0" rIns="0" bIns="0" rtlCol="0" anchor="ctr"/>
           <a:lstStyle/>
           <a:p>
             <a:pPr algn="ctr" indent="0" marL="0">
               <a:buNone/>
             </a:pPr>
             <a:r>
-              <a:rPr lang="en-US" sz="3600" b="1" dirty="0">
-                <a:solidFill>
-                  <a:srgbClr val="990011"/>
+              <a:rPr lang="en-US" sz="1600" i="1" dirty="0">
+                <a:solidFill>
+                  <a:srgbClr val="555555"/>
                 </a:solidFill>
                 <a:latin typeface="Times New Roman" pitchFamily="34" charset="0"/>
                 <a:ea typeface="Times New Roman" pitchFamily="34" charset="-122"/>
                 <a:cs typeface="Times New Roman" pitchFamily="34" charset="-120"/>
               </a:rPr>
-              <a:t>2. Factors of Spatial Interaction</a:t>
-            </a:r>
-            <a:endParaRPr lang="en-US" sz="3600" dirty="0"/>
-          </a:p>
-        </p:txBody>
-      </p:sp>
-      <p:sp>
-        <p:nvSpPr>
-          <p:cNvPr id="5" name="Text 2"/>
-          <p:cNvSpPr/>
-          <p:nvPr/>
-        </p:nvSpPr>
-        <p:spPr>
-          <a:xfrm>
-            <a:off x="5349240" y="1783080"/>
-            <a:ext cx="6522415" cy="4663440"/>
-          </a:xfrm>
-          <a:prstGeom prst="rect">
-            <a:avLst/>
-          </a:prstGeom>
-          <a:noFill/>
-          <a:ln/>
-        </p:spPr>
-        <p:txBody>
-          <a:bodyPr wrap="square" lIns="0" tIns="0" rIns="0" bIns="0" rtlCol="0" anchor="t"/>
-          <a:lstStyle/>
-          <a:p>
-            <a:pPr algn="l" indent="0" marL="0">
-              <a:spcAft>
-                <a:spcPts val="800"/>
-              </a:spcAft>
-              <a:buNone/>
-            </a:pPr>
-            <a:r>
-              <a:rPr lang="en-US" sz="4000" b="1" dirty="0">
-                <a:solidFill>
-                  <a:srgbClr val="111111"/>
-                </a:solidFill>
-                <a:latin typeface="Times New Roman" pitchFamily="34" charset="0"/>
-                <a:ea typeface="Times New Roman" pitchFamily="34" charset="-122"/>
-                <a:cs typeface="Times New Roman" pitchFamily="34" charset="-120"/>
-              </a:rPr>
-              <a:t>Intervening opportunity: </a:t>
-            </a:r>
-            <a:pPr algn="l" indent="0" marL="0">
-              <a:spcAft>
-                <a:spcPts val="800"/>
-              </a:spcAft>
-              <a:buNone/>
-            </a:pPr>
-            <a:r>
-              <a:rPr lang="en-US" sz="4000" dirty="0">
-                <a:solidFill>
-                  <a:srgbClr val="111111"/>
-                </a:solidFill>
-                <a:latin typeface="Times New Roman" pitchFamily="34" charset="0"/>
-                <a:ea typeface="Times New Roman" pitchFamily="34" charset="-122"/>
-                <a:cs typeface="Times New Roman" pitchFamily="34" charset="-120"/>
-              </a:rPr>
-              <a:t>A nearer or cheaper place can replace a distant one. For example, the university of Ngaoundéré or of Garoua keeps northern students from travelling to Yaoundé.</a:t>
-            </a:r>
-            <a:endParaRPr lang="en-US" sz="4000" dirty="0"/>
+              <a:t>Illustration: the cotton harvest</a:t>
+            </a:r>
+            <a:endParaRPr lang="en-US" sz="1600" dirty="0"/>
           </a:p>
         </p:txBody>
       </p:sp>
@@ -16818,109 +16907,9 @@
           </a:p>
         </p:txBody>
       </p:sp>
-      <p:sp>
-        <p:nvSpPr>
-          <p:cNvPr id="3" name="Text 1"/>
-          <p:cNvSpPr/>
-          <p:nvPr/>
-        </p:nvSpPr>
-        <p:spPr>
-          <a:xfrm>
-            <a:off x="365760" y="1005840"/>
-            <a:ext cx="11460175" cy="731520"/>
-          </a:xfrm>
-          <a:prstGeom prst="rect">
-            <a:avLst/>
-          </a:prstGeom>
-          <a:noFill/>
-          <a:ln/>
-        </p:spPr>
-        <p:txBody>
-          <a:bodyPr wrap="square" lIns="0" tIns="0" rIns="0" bIns="0" rtlCol="0" anchor="ctr">
-            <a:normAutofit/>
-          </a:bodyPr>
-          <a:lstStyle/>
-          <a:p>
-            <a:pPr algn="ctr" indent="0" marL="0">
-              <a:buNone/>
-            </a:pPr>
-            <a:r>
-              <a:rPr lang="en-US" sz="3600" b="1" dirty="0">
-                <a:solidFill>
-                  <a:srgbClr val="990011"/>
-                </a:solidFill>
-                <a:latin typeface="Times New Roman" pitchFamily="34" charset="0"/>
-                <a:ea typeface="Times New Roman" pitchFamily="34" charset="-122"/>
-                <a:cs typeface="Times New Roman" pitchFamily="34" charset="-120"/>
-              </a:rPr>
-              <a:t>2. Factors of Spatial Interaction</a:t>
-            </a:r>
-            <a:endParaRPr lang="en-US" sz="3600" dirty="0"/>
-          </a:p>
-        </p:txBody>
-      </p:sp>
-      <p:sp>
-        <p:nvSpPr>
-          <p:cNvPr id="4" name="Text 2"/>
-          <p:cNvSpPr/>
-          <p:nvPr/>
-        </p:nvSpPr>
-        <p:spPr>
-          <a:xfrm>
-            <a:off x="365760" y="1783080"/>
-            <a:ext cx="6035040" cy="4617720"/>
-          </a:xfrm>
-          <a:prstGeom prst="rect">
-            <a:avLst/>
-          </a:prstGeom>
-          <a:noFill/>
-          <a:ln/>
-        </p:spPr>
-        <p:txBody>
-          <a:bodyPr wrap="square" lIns="0" tIns="0" rIns="0" bIns="0" rtlCol="0" anchor="t"/>
-          <a:lstStyle/>
-          <a:p>
-            <a:pPr algn="l" indent="0" marL="0">
-              <a:spcAft>
-                <a:spcPts val="800"/>
-              </a:spcAft>
-              <a:buNone/>
-            </a:pPr>
-            <a:r>
-              <a:rPr lang="en-US" sz="3600" b="1" dirty="0">
-                <a:solidFill>
-                  <a:srgbClr val="111111"/>
-                </a:solidFill>
-                <a:latin typeface="Times New Roman" pitchFamily="34" charset="0"/>
-                <a:ea typeface="Times New Roman" pitchFamily="34" charset="-122"/>
-                <a:cs typeface="Times New Roman" pitchFamily="34" charset="-120"/>
-              </a:rPr>
-              <a:t>Distance decay: </a:t>
-            </a:r>
-            <a:pPr algn="l" indent="0" marL="0">
-              <a:spcAft>
-                <a:spcPts val="800"/>
-              </a:spcAft>
-              <a:buNone/>
-            </a:pPr>
-            <a:r>
-              <a:rPr lang="en-US" sz="3600" dirty="0">
-                <a:solidFill>
-                  <a:srgbClr val="111111"/>
-                </a:solidFill>
-                <a:latin typeface="Times New Roman" pitchFamily="34" charset="0"/>
-                <a:ea typeface="Times New Roman" pitchFamily="34" charset="-122"/>
-                <a:cs typeface="Times New Roman" pitchFamily="34" charset="-120"/>
-              </a:rPr>
-              <a:t>Interaction falls as distance rises, because travel costs more time and money. People therefore visit friends in their own quarter more often than friends in Kribi.</a:t>
-            </a:r>
-            <a:endParaRPr lang="en-US" sz="3600" dirty="0"/>
-          </a:p>
-        </p:txBody>
-      </p:sp>
       <p:pic>
         <p:nvPicPr>
-          <p:cNvPr id="5" name="Image 0" descr="/home/claude/f4/img/v2/zipf_big.png">    </p:cNvPr>
+          <p:cNvPr id="3" name="Image 0" descr="/home/claude/f4/img/minesec_sheet.png">    </p:cNvPr>
           <p:cNvPicPr>
             <a:picLocks noChangeAspect="1"/>
           </p:cNvPicPr>
@@ -16934,8 +16923,8 @@
         </p:blipFill>
         <p:spPr>
           <a:xfrm>
-            <a:off x="6537960" y="2721454"/>
-            <a:ext cx="5470855" cy="2393499"/>
+            <a:off x="0" y="658368"/>
+            <a:ext cx="5120640" cy="5833872"/>
           </a:xfrm>
           <a:prstGeom prst="rect">
             <a:avLst/>
@@ -16944,14 +16933,14 @@
       </p:pic>
       <p:sp>
         <p:nvSpPr>
-          <p:cNvPr id="6" name="Text 3"/>
+          <p:cNvPr id="4" name="Text 1"/>
           <p:cNvSpPr/>
           <p:nvPr/>
         </p:nvSpPr>
         <p:spPr>
           <a:xfrm>
-            <a:off x="6537960" y="6089904"/>
-            <a:ext cx="5470855" cy="347472"/>
+            <a:off x="5349240" y="1005840"/>
+            <a:ext cx="6522415" cy="731520"/>
           </a:xfrm>
           <a:prstGeom prst="rect">
             <a:avLst/>
@@ -16960,24 +16949,85 @@
           <a:ln/>
         </p:spPr>
         <p:txBody>
-          <a:bodyPr wrap="square" lIns="0" tIns="0" rIns="0" bIns="0" rtlCol="0" anchor="ctr"/>
+          <a:bodyPr wrap="square" lIns="0" tIns="0" rIns="0" bIns="0" rtlCol="0" anchor="ctr">
+            <a:normAutofit/>
+          </a:bodyPr>
           <a:lstStyle/>
           <a:p>
             <a:pPr algn="ctr" indent="0" marL="0">
               <a:buNone/>
             </a:pPr>
             <a:r>
-              <a:rPr lang="en-US" sz="1600" i="1" dirty="0">
-                <a:solidFill>
-                  <a:srgbClr val="555555"/>
+              <a:rPr lang="en-US" sz="3600" b="1" dirty="0">
+                <a:solidFill>
+                  <a:srgbClr val="990011"/>
                 </a:solidFill>
                 <a:latin typeface="Times New Roman" pitchFamily="34" charset="0"/>
                 <a:ea typeface="Times New Roman" pitchFamily="34" charset="-122"/>
                 <a:cs typeface="Times New Roman" pitchFamily="34" charset="-120"/>
               </a:rPr>
-              <a:t>Illustration: distance decay</a:t>
-            </a:r>
-            <a:endParaRPr lang="en-US" sz="1600" dirty="0"/>
+              <a:t>2. Factors of Spatial Interaction</a:t>
+            </a:r>
+            <a:endParaRPr lang="en-US" sz="3600" dirty="0"/>
+          </a:p>
+        </p:txBody>
+      </p:sp>
+      <p:sp>
+        <p:nvSpPr>
+          <p:cNvPr id="5" name="Text 2"/>
+          <p:cNvSpPr/>
+          <p:nvPr/>
+        </p:nvSpPr>
+        <p:spPr>
+          <a:xfrm>
+            <a:off x="5349240" y="1783080"/>
+            <a:ext cx="6522415" cy="4663440"/>
+          </a:xfrm>
+          <a:prstGeom prst="rect">
+            <a:avLst/>
+          </a:prstGeom>
+          <a:noFill/>
+          <a:ln/>
+        </p:spPr>
+        <p:txBody>
+          <a:bodyPr wrap="square" lIns="0" tIns="0" rIns="0" bIns="0" rtlCol="0" anchor="t"/>
+          <a:lstStyle/>
+          <a:p>
+            <a:pPr algn="l" indent="0" marL="0">
+              <a:spcAft>
+                <a:spcPts val="800"/>
+              </a:spcAft>
+              <a:buNone/>
+            </a:pPr>
+            <a:r>
+              <a:rPr lang="en-US" sz="4000" b="1" dirty="0">
+                <a:solidFill>
+                  <a:srgbClr val="111111"/>
+                </a:solidFill>
+                <a:latin typeface="Times New Roman" pitchFamily="34" charset="0"/>
+                <a:ea typeface="Times New Roman" pitchFamily="34" charset="-122"/>
+                <a:cs typeface="Times New Roman" pitchFamily="34" charset="-120"/>
+              </a:rPr>
+              <a:t>Intervening opportunity: </a:t>
+            </a:r>
+            <a:pPr algn="l" indent="0" marL="0">
+              <a:spcAft>
+                <a:spcPts val="800"/>
+              </a:spcAft>
+              <a:buNone/>
+            </a:pPr>
+            <a:r>
+              <a:rPr lang="en-US" sz="4000" dirty="0">
+                <a:solidFill>
+                  <a:srgbClr val="111111"/>
+                </a:solidFill>
+                <a:latin typeface="Times New Roman" pitchFamily="34" charset="0"/>
+                <a:ea typeface="Times New Roman" pitchFamily="34" charset="-122"/>
+                <a:cs typeface="Times New Roman" pitchFamily="34" charset="-120"/>
+              </a:rPr>
+              <a:t>A nearer or cheaper place can replace a distant one. For example, the university of Ngaoundéré or of Garoua keeps northern students from travelling to Yaoundé.</a:t>
+            </a:r>
+            <a:endParaRPr lang="en-US" sz="4000" dirty="0"/>
           </a:p>
         </p:txBody>
       </p:sp>
@@ -17087,15 +17137,115 @@
                 <a:ea typeface="Calibri" pitchFamily="34" charset="-122"/>
                 <a:cs typeface="Calibri" pitchFamily="34" charset="-120"/>
               </a:rPr>
-              <a:t>FORMATIVE EVALUATION</a:t>
+              <a:t>BOARD SUMMARY</a:t>
             </a:r>
             <a:endParaRPr lang="en-US" sz="1400" dirty="0"/>
+          </a:p>
+        </p:txBody>
+      </p:sp>
+      <p:sp>
+        <p:nvSpPr>
+          <p:cNvPr id="3" name="Text 1"/>
+          <p:cNvSpPr/>
+          <p:nvPr/>
+        </p:nvSpPr>
+        <p:spPr>
+          <a:xfrm>
+            <a:off x="365760" y="1005840"/>
+            <a:ext cx="11460175" cy="731520"/>
+          </a:xfrm>
+          <a:prstGeom prst="rect">
+            <a:avLst/>
+          </a:prstGeom>
+          <a:noFill/>
+          <a:ln/>
+        </p:spPr>
+        <p:txBody>
+          <a:bodyPr wrap="square" lIns="0" tIns="0" rIns="0" bIns="0" rtlCol="0" anchor="ctr">
+            <a:normAutofit/>
+          </a:bodyPr>
+          <a:lstStyle/>
+          <a:p>
+            <a:pPr algn="ctr" indent="0" marL="0">
+              <a:buNone/>
+            </a:pPr>
+            <a:r>
+              <a:rPr lang="en-US" sz="3600" b="1" dirty="0">
+                <a:solidFill>
+                  <a:srgbClr val="990011"/>
+                </a:solidFill>
+                <a:latin typeface="Times New Roman" pitchFamily="34" charset="0"/>
+                <a:ea typeface="Times New Roman" pitchFamily="34" charset="-122"/>
+                <a:cs typeface="Times New Roman" pitchFamily="34" charset="-120"/>
+              </a:rPr>
+              <a:t>2. Factors of Spatial Interaction</a:t>
+            </a:r>
+            <a:endParaRPr lang="en-US" sz="3600" dirty="0"/>
+          </a:p>
+        </p:txBody>
+      </p:sp>
+      <p:sp>
+        <p:nvSpPr>
+          <p:cNvPr id="4" name="Text 2"/>
+          <p:cNvSpPr/>
+          <p:nvPr/>
+        </p:nvSpPr>
+        <p:spPr>
+          <a:xfrm>
+            <a:off x="365760" y="1783080"/>
+            <a:ext cx="6035040" cy="4617720"/>
+          </a:xfrm>
+          <a:prstGeom prst="rect">
+            <a:avLst/>
+          </a:prstGeom>
+          <a:noFill/>
+          <a:ln/>
+        </p:spPr>
+        <p:txBody>
+          <a:bodyPr wrap="square" lIns="0" tIns="0" rIns="0" bIns="0" rtlCol="0" anchor="t"/>
+          <a:lstStyle/>
+          <a:p>
+            <a:pPr algn="l" indent="0" marL="0">
+              <a:spcAft>
+                <a:spcPts val="800"/>
+              </a:spcAft>
+              <a:buNone/>
+            </a:pPr>
+            <a:r>
+              <a:rPr lang="en-US" sz="3600" b="1" dirty="0">
+                <a:solidFill>
+                  <a:srgbClr val="111111"/>
+                </a:solidFill>
+                <a:latin typeface="Times New Roman" pitchFamily="34" charset="0"/>
+                <a:ea typeface="Times New Roman" pitchFamily="34" charset="-122"/>
+                <a:cs typeface="Times New Roman" pitchFamily="34" charset="-120"/>
+              </a:rPr>
+              <a:t>Distance decay: </a:t>
+            </a:r>
+            <a:pPr algn="l" indent="0" marL="0">
+              <a:spcAft>
+                <a:spcPts val="800"/>
+              </a:spcAft>
+              <a:buNone/>
+            </a:pPr>
+            <a:r>
+              <a:rPr lang="en-US" sz="3600" dirty="0">
+                <a:solidFill>
+                  <a:srgbClr val="111111"/>
+                </a:solidFill>
+                <a:latin typeface="Times New Roman" pitchFamily="34" charset="0"/>
+                <a:ea typeface="Times New Roman" pitchFamily="34" charset="-122"/>
+                <a:cs typeface="Times New Roman" pitchFamily="34" charset="-120"/>
+              </a:rPr>
+              <a:t>Interaction falls as distance rises, because travel costs more time and money. People therefore visit friends in their own quarter more often than friends in Kribi.</a:t>
+            </a:r>
+            <a:endParaRPr lang="en-US" sz="3600" dirty="0"/>
           </a:p>
         </p:txBody>
       </p:sp>
       <p:pic>
         <p:nvPicPr>
-          <p:cNvPr id="3" name="Image 0" descr="/home/claude/f4/img/minesec_sheet.png">    </p:cNvPr>
+          <p:cNvPr id="5" name="Image 0" descr="/home/claude/f4/img/v2/zipf_big.png">    </p:cNvPr>
           <p:cNvPicPr>
             <a:picLocks noChangeAspect="1"/>
           </p:cNvPicPr>
@@ -17109,8 +17259,8 @@
         </p:blipFill>
         <p:spPr>
           <a:xfrm>
-            <a:off x="0" y="658368"/>
-            <a:ext cx="5120640" cy="5833872"/>
+            <a:off x="6537960" y="2721454"/>
+            <a:ext cx="5470855" cy="2393499"/>
           </a:xfrm>
           <a:prstGeom prst="rect">
             <a:avLst/>
@@ -17119,14 +17269,14 @@
       </p:pic>
       <p:sp>
         <p:nvSpPr>
-          <p:cNvPr id="4" name="Text 1"/>
+          <p:cNvPr id="6" name="Text 3"/>
           <p:cNvSpPr/>
           <p:nvPr/>
         </p:nvSpPr>
         <p:spPr>
           <a:xfrm>
-            <a:off x="5349240" y="1005840"/>
-            <a:ext cx="6522415" cy="731520"/>
+            <a:off x="6537960" y="6089904"/>
+            <a:ext cx="5470855" cy="347472"/>
           </a:xfrm>
           <a:prstGeom prst="rect">
             <a:avLst/>
@@ -17135,68 +17285,24 @@
           <a:ln/>
         </p:spPr>
         <p:txBody>
-          <a:bodyPr wrap="square" lIns="0" tIns="0" rIns="0" bIns="0" rtlCol="0" anchor="ctr">
-            <a:normAutofit/>
-          </a:bodyPr>
+          <a:bodyPr wrap="square" lIns="0" tIns="0" rIns="0" bIns="0" rtlCol="0" anchor="ctr"/>
           <a:lstStyle/>
           <a:p>
             <a:pPr algn="ctr" indent="0" marL="0">
               <a:buNone/>
             </a:pPr>
             <a:r>
-              <a:rPr lang="en-US" sz="3600" b="1" dirty="0">
-                <a:solidFill>
-                  <a:srgbClr val="990011"/>
+              <a:rPr lang="en-US" sz="1600" i="1" dirty="0">
+                <a:solidFill>
+                  <a:srgbClr val="555555"/>
                 </a:solidFill>
                 <a:latin typeface="Times New Roman" pitchFamily="34" charset="0"/>
                 <a:ea typeface="Times New Roman" pitchFamily="34" charset="-122"/>
                 <a:cs typeface="Times New Roman" pitchFamily="34" charset="-120"/>
               </a:rPr>
-              <a:t>Evaluation 1</a:t>
-            </a:r>
-            <a:endParaRPr lang="en-US" sz="3600" dirty="0"/>
-          </a:p>
-        </p:txBody>
-      </p:sp>
-      <p:sp>
-        <p:nvSpPr>
-          <p:cNvPr id="5" name="Text 2"/>
-          <p:cNvSpPr/>
-          <p:nvPr/>
-        </p:nvSpPr>
-        <p:spPr>
-          <a:xfrm>
-            <a:off x="5349240" y="1783080"/>
-            <a:ext cx="6522415" cy="4663440"/>
-          </a:xfrm>
-          <a:prstGeom prst="rect">
-            <a:avLst/>
-          </a:prstGeom>
-          <a:noFill/>
-          <a:ln/>
-        </p:spPr>
-        <p:txBody>
-          <a:bodyPr wrap="square" lIns="0" tIns="0" rIns="0" bIns="0" rtlCol="0" anchor="t"/>
-          <a:lstStyle/>
-          <a:p>
-            <a:pPr algn="l" indent="0" marL="0">
-              <a:spcAft>
-                <a:spcPts val="800"/>
-              </a:spcAft>
-              <a:buNone/>
-            </a:pPr>
-            <a:r>
-              <a:rPr lang="en-US" sz="4000" dirty="0">
-                <a:solidFill>
-                  <a:srgbClr val="111111"/>
-                </a:solidFill>
-                <a:latin typeface="Times New Roman" pitchFamily="34" charset="0"/>
-                <a:ea typeface="Times New Roman" pitchFamily="34" charset="-122"/>
-                <a:cs typeface="Times New Roman" pitchFamily="34" charset="-120"/>
-              </a:rPr>
-              <a:t>Explain complementarity with an example.</a:t>
-            </a:r>
-            <a:endParaRPr lang="en-US" sz="4000" dirty="0"/>
+              <a:t>Illustration: distance decay</a:t>
+            </a:r>
+            <a:endParaRPr lang="en-US" sz="1600" dirty="0"/>
           </a:p>
         </p:txBody>
       </p:sp>
@@ -17371,7 +17477,7 @@
                 <a:ea typeface="Times New Roman" pitchFamily="34" charset="-122"/>
                 <a:cs typeface="Times New Roman" pitchFamily="34" charset="-120"/>
               </a:rPr>
-              <a:t>Expected Answer</a:t>
+              <a:t>Evaluation 1</a:t>
             </a:r>
             <a:endParaRPr lang="en-US" sz="3600" dirty="0"/>
           </a:p>
@@ -17413,7 +17519,7 @@
                 <a:ea typeface="Times New Roman" pitchFamily="34" charset="-122"/>
                 <a:cs typeface="Times New Roman" pitchFamily="34" charset="-120"/>
               </a:rPr>
-              <a:t>One place has a surplus that another needs, e.g. cotton from the North sent to textile factories in Douala.</a:t>
+              <a:t>Explain complementarity with an example.</a:t>
             </a:r>
             <a:endParaRPr lang="en-US" sz="4000" dirty="0"/>
           </a:p>
@@ -17590,7 +17696,7 @@
                 <a:ea typeface="Times New Roman" pitchFamily="34" charset="-122"/>
                 <a:cs typeface="Times New Roman" pitchFamily="34" charset="-120"/>
               </a:rPr>
-              <a:t>Evaluation 2</a:t>
+              <a:t>Expected Answer</a:t>
             </a:r>
             <a:endParaRPr lang="en-US" sz="3600" dirty="0"/>
           </a:p>
@@ -17632,7 +17738,7 @@
                 <a:ea typeface="Times New Roman" pitchFamily="34" charset="-122"/>
                 <a:cs typeface="Times New Roman" pitchFamily="34" charset="-120"/>
               </a:rPr>
-              <a:t>What is distance decay?</a:t>
+              <a:t>One place has a surplus that another needs, e.g. cotton from the North sent to textile factories in Douala.</a:t>
             </a:r>
             <a:endParaRPr lang="en-US" sz="4000" dirty="0"/>
           </a:p>
@@ -17809,7 +17915,7 @@
                 <a:ea typeface="Times New Roman" pitchFamily="34" charset="-122"/>
                 <a:cs typeface="Times New Roman" pitchFamily="34" charset="-120"/>
               </a:rPr>
-              <a:t>Expected Answer</a:t>
+              <a:t>Evaluation 2</a:t>
             </a:r>
             <a:endParaRPr lang="en-US" sz="3600" dirty="0"/>
           </a:p>
@@ -17851,7 +17957,7 @@
                 <a:ea typeface="Times New Roman" pitchFamily="34" charset="-122"/>
                 <a:cs typeface="Times New Roman" pitchFamily="34" charset="-120"/>
               </a:rPr>
-              <a:t>The decrease of interaction between places as distance increases.</a:t>
+              <a:t>What is distance decay?</a:t>
             </a:r>
             <a:endParaRPr lang="en-US" sz="4000" dirty="0"/>
           </a:p>
@@ -18182,7 +18288,7 @@
                 <a:ea typeface="Calibri" pitchFamily="34" charset="-122"/>
                 <a:cs typeface="Calibri" pitchFamily="34" charset="-120"/>
               </a:rPr>
-              <a:t>REMEDIATION</a:t>
+              <a:t>FORMATIVE EVALUATION</a:t>
             </a:r>
             <a:endParaRPr lang="en-US" sz="1400" dirty="0"/>
           </a:p>
@@ -18205,7 +18311,7 @@
         <p:spPr>
           <a:xfrm>
             <a:off x="0" y="658368"/>
-            <a:ext cx="1463040" cy="5833872"/>
+            <a:ext cx="5120640" cy="5833872"/>
           </a:xfrm>
           <a:prstGeom prst="rect">
             <a:avLst/>
@@ -18220,8 +18326,8 @@
         </p:nvSpPr>
         <p:spPr>
           <a:xfrm>
-            <a:off x="1691640" y="1005840"/>
-            <a:ext cx="10180015" cy="731520"/>
+            <a:off x="5349240" y="1005840"/>
+            <a:ext cx="6522415" cy="731520"/>
           </a:xfrm>
           <a:prstGeom prst="rect">
             <a:avLst/>
@@ -18247,7 +18353,7 @@
                 <a:ea typeface="Times New Roman" pitchFamily="34" charset="-122"/>
                 <a:cs typeface="Times New Roman" pitchFamily="34" charset="-120"/>
               </a:rPr>
-              <a:t>Remediation</a:t>
+              <a:t>Expected Answer</a:t>
             </a:r>
             <a:endParaRPr lang="en-US" sz="3600" dirty="0"/>
           </a:p>
@@ -18261,8 +18367,8 @@
         </p:nvSpPr>
         <p:spPr>
           <a:xfrm>
-            <a:off x="1691640" y="1783080"/>
-            <a:ext cx="10180015" cy="4663440"/>
+            <a:off x="5349240" y="1783080"/>
+            <a:ext cx="6522415" cy="4663440"/>
           </a:xfrm>
           <a:prstGeom prst="rect">
             <a:avLst/>
@@ -18281,7 +18387,7 @@
               <a:buNone/>
             </a:pPr>
             <a:r>
-              <a:rPr lang="en-US" sz="4000" b="1" dirty="0">
+              <a:rPr lang="en-US" sz="4000" dirty="0">
                 <a:solidFill>
                   <a:srgbClr val="111111"/>
                 </a:solidFill>
@@ -18289,73 +18395,7 @@
                 <a:ea typeface="Times New Roman" pitchFamily="34" charset="-122"/>
                 <a:cs typeface="Times New Roman" pitchFamily="34" charset="-120"/>
               </a:rPr>
-              <a:t>Fill in the blanks:</a:t>
-            </a:r>
-            <a:endParaRPr lang="en-US" sz="4000" dirty="0"/>
-          </a:p>
-          <a:p>
-            <a:pPr algn="l" marL="342900" indent="-342900">
-              <a:spcAft>
-                <a:spcPts val="800"/>
-              </a:spcAft>
-              <a:buSzPct val="100000"/>
-              <a:buFont typeface="+mj-lt"/>
-              <a:buAutoNum type="arabicPeriod" startAt="1"/>
-            </a:pPr>
-            <a:r>
-              <a:rPr lang="en-US" sz="4000" dirty="0">
-                <a:solidFill>
-                  <a:srgbClr val="111111"/>
-                </a:solidFill>
-                <a:latin typeface="Times New Roman" pitchFamily="34" charset="0"/>
-                <a:ea typeface="Times New Roman" pitchFamily="34" charset="-122"/>
-                <a:cs typeface="Times New Roman" pitchFamily="34" charset="-120"/>
-              </a:rPr>
-              <a:t>The movement of goods, people and information is spatial ______.</a:t>
-            </a:r>
-            <a:endParaRPr lang="en-US" sz="4000" dirty="0"/>
-          </a:p>
-          <a:p>
-            <a:pPr algn="l" marL="342900" indent="-342900">
-              <a:spcAft>
-                <a:spcPts val="800"/>
-              </a:spcAft>
-              <a:buSzPct val="100000"/>
-              <a:buFont typeface="+mj-lt"/>
-              <a:buAutoNum type="arabicPeriod" startAt="1"/>
-            </a:pPr>
-            <a:r>
-              <a:rPr lang="en-US" sz="4000" dirty="0">
-                <a:solidFill>
-                  <a:srgbClr val="111111"/>
-                </a:solidFill>
-                <a:latin typeface="Times New Roman" pitchFamily="34" charset="0"/>
-                <a:ea typeface="Times New Roman" pitchFamily="34" charset="-122"/>
-                <a:cs typeface="Times New Roman" pitchFamily="34" charset="-120"/>
-              </a:rPr>
-              <a:t>The ease of moving goods is called ______.</a:t>
-            </a:r>
-            <a:endParaRPr lang="en-US" sz="4000" dirty="0"/>
-          </a:p>
-          <a:p>
-            <a:pPr algn="l" marL="342900" indent="-342900">
-              <a:spcAft>
-                <a:spcPts val="800"/>
-              </a:spcAft>
-              <a:buSzPct val="100000"/>
-              <a:buFont typeface="+mj-lt"/>
-              <a:buAutoNum type="arabicPeriod" startAt="1"/>
-            </a:pPr>
-            <a:r>
-              <a:rPr lang="en-US" sz="4000" dirty="0">
-                <a:solidFill>
-                  <a:srgbClr val="111111"/>
-                </a:solidFill>
-                <a:latin typeface="Times New Roman" pitchFamily="34" charset="0"/>
-                <a:ea typeface="Times New Roman" pitchFamily="34" charset="-122"/>
-                <a:cs typeface="Times New Roman" pitchFamily="34" charset="-120"/>
-              </a:rPr>
-              <a:t>Interaction falls with distance: distance ______.</a:t>
+              <a:t>The decrease of interaction between places as distance increases.</a:t>
             </a:r>
             <a:endParaRPr lang="en-US" sz="4000" dirty="0"/>
           </a:p>
@@ -18467,7 +18507,7 @@
                 <a:ea typeface="Calibri" pitchFamily="34" charset="-122"/>
                 <a:cs typeface="Calibri" pitchFamily="34" charset="-120"/>
               </a:rPr>
-              <a:t>HOMEWORK</a:t>
+              <a:t>REMEDIATION</a:t>
             </a:r>
             <a:endParaRPr lang="en-US" sz="1400" dirty="0"/>
           </a:p>
@@ -18490,7 +18530,7 @@
         <p:spPr>
           <a:xfrm>
             <a:off x="0" y="658368"/>
-            <a:ext cx="5120640" cy="5833872"/>
+            <a:ext cx="1463040" cy="5833872"/>
           </a:xfrm>
           <a:prstGeom prst="rect">
             <a:avLst/>
@@ -18505,8 +18545,8 @@
         </p:nvSpPr>
         <p:spPr>
           <a:xfrm>
-            <a:off x="5349240" y="1005840"/>
-            <a:ext cx="6522415" cy="731520"/>
+            <a:off x="1691640" y="1005840"/>
+            <a:ext cx="10180015" cy="731520"/>
           </a:xfrm>
           <a:prstGeom prst="rect">
             <a:avLst/>
@@ -18532,7 +18572,7 @@
                 <a:ea typeface="Times New Roman" pitchFamily="34" charset="-122"/>
                 <a:cs typeface="Times New Roman" pitchFamily="34" charset="-120"/>
               </a:rPr>
-              <a:t>Homework</a:t>
+              <a:t>Remediation</a:t>
             </a:r>
             <a:endParaRPr lang="en-US" sz="3600" dirty="0"/>
           </a:p>
@@ -18546,8 +18586,8 @@
         </p:nvSpPr>
         <p:spPr>
           <a:xfrm>
-            <a:off x="5349240" y="1783080"/>
-            <a:ext cx="6522415" cy="4663440"/>
+            <a:off x="1691640" y="1783080"/>
+            <a:ext cx="10180015" cy="4663440"/>
           </a:xfrm>
           <a:prstGeom prst="rect">
             <a:avLst/>
@@ -18566,7 +18606,7 @@
               <a:buNone/>
             </a:pPr>
             <a:r>
-              <a:rPr lang="en-US" sz="4000" dirty="0">
+              <a:rPr lang="en-US" sz="4000" b="1" dirty="0">
                 <a:solidFill>
                   <a:srgbClr val="111111"/>
                 </a:solidFill>
@@ -18574,7 +18614,73 @@
                 <a:ea typeface="Times New Roman" pitchFamily="34" charset="-122"/>
                 <a:cs typeface="Times New Roman" pitchFamily="34" charset="-120"/>
               </a:rPr>
-              <a:t>Define an internally displaced person.</a:t>
+              <a:t>Fill in the blanks:</a:t>
+            </a:r>
+            <a:endParaRPr lang="en-US" sz="4000" dirty="0"/>
+          </a:p>
+          <a:p>
+            <a:pPr algn="l" marL="342900" indent="-342900">
+              <a:spcAft>
+                <a:spcPts val="800"/>
+              </a:spcAft>
+              <a:buSzPct val="100000"/>
+              <a:buFont typeface="+mj-lt"/>
+              <a:buAutoNum type="arabicPeriod" startAt="1"/>
+            </a:pPr>
+            <a:r>
+              <a:rPr lang="en-US" sz="4000" dirty="0">
+                <a:solidFill>
+                  <a:srgbClr val="111111"/>
+                </a:solidFill>
+                <a:latin typeface="Times New Roman" pitchFamily="34" charset="0"/>
+                <a:ea typeface="Times New Roman" pitchFamily="34" charset="-122"/>
+                <a:cs typeface="Times New Roman" pitchFamily="34" charset="-120"/>
+              </a:rPr>
+              <a:t>The movement of goods, people and information is spatial ______.</a:t>
+            </a:r>
+            <a:endParaRPr lang="en-US" sz="4000" dirty="0"/>
+          </a:p>
+          <a:p>
+            <a:pPr algn="l" marL="342900" indent="-342900">
+              <a:spcAft>
+                <a:spcPts val="800"/>
+              </a:spcAft>
+              <a:buSzPct val="100000"/>
+              <a:buFont typeface="+mj-lt"/>
+              <a:buAutoNum type="arabicPeriod" startAt="1"/>
+            </a:pPr>
+            <a:r>
+              <a:rPr lang="en-US" sz="4000" dirty="0">
+                <a:solidFill>
+                  <a:srgbClr val="111111"/>
+                </a:solidFill>
+                <a:latin typeface="Times New Roman" pitchFamily="34" charset="0"/>
+                <a:ea typeface="Times New Roman" pitchFamily="34" charset="-122"/>
+                <a:cs typeface="Times New Roman" pitchFamily="34" charset="-120"/>
+              </a:rPr>
+              <a:t>The ease of moving goods is called ______.</a:t>
+            </a:r>
+            <a:endParaRPr lang="en-US" sz="4000" dirty="0"/>
+          </a:p>
+          <a:p>
+            <a:pPr algn="l" marL="342900" indent="-342900">
+              <a:spcAft>
+                <a:spcPts val="800"/>
+              </a:spcAft>
+              <a:buSzPct val="100000"/>
+              <a:buFont typeface="+mj-lt"/>
+              <a:buAutoNum type="arabicPeriod" startAt="1"/>
+            </a:pPr>
+            <a:r>
+              <a:rPr lang="en-US" sz="4000" dirty="0">
+                <a:solidFill>
+                  <a:srgbClr val="111111"/>
+                </a:solidFill>
+                <a:latin typeface="Times New Roman" pitchFamily="34" charset="0"/>
+                <a:ea typeface="Times New Roman" pitchFamily="34" charset="-122"/>
+                <a:cs typeface="Times New Roman" pitchFamily="34" charset="-120"/>
+              </a:rPr>
+              <a:t>Interaction falls with distance: distance ______.</a:t>
             </a:r>
             <a:endParaRPr lang="en-US" sz="4000" dirty="0"/>
           </a:p>
@@ -18686,7 +18792,7 @@
                 <a:ea typeface="Calibri" pitchFamily="34" charset="-122"/>
                 <a:cs typeface="Calibri" pitchFamily="34" charset="-120"/>
               </a:rPr>
-              <a:t>NEXT LESSON</a:t>
+              <a:t>HOMEWORK</a:t>
             </a:r>
             <a:endParaRPr lang="en-US" sz="1400" dirty="0"/>
           </a:p>
@@ -18751,7 +18857,7 @@
                 <a:ea typeface="Times New Roman" pitchFamily="34" charset="-122"/>
                 <a:cs typeface="Times New Roman" pitchFamily="34" charset="-120"/>
               </a:rPr>
-              <a:t>Next Lesson</a:t>
+              <a:t>Homework</a:t>
             </a:r>
             <a:endParaRPr lang="en-US" sz="3600" dirty="0"/>
           </a:p>
@@ -18775,17 +18881,17 @@
           <a:ln/>
         </p:spPr>
         <p:txBody>
-          <a:bodyPr wrap="square" lIns="0" tIns="0" rIns="0" bIns="0" rtlCol="0" anchor="ctr"/>
-          <a:lstStyle/>
-          <a:p>
-            <a:pPr algn="ctr" indent="0" marL="0">
+          <a:bodyPr wrap="square" lIns="0" tIns="0" rIns="0" bIns="0" rtlCol="0" anchor="t"/>
+          <a:lstStyle/>
+          <a:p>
+            <a:pPr algn="l" indent="0" marL="0">
               <a:spcAft>
                 <a:spcPts val="800"/>
               </a:spcAft>
               <a:buNone/>
             </a:pPr>
             <a:r>
-              <a:rPr lang="en-US" sz="4000" b="1" dirty="0">
+              <a:rPr lang="en-US" sz="4000" dirty="0">
                 <a:solidFill>
                   <a:srgbClr val="111111"/>
                 </a:solidFill>
@@ -18793,27 +18899,7 @@
                 <a:ea typeface="Times New Roman" pitchFamily="34" charset="-122"/>
                 <a:cs typeface="Times New Roman" pitchFamily="34" charset="-120"/>
               </a:rPr>
-              <a:t>Our next lesson will be on:</a:t>
-            </a:r>
-            <a:endParaRPr lang="en-US" sz="4000" dirty="0"/>
-          </a:p>
-          <a:p>
-            <a:pPr algn="ctr" indent="0" marL="0">
-              <a:spcAft>
-                <a:spcPts val="800"/>
-              </a:spcAft>
-              <a:buNone/>
-            </a:pPr>
-            <a:r>
-              <a:rPr lang="en-US" sz="4000" b="1" dirty="0">
-                <a:solidFill>
-                  <a:srgbClr val="990011"/>
-                </a:solidFill>
-                <a:latin typeface="Times New Roman" pitchFamily="34" charset="0"/>
-                <a:ea typeface="Times New Roman" pitchFamily="34" charset="-122"/>
-                <a:cs typeface="Times New Roman" pitchFamily="34" charset="-120"/>
-              </a:rPr>
-              <a:t>Lesson 15: Types of Migration</a:t>
+              <a:t>Define an internally displaced person.</a:t>
             </a:r>
             <a:endParaRPr lang="en-US" sz="4000" dirty="0"/>
           </a:p>
@@ -18925,6 +19011,245 @@
                 <a:ea typeface="Calibri" pitchFamily="34" charset="-122"/>
                 <a:cs typeface="Calibri" pitchFamily="34" charset="-120"/>
               </a:rPr>
+              <a:t>NEXT LESSON</a:t>
+            </a:r>
+            <a:endParaRPr lang="en-US" sz="1400" dirty="0"/>
+          </a:p>
+        </p:txBody>
+      </p:sp>
+      <p:pic>
+        <p:nvPicPr>
+          <p:cNvPr id="3" name="Image 0" descr="/home/claude/f4/img/minesec_sheet.png">    </p:cNvPr>
+          <p:cNvPicPr>
+            <a:picLocks noChangeAspect="1"/>
+          </p:cNvPicPr>
+          <p:nvPr/>
+        </p:nvPicPr>
+        <p:blipFill>
+          <a:blip r:embed="rId1"/>
+          <a:stretch>
+            <a:fillRect/>
+          </a:stretch>
+        </p:blipFill>
+        <p:spPr>
+          <a:xfrm>
+            <a:off x="0" y="658368"/>
+            <a:ext cx="5120640" cy="5833872"/>
+          </a:xfrm>
+          <a:prstGeom prst="rect">
+            <a:avLst/>
+          </a:prstGeom>
+        </p:spPr>
+      </p:pic>
+      <p:sp>
+        <p:nvSpPr>
+          <p:cNvPr id="4" name="Text 1"/>
+          <p:cNvSpPr/>
+          <p:nvPr/>
+        </p:nvSpPr>
+        <p:spPr>
+          <a:xfrm>
+            <a:off x="5349240" y="1005840"/>
+            <a:ext cx="6522415" cy="731520"/>
+          </a:xfrm>
+          <a:prstGeom prst="rect">
+            <a:avLst/>
+          </a:prstGeom>
+          <a:noFill/>
+          <a:ln/>
+        </p:spPr>
+        <p:txBody>
+          <a:bodyPr wrap="square" lIns="0" tIns="0" rIns="0" bIns="0" rtlCol="0" anchor="ctr">
+            <a:normAutofit/>
+          </a:bodyPr>
+          <a:lstStyle/>
+          <a:p>
+            <a:pPr algn="ctr" indent="0" marL="0">
+              <a:buNone/>
+            </a:pPr>
+            <a:r>
+              <a:rPr lang="en-US" sz="3600" b="1" dirty="0">
+                <a:solidFill>
+                  <a:srgbClr val="990011"/>
+                </a:solidFill>
+                <a:latin typeface="Times New Roman" pitchFamily="34" charset="0"/>
+                <a:ea typeface="Times New Roman" pitchFamily="34" charset="-122"/>
+                <a:cs typeface="Times New Roman" pitchFamily="34" charset="-120"/>
+              </a:rPr>
+              <a:t>Next Lesson</a:t>
+            </a:r>
+            <a:endParaRPr lang="en-US" sz="3600" dirty="0"/>
+          </a:p>
+        </p:txBody>
+      </p:sp>
+      <p:sp>
+        <p:nvSpPr>
+          <p:cNvPr id="5" name="Text 2"/>
+          <p:cNvSpPr/>
+          <p:nvPr/>
+        </p:nvSpPr>
+        <p:spPr>
+          <a:xfrm>
+            <a:off x="5349240" y="1783080"/>
+            <a:ext cx="6522415" cy="4663440"/>
+          </a:xfrm>
+          <a:prstGeom prst="rect">
+            <a:avLst/>
+          </a:prstGeom>
+          <a:noFill/>
+          <a:ln/>
+        </p:spPr>
+        <p:txBody>
+          <a:bodyPr wrap="square" lIns="0" tIns="0" rIns="0" bIns="0" rtlCol="0" anchor="ctr"/>
+          <a:lstStyle/>
+          <a:p>
+            <a:pPr algn="ctr" indent="0" marL="0">
+              <a:spcAft>
+                <a:spcPts val="800"/>
+              </a:spcAft>
+              <a:buNone/>
+            </a:pPr>
+            <a:r>
+              <a:rPr lang="en-US" sz="4000" b="1" dirty="0">
+                <a:solidFill>
+                  <a:srgbClr val="111111"/>
+                </a:solidFill>
+                <a:latin typeface="Times New Roman" pitchFamily="34" charset="0"/>
+                <a:ea typeface="Times New Roman" pitchFamily="34" charset="-122"/>
+                <a:cs typeface="Times New Roman" pitchFamily="34" charset="-120"/>
+              </a:rPr>
+              <a:t>Our next lesson will be on:</a:t>
+            </a:r>
+            <a:endParaRPr lang="en-US" sz="4000" dirty="0"/>
+          </a:p>
+          <a:p>
+            <a:pPr algn="ctr" indent="0" marL="0">
+              <a:spcAft>
+                <a:spcPts val="800"/>
+              </a:spcAft>
+              <a:buNone/>
+            </a:pPr>
+            <a:r>
+              <a:rPr lang="en-US" sz="4000" b="1" dirty="0">
+                <a:solidFill>
+                  <a:srgbClr val="990011"/>
+                </a:solidFill>
+                <a:latin typeface="Times New Roman" pitchFamily="34" charset="0"/>
+                <a:ea typeface="Times New Roman" pitchFamily="34" charset="-122"/>
+                <a:cs typeface="Times New Roman" pitchFamily="34" charset="-120"/>
+              </a:rPr>
+              <a:t>Lesson 15: Types of Migration</a:t>
+            </a:r>
+            <a:endParaRPr lang="en-US" sz="4000" dirty="0"/>
+          </a:p>
+        </p:txBody>
+      </p:sp>
+      <p:sp>
+        <p:nvSpPr>
+          <p:cNvPr id="25" name="Slide Number Placeholder 0"/>
+          <p:cNvSpPr>
+            <a:spLocks noGrp="1"/>
+          </p:cNvSpPr>
+          <p:nvPr>
+            <p:ph type="sldNum" sz="quarter" idx="4294967295"/>
+          </p:nvPr>
+        </p:nvSpPr>
+        <p:spPr>
+          <a:xfrm>
+            <a:off x="27432" y="91440"/>
+            <a:ext cx="585216" cy="475488"/>
+          </a:xfrm>
+          <a:prstGeom prst="rect">
+            <a:avLst/>
+          </a:prstGeom>
+          <a:extLst>
+            <a:ext uri="{C572A759-6A51-4108-AA02-DFA0A04FC94B}">
+              <ma14:wrappingTextBoxFlag xmlns:ma14="http://schemas.microsoft.com/office/mac/drawingml/2011/main" val="0"/>
+            </a:ext>
+          </a:extLst>
+        </p:spPr>
+        <p:txBody>
+          <a:bodyPr/>
+          <a:lstStyle>
+            <a:lvl1pPr>
+              <a:defRPr sz="2000">
+                <a:solidFill>
+                  <a:srgbClr val="FFFFFF"/>
+                </a:solidFill>
+                <a:latin typeface="Calibri"/>
+                <a:ea typeface="Calibri"/>
+                <a:cs typeface="Calibri"/>
+              </a:defRPr>
+            </a:lvl1pPr>
+          </a:lstStyle>
+          <a:p>
+            <a:pPr algn="ctr"/>
+            <a:fld id="{F7021451-1387-4CA6-816F-3879F97B5CBC}" type="slidenum">
+              <a:rPr b="1" lang="en-US"/>
+              <a:t>53</a:t>
+            </a:fld>
+            <a:endParaRPr lang="en-US"/>
+          </a:p>
+        </p:txBody>
+      </p:sp>
+    </p:spTree>
+  </p:cSld>
+  <p:clrMapOvr>
+    <a:masterClrMapping/>
+  </p:clrMapOvr>
+</p:sld>
+</file>
+
+<file path=ppt/slides/slide54.xml><?xml version="1.0" encoding="utf-8"?>
+<p:sld xmlns:a="http://schemas.openxmlformats.org/drawingml/2006/main" xmlns:r="http://schemas.openxmlformats.org/officeDocument/2006/relationships" xmlns:p="http://schemas.openxmlformats.org/presentationml/2006/main">
+  <p:cSld name="Slide 54">
+    <p:spTree>
+      <p:nvGrpSpPr>
+        <p:cNvPr id="1" name=""/>
+        <p:cNvGrpSpPr/>
+        <p:nvPr/>
+      </p:nvGrpSpPr>
+      <p:grpSpPr>
+        <a:xfrm>
+          <a:off x="0" y="0"/>
+          <a:ext cx="0" cy="0"/>
+          <a:chOff x="0" y="0"/>
+          <a:chExt cx="0" cy="0"/>
+        </a:xfrm>
+      </p:grpSpPr>
+      <p:sp>
+        <p:nvSpPr>
+          <p:cNvPr id="2" name="Text 0"/>
+          <p:cNvSpPr/>
+          <p:nvPr/>
+        </p:nvSpPr>
+        <p:spPr>
+          <a:xfrm>
+            <a:off x="457200" y="713232"/>
+            <a:ext cx="11368735" cy="274320"/>
+          </a:xfrm>
+          <a:prstGeom prst="rect">
+            <a:avLst/>
+          </a:prstGeom>
+          <a:noFill/>
+          <a:ln/>
+        </p:spPr>
+        <p:txBody>
+          <a:bodyPr wrap="square" lIns="0" tIns="0" rIns="0" bIns="0" rtlCol="0" anchor="ctr"/>
+          <a:lstStyle/>
+          <a:p>
+            <a:pPr algn="r" indent="0" marL="0">
+              <a:buNone/>
+            </a:pPr>
+            <a:r>
+              <a:rPr lang="en-US" sz="1400" b="1" dirty="0">
+                <a:solidFill>
+                  <a:srgbClr val="1C3F6E"/>
+                </a:solidFill>
+                <a:latin typeface="Calibri" pitchFamily="34" charset="0"/>
+                <a:ea typeface="Calibri" pitchFamily="34" charset="-122"/>
+                <a:cs typeface="Calibri" pitchFamily="34" charset="-120"/>
+              </a:rPr>
               <a:t>BILINGUAL GAME</a:t>
             </a:r>
             <a:endParaRPr lang="en-US" sz="1400" dirty="0"/>
@@ -18972,7 +19297,7 @@
       </p:sp>
       <p:graphicFrame>
         <p:nvGraphicFramePr>
-          <p:cNvPr id="54" name="Table 0"/>
+          <p:cNvPr id="55" name="Table 0"/>
           <p:cNvGraphicFramePr>
             <a:graphicFrameLocks noGrp="1"/>
           </p:cNvGraphicFramePr>
@@ -20008,7 +20333,7 @@
             <a:pPr algn="ctr"/>
             <a:fld id="{F7021451-1387-4CA6-816F-3879F97B5CBC}" type="slidenum">
               <a:rPr b="1" lang="en-US"/>
-              <a:t>53</a:t>
+              <a:t>54</a:t>
             </a:fld>
             <a:endParaRPr lang="en-US"/>
           </a:p>
@@ -20022,9 +20347,9 @@
 </p:sld>
 </file>
 
-<file path=ppt/slides/slide54.xml><?xml version="1.0" encoding="utf-8"?>
+<file path=ppt/slides/slide55.xml><?xml version="1.0" encoding="utf-8"?>
 <p:sld xmlns:a="http://schemas.openxmlformats.org/drawingml/2006/main" xmlns:r="http://schemas.openxmlformats.org/officeDocument/2006/relationships" xmlns:p="http://schemas.openxmlformats.org/presentationml/2006/main">
-  <p:cSld name="Slide 54">
+  <p:cSld name="Slide 55">
     <p:spTree>
       <p:nvGrpSpPr>
         <p:cNvPr id="1" name=""/>
@@ -20119,7 +20444,7 @@
       </p:sp>
       <p:graphicFrame>
         <p:nvGraphicFramePr>
-          <p:cNvPr id="55" name="Table 0"/>
+          <p:cNvPr id="56" name="Table 0"/>
           <p:cNvGraphicFramePr>
             <a:graphicFrameLocks noGrp="1"/>
           </p:cNvGraphicFramePr>
@@ -20741,7 +21066,7 @@
             <a:pPr algn="ctr"/>
             <a:fld id="{F7021451-1387-4CA6-816F-3879F97B5CBC}" type="slidenum">
               <a:rPr b="1" lang="en-US"/>
-              <a:t>54</a:t>
+              <a:t>55</a:t>
             </a:fld>
             <a:endParaRPr lang="en-US"/>
           </a:p>
@@ -20755,9 +21080,9 @@
 </p:sld>
 </file>
 
-<file path=ppt/slides/slide55.xml><?xml version="1.0" encoding="utf-8"?>
+<file path=ppt/slides/slide56.xml><?xml version="1.0" encoding="utf-8"?>
 <p:sld xmlns:a="http://schemas.openxmlformats.org/drawingml/2006/main" xmlns:r="http://schemas.openxmlformats.org/officeDocument/2006/relationships" xmlns:p="http://schemas.openxmlformats.org/presentationml/2006/main">
-  <p:cSld name="Slide 55">
+  <p:cSld name="Slide 56">
     <p:spTree>
       <p:nvGrpSpPr>
         <p:cNvPr id="1" name=""/>
@@ -20852,7 +21177,7 @@
       </p:sp>
       <p:graphicFrame>
         <p:nvGraphicFramePr>
-          <p:cNvPr id="56" name="Table 0"/>
+          <p:cNvPr id="57" name="Table 0"/>
           <p:cNvGraphicFramePr>
             <a:graphicFrameLocks noGrp="1"/>
           </p:cNvGraphicFramePr>
@@ -21612,331 +21937,6 @@
             <a:pPr algn="ctr"/>
             <a:fld id="{F7021451-1387-4CA6-816F-3879F97B5CBC}" type="slidenum">
               <a:rPr b="1" lang="en-US"/>
-              <a:t>55</a:t>
-            </a:fld>
-            <a:endParaRPr lang="en-US"/>
-          </a:p>
-        </p:txBody>
-      </p:sp>
-    </p:spTree>
-  </p:cSld>
-  <p:clrMapOvr>
-    <a:masterClrMapping/>
-  </p:clrMapOvr>
-</p:sld>
-</file>
-
-<file path=ppt/slides/slide56.xml><?xml version="1.0" encoding="utf-8"?>
-<p:sld xmlns:a="http://schemas.openxmlformats.org/drawingml/2006/main" xmlns:r="http://schemas.openxmlformats.org/officeDocument/2006/relationships" xmlns:p="http://schemas.openxmlformats.org/presentationml/2006/main">
-  <p:cSld name="Slide 56">
-    <p:spTree>
-      <p:nvGrpSpPr>
-        <p:cNvPr id="1" name=""/>
-        <p:cNvGrpSpPr/>
-        <p:nvPr/>
-      </p:nvGrpSpPr>
-      <p:grpSpPr>
-        <a:xfrm>
-          <a:off x="0" y="0"/>
-          <a:ext cx="0" cy="0"/>
-          <a:chOff x="0" y="0"/>
-          <a:chExt cx="0" cy="0"/>
-        </a:xfrm>
-      </p:grpSpPr>
-      <p:sp>
-        <p:nvSpPr>
-          <p:cNvPr id="2" name="Text 0"/>
-          <p:cNvSpPr/>
-          <p:nvPr/>
-        </p:nvSpPr>
-        <p:spPr>
-          <a:xfrm>
-            <a:off x="457200" y="713232"/>
-            <a:ext cx="11368735" cy="274320"/>
-          </a:xfrm>
-          <a:prstGeom prst="rect">
-            <a:avLst/>
-          </a:prstGeom>
-          <a:noFill/>
-          <a:ln/>
-        </p:spPr>
-        <p:txBody>
-          <a:bodyPr wrap="square" lIns="0" tIns="0" rIns="0" bIns="0" rtlCol="0" anchor="ctr"/>
-          <a:lstStyle/>
-          <a:p>
-            <a:pPr algn="r" indent="0" marL="0">
-              <a:buNone/>
-            </a:pPr>
-            <a:r>
-              <a:rPr lang="en-US" sz="1400" b="1" dirty="0">
-                <a:solidFill>
-                  <a:srgbClr val="1C3F6E"/>
-                </a:solidFill>
-                <a:latin typeface="Calibri" pitchFamily="34" charset="0"/>
-                <a:ea typeface="Calibri" pitchFamily="34" charset="-122"/>
-                <a:cs typeface="Calibri" pitchFamily="34" charset="-120"/>
-              </a:rPr>
-              <a:t>TEACHER'S NOTE</a:t>
-            </a:r>
-            <a:endParaRPr lang="en-US" sz="1400" dirty="0"/>
-          </a:p>
-        </p:txBody>
-      </p:sp>
-      <p:pic>
-        <p:nvPicPr>
-          <p:cNvPr id="3" name="Image 0" descr="/home/claude/f4/img/minesec_sheet.png">    </p:cNvPr>
-          <p:cNvPicPr>
-            <a:picLocks noChangeAspect="1"/>
-          </p:cNvPicPr>
-          <p:nvPr/>
-        </p:nvPicPr>
-        <p:blipFill>
-          <a:blip r:embed="rId1"/>
-          <a:stretch>
-            <a:fillRect/>
-          </a:stretch>
-        </p:blipFill>
-        <p:spPr>
-          <a:xfrm>
-            <a:off x="0" y="658368"/>
-            <a:ext cx="3840480" cy="5833872"/>
-          </a:xfrm>
-          <a:prstGeom prst="rect">
-            <a:avLst/>
-          </a:prstGeom>
-        </p:spPr>
-      </p:pic>
-      <p:sp>
-        <p:nvSpPr>
-          <p:cNvPr id="4" name="Text 1"/>
-          <p:cNvSpPr/>
-          <p:nvPr/>
-        </p:nvSpPr>
-        <p:spPr>
-          <a:xfrm>
-            <a:off x="4069080" y="1005840"/>
-            <a:ext cx="7802575" cy="731520"/>
-          </a:xfrm>
-          <a:prstGeom prst="rect">
-            <a:avLst/>
-          </a:prstGeom>
-          <a:noFill/>
-          <a:ln/>
-        </p:spPr>
-        <p:txBody>
-          <a:bodyPr wrap="square" lIns="0" tIns="0" rIns="0" bIns="0" rtlCol="0" anchor="ctr">
-            <a:normAutofit/>
-          </a:bodyPr>
-          <a:lstStyle/>
-          <a:p>
-            <a:pPr algn="ctr" indent="0" marL="0">
-              <a:buNone/>
-            </a:pPr>
-            <a:r>
-              <a:rPr lang="en-US" sz="3600" b="1" dirty="0">
-                <a:solidFill>
-                  <a:srgbClr val="990011"/>
-                </a:solidFill>
-                <a:latin typeface="Times New Roman" pitchFamily="34" charset="0"/>
-                <a:ea typeface="Times New Roman" pitchFamily="34" charset="-122"/>
-                <a:cs typeface="Times New Roman" pitchFamily="34" charset="-120"/>
-              </a:rPr>
-              <a:t>Teacher's Note</a:t>
-            </a:r>
-            <a:endParaRPr lang="en-US" sz="3600" dirty="0"/>
-          </a:p>
-        </p:txBody>
-      </p:sp>
-      <p:sp>
-        <p:nvSpPr>
-          <p:cNvPr id="5" name="Text 2"/>
-          <p:cNvSpPr/>
-          <p:nvPr/>
-        </p:nvSpPr>
-        <p:spPr>
-          <a:xfrm>
-            <a:off x="4069080" y="1783080"/>
-            <a:ext cx="7802575" cy="4663440"/>
-          </a:xfrm>
-          <a:prstGeom prst="rect">
-            <a:avLst/>
-          </a:prstGeom>
-          <a:noFill/>
-          <a:ln/>
-        </p:spPr>
-        <p:txBody>
-          <a:bodyPr wrap="square" lIns="0" tIns="0" rIns="0" bIns="0" rtlCol="0" anchor="t"/>
-          <a:lstStyle/>
-          <a:p>
-            <a:pPr algn="l" marL="342900" indent="-342900">
-              <a:spcAft>
-                <a:spcPts val="800"/>
-              </a:spcAft>
-              <a:buSzPct val="100000"/>
-              <a:buChar char="•"/>
-            </a:pPr>
-            <a:r>
-              <a:rPr lang="en-US" sz="2000" dirty="0">
-                <a:solidFill>
-                  <a:srgbClr val="111111"/>
-                </a:solidFill>
-                <a:latin typeface="Calibri" pitchFamily="34" charset="0"/>
-                <a:ea typeface="Calibri" pitchFamily="34" charset="-122"/>
-                <a:cs typeface="Calibri" pitchFamily="34" charset="-120"/>
-              </a:rPr>
-              <a:t>Timing: Homework correction, plan, objectives 8 min | Recall, situation, action 10 min | 5 activities 30 min | Board summary (copying) 30 min | Evaluation, remediation 10 min | Homework, next lesson 5 min | Logbook 7 min</a:t>
-            </a:r>
-            <a:endParaRPr lang="en-US" sz="2000" dirty="0"/>
-          </a:p>
-          <a:p>
-            <a:pPr algn="l" marL="342900" indent="-342900">
-              <a:spcAft>
-                <a:spcPts val="800"/>
-              </a:spcAft>
-              <a:buSzPct val="100000"/>
-              <a:buChar char="•"/>
-            </a:pPr>
-            <a:r>
-              <a:rPr lang="en-US" sz="2000" dirty="0">
-                <a:solidFill>
-                  <a:srgbClr val="111111"/>
-                </a:solidFill>
-                <a:latin typeface="Calibri" pitchFamily="34" charset="0"/>
-                <a:ea typeface="Calibri" pitchFamily="34" charset="-122"/>
-                <a:cs typeface="Calibri" pitchFamily="34" charset="-120"/>
-              </a:rPr>
-              <a:t>Without the projector (Activity 1): list flows between Garoua and Douala.</a:t>
-            </a:r>
-            <a:endParaRPr lang="en-US" sz="2000" dirty="0"/>
-          </a:p>
-          <a:p>
-            <a:pPr algn="l" marL="342900" indent="-342900">
-              <a:spcAft>
-                <a:spcPts val="800"/>
-              </a:spcAft>
-              <a:buSzPct val="100000"/>
-              <a:buChar char="•"/>
-            </a:pPr>
-            <a:r>
-              <a:rPr lang="en-US" sz="2000" dirty="0">
-                <a:solidFill>
-                  <a:srgbClr val="111111"/>
-                </a:solidFill>
-                <a:latin typeface="Calibri" pitchFamily="34" charset="0"/>
-                <a:ea typeface="Calibri" pitchFamily="34" charset="-122"/>
-                <a:cs typeface="Calibri" pitchFamily="34" charset="-120"/>
-              </a:rPr>
-              <a:t>Without the projector (Activity 2): draw an arrow from Garoua to Douala.</a:t>
-            </a:r>
-            <a:endParaRPr lang="en-US" sz="2000" dirty="0"/>
-          </a:p>
-          <a:p>
-            <a:pPr algn="l" marL="342900" indent="-342900">
-              <a:spcAft>
-                <a:spcPts val="800"/>
-              </a:spcAft>
-              <a:buSzPct val="100000"/>
-              <a:buChar char="•"/>
-            </a:pPr>
-            <a:r>
-              <a:rPr lang="en-US" sz="2000" dirty="0">
-                <a:solidFill>
-                  <a:srgbClr val="111111"/>
-                </a:solidFill>
-                <a:latin typeface="Calibri" pitchFamily="34" charset="0"/>
-                <a:ea typeface="Calibri" pitchFamily="34" charset="-122"/>
-                <a:cs typeface="Calibri" pitchFamily="34" charset="-120"/>
-              </a:rPr>
-              <a:t>Without the projector (Activity 3): compare transport costs.</a:t>
-            </a:r>
-            <a:endParaRPr lang="en-US" sz="2000" dirty="0"/>
-          </a:p>
-          <a:p>
-            <a:pPr algn="l" marL="342900" indent="-342900">
-              <a:spcAft>
-                <a:spcPts val="800"/>
-              </a:spcAft>
-              <a:buSzPct val="100000"/>
-              <a:buChar char="•"/>
-            </a:pPr>
-            <a:r>
-              <a:rPr lang="en-US" sz="2000" dirty="0">
-                <a:solidFill>
-                  <a:srgbClr val="111111"/>
-                </a:solidFill>
-                <a:latin typeface="Calibri" pitchFamily="34" charset="0"/>
-                <a:ea typeface="Calibri" pitchFamily="34" charset="-122"/>
-                <a:cs typeface="Calibri" pitchFamily="34" charset="-120"/>
-              </a:rPr>
-              <a:t>Without the projector (Activity 4): draw the route Garoua–Ngaoundéré–Yaoundé.</a:t>
-            </a:r>
-            <a:endParaRPr lang="en-US" sz="2000" dirty="0"/>
-          </a:p>
-          <a:p>
-            <a:pPr algn="l" marL="342900" indent="-342900">
-              <a:spcAft>
-                <a:spcPts val="800"/>
-              </a:spcAft>
-              <a:buSzPct val="100000"/>
-              <a:buChar char="•"/>
-            </a:pPr>
-            <a:r>
-              <a:rPr lang="en-US" sz="2000" dirty="0">
-                <a:solidFill>
-                  <a:srgbClr val="111111"/>
-                </a:solidFill>
-                <a:latin typeface="Calibri" pitchFamily="34" charset="0"/>
-                <a:ea typeface="Calibri" pitchFamily="34" charset="-122"/>
-                <a:cs typeface="Calibri" pitchFamily="34" charset="-120"/>
-              </a:rPr>
-              <a:t>Without the projector (Activity 5): ask learners where their friends live.</a:t>
-            </a:r>
-            <a:endParaRPr lang="en-US" sz="2000" dirty="0"/>
-          </a:p>
-        </p:txBody>
-      </p:sp>
-      <p:sp>
-        <p:nvSpPr>
-          <p:cNvPr id="25" name="Slide Number Placeholder 0"/>
-          <p:cNvSpPr>
-            <a:spLocks noGrp="1"/>
-          </p:cNvSpPr>
-          <p:nvPr>
-            <p:ph type="sldNum" sz="quarter" idx="4294967295"/>
-          </p:nvPr>
-        </p:nvSpPr>
-        <p:spPr>
-          <a:xfrm>
-            <a:off x="27432" y="91440"/>
-            <a:ext cx="585216" cy="475488"/>
-          </a:xfrm>
-          <a:prstGeom prst="rect">
-            <a:avLst/>
-          </a:prstGeom>
-          <a:extLst>
-            <a:ext uri="{C572A759-6A51-4108-AA02-DFA0A04FC94B}">
-              <ma14:wrappingTextBoxFlag xmlns:ma14="http://schemas.microsoft.com/office/mac/drawingml/2011/main" val="0"/>
-            </a:ext>
-          </a:extLst>
-        </p:spPr>
-        <p:txBody>
-          <a:bodyPr/>
-          <a:lstStyle>
-            <a:lvl1pPr>
-              <a:defRPr sz="2000">
-                <a:solidFill>
-                  <a:srgbClr val="FFFFFF"/>
-                </a:solidFill>
-                <a:latin typeface="Calibri"/>
-                <a:ea typeface="Calibri"/>
-                <a:cs typeface="Calibri"/>
-              </a:defRPr>
-            </a:lvl1pPr>
-          </a:lstStyle>
-          <a:p>
-            <a:pPr algn="ctr"/>
-            <a:fld id="{F7021451-1387-4CA6-816F-3879F97B5CBC}" type="slidenum">
-              <a:rPr b="1" lang="en-US"/>
               <a:t>56</a:t>
             </a:fld>
             <a:endParaRPr lang="en-US"/>
@@ -22001,7 +22001,7 @@
                 <a:ea typeface="Calibri" pitchFamily="34" charset="-122"/>
                 <a:cs typeface="Calibri" pitchFamily="34" charset="-120"/>
               </a:rPr>
-              <a:t>REFERENCES</a:t>
+              <a:t>TEACHER'S NOTE</a:t>
             </a:r>
             <a:endParaRPr lang="en-US" sz="1400" dirty="0"/>
           </a:p>
@@ -22066,7 +22066,7 @@
                 <a:ea typeface="Times New Roman" pitchFamily="34" charset="-122"/>
                 <a:cs typeface="Times New Roman" pitchFamily="34" charset="-120"/>
               </a:rPr>
-              <a:t>References</a:t>
+              <a:t>Teacher's Note</a:t>
             </a:r>
             <a:endParaRPr lang="en-US" sz="3600" dirty="0"/>
           </a:p>
@@ -22101,7 +22101,7 @@
               <a:buChar char="•"/>
             </a:pPr>
             <a:r>
-              <a:rPr lang="en-US" sz="1800" dirty="0">
+              <a:rPr lang="en-US" sz="2000" dirty="0">
                 <a:solidFill>
                   <a:srgbClr val="111111"/>
                 </a:solidFill>
@@ -22109,9 +22109,9 @@
                 <a:ea typeface="Calibri" pitchFamily="34" charset="-122"/>
                 <a:cs typeface="Calibri" pitchFamily="34" charset="-120"/>
               </a:rPr>
-              <a:t>Geography Syllabus for Sixth Forms (Lower and Upper Sixth), MINESEC, 2019 — Module 4 (Population Geography).</a:t>
-            </a:r>
-            <a:endParaRPr lang="en-US" sz="1800" dirty="0"/>
+              <a:t>Timing: Homework correction, plan, objectives 8 min | Recall, situation, action 10 min | 5 activities 30 min | Board summary (copying) 30 min | Evaluation, remediation 10 min | Homework, next lesson 5 min | Logbook 7 min</a:t>
+            </a:r>
+            <a:endParaRPr lang="en-US" sz="2000" dirty="0"/>
           </a:p>
           <a:p>
             <a:pPr algn="l" marL="342900" indent="-342900">
@@ -22122,7 +22122,7 @@
               <a:buChar char="•"/>
             </a:pPr>
             <a:r>
-              <a:rPr lang="en-US" sz="1800" dirty="0">
+              <a:rPr lang="en-US" sz="2000" dirty="0">
                 <a:solidFill>
                   <a:srgbClr val="111111"/>
                 </a:solidFill>
@@ -22130,9 +22130,9 @@
                 <a:ea typeface="Calibri" pitchFamily="34" charset="-122"/>
                 <a:cs typeface="Calibri" pitchFamily="34" charset="-120"/>
               </a:rPr>
-              <a:t>Teacher's course notes: Mr KAMDEM E., Population Geography (USA), GBHS Garoua, 2026.</a:t>
-            </a:r>
-            <a:endParaRPr lang="en-US" sz="1800" dirty="0"/>
+              <a:t>Without the projector (Activity 1): list flows between Garoua and Douala.</a:t>
+            </a:r>
+            <a:endParaRPr lang="en-US" sz="2000" dirty="0"/>
           </a:p>
           <a:p>
             <a:pPr algn="l" marL="342900" indent="-342900">
@@ -22143,7 +22143,7 @@
               <a:buChar char="•"/>
             </a:pPr>
             <a:r>
-              <a:rPr lang="en-US" sz="1800" dirty="0">
+              <a:rPr lang="en-US" sz="2000" dirty="0">
                 <a:solidFill>
                   <a:srgbClr val="111111"/>
                 </a:solidFill>
@@ -22151,9 +22151,9 @@
                 <a:ea typeface="Calibri" pitchFamily="34" charset="-122"/>
                 <a:cs typeface="Calibri" pitchFamily="34" charset="-120"/>
               </a:rPr>
-              <a:t>United Nations, World Population Prospects 2024.</a:t>
-            </a:r>
-            <a:endParaRPr lang="en-US" sz="1800" dirty="0"/>
+              <a:t>Without the projector (Activity 2): draw an arrow from Garoua to Douala.</a:t>
+            </a:r>
+            <a:endParaRPr lang="en-US" sz="2000" dirty="0"/>
           </a:p>
           <a:p>
             <a:pPr algn="l" marL="342900" indent="-342900">
@@ -22164,7 +22164,7 @@
               <a:buChar char="•"/>
             </a:pPr>
             <a:r>
-              <a:rPr lang="en-US" sz="1800" dirty="0">
+              <a:rPr lang="en-US" sz="2000" dirty="0">
                 <a:solidFill>
                   <a:srgbClr val="111111"/>
                 </a:solidFill>
@@ -22172,9 +22172,9 @@
                 <a:ea typeface="Calibri" pitchFamily="34" charset="-122"/>
                 <a:cs typeface="Calibri" pitchFamily="34" charset="-120"/>
               </a:rPr>
-              <a:t>Photo, Activity 1: “Scenes from Rwanda” by International Monetary Fund, CC BY-NC-ND 2.0, via Flickr (https://www.flickr.com/photos/38851430@N07/52660758172)</a:t>
-            </a:r>
-            <a:endParaRPr lang="en-US" sz="1800" dirty="0"/>
+              <a:t>Without the projector (Activity 3): compare transport costs.</a:t>
+            </a:r>
+            <a:endParaRPr lang="en-US" sz="2000" dirty="0"/>
           </a:p>
           <a:p>
             <a:pPr algn="l" marL="342900" indent="-342900">
@@ -22185,7 +22185,7 @@
               <a:buChar char="•"/>
             </a:pPr>
             <a:r>
-              <a:rPr lang="en-US" sz="1800" dirty="0">
+              <a:rPr lang="en-US" sz="2000" dirty="0">
                 <a:solidFill>
                   <a:srgbClr val="111111"/>
                 </a:solidFill>
@@ -22193,9 +22193,9 @@
                 <a:ea typeface="Calibri" pitchFamily="34" charset="-122"/>
                 <a:cs typeface="Calibri" pitchFamily="34" charset="-120"/>
               </a:rPr>
-              <a:t>Photo, Activity 2: “Cotton harvest” by CIFOR, CC BY-NC-ND 2.0, via Flickr (https://www.flickr.com/photos/45423546@N07/35706862552)</a:t>
-            </a:r>
-            <a:endParaRPr lang="en-US" sz="1800" dirty="0"/>
+              <a:t>Without the projector (Activity 4): draw the route Garoua–Ngaoundéré–Yaoundé.</a:t>
+            </a:r>
+            <a:endParaRPr lang="en-US" sz="2000" dirty="0"/>
           </a:p>
           <a:p>
             <a:pPr algn="l" marL="342900" indent="-342900">
@@ -22206,7 +22206,7 @@
               <a:buChar char="•"/>
             </a:pPr>
             <a:r>
-              <a:rPr lang="en-US" sz="1800" dirty="0">
+              <a:rPr lang="en-US" sz="2000" dirty="0">
                 <a:solidFill>
                   <a:srgbClr val="111111"/>
                 </a:solidFill>
@@ -22214,10 +22214,209 @@
                 <a:ea typeface="Calibri" pitchFamily="34" charset="-122"/>
                 <a:cs typeface="Calibri" pitchFamily="34" charset="-120"/>
               </a:rPr>
-              <a:t>Photo, Activity 3: “Traveling by truck” by World Bank Photo Collection, CC BY-NC-ND 2.0, via Flickr (https://www.flickr.com/photos/10816734@N03/2628517227)</a:t>
-            </a:r>
-            <a:endParaRPr lang="en-US" sz="1800" dirty="0"/>
-          </a:p>
+              <a:t>Without the projector (Activity 5): ask learners where their friends live.</a:t>
+            </a:r>
+            <a:endParaRPr lang="en-US" sz="2000" dirty="0"/>
+          </a:p>
+        </p:txBody>
+      </p:sp>
+      <p:sp>
+        <p:nvSpPr>
+          <p:cNvPr id="25" name="Slide Number Placeholder 0"/>
+          <p:cNvSpPr>
+            <a:spLocks noGrp="1"/>
+          </p:cNvSpPr>
+          <p:nvPr>
+            <p:ph type="sldNum" sz="quarter" idx="4294967295"/>
+          </p:nvPr>
+        </p:nvSpPr>
+        <p:spPr>
+          <a:xfrm>
+            <a:off x="27432" y="91440"/>
+            <a:ext cx="585216" cy="475488"/>
+          </a:xfrm>
+          <a:prstGeom prst="rect">
+            <a:avLst/>
+          </a:prstGeom>
+          <a:extLst>
+            <a:ext uri="{C572A759-6A51-4108-AA02-DFA0A04FC94B}">
+              <ma14:wrappingTextBoxFlag xmlns:ma14="http://schemas.microsoft.com/office/mac/drawingml/2011/main" val="0"/>
+            </a:ext>
+          </a:extLst>
+        </p:spPr>
+        <p:txBody>
+          <a:bodyPr/>
+          <a:lstStyle>
+            <a:lvl1pPr>
+              <a:defRPr sz="2000">
+                <a:solidFill>
+                  <a:srgbClr val="FFFFFF"/>
+                </a:solidFill>
+                <a:latin typeface="Calibri"/>
+                <a:ea typeface="Calibri"/>
+                <a:cs typeface="Calibri"/>
+              </a:defRPr>
+            </a:lvl1pPr>
+          </a:lstStyle>
+          <a:p>
+            <a:pPr algn="ctr"/>
+            <a:fld id="{F7021451-1387-4CA6-816F-3879F97B5CBC}" type="slidenum">
+              <a:rPr b="1" lang="en-US"/>
+              <a:t>57</a:t>
+            </a:fld>
+            <a:endParaRPr lang="en-US"/>
+          </a:p>
+        </p:txBody>
+      </p:sp>
+    </p:spTree>
+  </p:cSld>
+  <p:clrMapOvr>
+    <a:masterClrMapping/>
+  </p:clrMapOvr>
+</p:sld>
+</file>
+
+<file path=ppt/slides/slide58.xml><?xml version="1.0" encoding="utf-8"?>
+<p:sld xmlns:a="http://schemas.openxmlformats.org/drawingml/2006/main" xmlns:r="http://schemas.openxmlformats.org/officeDocument/2006/relationships" xmlns:p="http://schemas.openxmlformats.org/presentationml/2006/main">
+  <p:cSld name="Slide 58">
+    <p:spTree>
+      <p:nvGrpSpPr>
+        <p:cNvPr id="1" name=""/>
+        <p:cNvGrpSpPr/>
+        <p:nvPr/>
+      </p:nvGrpSpPr>
+      <p:grpSpPr>
+        <a:xfrm>
+          <a:off x="0" y="0"/>
+          <a:ext cx="0" cy="0"/>
+          <a:chOff x="0" y="0"/>
+          <a:chExt cx="0" cy="0"/>
+        </a:xfrm>
+      </p:grpSpPr>
+      <p:sp>
+        <p:nvSpPr>
+          <p:cNvPr id="2" name="Text 0"/>
+          <p:cNvSpPr/>
+          <p:nvPr/>
+        </p:nvSpPr>
+        <p:spPr>
+          <a:xfrm>
+            <a:off x="457200" y="713232"/>
+            <a:ext cx="11368735" cy="274320"/>
+          </a:xfrm>
+          <a:prstGeom prst="rect">
+            <a:avLst/>
+          </a:prstGeom>
+          <a:noFill/>
+          <a:ln/>
+        </p:spPr>
+        <p:txBody>
+          <a:bodyPr wrap="square" lIns="0" tIns="0" rIns="0" bIns="0" rtlCol="0" anchor="ctr"/>
+          <a:lstStyle/>
+          <a:p>
+            <a:pPr algn="r" indent="0" marL="0">
+              <a:buNone/>
+            </a:pPr>
+            <a:r>
+              <a:rPr lang="en-US" sz="1400" b="1" dirty="0">
+                <a:solidFill>
+                  <a:srgbClr val="1C3F6E"/>
+                </a:solidFill>
+                <a:latin typeface="Calibri" pitchFamily="34" charset="0"/>
+                <a:ea typeface="Calibri" pitchFamily="34" charset="-122"/>
+                <a:cs typeface="Calibri" pitchFamily="34" charset="-120"/>
+              </a:rPr>
+              <a:t>REFERENCES</a:t>
+            </a:r>
+            <a:endParaRPr lang="en-US" sz="1400" dirty="0"/>
+          </a:p>
+        </p:txBody>
+      </p:sp>
+      <p:pic>
+        <p:nvPicPr>
+          <p:cNvPr id="3" name="Image 0" descr="/home/claude/f4/img/minesec_sheet.png">    </p:cNvPr>
+          <p:cNvPicPr>
+            <a:picLocks noChangeAspect="1"/>
+          </p:cNvPicPr>
+          <p:nvPr/>
+        </p:nvPicPr>
+        <p:blipFill>
+          <a:blip r:embed="rId1"/>
+          <a:stretch>
+            <a:fillRect/>
+          </a:stretch>
+        </p:blipFill>
+        <p:spPr>
+          <a:xfrm>
+            <a:off x="0" y="658368"/>
+            <a:ext cx="3840480" cy="5833872"/>
+          </a:xfrm>
+          <a:prstGeom prst="rect">
+            <a:avLst/>
+          </a:prstGeom>
+        </p:spPr>
+      </p:pic>
+      <p:sp>
+        <p:nvSpPr>
+          <p:cNvPr id="4" name="Text 1"/>
+          <p:cNvSpPr/>
+          <p:nvPr/>
+        </p:nvSpPr>
+        <p:spPr>
+          <a:xfrm>
+            <a:off x="4069080" y="1005840"/>
+            <a:ext cx="7802575" cy="731520"/>
+          </a:xfrm>
+          <a:prstGeom prst="rect">
+            <a:avLst/>
+          </a:prstGeom>
+          <a:noFill/>
+          <a:ln/>
+        </p:spPr>
+        <p:txBody>
+          <a:bodyPr wrap="square" lIns="0" tIns="0" rIns="0" bIns="0" rtlCol="0" anchor="ctr">
+            <a:normAutofit/>
+          </a:bodyPr>
+          <a:lstStyle/>
+          <a:p>
+            <a:pPr algn="ctr" indent="0" marL="0">
+              <a:buNone/>
+            </a:pPr>
+            <a:r>
+              <a:rPr lang="en-US" sz="3600" b="1" dirty="0">
+                <a:solidFill>
+                  <a:srgbClr val="990011"/>
+                </a:solidFill>
+                <a:latin typeface="Times New Roman" pitchFamily="34" charset="0"/>
+                <a:ea typeface="Times New Roman" pitchFamily="34" charset="-122"/>
+                <a:cs typeface="Times New Roman" pitchFamily="34" charset="-120"/>
+              </a:rPr>
+              <a:t>References</a:t>
+            </a:r>
+            <a:endParaRPr lang="en-US" sz="3600" dirty="0"/>
+          </a:p>
+        </p:txBody>
+      </p:sp>
+      <p:sp>
+        <p:nvSpPr>
+          <p:cNvPr id="5" name="Text 2"/>
+          <p:cNvSpPr/>
+          <p:nvPr/>
+        </p:nvSpPr>
+        <p:spPr>
+          <a:xfrm>
+            <a:off x="4069080" y="1783080"/>
+            <a:ext cx="7802575" cy="4663440"/>
+          </a:xfrm>
+          <a:prstGeom prst="rect">
+            <a:avLst/>
+          </a:prstGeom>
+          <a:noFill/>
+          <a:ln/>
+        </p:spPr>
+        <p:txBody>
+          <a:bodyPr wrap="square" lIns="0" tIns="0" rIns="0" bIns="0" rtlCol="0" anchor="t"/>
+          <a:lstStyle/>
           <a:p>
             <a:pPr algn="l" marL="342900" indent="-342900">
               <a:spcAft>
@@ -22235,6 +22434,132 @@
                 <a:ea typeface="Calibri" pitchFamily="34" charset="-122"/>
                 <a:cs typeface="Calibri" pitchFamily="34" charset="-120"/>
               </a:rPr>
+              <a:t>Geography Syllabus for Sixth Forms (Lower and Upper Sixth), MINESEC, 2019 — Module 4 (Population Geography).</a:t>
+            </a:r>
+            <a:endParaRPr lang="en-US" sz="1800" dirty="0"/>
+          </a:p>
+          <a:p>
+            <a:pPr algn="l" marL="342900" indent="-342900">
+              <a:spcAft>
+                <a:spcPts val="800"/>
+              </a:spcAft>
+              <a:buSzPct val="100000"/>
+              <a:buChar char="•"/>
+            </a:pPr>
+            <a:r>
+              <a:rPr lang="en-US" sz="1800" dirty="0">
+                <a:solidFill>
+                  <a:srgbClr val="111111"/>
+                </a:solidFill>
+                <a:latin typeface="Calibri" pitchFamily="34" charset="0"/>
+                <a:ea typeface="Calibri" pitchFamily="34" charset="-122"/>
+                <a:cs typeface="Calibri" pitchFamily="34" charset="-120"/>
+              </a:rPr>
+              <a:t>Teacher's course notes: Mr KAMDEM E., Population Geography (USA), GBHS Garoua, 2026.</a:t>
+            </a:r>
+            <a:endParaRPr lang="en-US" sz="1800" dirty="0"/>
+          </a:p>
+          <a:p>
+            <a:pPr algn="l" marL="342900" indent="-342900">
+              <a:spcAft>
+                <a:spcPts val="800"/>
+              </a:spcAft>
+              <a:buSzPct val="100000"/>
+              <a:buChar char="•"/>
+            </a:pPr>
+            <a:r>
+              <a:rPr lang="en-US" sz="1800" dirty="0">
+                <a:solidFill>
+                  <a:srgbClr val="111111"/>
+                </a:solidFill>
+                <a:latin typeface="Calibri" pitchFamily="34" charset="0"/>
+                <a:ea typeface="Calibri" pitchFamily="34" charset="-122"/>
+                <a:cs typeface="Calibri" pitchFamily="34" charset="-120"/>
+              </a:rPr>
+              <a:t>United Nations, World Population Prospects 2024.</a:t>
+            </a:r>
+            <a:endParaRPr lang="en-US" sz="1800" dirty="0"/>
+          </a:p>
+          <a:p>
+            <a:pPr algn="l" marL="342900" indent="-342900">
+              <a:spcAft>
+                <a:spcPts val="800"/>
+              </a:spcAft>
+              <a:buSzPct val="100000"/>
+              <a:buChar char="•"/>
+            </a:pPr>
+            <a:r>
+              <a:rPr lang="en-US" sz="1800" dirty="0">
+                <a:solidFill>
+                  <a:srgbClr val="111111"/>
+                </a:solidFill>
+                <a:latin typeface="Calibri" pitchFamily="34" charset="0"/>
+                <a:ea typeface="Calibri" pitchFamily="34" charset="-122"/>
+                <a:cs typeface="Calibri" pitchFamily="34" charset="-120"/>
+              </a:rPr>
+              <a:t>Photo, Activity 1: “Scenes from Rwanda” by International Monetary Fund, CC BY-NC-ND 2.0, via Flickr (https://www.flickr.com/photos/38851430@N07/52660758172)</a:t>
+            </a:r>
+            <a:endParaRPr lang="en-US" sz="1800" dirty="0"/>
+          </a:p>
+          <a:p>
+            <a:pPr algn="l" marL="342900" indent="-342900">
+              <a:spcAft>
+                <a:spcPts val="800"/>
+              </a:spcAft>
+              <a:buSzPct val="100000"/>
+              <a:buChar char="•"/>
+            </a:pPr>
+            <a:r>
+              <a:rPr lang="en-US" sz="1800" dirty="0">
+                <a:solidFill>
+                  <a:srgbClr val="111111"/>
+                </a:solidFill>
+                <a:latin typeface="Calibri" pitchFamily="34" charset="0"/>
+                <a:ea typeface="Calibri" pitchFamily="34" charset="-122"/>
+                <a:cs typeface="Calibri" pitchFamily="34" charset="-120"/>
+              </a:rPr>
+              <a:t>Photo, Activity 2: “Cotton harvest” by CIFOR, CC BY-NC-ND 2.0, via Flickr (https://www.flickr.com/photos/45423546@N07/35706862552)</a:t>
+            </a:r>
+            <a:endParaRPr lang="en-US" sz="1800" dirty="0"/>
+          </a:p>
+          <a:p>
+            <a:pPr algn="l" marL="342900" indent="-342900">
+              <a:spcAft>
+                <a:spcPts val="800"/>
+              </a:spcAft>
+              <a:buSzPct val="100000"/>
+              <a:buChar char="•"/>
+            </a:pPr>
+            <a:r>
+              <a:rPr lang="en-US" sz="1800" dirty="0">
+                <a:solidFill>
+                  <a:srgbClr val="111111"/>
+                </a:solidFill>
+                <a:latin typeface="Calibri" pitchFamily="34" charset="0"/>
+                <a:ea typeface="Calibri" pitchFamily="34" charset="-122"/>
+                <a:cs typeface="Calibri" pitchFamily="34" charset="-120"/>
+              </a:rPr>
+              <a:t>Photo, Activity 3: “Traveling by truck” by World Bank Photo Collection, CC BY-NC-ND 2.0, via Flickr (https://www.flickr.com/photos/10816734@N03/2628517227)</a:t>
+            </a:r>
+            <a:endParaRPr lang="en-US" sz="1800" dirty="0"/>
+          </a:p>
+          <a:p>
+            <a:pPr algn="l" marL="342900" indent="-342900">
+              <a:spcAft>
+                <a:spcPts val="800"/>
+              </a:spcAft>
+              <a:buSzPct val="100000"/>
+              <a:buChar char="•"/>
+            </a:pPr>
+            <a:r>
+              <a:rPr lang="en-US" sz="1800" dirty="0">
+                <a:solidFill>
+                  <a:srgbClr val="111111"/>
+                </a:solidFill>
+                <a:latin typeface="Calibri" pitchFamily="34" charset="0"/>
+                <a:ea typeface="Calibri" pitchFamily="34" charset="-122"/>
+                <a:cs typeface="Calibri" pitchFamily="34" charset="-120"/>
+              </a:rPr>
               <a:t>Diagrams and animations: drawn for this lesson (Geography Department).</a:t>
             </a:r>
             <a:endParaRPr lang="en-US" sz="1800" dirty="0"/>
@@ -22283,7 +22608,7 @@
             <a:pPr algn="ctr"/>
             <a:fld id="{F7021451-1387-4CA6-816F-3879F97B5CBC}" type="slidenum">
               <a:rPr b="1" lang="en-US"/>
-              <a:t>57</a:t>
+              <a:t>58</a:t>
             </a:fld>
             <a:endParaRPr lang="en-US"/>
           </a:p>
